--- a/lecons/F1/01_F1_M1_L01_Geography_Meaning_Branches_Methods_and_Importance.pptx
+++ b/lecons/F1/01_F1_M1_L01_Geography_Meaning_Branches_Methods_and_Importance.pptx
@@ -57,9 +57,14 @@
     <p:sldId id="305" r:id="rId51"/>
     <p:sldId id="306" r:id="rId52"/>
     <p:sldId id="307" r:id="rId53"/>
+    <p:sldId id="308" r:id="rId54"/>
+    <p:sldId id="309" r:id="rId55"/>
+    <p:sldId id="310" r:id="rId56"/>
+    <p:sldId id="311" r:id="rId57"/>
+    <p:sldId id="312" r:id="rId58"/>
   </p:sldIdLst>
   <p:notesMasterIdLst>
-    <p:notesMasterId r:id="rId54"/>
+    <p:notesMasterId r:id="rId59"/>
   </p:notesMasterIdLst>
   <p:sldSz cx="12192000" cy="6858000"/>
   <p:notesSz cx="6858000" cy="12192000"/>
@@ -641,7 +646,7 @@
           <a:p>
             <a:r>
               <a:rPr lang="en-US" dirty="0"/>
-              <a:t>Good. Ibrahim does not know what geography studies.</a:t>
+              <a:t>Good. Ibrahim does not know what geography studies and why it is useful.</a:t>
             </a:r>
             <a:endParaRPr lang="en-US" dirty="0"/>
           </a:p>
@@ -817,7 +822,7 @@
           <a:p>
             <a:r>
               <a:rPr lang="en-US" dirty="0"/>
-              <a:t>Good. Only drawing maps.</a:t>
+              <a:t>Good. She thinks it is only about drawing maps.</a:t>
             </a:r>
             <a:endParaRPr lang="en-US" dirty="0"/>
           </a:p>
@@ -993,7 +998,7 @@
           <a:p>
             <a:r>
               <a:rPr lang="en-US" dirty="0"/>
-              <a:t>Good. Farmers, drivers and the Mayor.</a:t>
+              <a:t>Good. Farmers, drivers and the Mayor of Garoua.</a:t>
             </a:r>
             <a:endParaRPr lang="en-US" dirty="0"/>
           </a:p>
@@ -1345,7 +1350,7 @@
           <a:p>
             <a:r>
               <a:rPr lang="en-US" dirty="0"/>
-              <a:t>Here is the question for Activity 1: Geography comes from two Greek words: "geo" (the Earth) and "graphein" (to describe). What does geography mean? Take one minute to think and write your answer in your rough notebook.</a:t>
+              <a:t>Here is the question for Activity 1: The word geography comes from the Greek words "geo" and "graphein". What do these words mean? Take one minute to think and write your answer in your rough notebook.</a:t>
             </a:r>
             <a:endParaRPr lang="en-US" dirty="0"/>
           </a:p>
@@ -1433,7 +1438,7 @@
           <a:p>
             <a:r>
               <a:rPr lang="en-US" dirty="0"/>
-              <a:t>Let us check the answer together. Geography is the study and description of the Earth and of the people who live on it.</a:t>
+              <a:t>Let us check the answer together. "Geo" means the Earth, and "graphein" means to describe.</a:t>
             </a:r>
             <a:endParaRPr lang="en-US" dirty="0"/>
           </a:p>
@@ -1609,7 +1614,7 @@
           <a:p>
             <a:r>
               <a:rPr lang="en-US" dirty="0"/>
-              <a:t>Activity 2. Look carefully at this picture: mount Cameroon. Observe every detail before I ask the question.</a:t>
+              <a:t>Here is the next question: So, what is geography? Take one minute to think and write your answer in your rough notebook.</a:t>
             </a:r>
             <a:endParaRPr lang="en-US" dirty="0"/>
           </a:p>
@@ -1697,7 +1702,7 @@
           <a:p>
             <a:r>
               <a:rPr lang="en-US" dirty="0"/>
-              <a:t>Here is the question for Activity 2: Which branch of geography studies mountains, rivers, climate and soils? Take one minute to think and write your answer in your rough notebook.</a:t>
+              <a:t>Let us check the answer together. Geography is the study and description of the Earth and of the people who live on it.</a:t>
             </a:r>
             <a:endParaRPr lang="en-US" dirty="0"/>
           </a:p>
@@ -1785,7 +1790,7 @@
           <a:p>
             <a:r>
               <a:rPr lang="en-US" dirty="0"/>
-              <a:t>Let us check the answer together. Physical geography.</a:t>
+              <a:t>Activity 2. Look carefully at this picture: mount Cameroon. Observe every detail before I ask the question.</a:t>
             </a:r>
             <a:endParaRPr lang="en-US" dirty="0"/>
           </a:p>
@@ -1873,7 +1878,7 @@
           <a:p>
             <a:r>
               <a:rPr lang="en-US" dirty="0"/>
-              <a:t>Activity 3. Look carefully at this picture: a busy market in Cameroon. Observe every detail before I ask the question.</a:t>
+              <a:t>Here is the question for Activity 2: Which branch of geography studies mountains, rivers, climate and soils? Take one minute to think and write your answer in your rough notebook.</a:t>
             </a:r>
             <a:endParaRPr lang="en-US" dirty="0"/>
           </a:p>
@@ -1961,7 +1966,7 @@
           <a:p>
             <a:r>
               <a:rPr lang="en-US" dirty="0"/>
-              <a:t>Here is the question for Activity 3: Which branch of geography studies people, markets, towns and farming? Take one minute to think and write your answer in your rough notebook.</a:t>
+              <a:t>Let us check the answer together. Physical geography.</a:t>
             </a:r>
             <a:endParaRPr lang="en-US" dirty="0"/>
           </a:p>
@@ -2049,7 +2054,7 @@
           <a:p>
             <a:r>
               <a:rPr lang="en-US" dirty="0"/>
-              <a:t>Let us check the answer together. Human geography.</a:t>
+              <a:t>Activity 3. Look carefully at this picture: a busy market in Cameroon. Observe every detail before I ask the question.</a:t>
             </a:r>
             <a:endParaRPr lang="en-US" dirty="0"/>
           </a:p>
@@ -2137,7 +2142,7 @@
           <a:p>
             <a:r>
               <a:rPr lang="en-US" dirty="0"/>
-              <a:t>Activity 4. Look carefully at this picture: a map used in the field. Observe every detail before I ask the question.</a:t>
+              <a:t>Here is the question for Activity 3: Which branch of geography studies people, markets, towns and farming? Take one minute to think and write your answer in your rough notebook.</a:t>
             </a:r>
             <a:endParaRPr lang="en-US" dirty="0"/>
           </a:p>
@@ -2225,7 +2230,7 @@
           <a:p>
             <a:r>
               <a:rPr lang="en-US" dirty="0"/>
-              <a:t>Here is the question for Activity 4: Give three ways a geographer collects and shows information. Take one minute to think and write your answer in your rough notebook.</a:t>
+              <a:t>Let us check the answer together. Human geography.</a:t>
             </a:r>
             <a:endParaRPr lang="en-US" dirty="0"/>
           </a:p>
@@ -2313,7 +2318,7 @@
           <a:p>
             <a:r>
               <a:rPr lang="en-US" dirty="0"/>
-              <a:t>Let us check the answer together. Observation and fieldwork, maps and photographs, and graphs and statistics (also interviews).</a:t>
+              <a:t>Activity 4. Look carefully at this picture: a geographer using a map in the field. Observe every detail before I ask the question.</a:t>
             </a:r>
             <a:endParaRPr lang="en-US" dirty="0"/>
           </a:p>
@@ -2401,7 +2406,7 @@
           <a:p>
             <a:r>
               <a:rPr lang="en-US" dirty="0"/>
-              <a:t>Activity 5. Look carefully at this diagram: the branches of geography. Observe every detail before I ask the question.</a:t>
+              <a:t>Here is the question for Activity 4: How does a geographer collect information about a place? Take one minute to think and write your answer in your rough notebook.</a:t>
             </a:r>
             <a:endParaRPr lang="en-US" dirty="0"/>
           </a:p>
@@ -2577,7 +2582,7 @@
           <a:p>
             <a:r>
               <a:rPr lang="en-US" dirty="0"/>
-              <a:t>Here is the question for Activity 5: Give two ways geography is useful in our daily lives. Take one minute to think and write your answer in your rough notebook.</a:t>
+              <a:t>Let us check the answer together. By observing and measuring in the field, and by asking people questions.</a:t>
             </a:r>
             <a:endParaRPr lang="en-US" dirty="0"/>
           </a:p>
@@ -2665,7 +2670,7 @@
           <a:p>
             <a:r>
               <a:rPr lang="en-US" dirty="0"/>
-              <a:t>Let us check the answer together. It helps farmers to choose seasons and crops and helps people to find their way with maps (also to protect the environment and plan towns).</a:t>
+              <a:t>Activity 5. Look carefully at this picture: a cotton farm in the North. Observe every detail before I ask the question.</a:t>
             </a:r>
             <a:endParaRPr lang="en-US" dirty="0"/>
           </a:p>
@@ -2753,7 +2758,7 @@
           <a:p>
             <a:r>
               <a:rPr lang="en-US" dirty="0"/>
-              <a:t>Now we are going to copy the board summary. Write the title and the headings neatly in your notebooks. I will give you enough time for each slide, so do not rush.</a:t>
+              <a:t>Here is the question for Activity 5: How can geography help this farmer? Take one minute to think and write your answer in your rough notebook.</a:t>
             </a:r>
             <a:endParaRPr lang="en-US" dirty="0"/>
           </a:p>
@@ -2841,7 +2846,7 @@
           <a:p>
             <a:r>
               <a:rPr lang="en-US" dirty="0"/>
-              <a:t>Let us copy Meaning of Geography. Geography is defined as follows. On this slide we have Geography. Write each point on a new line, with the key term first, and explain it in your own words when we revise.</a:t>
+              <a:t>Let us check the answer together. It helps him to know the seasons, the rainfall and the soils, so that he chooses the right crops and the right time to plant.</a:t>
             </a:r>
             <a:endParaRPr lang="en-US" dirty="0"/>
           </a:p>
@@ -2929,7 +2934,7 @@
           <a:p>
             <a:r>
               <a:rPr lang="en-US" dirty="0"/>
-              <a:t>Let us copy Branches of Geography. Geography has the following branches. On this slide we have Physical geography and Human geography. Write each point on a new line, with the key term first, and explain it in your own words when we revise. When you finish, we go to the next slide.</a:t>
+              <a:t>Now we are going to copy the board summary. Write the title and the headings neatly in your notebooks. I will give you enough time for each slide, so do not rush.</a:t>
             </a:r>
             <a:endParaRPr lang="en-US" dirty="0"/>
           </a:p>
@@ -3017,7 +3022,7 @@
           <a:p>
             <a:r>
               <a:rPr lang="en-US" dirty="0"/>
-              <a:t>We continue with Branches of Geography. On this slide we have Practical geography. Write each point on a new line, with the key term first, and explain it in your own words when we revise.</a:t>
+              <a:t>Let us copy the definitions. The key terms of this lesson are defined as follows. On this slide we have Geography. Write each point on a new line, with the key term first, and explain it in your own words when we revise. When you finish, we go to the next slide.</a:t>
             </a:r>
             <a:endParaRPr lang="en-US" dirty="0"/>
           </a:p>
@@ -3105,7 +3110,7 @@
           <a:p>
             <a:r>
               <a:rPr lang="en-US" dirty="0"/>
-              <a:t>Now draw this illustration in your notebook: the branches of geography. Give it a title and label it clearly.</a:t>
+              <a:t>We continue with the definitions. On this slide we have Branch of geography. Write each point on a new line, with the key term first, and explain it in your own words when we revise.</a:t>
             </a:r>
             <a:endParaRPr lang="en-US" dirty="0"/>
           </a:p>
@@ -3193,7 +3198,7 @@
           <a:p>
             <a:r>
               <a:rPr lang="en-US" dirty="0"/>
-              <a:t>Let us copy Methods of Geography. Geographers work with the following methods. On this slide we have Observation and fieldwork and Maps and photographs. Write each point on a new line, with the key term first, and explain it in your own words when we revise. When you finish, we go to the next slide.</a:t>
+              <a:t>Let us copy Branches and Sub-branches of Geography. Geography has three main branches. Copy the point on Physical geography on the left, then draw the diagram on the right: mount Cameroon, a physical feature. Give it a title and label it clearly.</a:t>
             </a:r>
             <a:endParaRPr lang="en-US" dirty="0"/>
           </a:p>
@@ -3281,7 +3286,7 @@
           <a:p>
             <a:r>
               <a:rPr lang="en-US" dirty="0"/>
-              <a:t>We continue with Methods of Geography. On this slide we have Graphs and statistics. Write each point on a new line, with the key term first, and explain it in your own words when we revise.</a:t>
+              <a:t>Copy the point on Human geography on the left, then draw the diagram on the right: a market, a human activity. Give it a title and label it clearly.</a:t>
             </a:r>
             <a:endParaRPr lang="en-US" dirty="0"/>
           </a:p>
@@ -3369,7 +3374,7 @@
           <a:p>
             <a:r>
               <a:rPr lang="en-US" dirty="0"/>
-              <a:t>Let us copy Importance of Geography. Geography is important for the following reasons. On this slide we have Daily life and Work. Write each point on a new line, with the key term first, and explain it in your own words when we revise. When you finish, we go to the next slide.</a:t>
+              <a:t>Copy the point on Practical geography on the left, then draw the diagram on the right: map reading in the field. Give it a title and label it clearly.</a:t>
             </a:r>
             <a:endParaRPr lang="en-US" dirty="0"/>
           </a:p>
@@ -3545,7 +3550,7 @@
           <a:p>
             <a:r>
               <a:rPr lang="en-US" dirty="0"/>
-              <a:t>We continue with Importance of Geography. On this slide we have Environment. Write each point on a new line, with the key term first, and explain it in your own words when we revise.</a:t>
+              <a:t>Let us copy Methods of Geography. Geographers use the following methods. Copy the point on Observation and fieldwork on the left, then draw the diagram on the right: the steps of fieldwork. Give it a title and label it clearly.</a:t>
             </a:r>
             <a:endParaRPr lang="en-US" dirty="0"/>
           </a:p>
@@ -3633,7 +3638,7 @@
           <a:p>
             <a:r>
               <a:rPr lang="en-US" dirty="0"/>
-              <a:t>Now let us check what you have understood. Question 1: Define geography. Answer in your exercise book.</a:t>
+              <a:t>Copy the point on Interviews and questionnaires on the left, then draw the diagram on the right: a questionnaire. Give it a title and label it clearly.</a:t>
             </a:r>
             <a:endParaRPr lang="en-US" dirty="0"/>
           </a:p>
@@ -3721,7 +3726,7 @@
           <a:p>
             <a:r>
               <a:rPr lang="en-US" dirty="0"/>
-              <a:t>The expected answer is: it is the study of the Earth, its physical features and the activities of people on it. If you got it right, well done.</a:t>
+              <a:t>Copy the point on Maps and photographs on the left, then draw the diagram on the right: a satellite image is taken from space. Give it a title and label it clearly.</a:t>
             </a:r>
             <a:endParaRPr lang="en-US" dirty="0"/>
           </a:p>
@@ -3809,7 +3814,7 @@
           <a:p>
             <a:r>
               <a:rPr lang="en-US" dirty="0"/>
-              <a:t>Now let us check what you have understood. Question 2: Name the three branches of geography. Answer in your exercise book.</a:t>
+              <a:t>Copy the point on Statistics and graphs on the left, then draw the diagram on the right: types of graphs. Give it a title and label it clearly.</a:t>
             </a:r>
             <a:endParaRPr lang="en-US" dirty="0"/>
           </a:p>
@@ -3897,7 +3902,7 @@
           <a:p>
             <a:r>
               <a:rPr lang="en-US" dirty="0"/>
-              <a:t>The expected answer is: physical, human and practical geography. If you got it right, well done.</a:t>
+              <a:t>Let us copy Importance of Geography. Geography is important for the following reasons. On this slide we have Daily life and Farming. Write each point on a new line, with the key term first, and explain it in your own words when we revise. When you finish, we go to the next slide.</a:t>
             </a:r>
             <a:endParaRPr lang="en-US" dirty="0"/>
           </a:p>
@@ -3985,7 +3990,7 @@
           <a:p>
             <a:r>
               <a:rPr lang="en-US" dirty="0"/>
-              <a:t>For those who need more practice, fill in the blanks in your exercise book. The answers are: number 1, Earth; number 2, physical; number 3, human.</a:t>
+              <a:t>We continue with Importance of Geography. On this slide we have Planning and Environment. Write each point on a new line, with the key term first, and explain it in your own words when we revise.</a:t>
             </a:r>
             <a:endParaRPr lang="en-US" dirty="0"/>
           </a:p>
@@ -4073,7 +4078,7 @@
           <a:p>
             <a:r>
               <a:rPr lang="en-US" dirty="0"/>
-              <a:t>For your homework: Write three physical features and three human activities that you see on your way to school. We shall correct it at the beginning of our next lesson.</a:t>
+              <a:t>Now let us check what you have understood. Question 1: Define geography. Answer in your exercise book.</a:t>
             </a:r>
             <a:endParaRPr lang="en-US" dirty="0"/>
           </a:p>
@@ -4161,7 +4166,7 @@
           <a:p>
             <a:r>
               <a:rPr lang="en-US" dirty="0"/>
-              <a:t>Our next lesson will be on Lesson 2: Our Planet, the Earth. Thank you for your attention, and see you next time.</a:t>
+              <a:t>The expected answer is: it is the study of the Earth, its physical features and the activities of people on it. If you got it right, well done.</a:t>
             </a:r>
             <a:endParaRPr lang="en-US" dirty="0"/>
           </a:p>
@@ -4249,7 +4254,7 @@
           <a:p>
             <a:r>
               <a:rPr lang="en-US" dirty="0"/>
-              <a:t>Let us play the bilingual game. I say a word in English, and you give me the French word. Then we do the reverse.</a:t>
+              <a:t>Now let us check what you have understood. Question 2: Name the three branches of geography. Answer in your exercise book.</a:t>
             </a:r>
             <a:endParaRPr lang="en-US" dirty="0"/>
           </a:p>
@@ -4337,7 +4342,7 @@
           <a:p>
             <a:r>
               <a:rPr lang="en-US" dirty="0"/>
-              <a:t>I record this information in the official logbook of the class after the lesson.</a:t>
+              <a:t>The expected answer is: physical, human and practical geography. If you got it right, well done.</a:t>
             </a:r>
             <a:endParaRPr lang="en-US" dirty="0"/>
           </a:p>
@@ -4513,7 +4518,7 @@
           <a:p>
             <a:r>
               <a:rPr lang="en-US" dirty="0"/>
-              <a:t>I complete the second page of the logbook: the matter taught, the evaluation, the homework and the attendance.</a:t>
+              <a:t>For those who need more practice, fill in the blanks in your exercise book. The answers are: number 1, Earth; number 2, physical; number 3, human.</a:t>
             </a:r>
             <a:endParaRPr lang="en-US" dirty="0"/>
           </a:p>
@@ -4601,7 +4606,7 @@
           <a:p>
             <a:r>
               <a:rPr lang="en-US" dirty="0"/>
-              <a:t>This slide is for me, the teacher: it gives the timing of the lesson and what to do if the projector is not available.</a:t>
+              <a:t>For your homework: Write three physical features and three human activities that you see on your way to school. We shall correct it at the beginning of our next lesson.</a:t>
             </a:r>
             <a:endParaRPr lang="en-US" dirty="0"/>
           </a:p>
@@ -4689,7 +4694,7 @@
           <a:p>
             <a:r>
               <a:rPr lang="en-US" dirty="0"/>
-              <a:t>These are the references and picture credits used to prepare this lesson.</a:t>
+              <a:t>Our next lesson will be on Lesson 2: Our Planet, the Earth. Thank you for your attention, and see you next time.</a:t>
             </a:r>
             <a:endParaRPr lang="en-US" dirty="0"/>
           </a:p>
@@ -4713,6 +4718,446 @@
             <a:fld id="{F7021451-1387-4CA6-816F-3879F97B5CBC}" type="slidenum">
               <a:rPr lang="en-US"/>
               <a:t>52</a:t>
+            </a:fld>
+            <a:endParaRPr lang="en-US"/>
+          </a:p>
+        </p:txBody>
+      </p:sp>
+    </p:spTree>
+    <p:extLst>
+      <p:ext uri="{BB962C8B-B14F-4D97-AF65-F5344CB8AC3E}">
+        <p14:creationId xmlns:p14="http://schemas.microsoft.com/office/powerpoint/2010/main" val="1024086991"/>
+      </p:ext>
+    </p:extLst>
+  </p:cSld>
+  <p:clrMapOvr>
+    <a:masterClrMapping/>
+  </p:clrMapOvr>
+</p:notes>
+</file>
+
+<file path=ppt/notesSlides/notesSlide53.xml><?xml version="1.0" encoding="utf-8"?>
+<p:notes xmlns:a="http://schemas.openxmlformats.org/drawingml/2006/main" xmlns:r="http://schemas.openxmlformats.org/officeDocument/2006/relationships" xmlns:p="http://schemas.openxmlformats.org/presentationml/2006/main">
+  <p:cSld>
+    <p:spTree>
+      <p:nvGrpSpPr>
+        <p:cNvPr id="1" name=""/>
+        <p:cNvGrpSpPr/>
+        <p:nvPr/>
+      </p:nvGrpSpPr>
+      <p:grpSpPr>
+        <a:xfrm>
+          <a:off x="0" y="0"/>
+          <a:ext cx="0" cy="0"/>
+          <a:chOff x="0" y="0"/>
+          <a:chExt cx="0" cy="0"/>
+        </a:xfrm>
+      </p:grpSpPr>
+      <p:sp>
+        <p:nvSpPr>
+          <p:cNvPr id="2" name="Slide Image Placeholder 1"/>
+          <p:cNvSpPr>
+            <a:spLocks noGrp="1" noRot="1" noChangeAspect="1"/>
+          </p:cNvSpPr>
+          <p:nvPr>
+            <p:ph type="sldImg"/>
+          </p:nvPr>
+        </p:nvSpPr>
+        <p:spPr/>
+      </p:sp>
+      <p:sp>
+        <p:nvSpPr>
+          <p:cNvPr id="3" name="Notes Placeholder 2"/>
+          <p:cNvSpPr>
+            <a:spLocks noGrp="1"/>
+          </p:cNvSpPr>
+          <p:nvPr>
+            <p:ph type="body" idx="1"/>
+          </p:nvPr>
+        </p:nvSpPr>
+        <p:spPr/>
+        <p:txBody>
+          <a:bodyPr/>
+          <a:lstStyle/>
+          <a:p>
+            <a:r>
+              <a:rPr lang="en-US" dirty="0"/>
+              <a:t>Let us play the bilingual game. I say a word in English, and you give me the French word. Then we do the reverse.</a:t>
+            </a:r>
+            <a:endParaRPr lang="en-US" dirty="0"/>
+          </a:p>
+        </p:txBody>
+      </p:sp>
+      <p:sp>
+        <p:nvSpPr>
+          <p:cNvPr id="4" name="Slide Number Placeholder 3"/>
+          <p:cNvSpPr>
+            <a:spLocks noGrp="1"/>
+          </p:cNvSpPr>
+          <p:nvPr>
+            <p:ph type="sldNum" sz="quarter" idx="10"/>
+          </p:nvPr>
+        </p:nvSpPr>
+        <p:spPr/>
+        <p:txBody>
+          <a:bodyPr/>
+          <a:lstStyle/>
+          <a:p>
+            <a:fld id="{F7021451-1387-4CA6-816F-3879F97B5CBC}" type="slidenum">
+              <a:rPr lang="en-US"/>
+              <a:t>53</a:t>
+            </a:fld>
+            <a:endParaRPr lang="en-US"/>
+          </a:p>
+        </p:txBody>
+      </p:sp>
+    </p:spTree>
+    <p:extLst>
+      <p:ext uri="{BB962C8B-B14F-4D97-AF65-F5344CB8AC3E}">
+        <p14:creationId xmlns:p14="http://schemas.microsoft.com/office/powerpoint/2010/main" val="1024086991"/>
+      </p:ext>
+    </p:extLst>
+  </p:cSld>
+  <p:clrMapOvr>
+    <a:masterClrMapping/>
+  </p:clrMapOvr>
+</p:notes>
+</file>
+
+<file path=ppt/notesSlides/notesSlide54.xml><?xml version="1.0" encoding="utf-8"?>
+<p:notes xmlns:a="http://schemas.openxmlformats.org/drawingml/2006/main" xmlns:r="http://schemas.openxmlformats.org/officeDocument/2006/relationships" xmlns:p="http://schemas.openxmlformats.org/presentationml/2006/main">
+  <p:cSld>
+    <p:spTree>
+      <p:nvGrpSpPr>
+        <p:cNvPr id="1" name=""/>
+        <p:cNvGrpSpPr/>
+        <p:nvPr/>
+      </p:nvGrpSpPr>
+      <p:grpSpPr>
+        <a:xfrm>
+          <a:off x="0" y="0"/>
+          <a:ext cx="0" cy="0"/>
+          <a:chOff x="0" y="0"/>
+          <a:chExt cx="0" cy="0"/>
+        </a:xfrm>
+      </p:grpSpPr>
+      <p:sp>
+        <p:nvSpPr>
+          <p:cNvPr id="2" name="Slide Image Placeholder 1"/>
+          <p:cNvSpPr>
+            <a:spLocks noGrp="1" noRot="1" noChangeAspect="1"/>
+          </p:cNvSpPr>
+          <p:nvPr>
+            <p:ph type="sldImg"/>
+          </p:nvPr>
+        </p:nvSpPr>
+        <p:spPr/>
+      </p:sp>
+      <p:sp>
+        <p:nvSpPr>
+          <p:cNvPr id="3" name="Notes Placeholder 2"/>
+          <p:cNvSpPr>
+            <a:spLocks noGrp="1"/>
+          </p:cNvSpPr>
+          <p:nvPr>
+            <p:ph type="body" idx="1"/>
+          </p:nvPr>
+        </p:nvSpPr>
+        <p:spPr/>
+        <p:txBody>
+          <a:bodyPr/>
+          <a:lstStyle/>
+          <a:p>
+            <a:r>
+              <a:rPr lang="en-US" dirty="0"/>
+              <a:t>I record this information in the official logbook of the class after the lesson.</a:t>
+            </a:r>
+            <a:endParaRPr lang="en-US" dirty="0"/>
+          </a:p>
+        </p:txBody>
+      </p:sp>
+      <p:sp>
+        <p:nvSpPr>
+          <p:cNvPr id="4" name="Slide Number Placeholder 3"/>
+          <p:cNvSpPr>
+            <a:spLocks noGrp="1"/>
+          </p:cNvSpPr>
+          <p:nvPr>
+            <p:ph type="sldNum" sz="quarter" idx="10"/>
+          </p:nvPr>
+        </p:nvSpPr>
+        <p:spPr/>
+        <p:txBody>
+          <a:bodyPr/>
+          <a:lstStyle/>
+          <a:p>
+            <a:fld id="{F7021451-1387-4CA6-816F-3879F97B5CBC}" type="slidenum">
+              <a:rPr lang="en-US"/>
+              <a:t>54</a:t>
+            </a:fld>
+            <a:endParaRPr lang="en-US"/>
+          </a:p>
+        </p:txBody>
+      </p:sp>
+    </p:spTree>
+    <p:extLst>
+      <p:ext uri="{BB962C8B-B14F-4D97-AF65-F5344CB8AC3E}">
+        <p14:creationId xmlns:p14="http://schemas.microsoft.com/office/powerpoint/2010/main" val="1024086991"/>
+      </p:ext>
+    </p:extLst>
+  </p:cSld>
+  <p:clrMapOvr>
+    <a:masterClrMapping/>
+  </p:clrMapOvr>
+</p:notes>
+</file>
+
+<file path=ppt/notesSlides/notesSlide55.xml><?xml version="1.0" encoding="utf-8"?>
+<p:notes xmlns:a="http://schemas.openxmlformats.org/drawingml/2006/main" xmlns:r="http://schemas.openxmlformats.org/officeDocument/2006/relationships" xmlns:p="http://schemas.openxmlformats.org/presentationml/2006/main">
+  <p:cSld>
+    <p:spTree>
+      <p:nvGrpSpPr>
+        <p:cNvPr id="1" name=""/>
+        <p:cNvGrpSpPr/>
+        <p:nvPr/>
+      </p:nvGrpSpPr>
+      <p:grpSpPr>
+        <a:xfrm>
+          <a:off x="0" y="0"/>
+          <a:ext cx="0" cy="0"/>
+          <a:chOff x="0" y="0"/>
+          <a:chExt cx="0" cy="0"/>
+        </a:xfrm>
+      </p:grpSpPr>
+      <p:sp>
+        <p:nvSpPr>
+          <p:cNvPr id="2" name="Slide Image Placeholder 1"/>
+          <p:cNvSpPr>
+            <a:spLocks noGrp="1" noRot="1" noChangeAspect="1"/>
+          </p:cNvSpPr>
+          <p:nvPr>
+            <p:ph type="sldImg"/>
+          </p:nvPr>
+        </p:nvSpPr>
+        <p:spPr/>
+      </p:sp>
+      <p:sp>
+        <p:nvSpPr>
+          <p:cNvPr id="3" name="Notes Placeholder 2"/>
+          <p:cNvSpPr>
+            <a:spLocks noGrp="1"/>
+          </p:cNvSpPr>
+          <p:nvPr>
+            <p:ph type="body" idx="1"/>
+          </p:nvPr>
+        </p:nvSpPr>
+        <p:spPr/>
+        <p:txBody>
+          <a:bodyPr/>
+          <a:lstStyle/>
+          <a:p>
+            <a:r>
+              <a:rPr lang="en-US" dirty="0"/>
+              <a:t>I complete the second page of the logbook: the matter taught, the evaluation, the homework and the attendance.</a:t>
+            </a:r>
+            <a:endParaRPr lang="en-US" dirty="0"/>
+          </a:p>
+        </p:txBody>
+      </p:sp>
+      <p:sp>
+        <p:nvSpPr>
+          <p:cNvPr id="4" name="Slide Number Placeholder 3"/>
+          <p:cNvSpPr>
+            <a:spLocks noGrp="1"/>
+          </p:cNvSpPr>
+          <p:nvPr>
+            <p:ph type="sldNum" sz="quarter" idx="10"/>
+          </p:nvPr>
+        </p:nvSpPr>
+        <p:spPr/>
+        <p:txBody>
+          <a:bodyPr/>
+          <a:lstStyle/>
+          <a:p>
+            <a:fld id="{F7021451-1387-4CA6-816F-3879F97B5CBC}" type="slidenum">
+              <a:rPr lang="en-US"/>
+              <a:t>55</a:t>
+            </a:fld>
+            <a:endParaRPr lang="en-US"/>
+          </a:p>
+        </p:txBody>
+      </p:sp>
+    </p:spTree>
+    <p:extLst>
+      <p:ext uri="{BB962C8B-B14F-4D97-AF65-F5344CB8AC3E}">
+        <p14:creationId xmlns:p14="http://schemas.microsoft.com/office/powerpoint/2010/main" val="1024086991"/>
+      </p:ext>
+    </p:extLst>
+  </p:cSld>
+  <p:clrMapOvr>
+    <a:masterClrMapping/>
+  </p:clrMapOvr>
+</p:notes>
+</file>
+
+<file path=ppt/notesSlides/notesSlide56.xml><?xml version="1.0" encoding="utf-8"?>
+<p:notes xmlns:a="http://schemas.openxmlformats.org/drawingml/2006/main" xmlns:r="http://schemas.openxmlformats.org/officeDocument/2006/relationships" xmlns:p="http://schemas.openxmlformats.org/presentationml/2006/main">
+  <p:cSld>
+    <p:spTree>
+      <p:nvGrpSpPr>
+        <p:cNvPr id="1" name=""/>
+        <p:cNvGrpSpPr/>
+        <p:nvPr/>
+      </p:nvGrpSpPr>
+      <p:grpSpPr>
+        <a:xfrm>
+          <a:off x="0" y="0"/>
+          <a:ext cx="0" cy="0"/>
+          <a:chOff x="0" y="0"/>
+          <a:chExt cx="0" cy="0"/>
+        </a:xfrm>
+      </p:grpSpPr>
+      <p:sp>
+        <p:nvSpPr>
+          <p:cNvPr id="2" name="Slide Image Placeholder 1"/>
+          <p:cNvSpPr>
+            <a:spLocks noGrp="1" noRot="1" noChangeAspect="1"/>
+          </p:cNvSpPr>
+          <p:nvPr>
+            <p:ph type="sldImg"/>
+          </p:nvPr>
+        </p:nvSpPr>
+        <p:spPr/>
+      </p:sp>
+      <p:sp>
+        <p:nvSpPr>
+          <p:cNvPr id="3" name="Notes Placeholder 2"/>
+          <p:cNvSpPr>
+            <a:spLocks noGrp="1"/>
+          </p:cNvSpPr>
+          <p:nvPr>
+            <p:ph type="body" idx="1"/>
+          </p:nvPr>
+        </p:nvSpPr>
+        <p:spPr/>
+        <p:txBody>
+          <a:bodyPr/>
+          <a:lstStyle/>
+          <a:p>
+            <a:r>
+              <a:rPr lang="en-US" dirty="0"/>
+              <a:t>This slide is for me, the teacher: it gives the timing of the lesson and what to do if the projector is not available.</a:t>
+            </a:r>
+            <a:endParaRPr lang="en-US" dirty="0"/>
+          </a:p>
+        </p:txBody>
+      </p:sp>
+      <p:sp>
+        <p:nvSpPr>
+          <p:cNvPr id="4" name="Slide Number Placeholder 3"/>
+          <p:cNvSpPr>
+            <a:spLocks noGrp="1"/>
+          </p:cNvSpPr>
+          <p:nvPr>
+            <p:ph type="sldNum" sz="quarter" idx="10"/>
+          </p:nvPr>
+        </p:nvSpPr>
+        <p:spPr/>
+        <p:txBody>
+          <a:bodyPr/>
+          <a:lstStyle/>
+          <a:p>
+            <a:fld id="{F7021451-1387-4CA6-816F-3879F97B5CBC}" type="slidenum">
+              <a:rPr lang="en-US"/>
+              <a:t>56</a:t>
+            </a:fld>
+            <a:endParaRPr lang="en-US"/>
+          </a:p>
+        </p:txBody>
+      </p:sp>
+    </p:spTree>
+    <p:extLst>
+      <p:ext uri="{BB962C8B-B14F-4D97-AF65-F5344CB8AC3E}">
+        <p14:creationId xmlns:p14="http://schemas.microsoft.com/office/powerpoint/2010/main" val="1024086991"/>
+      </p:ext>
+    </p:extLst>
+  </p:cSld>
+  <p:clrMapOvr>
+    <a:masterClrMapping/>
+  </p:clrMapOvr>
+</p:notes>
+</file>
+
+<file path=ppt/notesSlides/notesSlide57.xml><?xml version="1.0" encoding="utf-8"?>
+<p:notes xmlns:a="http://schemas.openxmlformats.org/drawingml/2006/main" xmlns:r="http://schemas.openxmlformats.org/officeDocument/2006/relationships" xmlns:p="http://schemas.openxmlformats.org/presentationml/2006/main">
+  <p:cSld>
+    <p:spTree>
+      <p:nvGrpSpPr>
+        <p:cNvPr id="1" name=""/>
+        <p:cNvGrpSpPr/>
+        <p:nvPr/>
+      </p:nvGrpSpPr>
+      <p:grpSpPr>
+        <a:xfrm>
+          <a:off x="0" y="0"/>
+          <a:ext cx="0" cy="0"/>
+          <a:chOff x="0" y="0"/>
+          <a:chExt cx="0" cy="0"/>
+        </a:xfrm>
+      </p:grpSpPr>
+      <p:sp>
+        <p:nvSpPr>
+          <p:cNvPr id="2" name="Slide Image Placeholder 1"/>
+          <p:cNvSpPr>
+            <a:spLocks noGrp="1" noRot="1" noChangeAspect="1"/>
+          </p:cNvSpPr>
+          <p:nvPr>
+            <p:ph type="sldImg"/>
+          </p:nvPr>
+        </p:nvSpPr>
+        <p:spPr/>
+      </p:sp>
+      <p:sp>
+        <p:nvSpPr>
+          <p:cNvPr id="3" name="Notes Placeholder 2"/>
+          <p:cNvSpPr>
+            <a:spLocks noGrp="1"/>
+          </p:cNvSpPr>
+          <p:nvPr>
+            <p:ph type="body" idx="1"/>
+          </p:nvPr>
+        </p:nvSpPr>
+        <p:spPr/>
+        <p:txBody>
+          <a:bodyPr/>
+          <a:lstStyle/>
+          <a:p>
+            <a:r>
+              <a:rPr lang="en-US" dirty="0"/>
+              <a:t>These are the references and picture credits used to prepare this lesson.</a:t>
+            </a:r>
+            <a:endParaRPr lang="en-US" dirty="0"/>
+          </a:p>
+        </p:txBody>
+      </p:sp>
+      <p:sp>
+        <p:nvSpPr>
+          <p:cNvPr id="4" name="Slide Number Placeholder 3"/>
+          <p:cNvSpPr>
+            <a:spLocks noGrp="1"/>
+          </p:cNvSpPr>
+          <p:nvPr>
+            <p:ph type="sldNum" sz="quarter" idx="10"/>
+          </p:nvPr>
+        </p:nvSpPr>
+        <p:spPr/>
+        <p:txBody>
+          <a:bodyPr/>
+          <a:lstStyle/>
+          <a:p>
+            <a:fld id="{F7021451-1387-4CA6-816F-3879F97B5CBC}" type="slidenum">
+              <a:rPr lang="en-US"/>
+              <a:t>57</a:t>
             </a:fld>
             <a:endParaRPr lang="en-US"/>
           </a:p>
@@ -4953,7 +5398,7 @@
           <a:p>
             <a:r>
               <a:rPr lang="en-US" dirty="0"/>
-              <a:t>Listen carefully to this situation from real life. On his first day in Form 1, Ibrahim sees "Geography" on his timetable. His elder sister says it is only about drawing maps, but his father says it helps farmers, drivers and even the Mayor of Garoua. Ibrahim wants to know who is right. Think about it, because I am going to ask you some questions.</a:t>
+              <a:t>Listen carefully to this situation from real life. On his first day in Form 1, Ibrahim sees "Geography" on his timetable. His elder sister says that it is only about drawing maps, but his father says that it helps farmers, drivers and even the Mayor of Garoua. Ibrahim is confused and asks his teacher: "What does geography really study, and why is it useful?" Think about it, because I am going to ask you some questions.</a:t>
             </a:r>
             <a:endParaRPr lang="en-US" dirty="0"/>
           </a:p>
@@ -6505,7 +6950,7 @@
                 <a:ea typeface="Times New Roman" pitchFamily="34" charset="-122"/>
                 <a:cs typeface="Times New Roman" pitchFamily="34" charset="-120"/>
               </a:rPr>
-              <a:t>Ibrahim does not know what geography studies.</a:t>
+              <a:t>Ibrahim does not know what geography studies and why it is useful.</a:t>
             </a:r>
             <a:endParaRPr lang="en-US" sz="4000" dirty="0"/>
           </a:p>
@@ -6943,7 +7388,7 @@
                 <a:ea typeface="Times New Roman" pitchFamily="34" charset="-122"/>
                 <a:cs typeface="Times New Roman" pitchFamily="34" charset="-120"/>
               </a:rPr>
-              <a:t>Only drawing maps.</a:t>
+              <a:t>She thinks it is only about drawing maps.</a:t>
             </a:r>
             <a:endParaRPr lang="en-US" sz="4000" dirty="0"/>
           </a:p>
@@ -7381,7 +7826,7 @@
                 <a:ea typeface="Times New Roman" pitchFamily="34" charset="-122"/>
                 <a:cs typeface="Times New Roman" pitchFamily="34" charset="-120"/>
               </a:rPr>
-              <a:t>Farmers, drivers and the Mayor.</a:t>
+              <a:t>Farmers, drivers and the Mayor of Garoua.</a:t>
             </a:r>
             <a:endParaRPr lang="en-US" sz="4000" dirty="0"/>
           </a:p>
@@ -8210,7 +8655,7 @@
                 <a:ea typeface="Times New Roman" pitchFamily="34" charset="-122"/>
                 <a:cs typeface="Times New Roman" pitchFamily="34" charset="-120"/>
               </a:rPr>
-              <a:t>Activity 1: Question</a:t>
+              <a:t>Activity 1: Question 1</a:t>
             </a:r>
             <a:endParaRPr lang="en-US" sz="3600" dirty="0"/>
           </a:p>
@@ -8252,7 +8697,7 @@
                 <a:ea typeface="Times New Roman" pitchFamily="34" charset="-122"/>
                 <a:cs typeface="Times New Roman" pitchFamily="34" charset="-120"/>
               </a:rPr>
-              <a:t>Geography comes from two Greek words: "geo" (the Earth) and "graphein" (to describe). What does geography mean?</a:t>
+              <a:t>The word geography comes from the Greek words "geo" and "graphein". What do these words mean?</a:t>
             </a:r>
             <a:endParaRPr lang="en-US" sz="4000" dirty="0"/>
           </a:p>
@@ -8429,7 +8874,7 @@
                 <a:ea typeface="Times New Roman" pitchFamily="34" charset="-122"/>
                 <a:cs typeface="Times New Roman" pitchFamily="34" charset="-120"/>
               </a:rPr>
-              <a:t>Activity 1: Answer</a:t>
+              <a:t>Activity 1: Answer 1</a:t>
             </a:r>
             <a:endParaRPr lang="en-US" sz="3600" dirty="0"/>
           </a:p>
@@ -8471,7 +8916,7 @@
                 <a:ea typeface="Times New Roman" pitchFamily="34" charset="-122"/>
                 <a:cs typeface="Times New Roman" pitchFamily="34" charset="-120"/>
               </a:rPr>
-              <a:t>Geography is the study and description of the Earth and of the people who live on it.</a:t>
+              <a:t>"Geo" means the Earth, and "graphein" means to describe.</a:t>
             </a:r>
             <a:endParaRPr lang="en-US" sz="4000" dirty="0"/>
           </a:p>
@@ -9178,54 +9623,15 @@
                 <a:ea typeface="Calibri" pitchFamily="34" charset="-122"/>
                 <a:cs typeface="Calibri" pitchFamily="34" charset="-120"/>
               </a:rPr>
-              <a:t>2. BRANCHES OF GEOGRAPHY</a:t>
+              <a:t>1. MEANING OF GEOGRAPHY</a:t>
             </a:r>
             <a:endParaRPr lang="en-US" sz="1400" dirty="0"/>
-          </a:p>
-        </p:txBody>
-      </p:sp>
-      <p:sp>
-        <p:nvSpPr>
-          <p:cNvPr id="3" name="Text 1"/>
-          <p:cNvSpPr/>
-          <p:nvPr/>
-        </p:nvSpPr>
-        <p:spPr>
-          <a:xfrm>
-            <a:off x="457200" y="1005840"/>
-            <a:ext cx="11277295" cy="731520"/>
-          </a:xfrm>
-          <a:prstGeom prst="rect">
-            <a:avLst/>
-          </a:prstGeom>
-          <a:noFill/>
-          <a:ln/>
-        </p:spPr>
-        <p:txBody>
-          <a:bodyPr wrap="square" lIns="0" tIns="0" rIns="0" bIns="0" rtlCol="0" anchor="ctr"/>
-          <a:lstStyle/>
-          <a:p>
-            <a:pPr algn="ctr" indent="0" marL="0">
-              <a:buNone/>
-            </a:pPr>
-            <a:r>
-              <a:rPr lang="en-US" sz="3600" b="1" dirty="0">
-                <a:solidFill>
-                  <a:srgbClr val="990011"/>
-                </a:solidFill>
-                <a:latin typeface="Times New Roman" pitchFamily="34" charset="0"/>
-                <a:ea typeface="Times New Roman" pitchFamily="34" charset="-122"/>
-                <a:cs typeface="Times New Roman" pitchFamily="34" charset="-120"/>
-              </a:rPr>
-              <a:t>Activity 2</a:t>
-            </a:r>
-            <a:endParaRPr lang="en-US" sz="3600" dirty="0"/>
           </a:p>
         </p:txBody>
       </p:sp>
       <p:pic>
         <p:nvPicPr>
-          <p:cNvPr id="4" name="Image 0" descr="/home/claude/f4/img/v2/f2t_mount_cameroon.jpg">    </p:cNvPr>
+          <p:cNvPr id="3" name="Image 0" descr="/home/claude/f4/img/minesec_sheet.png">    </p:cNvPr>
           <p:cNvPicPr>
             <a:picLocks noChangeAspect="1"/>
           </p:cNvPicPr>
@@ -9239,8 +9645,8 @@
         </p:blipFill>
         <p:spPr>
           <a:xfrm>
-            <a:off x="2246610" y="1783080"/>
-            <a:ext cx="7698475" cy="4270248"/>
+            <a:off x="0" y="658368"/>
+            <a:ext cx="5120640" cy="5833872"/>
           </a:xfrm>
           <a:prstGeom prst="rect">
             <a:avLst/>
@@ -9249,14 +9655,14 @@
       </p:pic>
       <p:sp>
         <p:nvSpPr>
-          <p:cNvPr id="5" name="Text 2"/>
+          <p:cNvPr id="4" name="Text 1"/>
           <p:cNvSpPr/>
           <p:nvPr/>
         </p:nvSpPr>
         <p:spPr>
           <a:xfrm>
-            <a:off x="457200" y="6089904"/>
-            <a:ext cx="11277295" cy="347472"/>
+            <a:off x="5349240" y="1005840"/>
+            <a:ext cx="6522415" cy="731520"/>
           </a:xfrm>
           <a:prstGeom prst="rect">
             <a:avLst/>
@@ -9265,24 +9671,68 @@
           <a:ln/>
         </p:spPr>
         <p:txBody>
-          <a:bodyPr wrap="square" lIns="0" tIns="0" rIns="0" bIns="0" rtlCol="0" anchor="ctr"/>
+          <a:bodyPr wrap="square" lIns="0" tIns="0" rIns="0" bIns="0" rtlCol="0" anchor="ctr">
+            <a:normAutofit/>
+          </a:bodyPr>
           <a:lstStyle/>
           <a:p>
             <a:pPr algn="ctr" indent="0" marL="0">
               <a:buNone/>
             </a:pPr>
             <a:r>
-              <a:rPr lang="en-US" sz="1800" i="1" dirty="0">
-                <a:solidFill>
-                  <a:srgbClr val="555555"/>
+              <a:rPr lang="en-US" sz="3600" b="1" dirty="0">
+                <a:solidFill>
+                  <a:srgbClr val="990011"/>
                 </a:solidFill>
                 <a:latin typeface="Times New Roman" pitchFamily="34" charset="0"/>
                 <a:ea typeface="Times New Roman" pitchFamily="34" charset="-122"/>
                 <a:cs typeface="Times New Roman" pitchFamily="34" charset="-120"/>
               </a:rPr>
-              <a:t>Mount Cameroon.</a:t>
-            </a:r>
-            <a:endParaRPr lang="en-US" sz="1800" dirty="0"/>
+              <a:t>Activity 1: Question 2</a:t>
+            </a:r>
+            <a:endParaRPr lang="en-US" sz="3600" dirty="0"/>
+          </a:p>
+        </p:txBody>
+      </p:sp>
+      <p:sp>
+        <p:nvSpPr>
+          <p:cNvPr id="5" name="Text 2"/>
+          <p:cNvSpPr/>
+          <p:nvPr/>
+        </p:nvSpPr>
+        <p:spPr>
+          <a:xfrm>
+            <a:off x="5349240" y="1783080"/>
+            <a:ext cx="6522415" cy="4663440"/>
+          </a:xfrm>
+          <a:prstGeom prst="rect">
+            <a:avLst/>
+          </a:prstGeom>
+          <a:noFill/>
+          <a:ln/>
+        </p:spPr>
+        <p:txBody>
+          <a:bodyPr wrap="square" lIns="0" tIns="0" rIns="0" bIns="0" rtlCol="0" anchor="t"/>
+          <a:lstStyle/>
+          <a:p>
+            <a:pPr algn="l" indent="0" marL="0">
+              <a:spcAft>
+                <a:spcPts val="800"/>
+              </a:spcAft>
+              <a:buNone/>
+            </a:pPr>
+            <a:r>
+              <a:rPr lang="en-US" sz="4000" dirty="0">
+                <a:solidFill>
+                  <a:srgbClr val="111111"/>
+                </a:solidFill>
+                <a:latin typeface="Times New Roman" pitchFamily="34" charset="0"/>
+                <a:ea typeface="Times New Roman" pitchFamily="34" charset="-122"/>
+                <a:cs typeface="Times New Roman" pitchFamily="34" charset="-120"/>
+              </a:rPr>
+              <a:t>So, what is geography?</a:t>
+            </a:r>
+            <a:endParaRPr lang="en-US" sz="4000" dirty="0"/>
           </a:p>
         </p:txBody>
       </p:sp>
@@ -9392,7 +9842,7 @@
                 <a:ea typeface="Calibri" pitchFamily="34" charset="-122"/>
                 <a:cs typeface="Calibri" pitchFamily="34" charset="-120"/>
               </a:rPr>
-              <a:t>2. BRANCHES OF GEOGRAPHY</a:t>
+              <a:t>1. MEANING OF GEOGRAPHY</a:t>
             </a:r>
             <a:endParaRPr lang="en-US" sz="1400" dirty="0"/>
           </a:p>
@@ -9457,7 +9907,7 @@
                 <a:ea typeface="Times New Roman" pitchFamily="34" charset="-122"/>
                 <a:cs typeface="Times New Roman" pitchFamily="34" charset="-120"/>
               </a:rPr>
-              <a:t>Activity 2: Question</a:t>
+              <a:t>Activity 1: Answer 2</a:t>
             </a:r>
             <a:endParaRPr lang="en-US" sz="3600" dirty="0"/>
           </a:p>
@@ -9499,7 +9949,7 @@
                 <a:ea typeface="Times New Roman" pitchFamily="34" charset="-122"/>
                 <a:cs typeface="Times New Roman" pitchFamily="34" charset="-120"/>
               </a:rPr>
-              <a:t>Which branch of geography studies mountains, rivers, climate and soils?</a:t>
+              <a:t>Geography is the study and description of the Earth and of the people who live on it.</a:t>
             </a:r>
             <a:endParaRPr lang="en-US" sz="4000" dirty="0"/>
           </a:p>
@@ -9617,9 +10067,48 @@
           </a:p>
         </p:txBody>
       </p:sp>
+      <p:sp>
+        <p:nvSpPr>
+          <p:cNvPr id="3" name="Text 1"/>
+          <p:cNvSpPr/>
+          <p:nvPr/>
+        </p:nvSpPr>
+        <p:spPr>
+          <a:xfrm>
+            <a:off x="457200" y="1005840"/>
+            <a:ext cx="11277295" cy="731520"/>
+          </a:xfrm>
+          <a:prstGeom prst="rect">
+            <a:avLst/>
+          </a:prstGeom>
+          <a:noFill/>
+          <a:ln/>
+        </p:spPr>
+        <p:txBody>
+          <a:bodyPr wrap="square" lIns="0" tIns="0" rIns="0" bIns="0" rtlCol="0" anchor="ctr"/>
+          <a:lstStyle/>
+          <a:p>
+            <a:pPr algn="ctr" indent="0" marL="0">
+              <a:buNone/>
+            </a:pPr>
+            <a:r>
+              <a:rPr lang="en-US" sz="3600" b="1" dirty="0">
+                <a:solidFill>
+                  <a:srgbClr val="990011"/>
+                </a:solidFill>
+                <a:latin typeface="Times New Roman" pitchFamily="34" charset="0"/>
+                <a:ea typeface="Times New Roman" pitchFamily="34" charset="-122"/>
+                <a:cs typeface="Times New Roman" pitchFamily="34" charset="-120"/>
+              </a:rPr>
+              <a:t>Activity 2</a:t>
+            </a:r>
+            <a:endParaRPr lang="en-US" sz="3600" dirty="0"/>
+          </a:p>
+        </p:txBody>
+      </p:sp>
       <p:pic>
         <p:nvPicPr>
-          <p:cNvPr id="3" name="Image 0" descr="/home/claude/f4/img/minesec_sheet.png">    </p:cNvPr>
+          <p:cNvPr id="4" name="Image 0" descr="/home/claude/f4/img/v2/lsa_mtcameroon.jpg">    </p:cNvPr>
           <p:cNvPicPr>
             <a:picLocks noChangeAspect="1"/>
           </p:cNvPicPr>
@@ -9633,8 +10122,8 @@
         </p:blipFill>
         <p:spPr>
           <a:xfrm>
-            <a:off x="0" y="658368"/>
-            <a:ext cx="5120640" cy="5833872"/>
+            <a:off x="2246610" y="1783080"/>
+            <a:ext cx="7698475" cy="4270248"/>
           </a:xfrm>
           <a:prstGeom prst="rect">
             <a:avLst/>
@@ -9643,14 +10132,14 @@
       </p:pic>
       <p:sp>
         <p:nvSpPr>
-          <p:cNvPr id="4" name="Text 1"/>
+          <p:cNvPr id="5" name="Text 2"/>
           <p:cNvSpPr/>
           <p:nvPr/>
         </p:nvSpPr>
         <p:spPr>
           <a:xfrm>
-            <a:off x="5349240" y="1005840"/>
-            <a:ext cx="6522415" cy="731520"/>
+            <a:off x="457200" y="6089904"/>
+            <a:ext cx="11277295" cy="347472"/>
           </a:xfrm>
           <a:prstGeom prst="rect">
             <a:avLst/>
@@ -9659,68 +10148,24 @@
           <a:ln/>
         </p:spPr>
         <p:txBody>
-          <a:bodyPr wrap="square" lIns="0" tIns="0" rIns="0" bIns="0" rtlCol="0" anchor="ctr">
-            <a:normAutofit/>
-          </a:bodyPr>
+          <a:bodyPr wrap="square" lIns="0" tIns="0" rIns="0" bIns="0" rtlCol="0" anchor="ctr"/>
           <a:lstStyle/>
           <a:p>
             <a:pPr algn="ctr" indent="0" marL="0">
               <a:buNone/>
             </a:pPr>
             <a:r>
-              <a:rPr lang="en-US" sz="3600" b="1" dirty="0">
-                <a:solidFill>
-                  <a:srgbClr val="990011"/>
+              <a:rPr lang="en-US" sz="1800" i="1" dirty="0">
+                <a:solidFill>
+                  <a:srgbClr val="555555"/>
                 </a:solidFill>
                 <a:latin typeface="Times New Roman" pitchFamily="34" charset="0"/>
                 <a:ea typeface="Times New Roman" pitchFamily="34" charset="-122"/>
                 <a:cs typeface="Times New Roman" pitchFamily="34" charset="-120"/>
               </a:rPr>
-              <a:t>Activity 2: Answer</a:t>
-            </a:r>
-            <a:endParaRPr lang="en-US" sz="3600" dirty="0"/>
-          </a:p>
-        </p:txBody>
-      </p:sp>
-      <p:sp>
-        <p:nvSpPr>
-          <p:cNvPr id="5" name="Text 2"/>
-          <p:cNvSpPr/>
-          <p:nvPr/>
-        </p:nvSpPr>
-        <p:spPr>
-          <a:xfrm>
-            <a:off x="5349240" y="1783080"/>
-            <a:ext cx="6522415" cy="4663440"/>
-          </a:xfrm>
-          <a:prstGeom prst="rect">
-            <a:avLst/>
-          </a:prstGeom>
-          <a:noFill/>
-          <a:ln/>
-        </p:spPr>
-        <p:txBody>
-          <a:bodyPr wrap="square" lIns="0" tIns="0" rIns="0" bIns="0" rtlCol="0" anchor="t"/>
-          <a:lstStyle/>
-          <a:p>
-            <a:pPr algn="l" indent="0" marL="0">
-              <a:spcAft>
-                <a:spcPts val="800"/>
-              </a:spcAft>
-              <a:buNone/>
-            </a:pPr>
-            <a:r>
-              <a:rPr lang="en-US" sz="4000" dirty="0">
-                <a:solidFill>
-                  <a:srgbClr val="111111"/>
-                </a:solidFill>
-                <a:latin typeface="Times New Roman" pitchFamily="34" charset="0"/>
-                <a:ea typeface="Times New Roman" pitchFamily="34" charset="-122"/>
-                <a:cs typeface="Times New Roman" pitchFamily="34" charset="-120"/>
-              </a:rPr>
-              <a:t>Physical geography.</a:t>
-            </a:r>
-            <a:endParaRPr lang="en-US" sz="4000" dirty="0"/>
+              <a:t>Mount Cameroon.</a:t>
+            </a:r>
+            <a:endParaRPr lang="en-US" sz="1800" dirty="0"/>
           </a:p>
         </p:txBody>
       </p:sp>
@@ -9836,48 +10281,9 @@
           </a:p>
         </p:txBody>
       </p:sp>
-      <p:sp>
-        <p:nvSpPr>
-          <p:cNvPr id="3" name="Text 1"/>
-          <p:cNvSpPr/>
-          <p:nvPr/>
-        </p:nvSpPr>
-        <p:spPr>
-          <a:xfrm>
-            <a:off x="457200" y="1005840"/>
-            <a:ext cx="11277295" cy="731520"/>
-          </a:xfrm>
-          <a:prstGeom prst="rect">
-            <a:avLst/>
-          </a:prstGeom>
-          <a:noFill/>
-          <a:ln/>
-        </p:spPr>
-        <p:txBody>
-          <a:bodyPr wrap="square" lIns="0" tIns="0" rIns="0" bIns="0" rtlCol="0" anchor="ctr"/>
-          <a:lstStyle/>
-          <a:p>
-            <a:pPr algn="ctr" indent="0" marL="0">
-              <a:buNone/>
-            </a:pPr>
-            <a:r>
-              <a:rPr lang="en-US" sz="3600" b="1" dirty="0">
-                <a:solidFill>
-                  <a:srgbClr val="990011"/>
-                </a:solidFill>
-                <a:latin typeface="Times New Roman" pitchFamily="34" charset="0"/>
-                <a:ea typeface="Times New Roman" pitchFamily="34" charset="-122"/>
-                <a:cs typeface="Times New Roman" pitchFamily="34" charset="-120"/>
-              </a:rPr>
-              <a:t>Activity 3</a:t>
-            </a:r>
-            <a:endParaRPr lang="en-US" sz="3600" dirty="0"/>
-          </a:p>
-        </p:txBody>
-      </p:sp>
       <p:pic>
         <p:nvPicPr>
-          <p:cNvPr id="4" name="Image 0" descr="/home/claude/f4/img/v2/f2t_market.jpg">    </p:cNvPr>
+          <p:cNvPr id="3" name="Image 0" descr="/home/claude/f4/img/minesec_sheet.png">    </p:cNvPr>
           <p:cNvPicPr>
             <a:picLocks noChangeAspect="1"/>
           </p:cNvPicPr>
@@ -9891,8 +10297,8 @@
         </p:blipFill>
         <p:spPr>
           <a:xfrm>
-            <a:off x="2246610" y="1783080"/>
-            <a:ext cx="7698475" cy="4270248"/>
+            <a:off x="0" y="658368"/>
+            <a:ext cx="5120640" cy="5833872"/>
           </a:xfrm>
           <a:prstGeom prst="rect">
             <a:avLst/>
@@ -9901,14 +10307,14 @@
       </p:pic>
       <p:sp>
         <p:nvSpPr>
-          <p:cNvPr id="5" name="Text 2"/>
+          <p:cNvPr id="4" name="Text 1"/>
           <p:cNvSpPr/>
           <p:nvPr/>
         </p:nvSpPr>
         <p:spPr>
           <a:xfrm>
-            <a:off x="457200" y="6089904"/>
-            <a:ext cx="11277295" cy="347472"/>
+            <a:off x="5349240" y="1005840"/>
+            <a:ext cx="6522415" cy="731520"/>
           </a:xfrm>
           <a:prstGeom prst="rect">
             <a:avLst/>
@@ -9917,24 +10323,68 @@
           <a:ln/>
         </p:spPr>
         <p:txBody>
-          <a:bodyPr wrap="square" lIns="0" tIns="0" rIns="0" bIns="0" rtlCol="0" anchor="ctr"/>
+          <a:bodyPr wrap="square" lIns="0" tIns="0" rIns="0" bIns="0" rtlCol="0" anchor="ctr">
+            <a:normAutofit/>
+          </a:bodyPr>
           <a:lstStyle/>
           <a:p>
             <a:pPr algn="ctr" indent="0" marL="0">
               <a:buNone/>
             </a:pPr>
             <a:r>
-              <a:rPr lang="en-US" sz="1800" i="1" dirty="0">
-                <a:solidFill>
-                  <a:srgbClr val="555555"/>
+              <a:rPr lang="en-US" sz="3600" b="1" dirty="0">
+                <a:solidFill>
+                  <a:srgbClr val="990011"/>
                 </a:solidFill>
                 <a:latin typeface="Times New Roman" pitchFamily="34" charset="0"/>
                 <a:ea typeface="Times New Roman" pitchFamily="34" charset="-122"/>
                 <a:cs typeface="Times New Roman" pitchFamily="34" charset="-120"/>
               </a:rPr>
-              <a:t>A busy market in Cameroon.</a:t>
-            </a:r>
-            <a:endParaRPr lang="en-US" sz="1800" dirty="0"/>
+              <a:t>Activity 2: Question</a:t>
+            </a:r>
+            <a:endParaRPr lang="en-US" sz="3600" dirty="0"/>
+          </a:p>
+        </p:txBody>
+      </p:sp>
+      <p:sp>
+        <p:nvSpPr>
+          <p:cNvPr id="5" name="Text 2"/>
+          <p:cNvSpPr/>
+          <p:nvPr/>
+        </p:nvSpPr>
+        <p:spPr>
+          <a:xfrm>
+            <a:off x="5349240" y="1783080"/>
+            <a:ext cx="6522415" cy="4663440"/>
+          </a:xfrm>
+          <a:prstGeom prst="rect">
+            <a:avLst/>
+          </a:prstGeom>
+          <a:noFill/>
+          <a:ln/>
+        </p:spPr>
+        <p:txBody>
+          <a:bodyPr wrap="square" lIns="0" tIns="0" rIns="0" bIns="0" rtlCol="0" anchor="t"/>
+          <a:lstStyle/>
+          <a:p>
+            <a:pPr algn="l" indent="0" marL="0">
+              <a:spcAft>
+                <a:spcPts val="800"/>
+              </a:spcAft>
+              <a:buNone/>
+            </a:pPr>
+            <a:r>
+              <a:rPr lang="en-US" sz="4000" dirty="0">
+                <a:solidFill>
+                  <a:srgbClr val="111111"/>
+                </a:solidFill>
+                <a:latin typeface="Times New Roman" pitchFamily="34" charset="0"/>
+                <a:ea typeface="Times New Roman" pitchFamily="34" charset="-122"/>
+                <a:cs typeface="Times New Roman" pitchFamily="34" charset="-120"/>
+              </a:rPr>
+              <a:t>Which branch of geography studies mountains, rivers, climate and soils?</a:t>
+            </a:r>
+            <a:endParaRPr lang="en-US" sz="4000" dirty="0"/>
           </a:p>
         </p:txBody>
       </p:sp>
@@ -10109,7 +10559,7 @@
                 <a:ea typeface="Times New Roman" pitchFamily="34" charset="-122"/>
                 <a:cs typeface="Times New Roman" pitchFamily="34" charset="-120"/>
               </a:rPr>
-              <a:t>Activity 3: Question</a:t>
+              <a:t>Activity 2: Answer</a:t>
             </a:r>
             <a:endParaRPr lang="en-US" sz="3600" dirty="0"/>
           </a:p>
@@ -10151,7 +10601,7 @@
                 <a:ea typeface="Times New Roman" pitchFamily="34" charset="-122"/>
                 <a:cs typeface="Times New Roman" pitchFamily="34" charset="-120"/>
               </a:rPr>
-              <a:t>Which branch of geography studies people, markets, towns and farming?</a:t>
+              <a:t>Physical geography.</a:t>
             </a:r>
             <a:endParaRPr lang="en-US" sz="4000" dirty="0"/>
           </a:p>
@@ -10269,9 +10719,48 @@
           </a:p>
         </p:txBody>
       </p:sp>
+      <p:sp>
+        <p:nvSpPr>
+          <p:cNvPr id="3" name="Text 1"/>
+          <p:cNvSpPr/>
+          <p:nvPr/>
+        </p:nvSpPr>
+        <p:spPr>
+          <a:xfrm>
+            <a:off x="457200" y="1005840"/>
+            <a:ext cx="11277295" cy="731520"/>
+          </a:xfrm>
+          <a:prstGeom prst="rect">
+            <a:avLst/>
+          </a:prstGeom>
+          <a:noFill/>
+          <a:ln/>
+        </p:spPr>
+        <p:txBody>
+          <a:bodyPr wrap="square" lIns="0" tIns="0" rIns="0" bIns="0" rtlCol="0" anchor="ctr"/>
+          <a:lstStyle/>
+          <a:p>
+            <a:pPr algn="ctr" indent="0" marL="0">
+              <a:buNone/>
+            </a:pPr>
+            <a:r>
+              <a:rPr lang="en-US" sz="3600" b="1" dirty="0">
+                <a:solidFill>
+                  <a:srgbClr val="990011"/>
+                </a:solidFill>
+                <a:latin typeface="Times New Roman" pitchFamily="34" charset="0"/>
+                <a:ea typeface="Times New Roman" pitchFamily="34" charset="-122"/>
+                <a:cs typeface="Times New Roman" pitchFamily="34" charset="-120"/>
+              </a:rPr>
+              <a:t>Activity 3</a:t>
+            </a:r>
+            <a:endParaRPr lang="en-US" sz="3600" dirty="0"/>
+          </a:p>
+        </p:txBody>
+      </p:sp>
       <p:pic>
         <p:nvPicPr>
-          <p:cNvPr id="3" name="Image 0" descr="/home/claude/f4/img/minesec_sheet.png">    </p:cNvPr>
+          <p:cNvPr id="4" name="Image 0" descr="/home/claude/f4/img/v2/f2t_market.jpg">    </p:cNvPr>
           <p:cNvPicPr>
             <a:picLocks noChangeAspect="1"/>
           </p:cNvPicPr>
@@ -10285,8 +10774,8 @@
         </p:blipFill>
         <p:spPr>
           <a:xfrm>
-            <a:off x="0" y="658368"/>
-            <a:ext cx="5120640" cy="5833872"/>
+            <a:off x="2246610" y="1783080"/>
+            <a:ext cx="7698475" cy="4270248"/>
           </a:xfrm>
           <a:prstGeom prst="rect">
             <a:avLst/>
@@ -10295,14 +10784,14 @@
       </p:pic>
       <p:sp>
         <p:nvSpPr>
-          <p:cNvPr id="4" name="Text 1"/>
+          <p:cNvPr id="5" name="Text 2"/>
           <p:cNvSpPr/>
           <p:nvPr/>
         </p:nvSpPr>
         <p:spPr>
           <a:xfrm>
-            <a:off x="5349240" y="1005840"/>
-            <a:ext cx="6522415" cy="731520"/>
+            <a:off x="457200" y="6089904"/>
+            <a:ext cx="11277295" cy="347472"/>
           </a:xfrm>
           <a:prstGeom prst="rect">
             <a:avLst/>
@@ -10311,68 +10800,24 @@
           <a:ln/>
         </p:spPr>
         <p:txBody>
-          <a:bodyPr wrap="square" lIns="0" tIns="0" rIns="0" bIns="0" rtlCol="0" anchor="ctr">
-            <a:normAutofit/>
-          </a:bodyPr>
+          <a:bodyPr wrap="square" lIns="0" tIns="0" rIns="0" bIns="0" rtlCol="0" anchor="ctr"/>
           <a:lstStyle/>
           <a:p>
             <a:pPr algn="ctr" indent="0" marL="0">
               <a:buNone/>
             </a:pPr>
             <a:r>
-              <a:rPr lang="en-US" sz="3600" b="1" dirty="0">
-                <a:solidFill>
-                  <a:srgbClr val="990011"/>
+              <a:rPr lang="en-US" sz="1800" i="1" dirty="0">
+                <a:solidFill>
+                  <a:srgbClr val="555555"/>
                 </a:solidFill>
                 <a:latin typeface="Times New Roman" pitchFamily="34" charset="0"/>
                 <a:ea typeface="Times New Roman" pitchFamily="34" charset="-122"/>
                 <a:cs typeface="Times New Roman" pitchFamily="34" charset="-120"/>
               </a:rPr>
-              <a:t>Activity 3: Answer</a:t>
-            </a:r>
-            <a:endParaRPr lang="en-US" sz="3600" dirty="0"/>
-          </a:p>
-        </p:txBody>
-      </p:sp>
-      <p:sp>
-        <p:nvSpPr>
-          <p:cNvPr id="5" name="Text 2"/>
-          <p:cNvSpPr/>
-          <p:nvPr/>
-        </p:nvSpPr>
-        <p:spPr>
-          <a:xfrm>
-            <a:off x="5349240" y="1783080"/>
-            <a:ext cx="6522415" cy="4663440"/>
-          </a:xfrm>
-          <a:prstGeom prst="rect">
-            <a:avLst/>
-          </a:prstGeom>
-          <a:noFill/>
-          <a:ln/>
-        </p:spPr>
-        <p:txBody>
-          <a:bodyPr wrap="square" lIns="0" tIns="0" rIns="0" bIns="0" rtlCol="0" anchor="t"/>
-          <a:lstStyle/>
-          <a:p>
-            <a:pPr algn="l" indent="0" marL="0">
-              <a:spcAft>
-                <a:spcPts val="800"/>
-              </a:spcAft>
-              <a:buNone/>
-            </a:pPr>
-            <a:r>
-              <a:rPr lang="en-US" sz="4000" dirty="0">
-                <a:solidFill>
-                  <a:srgbClr val="111111"/>
-                </a:solidFill>
-                <a:latin typeface="Times New Roman" pitchFamily="34" charset="0"/>
-                <a:ea typeface="Times New Roman" pitchFamily="34" charset="-122"/>
-                <a:cs typeface="Times New Roman" pitchFamily="34" charset="-120"/>
-              </a:rPr>
-              <a:t>Human geography.</a:t>
-            </a:r>
-            <a:endParaRPr lang="en-US" sz="4000" dirty="0"/>
+              <a:t>A busy market in Cameroon.</a:t>
+            </a:r>
+            <a:endParaRPr lang="en-US" sz="1800" dirty="0"/>
           </a:p>
         </p:txBody>
       </p:sp>
@@ -10482,54 +10927,15 @@
                 <a:ea typeface="Calibri" pitchFamily="34" charset="-122"/>
                 <a:cs typeface="Calibri" pitchFamily="34" charset="-120"/>
               </a:rPr>
-              <a:t>3. METHODS OF GEOGRAPHY</a:t>
+              <a:t>2. BRANCHES OF GEOGRAPHY</a:t>
             </a:r>
             <a:endParaRPr lang="en-US" sz="1400" dirty="0"/>
-          </a:p>
-        </p:txBody>
-      </p:sp>
-      <p:sp>
-        <p:nvSpPr>
-          <p:cNvPr id="3" name="Text 1"/>
-          <p:cNvSpPr/>
-          <p:nvPr/>
-        </p:nvSpPr>
-        <p:spPr>
-          <a:xfrm>
-            <a:off x="457200" y="1005840"/>
-            <a:ext cx="11277295" cy="731520"/>
-          </a:xfrm>
-          <a:prstGeom prst="rect">
-            <a:avLst/>
-          </a:prstGeom>
-          <a:noFill/>
-          <a:ln/>
-        </p:spPr>
-        <p:txBody>
-          <a:bodyPr wrap="square" lIns="0" tIns="0" rIns="0" bIns="0" rtlCol="0" anchor="ctr"/>
-          <a:lstStyle/>
-          <a:p>
-            <a:pPr algn="ctr" indent="0" marL="0">
-              <a:buNone/>
-            </a:pPr>
-            <a:r>
-              <a:rPr lang="en-US" sz="3600" b="1" dirty="0">
-                <a:solidFill>
-                  <a:srgbClr val="990011"/>
-                </a:solidFill>
-                <a:latin typeface="Times New Roman" pitchFamily="34" charset="0"/>
-                <a:ea typeface="Times New Roman" pitchFamily="34" charset="-122"/>
-                <a:cs typeface="Times New Roman" pitchFamily="34" charset="-120"/>
-              </a:rPr>
-              <a:t>Activity 4</a:t>
-            </a:r>
-            <a:endParaRPr lang="en-US" sz="3600" dirty="0"/>
           </a:p>
         </p:txBody>
       </p:sp>
       <p:pic>
         <p:nvPicPr>
-          <p:cNvPr id="4" name="Image 0" descr="/home/claude/f4/img/v2/usa_topomap.jpg">    </p:cNvPr>
+          <p:cNvPr id="3" name="Image 0" descr="/home/claude/f4/img/minesec_sheet.png">    </p:cNvPr>
           <p:cNvPicPr>
             <a:picLocks noChangeAspect="1"/>
           </p:cNvPicPr>
@@ -10543,8 +10949,8 @@
         </p:blipFill>
         <p:spPr>
           <a:xfrm>
-            <a:off x="2246610" y="1783080"/>
-            <a:ext cx="7698475" cy="4270248"/>
+            <a:off x="0" y="658368"/>
+            <a:ext cx="5120640" cy="5833872"/>
           </a:xfrm>
           <a:prstGeom prst="rect">
             <a:avLst/>
@@ -10553,14 +10959,14 @@
       </p:pic>
       <p:sp>
         <p:nvSpPr>
-          <p:cNvPr id="5" name="Text 2"/>
+          <p:cNvPr id="4" name="Text 1"/>
           <p:cNvSpPr/>
           <p:nvPr/>
         </p:nvSpPr>
         <p:spPr>
           <a:xfrm>
-            <a:off x="457200" y="6089904"/>
-            <a:ext cx="11277295" cy="347472"/>
+            <a:off x="5349240" y="1005840"/>
+            <a:ext cx="6522415" cy="731520"/>
           </a:xfrm>
           <a:prstGeom prst="rect">
             <a:avLst/>
@@ -10569,24 +10975,68 @@
           <a:ln/>
         </p:spPr>
         <p:txBody>
-          <a:bodyPr wrap="square" lIns="0" tIns="0" rIns="0" bIns="0" rtlCol="0" anchor="ctr"/>
+          <a:bodyPr wrap="square" lIns="0" tIns="0" rIns="0" bIns="0" rtlCol="0" anchor="ctr">
+            <a:normAutofit/>
+          </a:bodyPr>
           <a:lstStyle/>
           <a:p>
             <a:pPr algn="ctr" indent="0" marL="0">
               <a:buNone/>
             </a:pPr>
             <a:r>
-              <a:rPr lang="en-US" sz="1800" i="1" dirty="0">
-                <a:solidFill>
-                  <a:srgbClr val="555555"/>
+              <a:rPr lang="en-US" sz="3600" b="1" dirty="0">
+                <a:solidFill>
+                  <a:srgbClr val="990011"/>
                 </a:solidFill>
                 <a:latin typeface="Times New Roman" pitchFamily="34" charset="0"/>
                 <a:ea typeface="Times New Roman" pitchFamily="34" charset="-122"/>
                 <a:cs typeface="Times New Roman" pitchFamily="34" charset="-120"/>
               </a:rPr>
-              <a:t>A map used in the field.</a:t>
-            </a:r>
-            <a:endParaRPr lang="en-US" sz="1800" dirty="0"/>
+              <a:t>Activity 3: Question</a:t>
+            </a:r>
+            <a:endParaRPr lang="en-US" sz="3600" dirty="0"/>
+          </a:p>
+        </p:txBody>
+      </p:sp>
+      <p:sp>
+        <p:nvSpPr>
+          <p:cNvPr id="5" name="Text 2"/>
+          <p:cNvSpPr/>
+          <p:nvPr/>
+        </p:nvSpPr>
+        <p:spPr>
+          <a:xfrm>
+            <a:off x="5349240" y="1783080"/>
+            <a:ext cx="6522415" cy="4663440"/>
+          </a:xfrm>
+          <a:prstGeom prst="rect">
+            <a:avLst/>
+          </a:prstGeom>
+          <a:noFill/>
+          <a:ln/>
+        </p:spPr>
+        <p:txBody>
+          <a:bodyPr wrap="square" lIns="0" tIns="0" rIns="0" bIns="0" rtlCol="0" anchor="t"/>
+          <a:lstStyle/>
+          <a:p>
+            <a:pPr algn="l" indent="0" marL="0">
+              <a:spcAft>
+                <a:spcPts val="800"/>
+              </a:spcAft>
+              <a:buNone/>
+            </a:pPr>
+            <a:r>
+              <a:rPr lang="en-US" sz="4000" dirty="0">
+                <a:solidFill>
+                  <a:srgbClr val="111111"/>
+                </a:solidFill>
+                <a:latin typeface="Times New Roman" pitchFamily="34" charset="0"/>
+                <a:ea typeface="Times New Roman" pitchFamily="34" charset="-122"/>
+                <a:cs typeface="Times New Roman" pitchFamily="34" charset="-120"/>
+              </a:rPr>
+              <a:t>Which branch of geography studies people, markets, towns and farming?</a:t>
+            </a:r>
+            <a:endParaRPr lang="en-US" sz="4000" dirty="0"/>
           </a:p>
         </p:txBody>
       </p:sp>
@@ -10696,7 +11146,7 @@
                 <a:ea typeface="Calibri" pitchFamily="34" charset="-122"/>
                 <a:cs typeface="Calibri" pitchFamily="34" charset="-120"/>
               </a:rPr>
-              <a:t>3. METHODS OF GEOGRAPHY</a:t>
+              <a:t>2. BRANCHES OF GEOGRAPHY</a:t>
             </a:r>
             <a:endParaRPr lang="en-US" sz="1400" dirty="0"/>
           </a:p>
@@ -10761,7 +11211,7 @@
                 <a:ea typeface="Times New Roman" pitchFamily="34" charset="-122"/>
                 <a:cs typeface="Times New Roman" pitchFamily="34" charset="-120"/>
               </a:rPr>
-              <a:t>Activity 4: Question</a:t>
+              <a:t>Activity 3: Answer</a:t>
             </a:r>
             <a:endParaRPr lang="en-US" sz="3600" dirty="0"/>
           </a:p>
@@ -10803,7 +11253,7 @@
                 <a:ea typeface="Times New Roman" pitchFamily="34" charset="-122"/>
                 <a:cs typeface="Times New Roman" pitchFamily="34" charset="-120"/>
               </a:rPr>
-              <a:t>Give three ways a geographer collects and shows information.</a:t>
+              <a:t>Human geography.</a:t>
             </a:r>
             <a:endParaRPr lang="en-US" sz="4000" dirty="0"/>
           </a:p>
@@ -10921,9 +11371,48 @@
           </a:p>
         </p:txBody>
       </p:sp>
+      <p:sp>
+        <p:nvSpPr>
+          <p:cNvPr id="3" name="Text 1"/>
+          <p:cNvSpPr/>
+          <p:nvPr/>
+        </p:nvSpPr>
+        <p:spPr>
+          <a:xfrm>
+            <a:off x="457200" y="1005840"/>
+            <a:ext cx="11277295" cy="731520"/>
+          </a:xfrm>
+          <a:prstGeom prst="rect">
+            <a:avLst/>
+          </a:prstGeom>
+          <a:noFill/>
+          <a:ln/>
+        </p:spPr>
+        <p:txBody>
+          <a:bodyPr wrap="square" lIns="0" tIns="0" rIns="0" bIns="0" rtlCol="0" anchor="ctr"/>
+          <a:lstStyle/>
+          <a:p>
+            <a:pPr algn="ctr" indent="0" marL="0">
+              <a:buNone/>
+            </a:pPr>
+            <a:r>
+              <a:rPr lang="en-US" sz="3600" b="1" dirty="0">
+                <a:solidFill>
+                  <a:srgbClr val="990011"/>
+                </a:solidFill>
+                <a:latin typeface="Times New Roman" pitchFamily="34" charset="0"/>
+                <a:ea typeface="Times New Roman" pitchFamily="34" charset="-122"/>
+                <a:cs typeface="Times New Roman" pitchFamily="34" charset="-120"/>
+              </a:rPr>
+              <a:t>Activity 4</a:t>
+            </a:r>
+            <a:endParaRPr lang="en-US" sz="3600" dirty="0"/>
+          </a:p>
+        </p:txBody>
+      </p:sp>
       <p:pic>
         <p:nvPicPr>
-          <p:cNvPr id="3" name="Image 0" descr="/home/claude/f4/img/minesec_sheet.png">    </p:cNvPr>
+          <p:cNvPr id="4" name="Image 0" descr="/home/claude/f4/img/v2/usa_topomap.jpg">    </p:cNvPr>
           <p:cNvPicPr>
             <a:picLocks noChangeAspect="1"/>
           </p:cNvPicPr>
@@ -10937,8 +11426,8 @@
         </p:blipFill>
         <p:spPr>
           <a:xfrm>
-            <a:off x="0" y="658368"/>
-            <a:ext cx="5120640" cy="5833872"/>
+            <a:off x="2246610" y="1783080"/>
+            <a:ext cx="7698475" cy="4270248"/>
           </a:xfrm>
           <a:prstGeom prst="rect">
             <a:avLst/>
@@ -10947,14 +11436,14 @@
       </p:pic>
       <p:sp>
         <p:nvSpPr>
-          <p:cNvPr id="4" name="Text 1"/>
+          <p:cNvPr id="5" name="Text 2"/>
           <p:cNvSpPr/>
           <p:nvPr/>
         </p:nvSpPr>
         <p:spPr>
           <a:xfrm>
-            <a:off x="5349240" y="1005840"/>
-            <a:ext cx="6522415" cy="731520"/>
+            <a:off x="457200" y="6089904"/>
+            <a:ext cx="11277295" cy="347472"/>
           </a:xfrm>
           <a:prstGeom prst="rect">
             <a:avLst/>
@@ -10963,68 +11452,24 @@
           <a:ln/>
         </p:spPr>
         <p:txBody>
-          <a:bodyPr wrap="square" lIns="0" tIns="0" rIns="0" bIns="0" rtlCol="0" anchor="ctr">
-            <a:normAutofit/>
-          </a:bodyPr>
+          <a:bodyPr wrap="square" lIns="0" tIns="0" rIns="0" bIns="0" rtlCol="0" anchor="ctr"/>
           <a:lstStyle/>
           <a:p>
             <a:pPr algn="ctr" indent="0" marL="0">
               <a:buNone/>
             </a:pPr>
             <a:r>
-              <a:rPr lang="en-US" sz="3600" b="1" dirty="0">
-                <a:solidFill>
-                  <a:srgbClr val="990011"/>
+              <a:rPr lang="en-US" sz="1800" i="1" dirty="0">
+                <a:solidFill>
+                  <a:srgbClr val="555555"/>
                 </a:solidFill>
                 <a:latin typeface="Times New Roman" pitchFamily="34" charset="0"/>
                 <a:ea typeface="Times New Roman" pitchFamily="34" charset="-122"/>
                 <a:cs typeface="Times New Roman" pitchFamily="34" charset="-120"/>
               </a:rPr>
-              <a:t>Activity 4: Answer</a:t>
-            </a:r>
-            <a:endParaRPr lang="en-US" sz="3600" dirty="0"/>
-          </a:p>
-        </p:txBody>
-      </p:sp>
-      <p:sp>
-        <p:nvSpPr>
-          <p:cNvPr id="5" name="Text 2"/>
-          <p:cNvSpPr/>
-          <p:nvPr/>
-        </p:nvSpPr>
-        <p:spPr>
-          <a:xfrm>
-            <a:off x="5349240" y="1783080"/>
-            <a:ext cx="6522415" cy="4663440"/>
-          </a:xfrm>
-          <a:prstGeom prst="rect">
-            <a:avLst/>
-          </a:prstGeom>
-          <a:noFill/>
-          <a:ln/>
-        </p:spPr>
-        <p:txBody>
-          <a:bodyPr wrap="square" lIns="0" tIns="0" rIns="0" bIns="0" rtlCol="0" anchor="t"/>
-          <a:lstStyle/>
-          <a:p>
-            <a:pPr algn="l" indent="0" marL="0">
-              <a:spcAft>
-                <a:spcPts val="800"/>
-              </a:spcAft>
-              <a:buNone/>
-            </a:pPr>
-            <a:r>
-              <a:rPr lang="en-US" sz="4000" dirty="0">
-                <a:solidFill>
-                  <a:srgbClr val="111111"/>
-                </a:solidFill>
-                <a:latin typeface="Times New Roman" pitchFamily="34" charset="0"/>
-                <a:ea typeface="Times New Roman" pitchFamily="34" charset="-122"/>
-                <a:cs typeface="Times New Roman" pitchFamily="34" charset="-120"/>
-              </a:rPr>
-              <a:t>Observation and fieldwork, maps and photographs, and graphs and statistics (also interviews).</a:t>
-            </a:r>
-            <a:endParaRPr lang="en-US" sz="4000" dirty="0"/>
+              <a:t>A geographer using a map in the field.</a:t>
+            </a:r>
+            <a:endParaRPr lang="en-US" sz="1800" dirty="0"/>
           </a:p>
         </p:txBody>
       </p:sp>
@@ -11134,54 +11579,15 @@
                 <a:ea typeface="Calibri" pitchFamily="34" charset="-122"/>
                 <a:cs typeface="Calibri" pitchFamily="34" charset="-120"/>
               </a:rPr>
-              <a:t>4. IMPORTANCE OF GEOGRAPHY</a:t>
+              <a:t>3. METHODS OF GEOGRAPHY</a:t>
             </a:r>
             <a:endParaRPr lang="en-US" sz="1400" dirty="0"/>
-          </a:p>
-        </p:txBody>
-      </p:sp>
-      <p:sp>
-        <p:nvSpPr>
-          <p:cNvPr id="3" name="Text 1"/>
-          <p:cNvSpPr/>
-          <p:nvPr/>
-        </p:nvSpPr>
-        <p:spPr>
-          <a:xfrm>
-            <a:off x="457200" y="1005840"/>
-            <a:ext cx="11277295" cy="731520"/>
-          </a:xfrm>
-          <a:prstGeom prst="rect">
-            <a:avLst/>
-          </a:prstGeom>
-          <a:noFill/>
-          <a:ln/>
-        </p:spPr>
-        <p:txBody>
-          <a:bodyPr wrap="square" lIns="0" tIns="0" rIns="0" bIns="0" rtlCol="0" anchor="ctr"/>
-          <a:lstStyle/>
-          <a:p>
-            <a:pPr algn="ctr" indent="0" marL="0">
-              <a:buNone/>
-            </a:pPr>
-            <a:r>
-              <a:rPr lang="en-US" sz="3600" b="1" dirty="0">
-                <a:solidFill>
-                  <a:srgbClr val="990011"/>
-                </a:solidFill>
-                <a:latin typeface="Times New Roman" pitchFamily="34" charset="0"/>
-                <a:ea typeface="Times New Roman" pitchFamily="34" charset="-122"/>
-                <a:cs typeface="Times New Roman" pitchFamily="34" charset="-120"/>
-              </a:rPr>
-              <a:t>Activity 5</a:t>
-            </a:r>
-            <a:endParaRPr lang="en-US" sz="3600" dirty="0"/>
           </a:p>
         </p:txBody>
       </p:sp>
       <p:pic>
         <p:nvPicPr>
-          <p:cNvPr id="4" name="Image 0" descr="/home/claude/f4/img/v2/geography_branches_big.png">    </p:cNvPr>
+          <p:cNvPr id="3" name="Image 0" descr="/home/claude/f4/img/minesec_sheet.png">    </p:cNvPr>
           <p:cNvPicPr>
             <a:picLocks noChangeAspect="1"/>
           </p:cNvPicPr>
@@ -11195,8 +11601,8 @@
         </p:blipFill>
         <p:spPr>
           <a:xfrm>
-            <a:off x="629930" y="1783080"/>
-            <a:ext cx="10931835" cy="4270248"/>
+            <a:off x="0" y="658368"/>
+            <a:ext cx="5120640" cy="5833872"/>
           </a:xfrm>
           <a:prstGeom prst="rect">
             <a:avLst/>
@@ -11205,14 +11611,14 @@
       </p:pic>
       <p:sp>
         <p:nvSpPr>
-          <p:cNvPr id="5" name="Text 2"/>
+          <p:cNvPr id="4" name="Text 1"/>
           <p:cNvSpPr/>
           <p:nvPr/>
         </p:nvSpPr>
         <p:spPr>
           <a:xfrm>
-            <a:off x="457200" y="6089904"/>
-            <a:ext cx="11277295" cy="347472"/>
+            <a:off x="5349240" y="1005840"/>
+            <a:ext cx="6522415" cy="731520"/>
           </a:xfrm>
           <a:prstGeom prst="rect">
             <a:avLst/>
@@ -11221,24 +11627,68 @@
           <a:ln/>
         </p:spPr>
         <p:txBody>
-          <a:bodyPr wrap="square" lIns="0" tIns="0" rIns="0" bIns="0" rtlCol="0" anchor="ctr"/>
+          <a:bodyPr wrap="square" lIns="0" tIns="0" rIns="0" bIns="0" rtlCol="0" anchor="ctr">
+            <a:normAutofit/>
+          </a:bodyPr>
           <a:lstStyle/>
           <a:p>
             <a:pPr algn="ctr" indent="0" marL="0">
               <a:buNone/>
             </a:pPr>
             <a:r>
-              <a:rPr lang="en-US" sz="1800" i="1" dirty="0">
-                <a:solidFill>
-                  <a:srgbClr val="555555"/>
+              <a:rPr lang="en-US" sz="3600" b="1" dirty="0">
+                <a:solidFill>
+                  <a:srgbClr val="990011"/>
                 </a:solidFill>
                 <a:latin typeface="Times New Roman" pitchFamily="34" charset="0"/>
                 <a:ea typeface="Times New Roman" pitchFamily="34" charset="-122"/>
                 <a:cs typeface="Times New Roman" pitchFamily="34" charset="-120"/>
               </a:rPr>
-              <a:t>The branches of geography.</a:t>
-            </a:r>
-            <a:endParaRPr lang="en-US" sz="1800" dirty="0"/>
+              <a:t>Activity 4: Question</a:t>
+            </a:r>
+            <a:endParaRPr lang="en-US" sz="3600" dirty="0"/>
+          </a:p>
+        </p:txBody>
+      </p:sp>
+      <p:sp>
+        <p:nvSpPr>
+          <p:cNvPr id="5" name="Text 2"/>
+          <p:cNvSpPr/>
+          <p:nvPr/>
+        </p:nvSpPr>
+        <p:spPr>
+          <a:xfrm>
+            <a:off x="5349240" y="1783080"/>
+            <a:ext cx="6522415" cy="4663440"/>
+          </a:xfrm>
+          <a:prstGeom prst="rect">
+            <a:avLst/>
+          </a:prstGeom>
+          <a:noFill/>
+          <a:ln/>
+        </p:spPr>
+        <p:txBody>
+          <a:bodyPr wrap="square" lIns="0" tIns="0" rIns="0" bIns="0" rtlCol="0" anchor="t"/>
+          <a:lstStyle/>
+          <a:p>
+            <a:pPr algn="l" indent="0" marL="0">
+              <a:spcAft>
+                <a:spcPts val="800"/>
+              </a:spcAft>
+              <a:buNone/>
+            </a:pPr>
+            <a:r>
+              <a:rPr lang="en-US" sz="4000" dirty="0">
+                <a:solidFill>
+                  <a:srgbClr val="111111"/>
+                </a:solidFill>
+                <a:latin typeface="Times New Roman" pitchFamily="34" charset="0"/>
+                <a:ea typeface="Times New Roman" pitchFamily="34" charset="-122"/>
+                <a:cs typeface="Times New Roman" pitchFamily="34" charset="-120"/>
+              </a:rPr>
+              <a:t>How does a geographer collect information about a place?</a:t>
+            </a:r>
+            <a:endParaRPr lang="en-US" sz="4000" dirty="0"/>
           </a:p>
         </p:txBody>
       </p:sp>
@@ -12057,7 +12507,7 @@
                           <a:ea typeface="Calibri" pitchFamily="34" charset="-122"/>
                           <a:cs typeface="Calibri" pitchFamily="34" charset="-120"/>
                         </a:rPr>
-                        <a:t>Definition of geography; its branches and sub-branches; its methods; its importance.</a:t>
+                        <a:t>Definition of geography; branches and sub-branches; methods; importance.</a:t>
                       </a:r>
                       <a:endParaRPr lang="en-US" sz="1700" dirty="0">
                         <a:latin typeface="Calibri" charset="0"/>
@@ -12357,7 +12807,7 @@
                 <a:ea typeface="Calibri" pitchFamily="34" charset="-122"/>
                 <a:cs typeface="Calibri" pitchFamily="34" charset="-120"/>
               </a:rPr>
-              <a:t>4. IMPORTANCE OF GEOGRAPHY</a:t>
+              <a:t>3. METHODS OF GEOGRAPHY</a:t>
             </a:r>
             <a:endParaRPr lang="en-US" sz="1400" dirty="0"/>
           </a:p>
@@ -12422,7 +12872,7 @@
                 <a:ea typeface="Times New Roman" pitchFamily="34" charset="-122"/>
                 <a:cs typeface="Times New Roman" pitchFamily="34" charset="-120"/>
               </a:rPr>
-              <a:t>Activity 5: Question</a:t>
+              <a:t>Activity 4: Answer</a:t>
             </a:r>
             <a:endParaRPr lang="en-US" sz="3600" dirty="0"/>
           </a:p>
@@ -12464,7 +12914,7 @@
                 <a:ea typeface="Times New Roman" pitchFamily="34" charset="-122"/>
                 <a:cs typeface="Times New Roman" pitchFamily="34" charset="-120"/>
               </a:rPr>
-              <a:t>Give two ways geography is useful in our daily lives.</a:t>
+              <a:t>By observing and measuring in the field, and by asking people questions.</a:t>
             </a:r>
             <a:endParaRPr lang="en-US" sz="4000" dirty="0"/>
           </a:p>
@@ -12582,9 +13032,48 @@
           </a:p>
         </p:txBody>
       </p:sp>
+      <p:sp>
+        <p:nvSpPr>
+          <p:cNvPr id="3" name="Text 1"/>
+          <p:cNvSpPr/>
+          <p:nvPr/>
+        </p:nvSpPr>
+        <p:spPr>
+          <a:xfrm>
+            <a:off x="457200" y="1005840"/>
+            <a:ext cx="11277295" cy="731520"/>
+          </a:xfrm>
+          <a:prstGeom prst="rect">
+            <a:avLst/>
+          </a:prstGeom>
+          <a:noFill/>
+          <a:ln/>
+        </p:spPr>
+        <p:txBody>
+          <a:bodyPr wrap="square" lIns="0" tIns="0" rIns="0" bIns="0" rtlCol="0" anchor="ctr"/>
+          <a:lstStyle/>
+          <a:p>
+            <a:pPr algn="ctr" indent="0" marL="0">
+              <a:buNone/>
+            </a:pPr>
+            <a:r>
+              <a:rPr lang="en-US" sz="3600" b="1" dirty="0">
+                <a:solidFill>
+                  <a:srgbClr val="990011"/>
+                </a:solidFill>
+                <a:latin typeface="Times New Roman" pitchFamily="34" charset="0"/>
+                <a:ea typeface="Times New Roman" pitchFamily="34" charset="-122"/>
+                <a:cs typeface="Times New Roman" pitchFamily="34" charset="-120"/>
+              </a:rPr>
+              <a:t>Activity 5</a:t>
+            </a:r>
+            <a:endParaRPr lang="en-US" sz="3600" dirty="0"/>
+          </a:p>
+        </p:txBody>
+      </p:sp>
       <p:pic>
         <p:nvPicPr>
-          <p:cNvPr id="3" name="Image 0" descr="/home/claude/f4/img/minesec_sheet.png">    </p:cNvPr>
+          <p:cNvPr id="4" name="Image 0" descr="/home/claude/f4/img/v2/f2t_cotton_field.jpg">    </p:cNvPr>
           <p:cNvPicPr>
             <a:picLocks noChangeAspect="1"/>
           </p:cNvPicPr>
@@ -12598,8 +13087,8 @@
         </p:blipFill>
         <p:spPr>
           <a:xfrm>
-            <a:off x="0" y="658368"/>
-            <a:ext cx="5120640" cy="5833872"/>
+            <a:off x="2246610" y="1783080"/>
+            <a:ext cx="7698475" cy="4270248"/>
           </a:xfrm>
           <a:prstGeom prst="rect">
             <a:avLst/>
@@ -12608,14 +13097,14 @@
       </p:pic>
       <p:sp>
         <p:nvSpPr>
-          <p:cNvPr id="4" name="Text 1"/>
+          <p:cNvPr id="5" name="Text 2"/>
           <p:cNvSpPr/>
           <p:nvPr/>
         </p:nvSpPr>
         <p:spPr>
           <a:xfrm>
-            <a:off x="5349240" y="1005840"/>
-            <a:ext cx="6522415" cy="731520"/>
+            <a:off x="457200" y="6089904"/>
+            <a:ext cx="11277295" cy="347472"/>
           </a:xfrm>
           <a:prstGeom prst="rect">
             <a:avLst/>
@@ -12624,68 +13113,24 @@
           <a:ln/>
         </p:spPr>
         <p:txBody>
-          <a:bodyPr wrap="square" lIns="0" tIns="0" rIns="0" bIns="0" rtlCol="0" anchor="ctr">
-            <a:normAutofit/>
-          </a:bodyPr>
+          <a:bodyPr wrap="square" lIns="0" tIns="0" rIns="0" bIns="0" rtlCol="0" anchor="ctr"/>
           <a:lstStyle/>
           <a:p>
             <a:pPr algn="ctr" indent="0" marL="0">
               <a:buNone/>
             </a:pPr>
             <a:r>
-              <a:rPr lang="en-US" sz="3600" b="1" dirty="0">
-                <a:solidFill>
-                  <a:srgbClr val="990011"/>
+              <a:rPr lang="en-US" sz="1800" i="1" dirty="0">
+                <a:solidFill>
+                  <a:srgbClr val="555555"/>
                 </a:solidFill>
                 <a:latin typeface="Times New Roman" pitchFamily="34" charset="0"/>
                 <a:ea typeface="Times New Roman" pitchFamily="34" charset="-122"/>
                 <a:cs typeface="Times New Roman" pitchFamily="34" charset="-120"/>
               </a:rPr>
-              <a:t>Activity 5: Answer</a:t>
-            </a:r>
-            <a:endParaRPr lang="en-US" sz="3600" dirty="0"/>
-          </a:p>
-        </p:txBody>
-      </p:sp>
-      <p:sp>
-        <p:nvSpPr>
-          <p:cNvPr id="5" name="Text 2"/>
-          <p:cNvSpPr/>
-          <p:nvPr/>
-        </p:nvSpPr>
-        <p:spPr>
-          <a:xfrm>
-            <a:off x="5349240" y="1783080"/>
-            <a:ext cx="6522415" cy="4663440"/>
-          </a:xfrm>
-          <a:prstGeom prst="rect">
-            <a:avLst/>
-          </a:prstGeom>
-          <a:noFill/>
-          <a:ln/>
-        </p:spPr>
-        <p:txBody>
-          <a:bodyPr wrap="square" lIns="0" tIns="0" rIns="0" bIns="0" rtlCol="0" anchor="t"/>
-          <a:lstStyle/>
-          <a:p>
-            <a:pPr algn="l" indent="0" marL="0">
-              <a:spcAft>
-                <a:spcPts val="800"/>
-              </a:spcAft>
-              <a:buNone/>
-            </a:pPr>
-            <a:r>
-              <a:rPr lang="en-US" sz="4000" dirty="0">
-                <a:solidFill>
-                  <a:srgbClr val="111111"/>
-                </a:solidFill>
-                <a:latin typeface="Times New Roman" pitchFamily="34" charset="0"/>
-                <a:ea typeface="Times New Roman" pitchFamily="34" charset="-122"/>
-                <a:cs typeface="Times New Roman" pitchFamily="34" charset="-120"/>
-              </a:rPr>
-              <a:t>It helps farmers to choose seasons and crops and helps people to find their way with maps (also to protect the environment and plan towns).</a:t>
-            </a:r>
-            <a:endParaRPr lang="en-US" sz="4000" dirty="0"/>
+              <a:t>A cotton farm in the North.</a:t>
+            </a:r>
+            <a:endParaRPr lang="en-US" sz="1800" dirty="0"/>
           </a:p>
         </p:txBody>
       </p:sp>
@@ -12795,7 +13240,7 @@
                 <a:ea typeface="Calibri" pitchFamily="34" charset="-122"/>
                 <a:cs typeface="Calibri" pitchFamily="34" charset="-120"/>
               </a:rPr>
-              <a:t>BOARD SUMMARY</a:t>
+              <a:t>4. IMPORTANCE OF GEOGRAPHY</a:t>
             </a:r>
             <a:endParaRPr lang="en-US" sz="1400" dirty="0"/>
           </a:p>
@@ -12860,7 +13305,7 @@
                 <a:ea typeface="Times New Roman" pitchFamily="34" charset="-122"/>
                 <a:cs typeface="Times New Roman" pitchFamily="34" charset="-120"/>
               </a:rPr>
-              <a:t>Board Summary</a:t>
+              <a:t>Activity 5: Question</a:t>
             </a:r>
             <a:endParaRPr lang="en-US" sz="3600" dirty="0"/>
           </a:p>
@@ -12894,7 +13339,7 @@
               <a:buNone/>
             </a:pPr>
             <a:r>
-              <a:rPr lang="en-US" sz="4000" b="1" dirty="0">
+              <a:rPr lang="en-US" sz="4000" dirty="0">
                 <a:solidFill>
                   <a:srgbClr val="111111"/>
                 </a:solidFill>
@@ -12902,47 +13347,7 @@
                 <a:ea typeface="Times New Roman" pitchFamily="34" charset="-122"/>
                 <a:cs typeface="Times New Roman" pitchFamily="34" charset="-120"/>
               </a:rPr>
-              <a:t>Topic: The Earth in the Universe</a:t>
-            </a:r>
-            <a:endParaRPr lang="en-US" sz="4000" dirty="0"/>
-          </a:p>
-          <a:p>
-            <a:pPr algn="l" indent="0" marL="0">
-              <a:spcAft>
-                <a:spcPts val="800"/>
-              </a:spcAft>
-              <a:buNone/>
-            </a:pPr>
-            <a:r>
-              <a:rPr lang="en-US" sz="4000" b="1" dirty="0">
-                <a:solidFill>
-                  <a:srgbClr val="111111"/>
-                </a:solidFill>
-                <a:latin typeface="Times New Roman" pitchFamily="34" charset="0"/>
-                <a:ea typeface="Times New Roman" pitchFamily="34" charset="-122"/>
-                <a:cs typeface="Times New Roman" pitchFamily="34" charset="-120"/>
-              </a:rPr>
-              <a:t>Sub-topic: Introduction to Geography</a:t>
-            </a:r>
-            <a:endParaRPr lang="en-US" sz="4000" dirty="0"/>
-          </a:p>
-          <a:p>
-            <a:pPr algn="l" indent="0" marL="0">
-              <a:spcAft>
-                <a:spcPts val="800"/>
-              </a:spcAft>
-              <a:buNone/>
-            </a:pPr>
-            <a:r>
-              <a:rPr lang="en-US" sz="4000" b="1" dirty="0">
-                <a:solidFill>
-                  <a:srgbClr val="990011"/>
-                </a:solidFill>
-                <a:latin typeface="Times New Roman" pitchFamily="34" charset="0"/>
-                <a:ea typeface="Times New Roman" pitchFamily="34" charset="-122"/>
-                <a:cs typeface="Times New Roman" pitchFamily="34" charset="-120"/>
-              </a:rPr>
-              <a:t>Lesson 1: Geography: Meaning, Branches, Methods and Importance</a:t>
+              <a:t>How can geography help this farmer?</a:t>
             </a:r>
             <a:endParaRPr lang="en-US" sz="4000" dirty="0"/>
           </a:p>
@@ -13054,7 +13459,7 @@
                 <a:ea typeface="Calibri" pitchFamily="34" charset="-122"/>
                 <a:cs typeface="Calibri" pitchFamily="34" charset="-120"/>
               </a:rPr>
-              <a:t>BOARD SUMMARY</a:t>
+              <a:t>4. IMPORTANCE OF GEOGRAPHY</a:t>
             </a:r>
             <a:endParaRPr lang="en-US" sz="1400" dirty="0"/>
           </a:p>
@@ -13119,7 +13524,7 @@
                 <a:ea typeface="Times New Roman" pitchFamily="34" charset="-122"/>
                 <a:cs typeface="Times New Roman" pitchFamily="34" charset="-120"/>
               </a:rPr>
-              <a:t>1. Meaning of Geography</a:t>
+              <a:t>Activity 5: Answer</a:t>
             </a:r>
             <a:endParaRPr lang="en-US" sz="3600" dirty="0"/>
           </a:p>
@@ -13153,7 +13558,7 @@
               <a:buNone/>
             </a:pPr>
             <a:r>
-              <a:rPr lang="en-US" sz="4000" i="1" dirty="0">
+              <a:rPr lang="en-US" sz="4000" dirty="0">
                 <a:solidFill>
                   <a:srgbClr val="111111"/>
                 </a:solidFill>
@@ -13161,44 +13566,7 @@
                 <a:ea typeface="Times New Roman" pitchFamily="34" charset="-122"/>
                 <a:cs typeface="Times New Roman" pitchFamily="34" charset="-120"/>
               </a:rPr>
-              <a:t>Geography is defined as follows:</a:t>
-            </a:r>
-            <a:endParaRPr lang="en-US" sz="4000" dirty="0"/>
-          </a:p>
-          <a:p>
-            <a:pPr algn="l" indent="0" marL="0">
-              <a:spcAft>
-                <a:spcPts val="800"/>
-              </a:spcAft>
-              <a:buNone/>
-            </a:pPr>
-            <a:r>
-              <a:rPr lang="en-US" sz="4000" b="1" dirty="0">
-                <a:solidFill>
-                  <a:srgbClr val="111111"/>
-                </a:solidFill>
-                <a:latin typeface="Times New Roman" pitchFamily="34" charset="0"/>
-                <a:ea typeface="Times New Roman" pitchFamily="34" charset="-122"/>
-                <a:cs typeface="Times New Roman" pitchFamily="34" charset="-120"/>
-              </a:rPr>
-              <a:t>Geography: </a:t>
-            </a:r>
-            <a:pPr algn="l" indent="0" marL="0">
-              <a:spcAft>
-                <a:spcPts val="800"/>
-              </a:spcAft>
-              <a:buNone/>
-            </a:pPr>
-            <a:r>
-              <a:rPr lang="en-US" sz="4000" dirty="0">
-                <a:solidFill>
-                  <a:srgbClr val="111111"/>
-                </a:solidFill>
-                <a:latin typeface="Times New Roman" pitchFamily="34" charset="0"/>
-                <a:ea typeface="Times New Roman" pitchFamily="34" charset="-122"/>
-                <a:cs typeface="Times New Roman" pitchFamily="34" charset="-120"/>
-              </a:rPr>
-              <a:t>It is the study of the Earth, its physical features and the activities of the people who live on it.</a:t>
+              <a:t>It helps him to know the seasons, the rainfall and the soils, so that he chooses the right crops and the right time to plant.</a:t>
             </a:r>
             <a:endParaRPr lang="en-US" sz="4000" dirty="0"/>
           </a:p>
@@ -13333,7 +13701,7 @@
         <p:spPr>
           <a:xfrm>
             <a:off x="0" y="658368"/>
-            <a:ext cx="2468880" cy="5833872"/>
+            <a:ext cx="5120640" cy="5833872"/>
           </a:xfrm>
           <a:prstGeom prst="rect">
             <a:avLst/>
@@ -13348,8 +13716,8 @@
         </p:nvSpPr>
         <p:spPr>
           <a:xfrm>
-            <a:off x="2697480" y="1005840"/>
-            <a:ext cx="9174175" cy="731520"/>
+            <a:off x="5349240" y="1005840"/>
+            <a:ext cx="6522415" cy="731520"/>
           </a:xfrm>
           <a:prstGeom prst="rect">
             <a:avLst/>
@@ -13375,7 +13743,7 @@
                 <a:ea typeface="Times New Roman" pitchFamily="34" charset="-122"/>
                 <a:cs typeface="Times New Roman" pitchFamily="34" charset="-120"/>
               </a:rPr>
-              <a:t>2. Branches of Geography</a:t>
+              <a:t>Board Summary</a:t>
             </a:r>
             <a:endParaRPr lang="en-US" sz="3600" dirty="0"/>
           </a:p>
@@ -13389,8 +13757,8 @@
         </p:nvSpPr>
         <p:spPr>
           <a:xfrm>
-            <a:off x="2697480" y="1783080"/>
-            <a:ext cx="9174175" cy="4663440"/>
+            <a:off x="5349240" y="1783080"/>
+            <a:ext cx="6522415" cy="4663440"/>
           </a:xfrm>
           <a:prstGeom prst="rect">
             <a:avLst/>
@@ -13409,7 +13777,7 @@
               <a:buNone/>
             </a:pPr>
             <a:r>
-              <a:rPr lang="en-US" sz="4000" i="1" dirty="0">
+              <a:rPr lang="en-US" sz="4000" b="1" dirty="0">
                 <a:solidFill>
                   <a:srgbClr val="111111"/>
                 </a:solidFill>
@@ -13417,7 +13785,7 @@
                 <a:ea typeface="Times New Roman" pitchFamily="34" charset="-122"/>
                 <a:cs typeface="Times New Roman" pitchFamily="34" charset="-120"/>
               </a:rPr>
-              <a:t>Geography has the following branches:</a:t>
+              <a:t>Topic: The Earth in the Universe</a:t>
             </a:r>
             <a:endParaRPr lang="en-US" sz="4000" dirty="0"/>
           </a:p>
@@ -13437,8 +13805,11 @@
                 <a:ea typeface="Times New Roman" pitchFamily="34" charset="-122"/>
                 <a:cs typeface="Times New Roman" pitchFamily="34" charset="-120"/>
               </a:rPr>
-              <a:t>Physical geography: </a:t>
-            </a:r>
+              <a:t>Sub-topic: Introduction to Geography</a:t>
+            </a:r>
+            <a:endParaRPr lang="en-US" sz="4000" dirty="0"/>
+          </a:p>
+          <a:p>
             <a:pPr algn="l" indent="0" marL="0">
               <a:spcAft>
                 <a:spcPts val="800"/>
@@ -13446,52 +13817,15 @@
               <a:buNone/>
             </a:pPr>
             <a:r>
-              <a:rPr lang="en-US" sz="4000" dirty="0">
-                <a:solidFill>
-                  <a:srgbClr val="111111"/>
+              <a:rPr lang="en-US" sz="4000" b="1" dirty="0">
+                <a:solidFill>
+                  <a:srgbClr val="990011"/>
                 </a:solidFill>
                 <a:latin typeface="Times New Roman" pitchFamily="34" charset="0"/>
                 <a:ea typeface="Times New Roman" pitchFamily="34" charset="-122"/>
                 <a:cs typeface="Times New Roman" pitchFamily="34" charset="-120"/>
               </a:rPr>
-              <a:t>It studies natural features such as relief, climate, rivers, soils and vegetation.</a:t>
-            </a:r>
-            <a:endParaRPr lang="en-US" sz="4000" dirty="0"/>
-          </a:p>
-          <a:p>
-            <a:pPr algn="l" indent="0" marL="0">
-              <a:spcAft>
-                <a:spcPts val="800"/>
-              </a:spcAft>
-              <a:buNone/>
-            </a:pPr>
-            <a:r>
-              <a:rPr lang="en-US" sz="4000" b="1" dirty="0">
-                <a:solidFill>
-                  <a:srgbClr val="111111"/>
-                </a:solidFill>
-                <a:latin typeface="Times New Roman" pitchFamily="34" charset="0"/>
-                <a:ea typeface="Times New Roman" pitchFamily="34" charset="-122"/>
-                <a:cs typeface="Times New Roman" pitchFamily="34" charset="-120"/>
-              </a:rPr>
-              <a:t>Human geography: </a:t>
-            </a:r>
-            <a:pPr algn="l" indent="0" marL="0">
-              <a:spcAft>
-                <a:spcPts val="800"/>
-              </a:spcAft>
-              <a:buNone/>
-            </a:pPr>
-            <a:r>
-              <a:rPr lang="en-US" sz="4000" dirty="0">
-                <a:solidFill>
-                  <a:srgbClr val="111111"/>
-                </a:solidFill>
-                <a:latin typeface="Times New Roman" pitchFamily="34" charset="0"/>
-                <a:ea typeface="Times New Roman" pitchFamily="34" charset="-122"/>
-                <a:cs typeface="Times New Roman" pitchFamily="34" charset="-120"/>
-              </a:rPr>
-              <a:t>It studies people and their activities such as population, settlements, farming and trade.</a:t>
+              <a:t>Lesson 1: Geography: Meaning, Branches, Methods and Importance</a:t>
             </a:r>
             <a:endParaRPr lang="en-US" sz="4000" dirty="0"/>
           </a:p>
@@ -13668,7 +14002,7 @@
                 <a:ea typeface="Times New Roman" pitchFamily="34" charset="-122"/>
                 <a:cs typeface="Times New Roman" pitchFamily="34" charset="-120"/>
               </a:rPr>
-              <a:t>2. Branches of Geography (continued)</a:t>
+              <a:t>DEFINITIONS</a:t>
             </a:r>
             <a:endParaRPr lang="en-US" sz="3600" dirty="0"/>
           </a:p>
@@ -13702,7 +14036,7 @@
               <a:buNone/>
             </a:pPr>
             <a:r>
-              <a:rPr lang="en-US" sz="4000" b="1" dirty="0">
+              <a:rPr lang="en-US" sz="4000" i="1" dirty="0">
                 <a:solidFill>
                   <a:srgbClr val="111111"/>
                 </a:solidFill>
@@ -13710,8 +14044,11 @@
                 <a:ea typeface="Times New Roman" pitchFamily="34" charset="-122"/>
                 <a:cs typeface="Times New Roman" pitchFamily="34" charset="-120"/>
               </a:rPr>
-              <a:t>Practical geography: </a:t>
-            </a:r>
+              <a:t>The key terms of this lesson are defined as follows:</a:t>
+            </a:r>
+            <a:endParaRPr lang="en-US" sz="4000" dirty="0"/>
+          </a:p>
+          <a:p>
             <a:pPr algn="l" indent="0" marL="0">
               <a:spcAft>
                 <a:spcPts val="800"/>
@@ -13719,7 +14056,7 @@
               <a:buNone/>
             </a:pPr>
             <a:r>
-              <a:rPr lang="en-US" sz="4000" dirty="0">
+              <a:rPr lang="en-US" sz="4000" b="1" dirty="0">
                 <a:solidFill>
                   <a:srgbClr val="111111"/>
                 </a:solidFill>
@@ -13727,7 +14064,24 @@
                 <a:ea typeface="Times New Roman" pitchFamily="34" charset="-122"/>
                 <a:cs typeface="Times New Roman" pitchFamily="34" charset="-120"/>
               </a:rPr>
-              <a:t>It studies the tools of the geographer such as maps, graphs, statistics and fieldwork.</a:t>
+              <a:t>Geography: </a:t>
+            </a:r>
+            <a:pPr algn="l" indent="0" marL="0">
+              <a:spcAft>
+                <a:spcPts val="800"/>
+              </a:spcAft>
+              <a:buNone/>
+            </a:pPr>
+            <a:r>
+              <a:rPr lang="en-US" sz="4000" dirty="0">
+                <a:solidFill>
+                  <a:srgbClr val="111111"/>
+                </a:solidFill>
+                <a:latin typeface="Times New Roman" pitchFamily="34" charset="0"/>
+                <a:ea typeface="Times New Roman" pitchFamily="34" charset="-122"/>
+                <a:cs typeface="Times New Roman" pitchFamily="34" charset="-120"/>
+              </a:rPr>
+              <a:t>It is the study of the Earth, its physical features and the activities of the people who live on it.</a:t>
             </a:r>
             <a:endParaRPr lang="en-US" sz="4000" dirty="0"/>
           </a:p>
@@ -13845,48 +14199,9 @@
           </a:p>
         </p:txBody>
       </p:sp>
-      <p:sp>
-        <p:nvSpPr>
-          <p:cNvPr id="3" name="Text 1"/>
-          <p:cNvSpPr/>
-          <p:nvPr/>
-        </p:nvSpPr>
-        <p:spPr>
-          <a:xfrm>
-            <a:off x="457200" y="1005840"/>
-            <a:ext cx="11277295" cy="731520"/>
-          </a:xfrm>
-          <a:prstGeom prst="rect">
-            <a:avLst/>
-          </a:prstGeom>
-          <a:noFill/>
-          <a:ln/>
-        </p:spPr>
-        <p:txBody>
-          <a:bodyPr wrap="square" lIns="0" tIns="0" rIns="0" bIns="0" rtlCol="0" anchor="ctr"/>
-          <a:lstStyle/>
-          <a:p>
-            <a:pPr algn="ctr" indent="0" marL="0">
-              <a:buNone/>
-            </a:pPr>
-            <a:r>
-              <a:rPr lang="en-US" sz="3600" b="1" dirty="0">
-                <a:solidFill>
-                  <a:srgbClr val="990011"/>
-                </a:solidFill>
-                <a:latin typeface="Times New Roman" pitchFamily="34" charset="0"/>
-                <a:ea typeface="Times New Roman" pitchFamily="34" charset="-122"/>
-                <a:cs typeface="Times New Roman" pitchFamily="34" charset="-120"/>
-              </a:rPr>
-              <a:t>2. Branches of Geography</a:t>
-            </a:r>
-            <a:endParaRPr lang="en-US" sz="3600" dirty="0"/>
-          </a:p>
-        </p:txBody>
-      </p:sp>
       <p:pic>
         <p:nvPicPr>
-          <p:cNvPr id="4" name="Image 0" descr="/home/claude/f4/img/v2/geography_branches_big.png">    </p:cNvPr>
+          <p:cNvPr id="3" name="Image 0" descr="/home/claude/f4/img/minesec_sheet.png">    </p:cNvPr>
           <p:cNvPicPr>
             <a:picLocks noChangeAspect="1"/>
           </p:cNvPicPr>
@@ -13900,8 +14215,8 @@
         </p:blipFill>
         <p:spPr>
           <a:xfrm>
-            <a:off x="629930" y="1783080"/>
-            <a:ext cx="10931835" cy="4270248"/>
+            <a:off x="0" y="658368"/>
+            <a:ext cx="5120640" cy="5833872"/>
           </a:xfrm>
           <a:prstGeom prst="rect">
             <a:avLst/>
@@ -13910,14 +14225,14 @@
       </p:pic>
       <p:sp>
         <p:nvSpPr>
-          <p:cNvPr id="5" name="Text 2"/>
+          <p:cNvPr id="4" name="Text 1"/>
           <p:cNvSpPr/>
           <p:nvPr/>
         </p:nvSpPr>
         <p:spPr>
           <a:xfrm>
-            <a:off x="457200" y="6089904"/>
-            <a:ext cx="11277295" cy="347472"/>
+            <a:off x="5349240" y="1005840"/>
+            <a:ext cx="6522415" cy="731520"/>
           </a:xfrm>
           <a:prstGeom prst="rect">
             <a:avLst/>
@@ -13926,24 +14241,85 @@
           <a:ln/>
         </p:spPr>
         <p:txBody>
-          <a:bodyPr wrap="square" lIns="0" tIns="0" rIns="0" bIns="0" rtlCol="0" anchor="ctr"/>
+          <a:bodyPr wrap="square" lIns="0" tIns="0" rIns="0" bIns="0" rtlCol="0" anchor="ctr">
+            <a:normAutofit/>
+          </a:bodyPr>
           <a:lstStyle/>
           <a:p>
             <a:pPr algn="ctr" indent="0" marL="0">
               <a:buNone/>
             </a:pPr>
             <a:r>
-              <a:rPr lang="en-US" sz="1800" i="1" dirty="0">
-                <a:solidFill>
-                  <a:srgbClr val="555555"/>
+              <a:rPr lang="en-US" sz="3600" b="1" dirty="0">
+                <a:solidFill>
+                  <a:srgbClr val="990011"/>
                 </a:solidFill>
                 <a:latin typeface="Times New Roman" pitchFamily="34" charset="0"/>
                 <a:ea typeface="Times New Roman" pitchFamily="34" charset="-122"/>
                 <a:cs typeface="Times New Roman" pitchFamily="34" charset="-120"/>
               </a:rPr>
-              <a:t>Illustration: the branches of geography</a:t>
-            </a:r>
-            <a:endParaRPr lang="en-US" sz="1800" dirty="0"/>
+              <a:t>DEFINITIONS (continued)</a:t>
+            </a:r>
+            <a:endParaRPr lang="en-US" sz="3600" dirty="0"/>
+          </a:p>
+        </p:txBody>
+      </p:sp>
+      <p:sp>
+        <p:nvSpPr>
+          <p:cNvPr id="5" name="Text 2"/>
+          <p:cNvSpPr/>
+          <p:nvPr/>
+        </p:nvSpPr>
+        <p:spPr>
+          <a:xfrm>
+            <a:off x="5349240" y="1783080"/>
+            <a:ext cx="6522415" cy="4663440"/>
+          </a:xfrm>
+          <a:prstGeom prst="rect">
+            <a:avLst/>
+          </a:prstGeom>
+          <a:noFill/>
+          <a:ln/>
+        </p:spPr>
+        <p:txBody>
+          <a:bodyPr wrap="square" lIns="0" tIns="0" rIns="0" bIns="0" rtlCol="0" anchor="t"/>
+          <a:lstStyle/>
+          <a:p>
+            <a:pPr algn="l" indent="0" marL="0">
+              <a:spcAft>
+                <a:spcPts val="800"/>
+              </a:spcAft>
+              <a:buNone/>
+            </a:pPr>
+            <a:r>
+              <a:rPr lang="en-US" sz="4000" b="1" dirty="0">
+                <a:solidFill>
+                  <a:srgbClr val="111111"/>
+                </a:solidFill>
+                <a:latin typeface="Times New Roman" pitchFamily="34" charset="0"/>
+                <a:ea typeface="Times New Roman" pitchFamily="34" charset="-122"/>
+                <a:cs typeface="Times New Roman" pitchFamily="34" charset="-120"/>
+              </a:rPr>
+              <a:t>Branch of geography: </a:t>
+            </a:r>
+            <a:pPr algn="l" indent="0" marL="0">
+              <a:spcAft>
+                <a:spcPts val="800"/>
+              </a:spcAft>
+              <a:buNone/>
+            </a:pPr>
+            <a:r>
+              <a:rPr lang="en-US" sz="4000" dirty="0">
+                <a:solidFill>
+                  <a:srgbClr val="111111"/>
+                </a:solidFill>
+                <a:latin typeface="Times New Roman" pitchFamily="34" charset="0"/>
+                <a:ea typeface="Times New Roman" pitchFamily="34" charset="-122"/>
+                <a:cs typeface="Times New Roman" pitchFamily="34" charset="-120"/>
+              </a:rPr>
+              <a:t>It is a main part of geography that studies one group of subjects.</a:t>
+            </a:r>
+            <a:endParaRPr lang="en-US" sz="4000" dirty="0"/>
           </a:p>
         </p:txBody>
       </p:sp>
@@ -14059,9 +14435,129 @@
           </a:p>
         </p:txBody>
       </p:sp>
+      <p:sp>
+        <p:nvSpPr>
+          <p:cNvPr id="3" name="Text 1"/>
+          <p:cNvSpPr/>
+          <p:nvPr/>
+        </p:nvSpPr>
+        <p:spPr>
+          <a:xfrm>
+            <a:off x="365760" y="1005840"/>
+            <a:ext cx="11460175" cy="731520"/>
+          </a:xfrm>
+          <a:prstGeom prst="rect">
+            <a:avLst/>
+          </a:prstGeom>
+          <a:noFill/>
+          <a:ln/>
+        </p:spPr>
+        <p:txBody>
+          <a:bodyPr wrap="square" lIns="0" tIns="0" rIns="0" bIns="0" rtlCol="0" anchor="ctr">
+            <a:normAutofit/>
+          </a:bodyPr>
+          <a:lstStyle/>
+          <a:p>
+            <a:pPr algn="ctr" indent="0" marL="0">
+              <a:buNone/>
+            </a:pPr>
+            <a:r>
+              <a:rPr lang="en-US" sz="3600" b="1" dirty="0">
+                <a:solidFill>
+                  <a:srgbClr val="990011"/>
+                </a:solidFill>
+                <a:latin typeface="Times New Roman" pitchFamily="34" charset="0"/>
+                <a:ea typeface="Times New Roman" pitchFamily="34" charset="-122"/>
+                <a:cs typeface="Times New Roman" pitchFamily="34" charset="-120"/>
+              </a:rPr>
+              <a:t>1. Branches and Sub-branches of Geography</a:t>
+            </a:r>
+            <a:endParaRPr lang="en-US" sz="3600" dirty="0"/>
+          </a:p>
+        </p:txBody>
+      </p:sp>
+      <p:sp>
+        <p:nvSpPr>
+          <p:cNvPr id="4" name="Text 2"/>
+          <p:cNvSpPr/>
+          <p:nvPr/>
+        </p:nvSpPr>
+        <p:spPr>
+          <a:xfrm>
+            <a:off x="365760" y="1783080"/>
+            <a:ext cx="4846320" cy="4617720"/>
+          </a:xfrm>
+          <a:prstGeom prst="rect">
+            <a:avLst/>
+          </a:prstGeom>
+          <a:noFill/>
+          <a:ln/>
+        </p:spPr>
+        <p:txBody>
+          <a:bodyPr wrap="square" lIns="0" tIns="0" rIns="0" bIns="0" rtlCol="0" anchor="t"/>
+          <a:lstStyle/>
+          <a:p>
+            <a:pPr algn="l" indent="0" marL="0">
+              <a:spcAft>
+                <a:spcPts val="800"/>
+              </a:spcAft>
+              <a:buNone/>
+            </a:pPr>
+            <a:r>
+              <a:rPr lang="en-US" sz="2800" i="1" dirty="0">
+                <a:solidFill>
+                  <a:srgbClr val="111111"/>
+                </a:solidFill>
+                <a:latin typeface="Times New Roman" pitchFamily="34" charset="0"/>
+                <a:ea typeface="Times New Roman" pitchFamily="34" charset="-122"/>
+                <a:cs typeface="Times New Roman" pitchFamily="34" charset="-120"/>
+              </a:rPr>
+              <a:t>Geography has three main branches:</a:t>
+            </a:r>
+            <a:endParaRPr lang="en-US" sz="2800" dirty="0"/>
+          </a:p>
+          <a:p>
+            <a:pPr algn="l" indent="0" marL="0">
+              <a:spcAft>
+                <a:spcPts val="800"/>
+              </a:spcAft>
+              <a:buNone/>
+            </a:pPr>
+            <a:r>
+              <a:rPr lang="en-US" sz="2800" b="1" dirty="0">
+                <a:solidFill>
+                  <a:srgbClr val="111111"/>
+                </a:solidFill>
+                <a:latin typeface="Times New Roman" pitchFamily="34" charset="0"/>
+                <a:ea typeface="Times New Roman" pitchFamily="34" charset="-122"/>
+                <a:cs typeface="Times New Roman" pitchFamily="34" charset="-120"/>
+              </a:rPr>
+              <a:t>Physical geography: </a:t>
+            </a:r>
+            <a:pPr algn="l" indent="0" marL="0">
+              <a:spcAft>
+                <a:spcPts val="800"/>
+              </a:spcAft>
+              <a:buNone/>
+            </a:pPr>
+            <a:r>
+              <a:rPr lang="en-US" sz="2800" dirty="0">
+                <a:solidFill>
+                  <a:srgbClr val="111111"/>
+                </a:solidFill>
+                <a:latin typeface="Times New Roman" pitchFamily="34" charset="0"/>
+                <a:ea typeface="Times New Roman" pitchFamily="34" charset="-122"/>
+                <a:cs typeface="Times New Roman" pitchFamily="34" charset="-120"/>
+              </a:rPr>
+              <a:t>It studies natural features such as relief, climate, rivers, soils and vegetation. Its sub-branches include geomorphology, climatology, hydrology, pedology and biogeography.</a:t>
+            </a:r>
+            <a:endParaRPr lang="en-US" sz="2800" dirty="0"/>
+          </a:p>
+        </p:txBody>
+      </p:sp>
       <p:pic>
         <p:nvPicPr>
-          <p:cNvPr id="3" name="Image 0" descr="/home/claude/f4/img/minesec_sheet.png">    </p:cNvPr>
+          <p:cNvPr id="5" name="Image 0" descr="/home/claude/f4/img/v2/lsa_mtcameroon.jpg">    </p:cNvPr>
           <p:cNvPicPr>
             <a:picLocks noChangeAspect="1"/>
           </p:cNvPicPr>
@@ -14075,8 +14571,8 @@
         </p:blipFill>
         <p:spPr>
           <a:xfrm>
-            <a:off x="0" y="658368"/>
-            <a:ext cx="1463040" cy="5833872"/>
+            <a:off x="5349240" y="2071212"/>
+            <a:ext cx="6659575" cy="3693983"/>
           </a:xfrm>
           <a:prstGeom prst="rect">
             <a:avLst/>
@@ -14085,14 +14581,14 @@
       </p:pic>
       <p:sp>
         <p:nvSpPr>
-          <p:cNvPr id="4" name="Text 1"/>
+          <p:cNvPr id="6" name="Text 3"/>
           <p:cNvSpPr/>
           <p:nvPr/>
         </p:nvSpPr>
         <p:spPr>
           <a:xfrm>
-            <a:off x="1691640" y="1005840"/>
-            <a:ext cx="10180015" cy="731520"/>
+            <a:off x="5349240" y="6089904"/>
+            <a:ext cx="6659575" cy="347472"/>
           </a:xfrm>
           <a:prstGeom prst="rect">
             <a:avLst/>
@@ -14101,142 +14597,24 @@
           <a:ln/>
         </p:spPr>
         <p:txBody>
-          <a:bodyPr wrap="square" lIns="0" tIns="0" rIns="0" bIns="0" rtlCol="0" anchor="ctr">
-            <a:normAutofit/>
-          </a:bodyPr>
+          <a:bodyPr wrap="square" lIns="0" tIns="0" rIns="0" bIns="0" rtlCol="0" anchor="ctr"/>
           <a:lstStyle/>
           <a:p>
             <a:pPr algn="ctr" indent="0" marL="0">
               <a:buNone/>
             </a:pPr>
             <a:r>
-              <a:rPr lang="en-US" sz="3600" b="1" dirty="0">
-                <a:solidFill>
-                  <a:srgbClr val="990011"/>
+              <a:rPr lang="en-US" sz="1600" i="1" dirty="0">
+                <a:solidFill>
+                  <a:srgbClr val="555555"/>
                 </a:solidFill>
                 <a:latin typeface="Times New Roman" pitchFamily="34" charset="0"/>
                 <a:ea typeface="Times New Roman" pitchFamily="34" charset="-122"/>
                 <a:cs typeface="Times New Roman" pitchFamily="34" charset="-120"/>
               </a:rPr>
-              <a:t>3. Methods of Geography</a:t>
-            </a:r>
-            <a:endParaRPr lang="en-US" sz="3600" dirty="0"/>
-          </a:p>
-        </p:txBody>
-      </p:sp>
-      <p:sp>
-        <p:nvSpPr>
-          <p:cNvPr id="5" name="Text 2"/>
-          <p:cNvSpPr/>
-          <p:nvPr/>
-        </p:nvSpPr>
-        <p:spPr>
-          <a:xfrm>
-            <a:off x="1691640" y="1783080"/>
-            <a:ext cx="10180015" cy="4663440"/>
-          </a:xfrm>
-          <a:prstGeom prst="rect">
-            <a:avLst/>
-          </a:prstGeom>
-          <a:noFill/>
-          <a:ln/>
-        </p:spPr>
-        <p:txBody>
-          <a:bodyPr wrap="square" lIns="0" tIns="0" rIns="0" bIns="0" rtlCol="0" anchor="t"/>
-          <a:lstStyle/>
-          <a:p>
-            <a:pPr algn="l" indent="0" marL="0">
-              <a:spcAft>
-                <a:spcPts val="800"/>
-              </a:spcAft>
-              <a:buNone/>
-            </a:pPr>
-            <a:r>
-              <a:rPr lang="en-US" sz="4000" i="1" dirty="0">
-                <a:solidFill>
-                  <a:srgbClr val="111111"/>
-                </a:solidFill>
-                <a:latin typeface="Times New Roman" pitchFamily="34" charset="0"/>
-                <a:ea typeface="Times New Roman" pitchFamily="34" charset="-122"/>
-                <a:cs typeface="Times New Roman" pitchFamily="34" charset="-120"/>
-              </a:rPr>
-              <a:t>Geographers work with the following methods:</a:t>
-            </a:r>
-            <a:endParaRPr lang="en-US" sz="4000" dirty="0"/>
-          </a:p>
-          <a:p>
-            <a:pPr algn="l" indent="0" marL="0">
-              <a:spcAft>
-                <a:spcPts val="800"/>
-              </a:spcAft>
-              <a:buNone/>
-            </a:pPr>
-            <a:r>
-              <a:rPr lang="en-US" sz="4000" b="1" dirty="0">
-                <a:solidFill>
-                  <a:srgbClr val="111111"/>
-                </a:solidFill>
-                <a:latin typeface="Times New Roman" pitchFamily="34" charset="0"/>
-                <a:ea typeface="Times New Roman" pitchFamily="34" charset="-122"/>
-                <a:cs typeface="Times New Roman" pitchFamily="34" charset="-120"/>
-              </a:rPr>
-              <a:t>Observation and fieldwork: </a:t>
-            </a:r>
-            <a:pPr algn="l" indent="0" marL="0">
-              <a:spcAft>
-                <a:spcPts val="800"/>
-              </a:spcAft>
-              <a:buNone/>
-            </a:pPr>
-            <a:r>
-              <a:rPr lang="en-US" sz="4000" dirty="0">
-                <a:solidFill>
-                  <a:srgbClr val="111111"/>
-                </a:solidFill>
-                <a:latin typeface="Times New Roman" pitchFamily="34" charset="0"/>
-                <a:ea typeface="Times New Roman" pitchFamily="34" charset="-122"/>
-                <a:cs typeface="Times New Roman" pitchFamily="34" charset="-120"/>
-              </a:rPr>
-              <a:t>Geographers observe, measure and question people in the field.</a:t>
-            </a:r>
-            <a:endParaRPr lang="en-US" sz="4000" dirty="0"/>
-          </a:p>
-          <a:p>
-            <a:pPr algn="l" indent="0" marL="0">
-              <a:spcAft>
-                <a:spcPts val="800"/>
-              </a:spcAft>
-              <a:buNone/>
-            </a:pPr>
-            <a:r>
-              <a:rPr lang="en-US" sz="4000" b="1" dirty="0">
-                <a:solidFill>
-                  <a:srgbClr val="111111"/>
-                </a:solidFill>
-                <a:latin typeface="Times New Roman" pitchFamily="34" charset="0"/>
-                <a:ea typeface="Times New Roman" pitchFamily="34" charset="-122"/>
-                <a:cs typeface="Times New Roman" pitchFamily="34" charset="-120"/>
-              </a:rPr>
-              <a:t>Maps and photographs: </a:t>
-            </a:r>
-            <a:pPr algn="l" indent="0" marL="0">
-              <a:spcAft>
-                <a:spcPts val="800"/>
-              </a:spcAft>
-              <a:buNone/>
-            </a:pPr>
-            <a:r>
-              <a:rPr lang="en-US" sz="4000" dirty="0">
-                <a:solidFill>
-                  <a:srgbClr val="111111"/>
-                </a:solidFill>
-                <a:latin typeface="Times New Roman" pitchFamily="34" charset="0"/>
-                <a:ea typeface="Times New Roman" pitchFamily="34" charset="-122"/>
-                <a:cs typeface="Times New Roman" pitchFamily="34" charset="-120"/>
-              </a:rPr>
-              <a:t>Geographers use maps, photographs and satellite images to show places.</a:t>
-            </a:r>
-            <a:endParaRPr lang="en-US" sz="4000" dirty="0"/>
+              <a:t>Illustration: Mount Cameroon, a physical feature</a:t>
+            </a:r>
+            <a:endParaRPr lang="en-US" sz="1600" dirty="0"/>
           </a:p>
         </p:txBody>
       </p:sp>
@@ -14352,9 +14730,109 @@
           </a:p>
         </p:txBody>
       </p:sp>
+      <p:sp>
+        <p:nvSpPr>
+          <p:cNvPr id="3" name="Text 1"/>
+          <p:cNvSpPr/>
+          <p:nvPr/>
+        </p:nvSpPr>
+        <p:spPr>
+          <a:xfrm>
+            <a:off x="365760" y="1005840"/>
+            <a:ext cx="11460175" cy="731520"/>
+          </a:xfrm>
+          <a:prstGeom prst="rect">
+            <a:avLst/>
+          </a:prstGeom>
+          <a:noFill/>
+          <a:ln/>
+        </p:spPr>
+        <p:txBody>
+          <a:bodyPr wrap="square" lIns="0" tIns="0" rIns="0" bIns="0" rtlCol="0" anchor="ctr">
+            <a:normAutofit/>
+          </a:bodyPr>
+          <a:lstStyle/>
+          <a:p>
+            <a:pPr algn="ctr" indent="0" marL="0">
+              <a:buNone/>
+            </a:pPr>
+            <a:r>
+              <a:rPr lang="en-US" sz="3600" b="1" dirty="0">
+                <a:solidFill>
+                  <a:srgbClr val="990011"/>
+                </a:solidFill>
+                <a:latin typeface="Times New Roman" pitchFamily="34" charset="0"/>
+                <a:ea typeface="Times New Roman" pitchFamily="34" charset="-122"/>
+                <a:cs typeface="Times New Roman" pitchFamily="34" charset="-120"/>
+              </a:rPr>
+              <a:t>1. Branches and Sub-branches of Geography</a:t>
+            </a:r>
+            <a:endParaRPr lang="en-US" sz="3600" dirty="0"/>
+          </a:p>
+        </p:txBody>
+      </p:sp>
+      <p:sp>
+        <p:nvSpPr>
+          <p:cNvPr id="4" name="Text 2"/>
+          <p:cNvSpPr/>
+          <p:nvPr/>
+        </p:nvSpPr>
+        <p:spPr>
+          <a:xfrm>
+            <a:off x="365760" y="1783080"/>
+            <a:ext cx="4846320" cy="4617720"/>
+          </a:xfrm>
+          <a:prstGeom prst="rect">
+            <a:avLst/>
+          </a:prstGeom>
+          <a:noFill/>
+          <a:ln/>
+        </p:spPr>
+        <p:txBody>
+          <a:bodyPr wrap="square" lIns="0" tIns="0" rIns="0" bIns="0" rtlCol="0" anchor="t"/>
+          <a:lstStyle/>
+          <a:p>
+            <a:pPr algn="l" indent="0" marL="0">
+              <a:spcAft>
+                <a:spcPts val="800"/>
+              </a:spcAft>
+              <a:buNone/>
+            </a:pPr>
+            <a:r>
+              <a:rPr lang="en-US" sz="3600" b="1" dirty="0">
+                <a:solidFill>
+                  <a:srgbClr val="111111"/>
+                </a:solidFill>
+                <a:latin typeface="Times New Roman" pitchFamily="34" charset="0"/>
+                <a:ea typeface="Times New Roman" pitchFamily="34" charset="-122"/>
+                <a:cs typeface="Times New Roman" pitchFamily="34" charset="-120"/>
+              </a:rPr>
+              <a:t>Human geography: </a:t>
+            </a:r>
+            <a:pPr algn="l" indent="0" marL="0">
+              <a:spcAft>
+                <a:spcPts val="800"/>
+              </a:spcAft>
+              <a:buNone/>
+            </a:pPr>
+            <a:r>
+              <a:rPr lang="en-US" sz="3600" dirty="0">
+                <a:solidFill>
+                  <a:srgbClr val="111111"/>
+                </a:solidFill>
+                <a:latin typeface="Times New Roman" pitchFamily="34" charset="0"/>
+                <a:ea typeface="Times New Roman" pitchFamily="34" charset="-122"/>
+                <a:cs typeface="Times New Roman" pitchFamily="34" charset="-120"/>
+              </a:rPr>
+              <a:t>It studies people and their activities. Its sub-branches include population, settlement, economic and political geography.</a:t>
+            </a:r>
+            <a:endParaRPr lang="en-US" sz="3600" dirty="0"/>
+          </a:p>
+        </p:txBody>
+      </p:sp>
       <p:pic>
         <p:nvPicPr>
-          <p:cNvPr id="3" name="Image 0" descr="/home/claude/f4/img/minesec_sheet.png">    </p:cNvPr>
+          <p:cNvPr id="5" name="Image 0" descr="/home/claude/f4/img/v2/f2t_market.jpg">    </p:cNvPr>
           <p:cNvPicPr>
             <a:picLocks noChangeAspect="1"/>
           </p:cNvPicPr>
@@ -14368,8 +14846,8 @@
         </p:blipFill>
         <p:spPr>
           <a:xfrm>
-            <a:off x="0" y="658368"/>
-            <a:ext cx="5120640" cy="5833872"/>
+            <a:off x="5349240" y="2071212"/>
+            <a:ext cx="6659575" cy="3693983"/>
           </a:xfrm>
           <a:prstGeom prst="rect">
             <a:avLst/>
@@ -14378,14 +14856,14 @@
       </p:pic>
       <p:sp>
         <p:nvSpPr>
-          <p:cNvPr id="4" name="Text 1"/>
+          <p:cNvPr id="6" name="Text 3"/>
           <p:cNvSpPr/>
           <p:nvPr/>
         </p:nvSpPr>
         <p:spPr>
           <a:xfrm>
-            <a:off x="5349240" y="1005840"/>
-            <a:ext cx="6522415" cy="731520"/>
+            <a:off x="5349240" y="6089904"/>
+            <a:ext cx="6659575" cy="347472"/>
           </a:xfrm>
           <a:prstGeom prst="rect">
             <a:avLst/>
@@ -14394,85 +14872,24 @@
           <a:ln/>
         </p:spPr>
         <p:txBody>
-          <a:bodyPr wrap="square" lIns="0" tIns="0" rIns="0" bIns="0" rtlCol="0" anchor="ctr">
-            <a:normAutofit/>
-          </a:bodyPr>
+          <a:bodyPr wrap="square" lIns="0" tIns="0" rIns="0" bIns="0" rtlCol="0" anchor="ctr"/>
           <a:lstStyle/>
           <a:p>
             <a:pPr algn="ctr" indent="0" marL="0">
               <a:buNone/>
             </a:pPr>
             <a:r>
-              <a:rPr lang="en-US" sz="3600" b="1" dirty="0">
-                <a:solidFill>
-                  <a:srgbClr val="990011"/>
+              <a:rPr lang="en-US" sz="1600" i="1" dirty="0">
+                <a:solidFill>
+                  <a:srgbClr val="555555"/>
                 </a:solidFill>
                 <a:latin typeface="Times New Roman" pitchFamily="34" charset="0"/>
                 <a:ea typeface="Times New Roman" pitchFamily="34" charset="-122"/>
                 <a:cs typeface="Times New Roman" pitchFamily="34" charset="-120"/>
               </a:rPr>
-              <a:t>3. Methods of Geography (continued)</a:t>
-            </a:r>
-            <a:endParaRPr lang="en-US" sz="3600" dirty="0"/>
-          </a:p>
-        </p:txBody>
-      </p:sp>
-      <p:sp>
-        <p:nvSpPr>
-          <p:cNvPr id="5" name="Text 2"/>
-          <p:cNvSpPr/>
-          <p:nvPr/>
-        </p:nvSpPr>
-        <p:spPr>
-          <a:xfrm>
-            <a:off x="5349240" y="1783080"/>
-            <a:ext cx="6522415" cy="4663440"/>
-          </a:xfrm>
-          <a:prstGeom prst="rect">
-            <a:avLst/>
-          </a:prstGeom>
-          <a:noFill/>
-          <a:ln/>
-        </p:spPr>
-        <p:txBody>
-          <a:bodyPr wrap="square" lIns="0" tIns="0" rIns="0" bIns="0" rtlCol="0" anchor="t"/>
-          <a:lstStyle/>
-          <a:p>
-            <a:pPr algn="l" indent="0" marL="0">
-              <a:spcAft>
-                <a:spcPts val="800"/>
-              </a:spcAft>
-              <a:buNone/>
-            </a:pPr>
-            <a:r>
-              <a:rPr lang="en-US" sz="4000" b="1" dirty="0">
-                <a:solidFill>
-                  <a:srgbClr val="111111"/>
-                </a:solidFill>
-                <a:latin typeface="Times New Roman" pitchFamily="34" charset="0"/>
-                <a:ea typeface="Times New Roman" pitchFamily="34" charset="-122"/>
-                <a:cs typeface="Times New Roman" pitchFamily="34" charset="-120"/>
-              </a:rPr>
-              <a:t>Graphs and statistics: </a:t>
-            </a:r>
-            <a:pPr algn="l" indent="0" marL="0">
-              <a:spcAft>
-                <a:spcPts val="800"/>
-              </a:spcAft>
-              <a:buNone/>
-            </a:pPr>
-            <a:r>
-              <a:rPr lang="en-US" sz="4000" dirty="0">
-                <a:solidFill>
-                  <a:srgbClr val="111111"/>
-                </a:solidFill>
-                <a:latin typeface="Times New Roman" pitchFamily="34" charset="0"/>
-                <a:ea typeface="Times New Roman" pitchFamily="34" charset="-122"/>
-                <a:cs typeface="Times New Roman" pitchFamily="34" charset="-120"/>
-              </a:rPr>
-              <a:t>Geographers use numbers and graphs to compare places and changes.</a:t>
-            </a:r>
-            <a:endParaRPr lang="en-US" sz="4000" dirty="0"/>
+              <a:t>Illustration: a market, a human activity</a:t>
+            </a:r>
+            <a:endParaRPr lang="en-US" sz="1600" dirty="0"/>
           </a:p>
         </p:txBody>
       </p:sp>
@@ -14588,9 +15005,109 @@
           </a:p>
         </p:txBody>
       </p:sp>
+      <p:sp>
+        <p:nvSpPr>
+          <p:cNvPr id="3" name="Text 1"/>
+          <p:cNvSpPr/>
+          <p:nvPr/>
+        </p:nvSpPr>
+        <p:spPr>
+          <a:xfrm>
+            <a:off x="365760" y="1005840"/>
+            <a:ext cx="11460175" cy="731520"/>
+          </a:xfrm>
+          <a:prstGeom prst="rect">
+            <a:avLst/>
+          </a:prstGeom>
+          <a:noFill/>
+          <a:ln/>
+        </p:spPr>
+        <p:txBody>
+          <a:bodyPr wrap="square" lIns="0" tIns="0" rIns="0" bIns="0" rtlCol="0" anchor="ctr">
+            <a:normAutofit/>
+          </a:bodyPr>
+          <a:lstStyle/>
+          <a:p>
+            <a:pPr algn="ctr" indent="0" marL="0">
+              <a:buNone/>
+            </a:pPr>
+            <a:r>
+              <a:rPr lang="en-US" sz="3600" b="1" dirty="0">
+                <a:solidFill>
+                  <a:srgbClr val="990011"/>
+                </a:solidFill>
+                <a:latin typeface="Times New Roman" pitchFamily="34" charset="0"/>
+                <a:ea typeface="Times New Roman" pitchFamily="34" charset="-122"/>
+                <a:cs typeface="Times New Roman" pitchFamily="34" charset="-120"/>
+              </a:rPr>
+              <a:t>1. Branches and Sub-branches of Geography</a:t>
+            </a:r>
+            <a:endParaRPr lang="en-US" sz="3600" dirty="0"/>
+          </a:p>
+        </p:txBody>
+      </p:sp>
+      <p:sp>
+        <p:nvSpPr>
+          <p:cNvPr id="4" name="Text 2"/>
+          <p:cNvSpPr/>
+          <p:nvPr/>
+        </p:nvSpPr>
+        <p:spPr>
+          <a:xfrm>
+            <a:off x="365760" y="1783080"/>
+            <a:ext cx="4846320" cy="4617720"/>
+          </a:xfrm>
+          <a:prstGeom prst="rect">
+            <a:avLst/>
+          </a:prstGeom>
+          <a:noFill/>
+          <a:ln/>
+        </p:spPr>
+        <p:txBody>
+          <a:bodyPr wrap="square" lIns="0" tIns="0" rIns="0" bIns="0" rtlCol="0" anchor="t"/>
+          <a:lstStyle/>
+          <a:p>
+            <a:pPr algn="l" indent="0" marL="0">
+              <a:spcAft>
+                <a:spcPts val="800"/>
+              </a:spcAft>
+              <a:buNone/>
+            </a:pPr>
+            <a:r>
+              <a:rPr lang="en-US" sz="3600" b="1" dirty="0">
+                <a:solidFill>
+                  <a:srgbClr val="111111"/>
+                </a:solidFill>
+                <a:latin typeface="Times New Roman" pitchFamily="34" charset="0"/>
+                <a:ea typeface="Times New Roman" pitchFamily="34" charset="-122"/>
+                <a:cs typeface="Times New Roman" pitchFamily="34" charset="-120"/>
+              </a:rPr>
+              <a:t>Practical geography: </a:t>
+            </a:r>
+            <a:pPr algn="l" indent="0" marL="0">
+              <a:spcAft>
+                <a:spcPts val="800"/>
+              </a:spcAft>
+              <a:buNone/>
+            </a:pPr>
+            <a:r>
+              <a:rPr lang="en-US" sz="3600" dirty="0">
+                <a:solidFill>
+                  <a:srgbClr val="111111"/>
+                </a:solidFill>
+                <a:latin typeface="Times New Roman" pitchFamily="34" charset="0"/>
+                <a:ea typeface="Times New Roman" pitchFamily="34" charset="-122"/>
+                <a:cs typeface="Times New Roman" pitchFamily="34" charset="-120"/>
+              </a:rPr>
+              <a:t>It studies the tools of the geographer. Its sub-branches include map reading, statistics, fieldwork and remote sensing.</a:t>
+            </a:r>
+            <a:endParaRPr lang="en-US" sz="3600" dirty="0"/>
+          </a:p>
+        </p:txBody>
+      </p:sp>
       <p:pic>
         <p:nvPicPr>
-          <p:cNvPr id="3" name="Image 0" descr="/home/claude/f4/img/minesec_sheet.png">    </p:cNvPr>
+          <p:cNvPr id="5" name="Image 0" descr="/home/claude/f4/img/v2/usa_topomap.jpg">    </p:cNvPr>
           <p:cNvPicPr>
             <a:picLocks noChangeAspect="1"/>
           </p:cNvPicPr>
@@ -14604,8 +15121,8 @@
         </p:blipFill>
         <p:spPr>
           <a:xfrm>
-            <a:off x="0" y="658368"/>
-            <a:ext cx="2468880" cy="5833872"/>
+            <a:off x="5349240" y="2071212"/>
+            <a:ext cx="6659575" cy="3693983"/>
           </a:xfrm>
           <a:prstGeom prst="rect">
             <a:avLst/>
@@ -14614,14 +15131,14 @@
       </p:pic>
       <p:sp>
         <p:nvSpPr>
-          <p:cNvPr id="4" name="Text 1"/>
+          <p:cNvPr id="6" name="Text 3"/>
           <p:cNvSpPr/>
           <p:nvPr/>
         </p:nvSpPr>
         <p:spPr>
           <a:xfrm>
-            <a:off x="2697480" y="1005840"/>
-            <a:ext cx="9174175" cy="731520"/>
+            <a:off x="5349240" y="6089904"/>
+            <a:ext cx="6659575" cy="347472"/>
           </a:xfrm>
           <a:prstGeom prst="rect">
             <a:avLst/>
@@ -14630,142 +15147,24 @@
           <a:ln/>
         </p:spPr>
         <p:txBody>
-          <a:bodyPr wrap="square" lIns="0" tIns="0" rIns="0" bIns="0" rtlCol="0" anchor="ctr">
-            <a:normAutofit/>
-          </a:bodyPr>
+          <a:bodyPr wrap="square" lIns="0" tIns="0" rIns="0" bIns="0" rtlCol="0" anchor="ctr"/>
           <a:lstStyle/>
           <a:p>
             <a:pPr algn="ctr" indent="0" marL="0">
               <a:buNone/>
             </a:pPr>
             <a:r>
-              <a:rPr lang="en-US" sz="3600" b="1" dirty="0">
-                <a:solidFill>
-                  <a:srgbClr val="990011"/>
+              <a:rPr lang="en-US" sz="1600" i="1" dirty="0">
+                <a:solidFill>
+                  <a:srgbClr val="555555"/>
                 </a:solidFill>
                 <a:latin typeface="Times New Roman" pitchFamily="34" charset="0"/>
                 <a:ea typeface="Times New Roman" pitchFamily="34" charset="-122"/>
                 <a:cs typeface="Times New Roman" pitchFamily="34" charset="-120"/>
               </a:rPr>
-              <a:t>4. Importance of Geography</a:t>
-            </a:r>
-            <a:endParaRPr lang="en-US" sz="3600" dirty="0"/>
-          </a:p>
-        </p:txBody>
-      </p:sp>
-      <p:sp>
-        <p:nvSpPr>
-          <p:cNvPr id="5" name="Text 2"/>
-          <p:cNvSpPr/>
-          <p:nvPr/>
-        </p:nvSpPr>
-        <p:spPr>
-          <a:xfrm>
-            <a:off x="2697480" y="1783080"/>
-            <a:ext cx="9174175" cy="4663440"/>
-          </a:xfrm>
-          <a:prstGeom prst="rect">
-            <a:avLst/>
-          </a:prstGeom>
-          <a:noFill/>
-          <a:ln/>
-        </p:spPr>
-        <p:txBody>
-          <a:bodyPr wrap="square" lIns="0" tIns="0" rIns="0" bIns="0" rtlCol="0" anchor="t"/>
-          <a:lstStyle/>
-          <a:p>
-            <a:pPr algn="l" indent="0" marL="0">
-              <a:spcAft>
-                <a:spcPts val="800"/>
-              </a:spcAft>
-              <a:buNone/>
-            </a:pPr>
-            <a:r>
-              <a:rPr lang="en-US" sz="4000" i="1" dirty="0">
-                <a:solidFill>
-                  <a:srgbClr val="111111"/>
-                </a:solidFill>
-                <a:latin typeface="Times New Roman" pitchFamily="34" charset="0"/>
-                <a:ea typeface="Times New Roman" pitchFamily="34" charset="-122"/>
-                <a:cs typeface="Times New Roman" pitchFamily="34" charset="-120"/>
-              </a:rPr>
-              <a:t>Geography is important for the following reasons:</a:t>
-            </a:r>
-            <a:endParaRPr lang="en-US" sz="4000" dirty="0"/>
-          </a:p>
-          <a:p>
-            <a:pPr algn="l" indent="0" marL="0">
-              <a:spcAft>
-                <a:spcPts val="800"/>
-              </a:spcAft>
-              <a:buNone/>
-            </a:pPr>
-            <a:r>
-              <a:rPr lang="en-US" sz="4000" b="1" dirty="0">
-                <a:solidFill>
-                  <a:srgbClr val="111111"/>
-                </a:solidFill>
-                <a:latin typeface="Times New Roman" pitchFamily="34" charset="0"/>
-                <a:ea typeface="Times New Roman" pitchFamily="34" charset="-122"/>
-                <a:cs typeface="Times New Roman" pitchFamily="34" charset="-120"/>
-              </a:rPr>
-              <a:t>Daily life: </a:t>
-            </a:r>
-            <a:pPr algn="l" indent="0" marL="0">
-              <a:spcAft>
-                <a:spcPts val="800"/>
-              </a:spcAft>
-              <a:buNone/>
-            </a:pPr>
-            <a:r>
-              <a:rPr lang="en-US" sz="4000" dirty="0">
-                <a:solidFill>
-                  <a:srgbClr val="111111"/>
-                </a:solidFill>
-                <a:latin typeface="Times New Roman" pitchFamily="34" charset="0"/>
-                <a:ea typeface="Times New Roman" pitchFamily="34" charset="-122"/>
-                <a:cs typeface="Times New Roman" pitchFamily="34" charset="-120"/>
-              </a:rPr>
-              <a:t>It helps us to find places, read maps and understand the weather.</a:t>
-            </a:r>
-            <a:endParaRPr lang="en-US" sz="4000" dirty="0"/>
-          </a:p>
-          <a:p>
-            <a:pPr algn="l" indent="0" marL="0">
-              <a:spcAft>
-                <a:spcPts val="800"/>
-              </a:spcAft>
-              <a:buNone/>
-            </a:pPr>
-            <a:r>
-              <a:rPr lang="en-US" sz="4000" b="1" dirty="0">
-                <a:solidFill>
-                  <a:srgbClr val="111111"/>
-                </a:solidFill>
-                <a:latin typeface="Times New Roman" pitchFamily="34" charset="0"/>
-                <a:ea typeface="Times New Roman" pitchFamily="34" charset="-122"/>
-                <a:cs typeface="Times New Roman" pitchFamily="34" charset="-120"/>
-              </a:rPr>
-              <a:t>Work: </a:t>
-            </a:r>
-            <a:pPr algn="l" indent="0" marL="0">
-              <a:spcAft>
-                <a:spcPts val="800"/>
-              </a:spcAft>
-              <a:buNone/>
-            </a:pPr>
-            <a:r>
-              <a:rPr lang="en-US" sz="4000" dirty="0">
-                <a:solidFill>
-                  <a:srgbClr val="111111"/>
-                </a:solidFill>
-                <a:latin typeface="Times New Roman" pitchFamily="34" charset="0"/>
-                <a:ea typeface="Times New Roman" pitchFamily="34" charset="-122"/>
-                <a:cs typeface="Times New Roman" pitchFamily="34" charset="-120"/>
-              </a:rPr>
-              <a:t>It helps farmers, drivers, traders and planners in their work.</a:t>
-            </a:r>
-            <a:endParaRPr lang="en-US" sz="4000" dirty="0"/>
+              <a:t>Illustration: map reading in the field</a:t>
+            </a:r>
+            <a:endParaRPr lang="en-US" sz="1600" dirty="0"/>
           </a:p>
         </p:txBody>
       </p:sp>
@@ -15190,9 +15589,129 @@
           </a:p>
         </p:txBody>
       </p:sp>
+      <p:sp>
+        <p:nvSpPr>
+          <p:cNvPr id="3" name="Text 1"/>
+          <p:cNvSpPr/>
+          <p:nvPr/>
+        </p:nvSpPr>
+        <p:spPr>
+          <a:xfrm>
+            <a:off x="365760" y="1005840"/>
+            <a:ext cx="11460175" cy="731520"/>
+          </a:xfrm>
+          <a:prstGeom prst="rect">
+            <a:avLst/>
+          </a:prstGeom>
+          <a:noFill/>
+          <a:ln/>
+        </p:spPr>
+        <p:txBody>
+          <a:bodyPr wrap="square" lIns="0" tIns="0" rIns="0" bIns="0" rtlCol="0" anchor="ctr">
+            <a:normAutofit/>
+          </a:bodyPr>
+          <a:lstStyle/>
+          <a:p>
+            <a:pPr algn="ctr" indent="0" marL="0">
+              <a:buNone/>
+            </a:pPr>
+            <a:r>
+              <a:rPr lang="en-US" sz="3600" b="1" dirty="0">
+                <a:solidFill>
+                  <a:srgbClr val="990011"/>
+                </a:solidFill>
+                <a:latin typeface="Times New Roman" pitchFamily="34" charset="0"/>
+                <a:ea typeface="Times New Roman" pitchFamily="34" charset="-122"/>
+                <a:cs typeface="Times New Roman" pitchFamily="34" charset="-120"/>
+              </a:rPr>
+              <a:t>2. Methods of Geography</a:t>
+            </a:r>
+            <a:endParaRPr lang="en-US" sz="3600" dirty="0"/>
+          </a:p>
+        </p:txBody>
+      </p:sp>
+      <p:sp>
+        <p:nvSpPr>
+          <p:cNvPr id="4" name="Text 2"/>
+          <p:cNvSpPr/>
+          <p:nvPr/>
+        </p:nvSpPr>
+        <p:spPr>
+          <a:xfrm>
+            <a:off x="365760" y="1783080"/>
+            <a:ext cx="4846320" cy="4617720"/>
+          </a:xfrm>
+          <a:prstGeom prst="rect">
+            <a:avLst/>
+          </a:prstGeom>
+          <a:noFill/>
+          <a:ln/>
+        </p:spPr>
+        <p:txBody>
+          <a:bodyPr wrap="square" lIns="0" tIns="0" rIns="0" bIns="0" rtlCol="0" anchor="t"/>
+          <a:lstStyle/>
+          <a:p>
+            <a:pPr algn="l" indent="0" marL="0">
+              <a:spcAft>
+                <a:spcPts val="800"/>
+              </a:spcAft>
+              <a:buNone/>
+            </a:pPr>
+            <a:r>
+              <a:rPr lang="en-US" sz="3600" i="1" dirty="0">
+                <a:solidFill>
+                  <a:srgbClr val="111111"/>
+                </a:solidFill>
+                <a:latin typeface="Times New Roman" pitchFamily="34" charset="0"/>
+                <a:ea typeface="Times New Roman" pitchFamily="34" charset="-122"/>
+                <a:cs typeface="Times New Roman" pitchFamily="34" charset="-120"/>
+              </a:rPr>
+              <a:t>Geographers use the following methods:</a:t>
+            </a:r>
+            <a:endParaRPr lang="en-US" sz="3600" dirty="0"/>
+          </a:p>
+          <a:p>
+            <a:pPr algn="l" indent="0" marL="0">
+              <a:spcAft>
+                <a:spcPts val="800"/>
+              </a:spcAft>
+              <a:buNone/>
+            </a:pPr>
+            <a:r>
+              <a:rPr lang="en-US" sz="3600" b="1" dirty="0">
+                <a:solidFill>
+                  <a:srgbClr val="111111"/>
+                </a:solidFill>
+                <a:latin typeface="Times New Roman" pitchFamily="34" charset="0"/>
+                <a:ea typeface="Times New Roman" pitchFamily="34" charset="-122"/>
+                <a:cs typeface="Times New Roman" pitchFamily="34" charset="-120"/>
+              </a:rPr>
+              <a:t>Observation and fieldwork: </a:t>
+            </a:r>
+            <a:pPr algn="l" indent="0" marL="0">
+              <a:spcAft>
+                <a:spcPts val="800"/>
+              </a:spcAft>
+              <a:buNone/>
+            </a:pPr>
+            <a:r>
+              <a:rPr lang="en-US" sz="3600" dirty="0">
+                <a:solidFill>
+                  <a:srgbClr val="111111"/>
+                </a:solidFill>
+                <a:latin typeface="Times New Roman" pitchFamily="34" charset="0"/>
+                <a:ea typeface="Times New Roman" pitchFamily="34" charset="-122"/>
+                <a:cs typeface="Times New Roman" pitchFamily="34" charset="-120"/>
+              </a:rPr>
+              <a:t>Geographers go to the field to observe, measure and record what they see.</a:t>
+            </a:r>
+            <a:endParaRPr lang="en-US" sz="3600" dirty="0"/>
+          </a:p>
+        </p:txBody>
+      </p:sp>
       <p:pic>
         <p:nvPicPr>
-          <p:cNvPr id="3" name="Image 0" descr="/home/claude/f4/img/minesec_sheet.png">    </p:cNvPr>
+          <p:cNvPr id="5" name="Image 0" descr="/home/claude/f4/img/v2/fieldwork_steps_big.png">    </p:cNvPr>
           <p:cNvPicPr>
             <a:picLocks noChangeAspect="1"/>
           </p:cNvPicPr>
@@ -15206,8 +15725,8 @@
         </p:blipFill>
         <p:spPr>
           <a:xfrm>
-            <a:off x="0" y="658368"/>
-            <a:ext cx="5120640" cy="5833872"/>
+            <a:off x="5349240" y="2617506"/>
+            <a:ext cx="6659575" cy="2601397"/>
           </a:xfrm>
           <a:prstGeom prst="rect">
             <a:avLst/>
@@ -15216,14 +15735,14 @@
       </p:pic>
       <p:sp>
         <p:nvSpPr>
-          <p:cNvPr id="4" name="Text 1"/>
+          <p:cNvPr id="6" name="Text 3"/>
           <p:cNvSpPr/>
           <p:nvPr/>
         </p:nvSpPr>
         <p:spPr>
           <a:xfrm>
-            <a:off x="5349240" y="1005840"/>
-            <a:ext cx="6522415" cy="731520"/>
+            <a:off x="5349240" y="6089904"/>
+            <a:ext cx="6659575" cy="347472"/>
           </a:xfrm>
           <a:prstGeom prst="rect">
             <a:avLst/>
@@ -15232,85 +15751,24 @@
           <a:ln/>
         </p:spPr>
         <p:txBody>
-          <a:bodyPr wrap="square" lIns="0" tIns="0" rIns="0" bIns="0" rtlCol="0" anchor="ctr">
-            <a:normAutofit/>
-          </a:bodyPr>
+          <a:bodyPr wrap="square" lIns="0" tIns="0" rIns="0" bIns="0" rtlCol="0" anchor="ctr"/>
           <a:lstStyle/>
           <a:p>
             <a:pPr algn="ctr" indent="0" marL="0">
               <a:buNone/>
             </a:pPr>
             <a:r>
-              <a:rPr lang="en-US" sz="3600" b="1" dirty="0">
-                <a:solidFill>
-                  <a:srgbClr val="990011"/>
+              <a:rPr lang="en-US" sz="1600" i="1" dirty="0">
+                <a:solidFill>
+                  <a:srgbClr val="555555"/>
                 </a:solidFill>
                 <a:latin typeface="Times New Roman" pitchFamily="34" charset="0"/>
                 <a:ea typeface="Times New Roman" pitchFamily="34" charset="-122"/>
                 <a:cs typeface="Times New Roman" pitchFamily="34" charset="-120"/>
               </a:rPr>
-              <a:t>4. Importance of Geography (continued)</a:t>
-            </a:r>
-            <a:endParaRPr lang="en-US" sz="3600" dirty="0"/>
-          </a:p>
-        </p:txBody>
-      </p:sp>
-      <p:sp>
-        <p:nvSpPr>
-          <p:cNvPr id="5" name="Text 2"/>
-          <p:cNvSpPr/>
-          <p:nvPr/>
-        </p:nvSpPr>
-        <p:spPr>
-          <a:xfrm>
-            <a:off x="5349240" y="1783080"/>
-            <a:ext cx="6522415" cy="4663440"/>
-          </a:xfrm>
-          <a:prstGeom prst="rect">
-            <a:avLst/>
-          </a:prstGeom>
-          <a:noFill/>
-          <a:ln/>
-        </p:spPr>
-        <p:txBody>
-          <a:bodyPr wrap="square" lIns="0" tIns="0" rIns="0" bIns="0" rtlCol="0" anchor="t"/>
-          <a:lstStyle/>
-          <a:p>
-            <a:pPr algn="l" indent="0" marL="0">
-              <a:spcAft>
-                <a:spcPts val="800"/>
-              </a:spcAft>
-              <a:buNone/>
-            </a:pPr>
-            <a:r>
-              <a:rPr lang="en-US" sz="4000" b="1" dirty="0">
-                <a:solidFill>
-                  <a:srgbClr val="111111"/>
-                </a:solidFill>
-                <a:latin typeface="Times New Roman" pitchFamily="34" charset="0"/>
-                <a:ea typeface="Times New Roman" pitchFamily="34" charset="-122"/>
-                <a:cs typeface="Times New Roman" pitchFamily="34" charset="-120"/>
-              </a:rPr>
-              <a:t>Environment: </a:t>
-            </a:r>
-            <a:pPr algn="l" indent="0" marL="0">
-              <a:spcAft>
-                <a:spcPts val="800"/>
-              </a:spcAft>
-              <a:buNone/>
-            </a:pPr>
-            <a:r>
-              <a:rPr lang="en-US" sz="4000" dirty="0">
-                <a:solidFill>
-                  <a:srgbClr val="111111"/>
-                </a:solidFill>
-                <a:latin typeface="Times New Roman" pitchFamily="34" charset="0"/>
-                <a:ea typeface="Times New Roman" pitchFamily="34" charset="-122"/>
-                <a:cs typeface="Times New Roman" pitchFamily="34" charset="-120"/>
-              </a:rPr>
-              <a:t>It teaches us to protect the land, water and forests.</a:t>
-            </a:r>
-            <a:endParaRPr lang="en-US" sz="4000" dirty="0"/>
+              <a:t>Illustration: the steps of fieldwork</a:t>
+            </a:r>
+            <a:endParaRPr lang="en-US" sz="1600" dirty="0"/>
           </a:p>
         </p:txBody>
       </p:sp>
@@ -15420,15 +15878,115 @@
                 <a:ea typeface="Calibri" pitchFamily="34" charset="-122"/>
                 <a:cs typeface="Calibri" pitchFamily="34" charset="-120"/>
               </a:rPr>
-              <a:t>FORMATIVE EVALUATION</a:t>
+              <a:t>BOARD SUMMARY</a:t>
             </a:r>
             <a:endParaRPr lang="en-US" sz="1400" dirty="0"/>
+          </a:p>
+        </p:txBody>
+      </p:sp>
+      <p:sp>
+        <p:nvSpPr>
+          <p:cNvPr id="3" name="Text 1"/>
+          <p:cNvSpPr/>
+          <p:nvPr/>
+        </p:nvSpPr>
+        <p:spPr>
+          <a:xfrm>
+            <a:off x="365760" y="1005840"/>
+            <a:ext cx="11460175" cy="731520"/>
+          </a:xfrm>
+          <a:prstGeom prst="rect">
+            <a:avLst/>
+          </a:prstGeom>
+          <a:noFill/>
+          <a:ln/>
+        </p:spPr>
+        <p:txBody>
+          <a:bodyPr wrap="square" lIns="0" tIns="0" rIns="0" bIns="0" rtlCol="0" anchor="ctr">
+            <a:normAutofit/>
+          </a:bodyPr>
+          <a:lstStyle/>
+          <a:p>
+            <a:pPr algn="ctr" indent="0" marL="0">
+              <a:buNone/>
+            </a:pPr>
+            <a:r>
+              <a:rPr lang="en-US" sz="3600" b="1" dirty="0">
+                <a:solidFill>
+                  <a:srgbClr val="990011"/>
+                </a:solidFill>
+                <a:latin typeface="Times New Roman" pitchFamily="34" charset="0"/>
+                <a:ea typeface="Times New Roman" pitchFamily="34" charset="-122"/>
+                <a:cs typeface="Times New Roman" pitchFamily="34" charset="-120"/>
+              </a:rPr>
+              <a:t>2. Methods of Geography</a:t>
+            </a:r>
+            <a:endParaRPr lang="en-US" sz="3600" dirty="0"/>
+          </a:p>
+        </p:txBody>
+      </p:sp>
+      <p:sp>
+        <p:nvSpPr>
+          <p:cNvPr id="4" name="Text 2"/>
+          <p:cNvSpPr/>
+          <p:nvPr/>
+        </p:nvSpPr>
+        <p:spPr>
+          <a:xfrm>
+            <a:off x="365760" y="1783080"/>
+            <a:ext cx="4846320" cy="4617720"/>
+          </a:xfrm>
+          <a:prstGeom prst="rect">
+            <a:avLst/>
+          </a:prstGeom>
+          <a:noFill/>
+          <a:ln/>
+        </p:spPr>
+        <p:txBody>
+          <a:bodyPr wrap="square" lIns="0" tIns="0" rIns="0" bIns="0" rtlCol="0" anchor="t"/>
+          <a:lstStyle/>
+          <a:p>
+            <a:pPr algn="l" indent="0" marL="0">
+              <a:spcAft>
+                <a:spcPts val="800"/>
+              </a:spcAft>
+              <a:buNone/>
+            </a:pPr>
+            <a:r>
+              <a:rPr lang="en-US" sz="3600" b="1" dirty="0">
+                <a:solidFill>
+                  <a:srgbClr val="111111"/>
+                </a:solidFill>
+                <a:latin typeface="Times New Roman" pitchFamily="34" charset="0"/>
+                <a:ea typeface="Times New Roman" pitchFamily="34" charset="-122"/>
+                <a:cs typeface="Times New Roman" pitchFamily="34" charset="-120"/>
+              </a:rPr>
+              <a:t>Interviews and questionnaires: </a:t>
+            </a:r>
+            <a:pPr algn="l" indent="0" marL="0">
+              <a:spcAft>
+                <a:spcPts val="800"/>
+              </a:spcAft>
+              <a:buNone/>
+            </a:pPr>
+            <a:r>
+              <a:rPr lang="en-US" sz="3600" dirty="0">
+                <a:solidFill>
+                  <a:srgbClr val="111111"/>
+                </a:solidFill>
+                <a:latin typeface="Times New Roman" pitchFamily="34" charset="0"/>
+                <a:ea typeface="Times New Roman" pitchFamily="34" charset="-122"/>
+                <a:cs typeface="Times New Roman" pitchFamily="34" charset="-120"/>
+              </a:rPr>
+              <a:t>Geographers ask people questions to collect information on their lives and activities.</a:t>
+            </a:r>
+            <a:endParaRPr lang="en-US" sz="3600" dirty="0"/>
           </a:p>
         </p:txBody>
       </p:sp>
       <p:pic>
         <p:nvPicPr>
-          <p:cNvPr id="3" name="Image 0" descr="/home/claude/f4/img/minesec_sheet.png">    </p:cNvPr>
+          <p:cNvPr id="5" name="Image 0" descr="/home/claude/f4/img/v2/questionnaire_big.png">    </p:cNvPr>
           <p:cNvPicPr>
             <a:picLocks noChangeAspect="1"/>
           </p:cNvPicPr>
@@ -15442,8 +16000,8 @@
         </p:blipFill>
         <p:spPr>
           <a:xfrm>
-            <a:off x="0" y="658368"/>
-            <a:ext cx="5120640" cy="5833872"/>
+            <a:off x="5349240" y="2617506"/>
+            <a:ext cx="6659575" cy="2601397"/>
           </a:xfrm>
           <a:prstGeom prst="rect">
             <a:avLst/>
@@ -15452,14 +16010,14 @@
       </p:pic>
       <p:sp>
         <p:nvSpPr>
-          <p:cNvPr id="4" name="Text 1"/>
+          <p:cNvPr id="6" name="Text 3"/>
           <p:cNvSpPr/>
           <p:nvPr/>
         </p:nvSpPr>
         <p:spPr>
           <a:xfrm>
-            <a:off x="5349240" y="1005840"/>
-            <a:ext cx="6522415" cy="731520"/>
+            <a:off x="5349240" y="6089904"/>
+            <a:ext cx="6659575" cy="347472"/>
           </a:xfrm>
           <a:prstGeom prst="rect">
             <a:avLst/>
@@ -15468,68 +16026,24 @@
           <a:ln/>
         </p:spPr>
         <p:txBody>
-          <a:bodyPr wrap="square" lIns="0" tIns="0" rIns="0" bIns="0" rtlCol="0" anchor="ctr">
-            <a:normAutofit/>
-          </a:bodyPr>
+          <a:bodyPr wrap="square" lIns="0" tIns="0" rIns="0" bIns="0" rtlCol="0" anchor="ctr"/>
           <a:lstStyle/>
           <a:p>
             <a:pPr algn="ctr" indent="0" marL="0">
               <a:buNone/>
             </a:pPr>
             <a:r>
-              <a:rPr lang="en-US" sz="3600" b="1" dirty="0">
-                <a:solidFill>
-                  <a:srgbClr val="990011"/>
+              <a:rPr lang="en-US" sz="1600" i="1" dirty="0">
+                <a:solidFill>
+                  <a:srgbClr val="555555"/>
                 </a:solidFill>
                 <a:latin typeface="Times New Roman" pitchFamily="34" charset="0"/>
                 <a:ea typeface="Times New Roman" pitchFamily="34" charset="-122"/>
                 <a:cs typeface="Times New Roman" pitchFamily="34" charset="-120"/>
               </a:rPr>
-              <a:t>Evaluation 1</a:t>
-            </a:r>
-            <a:endParaRPr lang="en-US" sz="3600" dirty="0"/>
-          </a:p>
-        </p:txBody>
-      </p:sp>
-      <p:sp>
-        <p:nvSpPr>
-          <p:cNvPr id="5" name="Text 2"/>
-          <p:cNvSpPr/>
-          <p:nvPr/>
-        </p:nvSpPr>
-        <p:spPr>
-          <a:xfrm>
-            <a:off x="5349240" y="1783080"/>
-            <a:ext cx="6522415" cy="4663440"/>
-          </a:xfrm>
-          <a:prstGeom prst="rect">
-            <a:avLst/>
-          </a:prstGeom>
-          <a:noFill/>
-          <a:ln/>
-        </p:spPr>
-        <p:txBody>
-          <a:bodyPr wrap="square" lIns="0" tIns="0" rIns="0" bIns="0" rtlCol="0" anchor="t"/>
-          <a:lstStyle/>
-          <a:p>
-            <a:pPr algn="l" indent="0" marL="0">
-              <a:spcAft>
-                <a:spcPts val="800"/>
-              </a:spcAft>
-              <a:buNone/>
-            </a:pPr>
-            <a:r>
-              <a:rPr lang="en-US" sz="4000" dirty="0">
-                <a:solidFill>
-                  <a:srgbClr val="111111"/>
-                </a:solidFill>
-                <a:latin typeface="Times New Roman" pitchFamily="34" charset="0"/>
-                <a:ea typeface="Times New Roman" pitchFamily="34" charset="-122"/>
-                <a:cs typeface="Times New Roman" pitchFamily="34" charset="-120"/>
-              </a:rPr>
-              <a:t>Define geography.</a:t>
-            </a:r>
-            <a:endParaRPr lang="en-US" sz="4000" dirty="0"/>
+              <a:t>Illustration: a questionnaire</a:t>
+            </a:r>
+            <a:endParaRPr lang="en-US" sz="1600" dirty="0"/>
           </a:p>
         </p:txBody>
       </p:sp>
@@ -15639,15 +16153,115 @@
                 <a:ea typeface="Calibri" pitchFamily="34" charset="-122"/>
                 <a:cs typeface="Calibri" pitchFamily="34" charset="-120"/>
               </a:rPr>
-              <a:t>FORMATIVE EVALUATION</a:t>
+              <a:t>BOARD SUMMARY</a:t>
             </a:r>
             <a:endParaRPr lang="en-US" sz="1400" dirty="0"/>
+          </a:p>
+        </p:txBody>
+      </p:sp>
+      <p:sp>
+        <p:nvSpPr>
+          <p:cNvPr id="3" name="Text 1"/>
+          <p:cNvSpPr/>
+          <p:nvPr/>
+        </p:nvSpPr>
+        <p:spPr>
+          <a:xfrm>
+            <a:off x="365760" y="1005840"/>
+            <a:ext cx="11460175" cy="731520"/>
+          </a:xfrm>
+          <a:prstGeom prst="rect">
+            <a:avLst/>
+          </a:prstGeom>
+          <a:noFill/>
+          <a:ln/>
+        </p:spPr>
+        <p:txBody>
+          <a:bodyPr wrap="square" lIns="0" tIns="0" rIns="0" bIns="0" rtlCol="0" anchor="ctr">
+            <a:normAutofit/>
+          </a:bodyPr>
+          <a:lstStyle/>
+          <a:p>
+            <a:pPr algn="ctr" indent="0" marL="0">
+              <a:buNone/>
+            </a:pPr>
+            <a:r>
+              <a:rPr lang="en-US" sz="3600" b="1" dirty="0">
+                <a:solidFill>
+                  <a:srgbClr val="990011"/>
+                </a:solidFill>
+                <a:latin typeface="Times New Roman" pitchFamily="34" charset="0"/>
+                <a:ea typeface="Times New Roman" pitchFamily="34" charset="-122"/>
+                <a:cs typeface="Times New Roman" pitchFamily="34" charset="-120"/>
+              </a:rPr>
+              <a:t>2. Methods of Geography</a:t>
+            </a:r>
+            <a:endParaRPr lang="en-US" sz="3600" dirty="0"/>
+          </a:p>
+        </p:txBody>
+      </p:sp>
+      <p:sp>
+        <p:nvSpPr>
+          <p:cNvPr id="4" name="Text 2"/>
+          <p:cNvSpPr/>
+          <p:nvPr/>
+        </p:nvSpPr>
+        <p:spPr>
+          <a:xfrm>
+            <a:off x="365760" y="1783080"/>
+            <a:ext cx="4846320" cy="4617720"/>
+          </a:xfrm>
+          <a:prstGeom prst="rect">
+            <a:avLst/>
+          </a:prstGeom>
+          <a:noFill/>
+          <a:ln/>
+        </p:spPr>
+        <p:txBody>
+          <a:bodyPr wrap="square" lIns="0" tIns="0" rIns="0" bIns="0" rtlCol="0" anchor="t"/>
+          <a:lstStyle/>
+          <a:p>
+            <a:pPr algn="l" indent="0" marL="0">
+              <a:spcAft>
+                <a:spcPts val="800"/>
+              </a:spcAft>
+              <a:buNone/>
+            </a:pPr>
+            <a:r>
+              <a:rPr lang="en-US" sz="3600" b="1" dirty="0">
+                <a:solidFill>
+                  <a:srgbClr val="111111"/>
+                </a:solidFill>
+                <a:latin typeface="Times New Roman" pitchFamily="34" charset="0"/>
+                <a:ea typeface="Times New Roman" pitchFamily="34" charset="-122"/>
+                <a:cs typeface="Times New Roman" pitchFamily="34" charset="-120"/>
+              </a:rPr>
+              <a:t>Maps and photographs: </a:t>
+            </a:r>
+            <a:pPr algn="l" indent="0" marL="0">
+              <a:spcAft>
+                <a:spcPts val="800"/>
+              </a:spcAft>
+              <a:buNone/>
+            </a:pPr>
+            <a:r>
+              <a:rPr lang="en-US" sz="3600" dirty="0">
+                <a:solidFill>
+                  <a:srgbClr val="111111"/>
+                </a:solidFill>
+                <a:latin typeface="Times New Roman" pitchFamily="34" charset="0"/>
+                <a:ea typeface="Times New Roman" pitchFamily="34" charset="-122"/>
+                <a:cs typeface="Times New Roman" pitchFamily="34" charset="-120"/>
+              </a:rPr>
+              <a:t>Geographers use maps, photographs and satellite images to show and study places.</a:t>
+            </a:r>
+            <a:endParaRPr lang="en-US" sz="3600" dirty="0"/>
           </a:p>
         </p:txBody>
       </p:sp>
       <p:pic>
         <p:nvPicPr>
-          <p:cNvPr id="3" name="Image 0" descr="/home/claude/f4/img/minesec_sheet.png">    </p:cNvPr>
+          <p:cNvPr id="5" name="Image 0" descr="/home/claude/f4/img/v2/remote_sensing_big.png">    </p:cNvPr>
           <p:cNvPicPr>
             <a:picLocks noChangeAspect="1"/>
           </p:cNvPicPr>
@@ -15661,8 +16275,8 @@
         </p:blipFill>
         <p:spPr>
           <a:xfrm>
-            <a:off x="0" y="658368"/>
-            <a:ext cx="5120640" cy="5833872"/>
+            <a:off x="5349240" y="2617506"/>
+            <a:ext cx="6659575" cy="2601397"/>
           </a:xfrm>
           <a:prstGeom prst="rect">
             <a:avLst/>
@@ -15671,14 +16285,14 @@
       </p:pic>
       <p:sp>
         <p:nvSpPr>
-          <p:cNvPr id="4" name="Text 1"/>
+          <p:cNvPr id="6" name="Text 3"/>
           <p:cNvSpPr/>
           <p:nvPr/>
         </p:nvSpPr>
         <p:spPr>
           <a:xfrm>
-            <a:off x="5349240" y="1005840"/>
-            <a:ext cx="6522415" cy="731520"/>
+            <a:off x="5349240" y="6089904"/>
+            <a:ext cx="6659575" cy="347472"/>
           </a:xfrm>
           <a:prstGeom prst="rect">
             <a:avLst/>
@@ -15687,68 +16301,24 @@
           <a:ln/>
         </p:spPr>
         <p:txBody>
-          <a:bodyPr wrap="square" lIns="0" tIns="0" rIns="0" bIns="0" rtlCol="0" anchor="ctr">
-            <a:normAutofit/>
-          </a:bodyPr>
+          <a:bodyPr wrap="square" lIns="0" tIns="0" rIns="0" bIns="0" rtlCol="0" anchor="ctr"/>
           <a:lstStyle/>
           <a:p>
             <a:pPr algn="ctr" indent="0" marL="0">
               <a:buNone/>
             </a:pPr>
             <a:r>
-              <a:rPr lang="en-US" sz="3600" b="1" dirty="0">
-                <a:solidFill>
-                  <a:srgbClr val="990011"/>
+              <a:rPr lang="en-US" sz="1600" i="1" dirty="0">
+                <a:solidFill>
+                  <a:srgbClr val="555555"/>
                 </a:solidFill>
                 <a:latin typeface="Times New Roman" pitchFamily="34" charset="0"/>
                 <a:ea typeface="Times New Roman" pitchFamily="34" charset="-122"/>
                 <a:cs typeface="Times New Roman" pitchFamily="34" charset="-120"/>
               </a:rPr>
-              <a:t>Expected Answer</a:t>
-            </a:r>
-            <a:endParaRPr lang="en-US" sz="3600" dirty="0"/>
-          </a:p>
-        </p:txBody>
-      </p:sp>
-      <p:sp>
-        <p:nvSpPr>
-          <p:cNvPr id="5" name="Text 2"/>
-          <p:cNvSpPr/>
-          <p:nvPr/>
-        </p:nvSpPr>
-        <p:spPr>
-          <a:xfrm>
-            <a:off x="5349240" y="1783080"/>
-            <a:ext cx="6522415" cy="4663440"/>
-          </a:xfrm>
-          <a:prstGeom prst="rect">
-            <a:avLst/>
-          </a:prstGeom>
-          <a:noFill/>
-          <a:ln/>
-        </p:spPr>
-        <p:txBody>
-          <a:bodyPr wrap="square" lIns="0" tIns="0" rIns="0" bIns="0" rtlCol="0" anchor="t"/>
-          <a:lstStyle/>
-          <a:p>
-            <a:pPr algn="l" indent="0" marL="0">
-              <a:spcAft>
-                <a:spcPts val="800"/>
-              </a:spcAft>
-              <a:buNone/>
-            </a:pPr>
-            <a:r>
-              <a:rPr lang="en-US" sz="4000" dirty="0">
-                <a:solidFill>
-                  <a:srgbClr val="111111"/>
-                </a:solidFill>
-                <a:latin typeface="Times New Roman" pitchFamily="34" charset="0"/>
-                <a:ea typeface="Times New Roman" pitchFamily="34" charset="-122"/>
-                <a:cs typeface="Times New Roman" pitchFamily="34" charset="-120"/>
-              </a:rPr>
-              <a:t>It is the study of the Earth, its physical features and the activities of people on it.</a:t>
-            </a:r>
-            <a:endParaRPr lang="en-US" sz="4000" dirty="0"/>
+              <a:t>Illustration: a satellite image is taken from space</a:t>
+            </a:r>
+            <a:endParaRPr lang="en-US" sz="1600" dirty="0"/>
           </a:p>
         </p:txBody>
       </p:sp>
@@ -15858,15 +16428,115 @@
                 <a:ea typeface="Calibri" pitchFamily="34" charset="-122"/>
                 <a:cs typeface="Calibri" pitchFamily="34" charset="-120"/>
               </a:rPr>
-              <a:t>FORMATIVE EVALUATION</a:t>
+              <a:t>BOARD SUMMARY</a:t>
             </a:r>
             <a:endParaRPr lang="en-US" sz="1400" dirty="0"/>
+          </a:p>
+        </p:txBody>
+      </p:sp>
+      <p:sp>
+        <p:nvSpPr>
+          <p:cNvPr id="3" name="Text 1"/>
+          <p:cNvSpPr/>
+          <p:nvPr/>
+        </p:nvSpPr>
+        <p:spPr>
+          <a:xfrm>
+            <a:off x="365760" y="1005840"/>
+            <a:ext cx="11460175" cy="731520"/>
+          </a:xfrm>
+          <a:prstGeom prst="rect">
+            <a:avLst/>
+          </a:prstGeom>
+          <a:noFill/>
+          <a:ln/>
+        </p:spPr>
+        <p:txBody>
+          <a:bodyPr wrap="square" lIns="0" tIns="0" rIns="0" bIns="0" rtlCol="0" anchor="ctr">
+            <a:normAutofit/>
+          </a:bodyPr>
+          <a:lstStyle/>
+          <a:p>
+            <a:pPr algn="ctr" indent="0" marL="0">
+              <a:buNone/>
+            </a:pPr>
+            <a:r>
+              <a:rPr lang="en-US" sz="3600" b="1" dirty="0">
+                <a:solidFill>
+                  <a:srgbClr val="990011"/>
+                </a:solidFill>
+                <a:latin typeface="Times New Roman" pitchFamily="34" charset="0"/>
+                <a:ea typeface="Times New Roman" pitchFamily="34" charset="-122"/>
+                <a:cs typeface="Times New Roman" pitchFamily="34" charset="-120"/>
+              </a:rPr>
+              <a:t>2. Methods of Geography</a:t>
+            </a:r>
+            <a:endParaRPr lang="en-US" sz="3600" dirty="0"/>
+          </a:p>
+        </p:txBody>
+      </p:sp>
+      <p:sp>
+        <p:nvSpPr>
+          <p:cNvPr id="4" name="Text 2"/>
+          <p:cNvSpPr/>
+          <p:nvPr/>
+        </p:nvSpPr>
+        <p:spPr>
+          <a:xfrm>
+            <a:off x="365760" y="1783080"/>
+            <a:ext cx="4846320" cy="4617720"/>
+          </a:xfrm>
+          <a:prstGeom prst="rect">
+            <a:avLst/>
+          </a:prstGeom>
+          <a:noFill/>
+          <a:ln/>
+        </p:spPr>
+        <p:txBody>
+          <a:bodyPr wrap="square" lIns="0" tIns="0" rIns="0" bIns="0" rtlCol="0" anchor="t"/>
+          <a:lstStyle/>
+          <a:p>
+            <a:pPr algn="l" indent="0" marL="0">
+              <a:spcAft>
+                <a:spcPts val="800"/>
+              </a:spcAft>
+              <a:buNone/>
+            </a:pPr>
+            <a:r>
+              <a:rPr lang="en-US" sz="3600" b="1" dirty="0">
+                <a:solidFill>
+                  <a:srgbClr val="111111"/>
+                </a:solidFill>
+                <a:latin typeface="Times New Roman" pitchFamily="34" charset="0"/>
+                <a:ea typeface="Times New Roman" pitchFamily="34" charset="-122"/>
+                <a:cs typeface="Times New Roman" pitchFamily="34" charset="-120"/>
+              </a:rPr>
+              <a:t>Statistics and graphs: </a:t>
+            </a:r>
+            <a:pPr algn="l" indent="0" marL="0">
+              <a:spcAft>
+                <a:spcPts val="800"/>
+              </a:spcAft>
+              <a:buNone/>
+            </a:pPr>
+            <a:r>
+              <a:rPr lang="en-US" sz="3600" dirty="0">
+                <a:solidFill>
+                  <a:srgbClr val="111111"/>
+                </a:solidFill>
+                <a:latin typeface="Times New Roman" pitchFamily="34" charset="0"/>
+                <a:ea typeface="Times New Roman" pitchFamily="34" charset="-122"/>
+                <a:cs typeface="Times New Roman" pitchFamily="34" charset="-120"/>
+              </a:rPr>
+              <a:t>Geographers use numbers, tables and graphs to compare places and changes.</a:t>
+            </a:r>
+            <a:endParaRPr lang="en-US" sz="3600" dirty="0"/>
           </a:p>
         </p:txBody>
       </p:sp>
       <p:pic>
         <p:nvPicPr>
-          <p:cNvPr id="3" name="Image 0" descr="/home/claude/f4/img/minesec_sheet.png">    </p:cNvPr>
+          <p:cNvPr id="5" name="Image 0" descr="/home/claude/f4/img/v2/graph_choice_big.png">    </p:cNvPr>
           <p:cNvPicPr>
             <a:picLocks noChangeAspect="1"/>
           </p:cNvPicPr>
@@ -15880,8 +16550,8 @@
         </p:blipFill>
         <p:spPr>
           <a:xfrm>
-            <a:off x="0" y="658368"/>
-            <a:ext cx="5120640" cy="5833872"/>
+            <a:off x="5349240" y="2617506"/>
+            <a:ext cx="6659575" cy="2601397"/>
           </a:xfrm>
           <a:prstGeom prst="rect">
             <a:avLst/>
@@ -15890,14 +16560,14 @@
       </p:pic>
       <p:sp>
         <p:nvSpPr>
-          <p:cNvPr id="4" name="Text 1"/>
+          <p:cNvPr id="6" name="Text 3"/>
           <p:cNvSpPr/>
           <p:nvPr/>
         </p:nvSpPr>
         <p:spPr>
           <a:xfrm>
-            <a:off x="5349240" y="1005840"/>
-            <a:ext cx="6522415" cy="731520"/>
+            <a:off x="5349240" y="6089904"/>
+            <a:ext cx="6659575" cy="347472"/>
           </a:xfrm>
           <a:prstGeom prst="rect">
             <a:avLst/>
@@ -15906,68 +16576,24 @@
           <a:ln/>
         </p:spPr>
         <p:txBody>
-          <a:bodyPr wrap="square" lIns="0" tIns="0" rIns="0" bIns="0" rtlCol="0" anchor="ctr">
-            <a:normAutofit/>
-          </a:bodyPr>
+          <a:bodyPr wrap="square" lIns="0" tIns="0" rIns="0" bIns="0" rtlCol="0" anchor="ctr"/>
           <a:lstStyle/>
           <a:p>
             <a:pPr algn="ctr" indent="0" marL="0">
               <a:buNone/>
             </a:pPr>
             <a:r>
-              <a:rPr lang="en-US" sz="3600" b="1" dirty="0">
-                <a:solidFill>
-                  <a:srgbClr val="990011"/>
+              <a:rPr lang="en-US" sz="1600" i="1" dirty="0">
+                <a:solidFill>
+                  <a:srgbClr val="555555"/>
                 </a:solidFill>
                 <a:latin typeface="Times New Roman" pitchFamily="34" charset="0"/>
                 <a:ea typeface="Times New Roman" pitchFamily="34" charset="-122"/>
                 <a:cs typeface="Times New Roman" pitchFamily="34" charset="-120"/>
               </a:rPr>
-              <a:t>Evaluation 2</a:t>
-            </a:r>
-            <a:endParaRPr lang="en-US" sz="3600" dirty="0"/>
-          </a:p>
-        </p:txBody>
-      </p:sp>
-      <p:sp>
-        <p:nvSpPr>
-          <p:cNvPr id="5" name="Text 2"/>
-          <p:cNvSpPr/>
-          <p:nvPr/>
-        </p:nvSpPr>
-        <p:spPr>
-          <a:xfrm>
-            <a:off x="5349240" y="1783080"/>
-            <a:ext cx="6522415" cy="4663440"/>
-          </a:xfrm>
-          <a:prstGeom prst="rect">
-            <a:avLst/>
-          </a:prstGeom>
-          <a:noFill/>
-          <a:ln/>
-        </p:spPr>
-        <p:txBody>
-          <a:bodyPr wrap="square" lIns="0" tIns="0" rIns="0" bIns="0" rtlCol="0" anchor="t"/>
-          <a:lstStyle/>
-          <a:p>
-            <a:pPr algn="l" indent="0" marL="0">
-              <a:spcAft>
-                <a:spcPts val="800"/>
-              </a:spcAft>
-              <a:buNone/>
-            </a:pPr>
-            <a:r>
-              <a:rPr lang="en-US" sz="4000" dirty="0">
-                <a:solidFill>
-                  <a:srgbClr val="111111"/>
-                </a:solidFill>
-                <a:latin typeface="Times New Roman" pitchFamily="34" charset="0"/>
-                <a:ea typeface="Times New Roman" pitchFamily="34" charset="-122"/>
-                <a:cs typeface="Times New Roman" pitchFamily="34" charset="-120"/>
-              </a:rPr>
-              <a:t>Name the three branches of geography.</a:t>
-            </a:r>
-            <a:endParaRPr lang="en-US" sz="4000" dirty="0"/>
+              <a:t>Illustration: types of graphs</a:t>
+            </a:r>
+            <a:endParaRPr lang="en-US" sz="1600" dirty="0"/>
           </a:p>
         </p:txBody>
       </p:sp>
@@ -16077,7 +16703,7 @@
                 <a:ea typeface="Calibri" pitchFamily="34" charset="-122"/>
                 <a:cs typeface="Calibri" pitchFamily="34" charset="-120"/>
               </a:rPr>
-              <a:t>FORMATIVE EVALUATION</a:t>
+              <a:t>BOARD SUMMARY</a:t>
             </a:r>
             <a:endParaRPr lang="en-US" sz="1400" dirty="0"/>
           </a:p>
@@ -16100,7 +16726,7 @@
         <p:spPr>
           <a:xfrm>
             <a:off x="0" y="658368"/>
-            <a:ext cx="5120640" cy="5833872"/>
+            <a:ext cx="2468880" cy="5833872"/>
           </a:xfrm>
           <a:prstGeom prst="rect">
             <a:avLst/>
@@ -16115,8 +16741,8 @@
         </p:nvSpPr>
         <p:spPr>
           <a:xfrm>
-            <a:off x="5349240" y="1005840"/>
-            <a:ext cx="6522415" cy="731520"/>
+            <a:off x="2697480" y="1005840"/>
+            <a:ext cx="9174175" cy="731520"/>
           </a:xfrm>
           <a:prstGeom prst="rect">
             <a:avLst/>
@@ -16142,7 +16768,7 @@
                 <a:ea typeface="Times New Roman" pitchFamily="34" charset="-122"/>
                 <a:cs typeface="Times New Roman" pitchFamily="34" charset="-120"/>
               </a:rPr>
-              <a:t>Expected Answer</a:t>
+              <a:t>3. Importance of Geography</a:t>
             </a:r>
             <a:endParaRPr lang="en-US" sz="3600" dirty="0"/>
           </a:p>
@@ -16156,8 +16782,8 @@
         </p:nvSpPr>
         <p:spPr>
           <a:xfrm>
-            <a:off x="5349240" y="1783080"/>
-            <a:ext cx="6522415" cy="4663440"/>
+            <a:off x="2697480" y="1783080"/>
+            <a:ext cx="9174175" cy="4663440"/>
           </a:xfrm>
           <a:prstGeom prst="rect">
             <a:avLst/>
@@ -16176,7 +16802,7 @@
               <a:buNone/>
             </a:pPr>
             <a:r>
-              <a:rPr lang="en-US" sz="4000" dirty="0">
+              <a:rPr lang="en-US" sz="4000" i="1" dirty="0">
                 <a:solidFill>
                   <a:srgbClr val="111111"/>
                 </a:solidFill>
@@ -16184,7 +16810,81 @@
                 <a:ea typeface="Times New Roman" pitchFamily="34" charset="-122"/>
                 <a:cs typeface="Times New Roman" pitchFamily="34" charset="-120"/>
               </a:rPr>
-              <a:t>Physical, human and practical geography.</a:t>
+              <a:t>Geography is important for the following reasons:</a:t>
+            </a:r>
+            <a:endParaRPr lang="en-US" sz="4000" dirty="0"/>
+          </a:p>
+          <a:p>
+            <a:pPr algn="l" indent="0" marL="0">
+              <a:spcAft>
+                <a:spcPts val="800"/>
+              </a:spcAft>
+              <a:buNone/>
+            </a:pPr>
+            <a:r>
+              <a:rPr lang="en-US" sz="4000" b="1" dirty="0">
+                <a:solidFill>
+                  <a:srgbClr val="111111"/>
+                </a:solidFill>
+                <a:latin typeface="Times New Roman" pitchFamily="34" charset="0"/>
+                <a:ea typeface="Times New Roman" pitchFamily="34" charset="-122"/>
+                <a:cs typeface="Times New Roman" pitchFamily="34" charset="-120"/>
+              </a:rPr>
+              <a:t>Daily life: </a:t>
+            </a:r>
+            <a:pPr algn="l" indent="0" marL="0">
+              <a:spcAft>
+                <a:spcPts val="800"/>
+              </a:spcAft>
+              <a:buNone/>
+            </a:pPr>
+            <a:r>
+              <a:rPr lang="en-US" sz="4000" dirty="0">
+                <a:solidFill>
+                  <a:srgbClr val="111111"/>
+                </a:solidFill>
+                <a:latin typeface="Times New Roman" pitchFamily="34" charset="0"/>
+                <a:ea typeface="Times New Roman" pitchFamily="34" charset="-122"/>
+                <a:cs typeface="Times New Roman" pitchFamily="34" charset="-120"/>
+              </a:rPr>
+              <a:t>It helps us to find places, read maps and understand the weather.</a:t>
+            </a:r>
+            <a:endParaRPr lang="en-US" sz="4000" dirty="0"/>
+          </a:p>
+          <a:p>
+            <a:pPr algn="l" indent="0" marL="0">
+              <a:spcAft>
+                <a:spcPts val="800"/>
+              </a:spcAft>
+              <a:buNone/>
+            </a:pPr>
+            <a:r>
+              <a:rPr lang="en-US" sz="4000" b="1" dirty="0">
+                <a:solidFill>
+                  <a:srgbClr val="111111"/>
+                </a:solidFill>
+                <a:latin typeface="Times New Roman" pitchFamily="34" charset="0"/>
+                <a:ea typeface="Times New Roman" pitchFamily="34" charset="-122"/>
+                <a:cs typeface="Times New Roman" pitchFamily="34" charset="-120"/>
+              </a:rPr>
+              <a:t>Farming: </a:t>
+            </a:r>
+            <a:pPr algn="l" indent="0" marL="0">
+              <a:spcAft>
+                <a:spcPts val="800"/>
+              </a:spcAft>
+              <a:buNone/>
+            </a:pPr>
+            <a:r>
+              <a:rPr lang="en-US" sz="4000" dirty="0">
+                <a:solidFill>
+                  <a:srgbClr val="111111"/>
+                </a:solidFill>
+                <a:latin typeface="Times New Roman" pitchFamily="34" charset="0"/>
+                <a:ea typeface="Times New Roman" pitchFamily="34" charset="-122"/>
+                <a:cs typeface="Times New Roman" pitchFamily="34" charset="-120"/>
+              </a:rPr>
+              <a:t>It helps farmers to know the seasons, the soils and the right crops.</a:t>
             </a:r>
             <a:endParaRPr lang="en-US" sz="4000" dirty="0"/>
           </a:p>
@@ -16296,7 +16996,7 @@
                 <a:ea typeface="Calibri" pitchFamily="34" charset="-122"/>
                 <a:cs typeface="Calibri" pitchFamily="34" charset="-120"/>
               </a:rPr>
-              <a:t>REMEDIATION</a:t>
+              <a:t>BOARD SUMMARY</a:t>
             </a:r>
             <a:endParaRPr lang="en-US" sz="1400" dirty="0"/>
           </a:p>
@@ -16319,7 +17019,7 @@
         <p:spPr>
           <a:xfrm>
             <a:off x="0" y="658368"/>
-            <a:ext cx="3840480" cy="5833872"/>
+            <a:ext cx="5120640" cy="5833872"/>
           </a:xfrm>
           <a:prstGeom prst="rect">
             <a:avLst/>
@@ -16334,8 +17034,8 @@
         </p:nvSpPr>
         <p:spPr>
           <a:xfrm>
-            <a:off x="4069080" y="1005840"/>
-            <a:ext cx="7802575" cy="731520"/>
+            <a:off x="5349240" y="1005840"/>
+            <a:ext cx="6522415" cy="731520"/>
           </a:xfrm>
           <a:prstGeom prst="rect">
             <a:avLst/>
@@ -16361,7 +17061,7 @@
                 <a:ea typeface="Times New Roman" pitchFamily="34" charset="-122"/>
                 <a:cs typeface="Times New Roman" pitchFamily="34" charset="-120"/>
               </a:rPr>
-              <a:t>Remediation</a:t>
+              <a:t>3. Importance of Geography (continued)</a:t>
             </a:r>
             <a:endParaRPr lang="en-US" sz="3600" dirty="0"/>
           </a:p>
@@ -16375,8 +17075,8 @@
         </p:nvSpPr>
         <p:spPr>
           <a:xfrm>
-            <a:off x="4069080" y="1783080"/>
-            <a:ext cx="7802575" cy="4663440"/>
+            <a:off x="5349240" y="1783080"/>
+            <a:ext cx="6522415" cy="4663440"/>
           </a:xfrm>
           <a:prstGeom prst="rect">
             <a:avLst/>
@@ -16403,18 +17103,13 @@
                 <a:ea typeface="Times New Roman" pitchFamily="34" charset="-122"/>
                 <a:cs typeface="Times New Roman" pitchFamily="34" charset="-120"/>
               </a:rPr>
-              <a:t>Fill in the blanks:</a:t>
-            </a:r>
-            <a:endParaRPr lang="en-US" sz="4000" dirty="0"/>
-          </a:p>
-          <a:p>
-            <a:pPr algn="l" marL="342900" indent="-342900">
+              <a:t>Planning: </a:t>
+            </a:r>
+            <a:pPr algn="l" indent="0" marL="0">
               <a:spcAft>
                 <a:spcPts val="800"/>
               </a:spcAft>
-              <a:buSzPct val="100000"/>
-              <a:buFont typeface="+mj-lt"/>
-              <a:buAutoNum type="arabicPeriod" startAt="1"/>
+              <a:buNone/>
             </a:pPr>
             <a:r>
               <a:rPr lang="en-US" sz="4000" dirty="0">
@@ -16425,21 +17120,19 @@
                 <a:ea typeface="Times New Roman" pitchFamily="34" charset="-122"/>
                 <a:cs typeface="Times New Roman" pitchFamily="34" charset="-120"/>
               </a:rPr>
-              <a:t>"Geo" means the ______.</a:t>
+              <a:t>It helps the government and councils to plan roads, schools and towns.</a:t>
             </a:r>
             <a:endParaRPr lang="en-US" sz="4000" dirty="0"/>
           </a:p>
           <a:p>
-            <a:pPr algn="l" marL="342900" indent="-342900">
+            <a:pPr algn="l" indent="0" marL="0">
               <a:spcAft>
                 <a:spcPts val="800"/>
               </a:spcAft>
-              <a:buSzPct val="100000"/>
-              <a:buFont typeface="+mj-lt"/>
-              <a:buAutoNum type="arabicPeriod" startAt="1"/>
+              <a:buNone/>
             </a:pPr>
             <a:r>
-              <a:rPr lang="en-US" sz="4000" dirty="0">
+              <a:rPr lang="en-US" sz="4000" b="1" dirty="0">
                 <a:solidFill>
                   <a:srgbClr val="111111"/>
                 </a:solidFill>
@@ -16447,18 +17140,13 @@
                 <a:ea typeface="Times New Roman" pitchFamily="34" charset="-122"/>
                 <a:cs typeface="Times New Roman" pitchFamily="34" charset="-120"/>
               </a:rPr>
-              <a:t>The study of relief and climate is ______ geography.</a:t>
-            </a:r>
-            <a:endParaRPr lang="en-US" sz="4000" dirty="0"/>
-          </a:p>
-          <a:p>
-            <a:pPr algn="l" marL="342900" indent="-342900">
+              <a:t>Environment: </a:t>
+            </a:r>
+            <a:pPr algn="l" indent="0" marL="0">
               <a:spcAft>
                 <a:spcPts val="800"/>
               </a:spcAft>
-              <a:buSzPct val="100000"/>
-              <a:buFont typeface="+mj-lt"/>
-              <a:buAutoNum type="arabicPeriod" startAt="1"/>
+              <a:buNone/>
             </a:pPr>
             <a:r>
               <a:rPr lang="en-US" sz="4000" dirty="0">
@@ -16469,7 +17157,7 @@
                 <a:ea typeface="Times New Roman" pitchFamily="34" charset="-122"/>
                 <a:cs typeface="Times New Roman" pitchFamily="34" charset="-120"/>
               </a:rPr>
-              <a:t>The study of population and towns is ______ geography.</a:t>
+              <a:t>It teaches us to protect the land, water and forests.</a:t>
             </a:r>
             <a:endParaRPr lang="en-US" sz="4000" dirty="0"/>
           </a:p>
@@ -16581,7 +17269,7 @@
                 <a:ea typeface="Calibri" pitchFamily="34" charset="-122"/>
                 <a:cs typeface="Calibri" pitchFamily="34" charset="-120"/>
               </a:rPr>
-              <a:t>HOMEWORK</a:t>
+              <a:t>FORMATIVE EVALUATION</a:t>
             </a:r>
             <a:endParaRPr lang="en-US" sz="1400" dirty="0"/>
           </a:p>
@@ -16646,7 +17334,7 @@
                 <a:ea typeface="Times New Roman" pitchFamily="34" charset="-122"/>
                 <a:cs typeface="Times New Roman" pitchFamily="34" charset="-120"/>
               </a:rPr>
-              <a:t>Homework</a:t>
+              <a:t>Evaluation 1</a:t>
             </a:r>
             <a:endParaRPr lang="en-US" sz="3600" dirty="0"/>
           </a:p>
@@ -16688,7 +17376,7 @@
                 <a:ea typeface="Times New Roman" pitchFamily="34" charset="-122"/>
                 <a:cs typeface="Times New Roman" pitchFamily="34" charset="-120"/>
               </a:rPr>
-              <a:t>Write three physical features and three human activities that you see on your way to school.</a:t>
+              <a:t>Define geography.</a:t>
             </a:r>
             <a:endParaRPr lang="en-US" sz="4000" dirty="0"/>
           </a:p>
@@ -16800,7 +17488,7 @@
                 <a:ea typeface="Calibri" pitchFamily="34" charset="-122"/>
                 <a:cs typeface="Calibri" pitchFamily="34" charset="-120"/>
               </a:rPr>
-              <a:t>NEXT LESSON</a:t>
+              <a:t>FORMATIVE EVALUATION</a:t>
             </a:r>
             <a:endParaRPr lang="en-US" sz="1400" dirty="0"/>
           </a:p>
@@ -16865,7 +17553,7 @@
                 <a:ea typeface="Times New Roman" pitchFamily="34" charset="-122"/>
                 <a:cs typeface="Times New Roman" pitchFamily="34" charset="-120"/>
               </a:rPr>
-              <a:t>Next Lesson</a:t>
+              <a:t>Expected Answer</a:t>
             </a:r>
             <a:endParaRPr lang="en-US" sz="3600" dirty="0"/>
           </a:p>
@@ -16889,17 +17577,17 @@
           <a:ln/>
         </p:spPr>
         <p:txBody>
-          <a:bodyPr wrap="square" lIns="0" tIns="0" rIns="0" bIns="0" rtlCol="0" anchor="ctr"/>
-          <a:lstStyle/>
-          <a:p>
-            <a:pPr algn="ctr" indent="0" marL="0">
+          <a:bodyPr wrap="square" lIns="0" tIns="0" rIns="0" bIns="0" rtlCol="0" anchor="t"/>
+          <a:lstStyle/>
+          <a:p>
+            <a:pPr algn="l" indent="0" marL="0">
               <a:spcAft>
                 <a:spcPts val="800"/>
               </a:spcAft>
               <a:buNone/>
             </a:pPr>
             <a:r>
-              <a:rPr lang="en-US" sz="4000" b="1" dirty="0">
+              <a:rPr lang="en-US" sz="4000" dirty="0">
                 <a:solidFill>
                   <a:srgbClr val="111111"/>
                 </a:solidFill>
@@ -16907,27 +17595,7 @@
                 <a:ea typeface="Times New Roman" pitchFamily="34" charset="-122"/>
                 <a:cs typeface="Times New Roman" pitchFamily="34" charset="-120"/>
               </a:rPr>
-              <a:t>Our next lesson will be on:</a:t>
-            </a:r>
-            <a:endParaRPr lang="en-US" sz="4000" dirty="0"/>
-          </a:p>
-          <a:p>
-            <a:pPr algn="ctr" indent="0" marL="0">
-              <a:spcAft>
-                <a:spcPts val="800"/>
-              </a:spcAft>
-              <a:buNone/>
-            </a:pPr>
-            <a:r>
-              <a:rPr lang="en-US" sz="4000" b="1" dirty="0">
-                <a:solidFill>
-                  <a:srgbClr val="990011"/>
-                </a:solidFill>
-                <a:latin typeface="Times New Roman" pitchFamily="34" charset="0"/>
-                <a:ea typeface="Times New Roman" pitchFamily="34" charset="-122"/>
-                <a:cs typeface="Times New Roman" pitchFamily="34" charset="-120"/>
-              </a:rPr>
-              <a:t>Lesson 2: Our Planet, the Earth</a:t>
+              <a:t>It is the study of the Earth, its physical features and the activities of people on it.</a:t>
             </a:r>
             <a:endParaRPr lang="en-US" sz="4000" dirty="0"/>
           </a:p>
@@ -17039,6 +17707,1450 @@
                 <a:ea typeface="Calibri" pitchFamily="34" charset="-122"/>
                 <a:cs typeface="Calibri" pitchFamily="34" charset="-120"/>
               </a:rPr>
+              <a:t>FORMATIVE EVALUATION</a:t>
+            </a:r>
+            <a:endParaRPr lang="en-US" sz="1400" dirty="0"/>
+          </a:p>
+        </p:txBody>
+      </p:sp>
+      <p:pic>
+        <p:nvPicPr>
+          <p:cNvPr id="3" name="Image 0" descr="/home/claude/f4/img/minesec_sheet.png">    </p:cNvPr>
+          <p:cNvPicPr>
+            <a:picLocks noChangeAspect="1"/>
+          </p:cNvPicPr>
+          <p:nvPr/>
+        </p:nvPicPr>
+        <p:blipFill>
+          <a:blip r:embed="rId1"/>
+          <a:stretch>
+            <a:fillRect/>
+          </a:stretch>
+        </p:blipFill>
+        <p:spPr>
+          <a:xfrm>
+            <a:off x="0" y="658368"/>
+            <a:ext cx="5120640" cy="5833872"/>
+          </a:xfrm>
+          <a:prstGeom prst="rect">
+            <a:avLst/>
+          </a:prstGeom>
+        </p:spPr>
+      </p:pic>
+      <p:sp>
+        <p:nvSpPr>
+          <p:cNvPr id="4" name="Text 1"/>
+          <p:cNvSpPr/>
+          <p:nvPr/>
+        </p:nvSpPr>
+        <p:spPr>
+          <a:xfrm>
+            <a:off x="5349240" y="1005840"/>
+            <a:ext cx="6522415" cy="731520"/>
+          </a:xfrm>
+          <a:prstGeom prst="rect">
+            <a:avLst/>
+          </a:prstGeom>
+          <a:noFill/>
+          <a:ln/>
+        </p:spPr>
+        <p:txBody>
+          <a:bodyPr wrap="square" lIns="0" tIns="0" rIns="0" bIns="0" rtlCol="0" anchor="ctr">
+            <a:normAutofit/>
+          </a:bodyPr>
+          <a:lstStyle/>
+          <a:p>
+            <a:pPr algn="ctr" indent="0" marL="0">
+              <a:buNone/>
+            </a:pPr>
+            <a:r>
+              <a:rPr lang="en-US" sz="3600" b="1" dirty="0">
+                <a:solidFill>
+                  <a:srgbClr val="990011"/>
+                </a:solidFill>
+                <a:latin typeface="Times New Roman" pitchFamily="34" charset="0"/>
+                <a:ea typeface="Times New Roman" pitchFamily="34" charset="-122"/>
+                <a:cs typeface="Times New Roman" pitchFamily="34" charset="-120"/>
+              </a:rPr>
+              <a:t>Evaluation 2</a:t>
+            </a:r>
+            <a:endParaRPr lang="en-US" sz="3600" dirty="0"/>
+          </a:p>
+        </p:txBody>
+      </p:sp>
+      <p:sp>
+        <p:nvSpPr>
+          <p:cNvPr id="5" name="Text 2"/>
+          <p:cNvSpPr/>
+          <p:nvPr/>
+        </p:nvSpPr>
+        <p:spPr>
+          <a:xfrm>
+            <a:off x="5349240" y="1783080"/>
+            <a:ext cx="6522415" cy="4663440"/>
+          </a:xfrm>
+          <a:prstGeom prst="rect">
+            <a:avLst/>
+          </a:prstGeom>
+          <a:noFill/>
+          <a:ln/>
+        </p:spPr>
+        <p:txBody>
+          <a:bodyPr wrap="square" lIns="0" tIns="0" rIns="0" bIns="0" rtlCol="0" anchor="t"/>
+          <a:lstStyle/>
+          <a:p>
+            <a:pPr algn="l" indent="0" marL="0">
+              <a:spcAft>
+                <a:spcPts val="800"/>
+              </a:spcAft>
+              <a:buNone/>
+            </a:pPr>
+            <a:r>
+              <a:rPr lang="en-US" sz="4000" dirty="0">
+                <a:solidFill>
+                  <a:srgbClr val="111111"/>
+                </a:solidFill>
+                <a:latin typeface="Times New Roman" pitchFamily="34" charset="0"/>
+                <a:ea typeface="Times New Roman" pitchFamily="34" charset="-122"/>
+                <a:cs typeface="Times New Roman" pitchFamily="34" charset="-120"/>
+              </a:rPr>
+              <a:t>Name the three branches of geography.</a:t>
+            </a:r>
+            <a:endParaRPr lang="en-US" sz="4000" dirty="0"/>
+          </a:p>
+        </p:txBody>
+      </p:sp>
+      <p:sp>
+        <p:nvSpPr>
+          <p:cNvPr id="25" name="Slide Number Placeholder 0"/>
+          <p:cNvSpPr>
+            <a:spLocks noGrp="1"/>
+          </p:cNvSpPr>
+          <p:nvPr>
+            <p:ph type="sldNum" sz="quarter" idx="4294967295"/>
+          </p:nvPr>
+        </p:nvSpPr>
+        <p:spPr>
+          <a:xfrm>
+            <a:off x="27432" y="91440"/>
+            <a:ext cx="585216" cy="475488"/>
+          </a:xfrm>
+          <a:prstGeom prst="rect">
+            <a:avLst/>
+          </a:prstGeom>
+          <a:extLst>
+            <a:ext uri="{C572A759-6A51-4108-AA02-DFA0A04FC94B}">
+              <ma14:wrappingTextBoxFlag xmlns:ma14="http://schemas.microsoft.com/office/mac/drawingml/2011/main" val="0"/>
+            </a:ext>
+          </a:extLst>
+        </p:spPr>
+        <p:txBody>
+          <a:bodyPr/>
+          <a:lstStyle>
+            <a:lvl1pPr>
+              <a:defRPr sz="2000">
+                <a:solidFill>
+                  <a:srgbClr val="FFFFFF"/>
+                </a:solidFill>
+                <a:latin typeface="Calibri"/>
+                <a:ea typeface="Calibri"/>
+                <a:cs typeface="Calibri"/>
+              </a:defRPr>
+            </a:lvl1pPr>
+          </a:lstStyle>
+          <a:p>
+            <a:pPr algn="ctr"/>
+            <a:fld id="{F7021451-1387-4CA6-816F-3879F97B5CBC}" type="slidenum">
+              <a:rPr b="1" lang="en-US"/>
+              <a:t>48</a:t>
+            </a:fld>
+            <a:endParaRPr lang="en-US"/>
+          </a:p>
+        </p:txBody>
+      </p:sp>
+    </p:spTree>
+  </p:cSld>
+  <p:clrMapOvr>
+    <a:masterClrMapping/>
+  </p:clrMapOvr>
+</p:sld>
+</file>
+
+<file path=ppt/slides/slide49.xml><?xml version="1.0" encoding="utf-8"?>
+<p:sld xmlns:a="http://schemas.openxmlformats.org/drawingml/2006/main" xmlns:r="http://schemas.openxmlformats.org/officeDocument/2006/relationships" xmlns:p="http://schemas.openxmlformats.org/presentationml/2006/main">
+  <p:cSld name="Slide 49">
+    <p:spTree>
+      <p:nvGrpSpPr>
+        <p:cNvPr id="1" name=""/>
+        <p:cNvGrpSpPr/>
+        <p:nvPr/>
+      </p:nvGrpSpPr>
+      <p:grpSpPr>
+        <a:xfrm>
+          <a:off x="0" y="0"/>
+          <a:ext cx="0" cy="0"/>
+          <a:chOff x="0" y="0"/>
+          <a:chExt cx="0" cy="0"/>
+        </a:xfrm>
+      </p:grpSpPr>
+      <p:sp>
+        <p:nvSpPr>
+          <p:cNvPr id="2" name="Text 0"/>
+          <p:cNvSpPr/>
+          <p:nvPr/>
+        </p:nvSpPr>
+        <p:spPr>
+          <a:xfrm>
+            <a:off x="457200" y="713232"/>
+            <a:ext cx="11368735" cy="274320"/>
+          </a:xfrm>
+          <a:prstGeom prst="rect">
+            <a:avLst/>
+          </a:prstGeom>
+          <a:noFill/>
+          <a:ln/>
+        </p:spPr>
+        <p:txBody>
+          <a:bodyPr wrap="square" lIns="0" tIns="0" rIns="0" bIns="0" rtlCol="0" anchor="ctr"/>
+          <a:lstStyle/>
+          <a:p>
+            <a:pPr algn="r" indent="0" marL="0">
+              <a:buNone/>
+            </a:pPr>
+            <a:r>
+              <a:rPr lang="en-US" sz="1400" b="1" dirty="0">
+                <a:solidFill>
+                  <a:srgbClr val="1C3F6E"/>
+                </a:solidFill>
+                <a:latin typeface="Calibri" pitchFamily="34" charset="0"/>
+                <a:ea typeface="Calibri" pitchFamily="34" charset="-122"/>
+                <a:cs typeface="Calibri" pitchFamily="34" charset="-120"/>
+              </a:rPr>
+              <a:t>FORMATIVE EVALUATION</a:t>
+            </a:r>
+            <a:endParaRPr lang="en-US" sz="1400" dirty="0"/>
+          </a:p>
+        </p:txBody>
+      </p:sp>
+      <p:pic>
+        <p:nvPicPr>
+          <p:cNvPr id="3" name="Image 0" descr="/home/claude/f4/img/minesec_sheet.png">    </p:cNvPr>
+          <p:cNvPicPr>
+            <a:picLocks noChangeAspect="1"/>
+          </p:cNvPicPr>
+          <p:nvPr/>
+        </p:nvPicPr>
+        <p:blipFill>
+          <a:blip r:embed="rId1"/>
+          <a:stretch>
+            <a:fillRect/>
+          </a:stretch>
+        </p:blipFill>
+        <p:spPr>
+          <a:xfrm>
+            <a:off x="0" y="658368"/>
+            <a:ext cx="5120640" cy="5833872"/>
+          </a:xfrm>
+          <a:prstGeom prst="rect">
+            <a:avLst/>
+          </a:prstGeom>
+        </p:spPr>
+      </p:pic>
+      <p:sp>
+        <p:nvSpPr>
+          <p:cNvPr id="4" name="Text 1"/>
+          <p:cNvSpPr/>
+          <p:nvPr/>
+        </p:nvSpPr>
+        <p:spPr>
+          <a:xfrm>
+            <a:off x="5349240" y="1005840"/>
+            <a:ext cx="6522415" cy="731520"/>
+          </a:xfrm>
+          <a:prstGeom prst="rect">
+            <a:avLst/>
+          </a:prstGeom>
+          <a:noFill/>
+          <a:ln/>
+        </p:spPr>
+        <p:txBody>
+          <a:bodyPr wrap="square" lIns="0" tIns="0" rIns="0" bIns="0" rtlCol="0" anchor="ctr">
+            <a:normAutofit/>
+          </a:bodyPr>
+          <a:lstStyle/>
+          <a:p>
+            <a:pPr algn="ctr" indent="0" marL="0">
+              <a:buNone/>
+            </a:pPr>
+            <a:r>
+              <a:rPr lang="en-US" sz="3600" b="1" dirty="0">
+                <a:solidFill>
+                  <a:srgbClr val="990011"/>
+                </a:solidFill>
+                <a:latin typeface="Times New Roman" pitchFamily="34" charset="0"/>
+                <a:ea typeface="Times New Roman" pitchFamily="34" charset="-122"/>
+                <a:cs typeface="Times New Roman" pitchFamily="34" charset="-120"/>
+              </a:rPr>
+              <a:t>Expected Answer</a:t>
+            </a:r>
+            <a:endParaRPr lang="en-US" sz="3600" dirty="0"/>
+          </a:p>
+        </p:txBody>
+      </p:sp>
+      <p:sp>
+        <p:nvSpPr>
+          <p:cNvPr id="5" name="Text 2"/>
+          <p:cNvSpPr/>
+          <p:nvPr/>
+        </p:nvSpPr>
+        <p:spPr>
+          <a:xfrm>
+            <a:off x="5349240" y="1783080"/>
+            <a:ext cx="6522415" cy="4663440"/>
+          </a:xfrm>
+          <a:prstGeom prst="rect">
+            <a:avLst/>
+          </a:prstGeom>
+          <a:noFill/>
+          <a:ln/>
+        </p:spPr>
+        <p:txBody>
+          <a:bodyPr wrap="square" lIns="0" tIns="0" rIns="0" bIns="0" rtlCol="0" anchor="t"/>
+          <a:lstStyle/>
+          <a:p>
+            <a:pPr algn="l" indent="0" marL="0">
+              <a:spcAft>
+                <a:spcPts val="800"/>
+              </a:spcAft>
+              <a:buNone/>
+            </a:pPr>
+            <a:r>
+              <a:rPr lang="en-US" sz="4000" dirty="0">
+                <a:solidFill>
+                  <a:srgbClr val="111111"/>
+                </a:solidFill>
+                <a:latin typeface="Times New Roman" pitchFamily="34" charset="0"/>
+                <a:ea typeface="Times New Roman" pitchFamily="34" charset="-122"/>
+                <a:cs typeface="Times New Roman" pitchFamily="34" charset="-120"/>
+              </a:rPr>
+              <a:t>Physical, human and practical geography.</a:t>
+            </a:r>
+            <a:endParaRPr lang="en-US" sz="4000" dirty="0"/>
+          </a:p>
+        </p:txBody>
+      </p:sp>
+      <p:sp>
+        <p:nvSpPr>
+          <p:cNvPr id="25" name="Slide Number Placeholder 0"/>
+          <p:cNvSpPr>
+            <a:spLocks noGrp="1"/>
+          </p:cNvSpPr>
+          <p:nvPr>
+            <p:ph type="sldNum" sz="quarter" idx="4294967295"/>
+          </p:nvPr>
+        </p:nvSpPr>
+        <p:spPr>
+          <a:xfrm>
+            <a:off x="27432" y="91440"/>
+            <a:ext cx="585216" cy="475488"/>
+          </a:xfrm>
+          <a:prstGeom prst="rect">
+            <a:avLst/>
+          </a:prstGeom>
+          <a:extLst>
+            <a:ext uri="{C572A759-6A51-4108-AA02-DFA0A04FC94B}">
+              <ma14:wrappingTextBoxFlag xmlns:ma14="http://schemas.microsoft.com/office/mac/drawingml/2011/main" val="0"/>
+            </a:ext>
+          </a:extLst>
+        </p:spPr>
+        <p:txBody>
+          <a:bodyPr/>
+          <a:lstStyle>
+            <a:lvl1pPr>
+              <a:defRPr sz="2000">
+                <a:solidFill>
+                  <a:srgbClr val="FFFFFF"/>
+                </a:solidFill>
+                <a:latin typeface="Calibri"/>
+                <a:ea typeface="Calibri"/>
+                <a:cs typeface="Calibri"/>
+              </a:defRPr>
+            </a:lvl1pPr>
+          </a:lstStyle>
+          <a:p>
+            <a:pPr algn="ctr"/>
+            <a:fld id="{F7021451-1387-4CA6-816F-3879F97B5CBC}" type="slidenum">
+              <a:rPr b="1" lang="en-US"/>
+              <a:t>49</a:t>
+            </a:fld>
+            <a:endParaRPr lang="en-US"/>
+          </a:p>
+        </p:txBody>
+      </p:sp>
+    </p:spTree>
+  </p:cSld>
+  <p:clrMapOvr>
+    <a:masterClrMapping/>
+  </p:clrMapOvr>
+</p:sld>
+</file>
+
+<file path=ppt/slides/slide5.xml><?xml version="1.0" encoding="utf-8"?>
+<p:sld xmlns:a="http://schemas.openxmlformats.org/drawingml/2006/main" xmlns:r="http://schemas.openxmlformats.org/officeDocument/2006/relationships" xmlns:p="http://schemas.openxmlformats.org/presentationml/2006/main">
+  <p:cSld name="Slide 5">
+    <p:spTree>
+      <p:nvGrpSpPr>
+        <p:cNvPr id="1" name=""/>
+        <p:cNvGrpSpPr/>
+        <p:nvPr/>
+      </p:nvGrpSpPr>
+      <p:grpSpPr>
+        <a:xfrm>
+          <a:off x="0" y="0"/>
+          <a:ext cx="0" cy="0"/>
+          <a:chOff x="0" y="0"/>
+          <a:chExt cx="0" cy="0"/>
+        </a:xfrm>
+      </p:grpSpPr>
+      <p:sp>
+        <p:nvSpPr>
+          <p:cNvPr id="2" name="Text 0"/>
+          <p:cNvSpPr/>
+          <p:nvPr/>
+        </p:nvSpPr>
+        <p:spPr>
+          <a:xfrm>
+            <a:off x="457200" y="713232"/>
+            <a:ext cx="11368735" cy="274320"/>
+          </a:xfrm>
+          <a:prstGeom prst="rect">
+            <a:avLst/>
+          </a:prstGeom>
+          <a:noFill/>
+          <a:ln/>
+        </p:spPr>
+        <p:txBody>
+          <a:bodyPr wrap="square" lIns="0" tIns="0" rIns="0" bIns="0" rtlCol="0" anchor="ctr"/>
+          <a:lstStyle/>
+          <a:p>
+            <a:pPr algn="r" indent="0" marL="0">
+              <a:buNone/>
+            </a:pPr>
+            <a:r>
+              <a:rPr lang="en-US" sz="1400" b="1" dirty="0">
+                <a:solidFill>
+                  <a:srgbClr val="1C3F6E"/>
+                </a:solidFill>
+                <a:latin typeface="Calibri" pitchFamily="34" charset="0"/>
+                <a:ea typeface="Calibri" pitchFamily="34" charset="-122"/>
+                <a:cs typeface="Calibri" pitchFamily="34" charset="-120"/>
+              </a:rPr>
+              <a:t>OBJECTIVES</a:t>
+            </a:r>
+            <a:endParaRPr lang="en-US" sz="1400" dirty="0"/>
+          </a:p>
+        </p:txBody>
+      </p:sp>
+      <p:pic>
+        <p:nvPicPr>
+          <p:cNvPr id="3" name="Image 0" descr="/home/claude/f4/img/minesec_sheet.png">    </p:cNvPr>
+          <p:cNvPicPr>
+            <a:picLocks noChangeAspect="1"/>
+          </p:cNvPicPr>
+          <p:nvPr/>
+        </p:nvPicPr>
+        <p:blipFill>
+          <a:blip r:embed="rId1"/>
+          <a:stretch>
+            <a:fillRect/>
+          </a:stretch>
+        </p:blipFill>
+        <p:spPr>
+          <a:xfrm>
+            <a:off x="0" y="658368"/>
+            <a:ext cx="5120640" cy="5833872"/>
+          </a:xfrm>
+          <a:prstGeom prst="rect">
+            <a:avLst/>
+          </a:prstGeom>
+        </p:spPr>
+      </p:pic>
+      <p:sp>
+        <p:nvSpPr>
+          <p:cNvPr id="4" name="Text 1"/>
+          <p:cNvSpPr/>
+          <p:nvPr/>
+        </p:nvSpPr>
+        <p:spPr>
+          <a:xfrm>
+            <a:off x="5349240" y="1005840"/>
+            <a:ext cx="6522415" cy="731520"/>
+          </a:xfrm>
+          <a:prstGeom prst="rect">
+            <a:avLst/>
+          </a:prstGeom>
+          <a:noFill/>
+          <a:ln/>
+        </p:spPr>
+        <p:txBody>
+          <a:bodyPr wrap="square" lIns="0" tIns="0" rIns="0" bIns="0" rtlCol="0" anchor="ctr">
+            <a:normAutofit/>
+          </a:bodyPr>
+          <a:lstStyle/>
+          <a:p>
+            <a:pPr algn="ctr" indent="0" marL="0">
+              <a:buNone/>
+            </a:pPr>
+            <a:r>
+              <a:rPr lang="en-US" sz="3600" b="1" dirty="0">
+                <a:solidFill>
+                  <a:srgbClr val="990011"/>
+                </a:solidFill>
+                <a:latin typeface="Times New Roman" pitchFamily="34" charset="0"/>
+                <a:ea typeface="Times New Roman" pitchFamily="34" charset="-122"/>
+                <a:cs typeface="Times New Roman" pitchFamily="34" charset="-120"/>
+              </a:rPr>
+              <a:t>Objectives</a:t>
+            </a:r>
+            <a:endParaRPr lang="en-US" sz="3600" dirty="0"/>
+          </a:p>
+        </p:txBody>
+      </p:sp>
+      <p:sp>
+        <p:nvSpPr>
+          <p:cNvPr id="5" name="Text 2"/>
+          <p:cNvSpPr/>
+          <p:nvPr/>
+        </p:nvSpPr>
+        <p:spPr>
+          <a:xfrm>
+            <a:off x="5349240" y="1783080"/>
+            <a:ext cx="6522415" cy="4663440"/>
+          </a:xfrm>
+          <a:prstGeom prst="rect">
+            <a:avLst/>
+          </a:prstGeom>
+          <a:noFill/>
+          <a:ln/>
+        </p:spPr>
+        <p:txBody>
+          <a:bodyPr wrap="square" lIns="0" tIns="0" rIns="0" bIns="0" rtlCol="0" anchor="t"/>
+          <a:lstStyle/>
+          <a:p>
+            <a:pPr algn="l" indent="0" marL="0">
+              <a:spcAft>
+                <a:spcPts val="800"/>
+              </a:spcAft>
+              <a:buNone/>
+            </a:pPr>
+            <a:r>
+              <a:rPr lang="en-US" sz="4000" b="1" dirty="0">
+                <a:solidFill>
+                  <a:srgbClr val="111111"/>
+                </a:solidFill>
+                <a:latin typeface="Times New Roman" pitchFamily="34" charset="0"/>
+                <a:ea typeface="Times New Roman" pitchFamily="34" charset="-122"/>
+                <a:cs typeface="Times New Roman" pitchFamily="34" charset="-120"/>
+              </a:rPr>
+              <a:t>By the end of this lesson, you should be able to:</a:t>
+            </a:r>
+            <a:endParaRPr lang="en-US" sz="4000" dirty="0"/>
+          </a:p>
+          <a:p>
+            <a:pPr algn="l" marL="342900" indent="-342900">
+              <a:spcAft>
+                <a:spcPts val="800"/>
+              </a:spcAft>
+              <a:buSzPct val="100000"/>
+              <a:buFont typeface="+mj-lt"/>
+              <a:buAutoNum type="arabicPeriod" startAt="1"/>
+            </a:pPr>
+            <a:r>
+              <a:rPr lang="en-US" sz="4000" dirty="0">
+                <a:solidFill>
+                  <a:srgbClr val="111111"/>
+                </a:solidFill>
+                <a:latin typeface="Times New Roman" pitchFamily="34" charset="0"/>
+                <a:ea typeface="Times New Roman" pitchFamily="34" charset="-122"/>
+                <a:cs typeface="Times New Roman" pitchFamily="34" charset="-120"/>
+              </a:rPr>
+              <a:t>Define geography.</a:t>
+            </a:r>
+            <a:endParaRPr lang="en-US" sz="4000" dirty="0"/>
+          </a:p>
+          <a:p>
+            <a:pPr algn="l" marL="342900" indent="-342900">
+              <a:spcAft>
+                <a:spcPts val="800"/>
+              </a:spcAft>
+              <a:buSzPct val="100000"/>
+              <a:buFont typeface="+mj-lt"/>
+              <a:buAutoNum type="arabicPeriod" startAt="1"/>
+            </a:pPr>
+            <a:r>
+              <a:rPr lang="en-US" sz="4000" dirty="0">
+                <a:solidFill>
+                  <a:srgbClr val="111111"/>
+                </a:solidFill>
+                <a:latin typeface="Times New Roman" pitchFamily="34" charset="0"/>
+                <a:ea typeface="Times New Roman" pitchFamily="34" charset="-122"/>
+                <a:cs typeface="Times New Roman" pitchFamily="34" charset="-120"/>
+              </a:rPr>
+              <a:t>Identify the branches and sub-branches of geography.</a:t>
+            </a:r>
+            <a:endParaRPr lang="en-US" sz="4000" dirty="0"/>
+          </a:p>
+        </p:txBody>
+      </p:sp>
+      <p:sp>
+        <p:nvSpPr>
+          <p:cNvPr id="25" name="Slide Number Placeholder 0"/>
+          <p:cNvSpPr>
+            <a:spLocks noGrp="1"/>
+          </p:cNvSpPr>
+          <p:nvPr>
+            <p:ph type="sldNum" sz="quarter" idx="4294967295"/>
+          </p:nvPr>
+        </p:nvSpPr>
+        <p:spPr>
+          <a:xfrm>
+            <a:off x="27432" y="91440"/>
+            <a:ext cx="585216" cy="475488"/>
+          </a:xfrm>
+          <a:prstGeom prst="rect">
+            <a:avLst/>
+          </a:prstGeom>
+          <a:extLst>
+            <a:ext uri="{C572A759-6A51-4108-AA02-DFA0A04FC94B}">
+              <ma14:wrappingTextBoxFlag xmlns:ma14="http://schemas.microsoft.com/office/mac/drawingml/2011/main" val="0"/>
+            </a:ext>
+          </a:extLst>
+        </p:spPr>
+        <p:txBody>
+          <a:bodyPr/>
+          <a:lstStyle>
+            <a:lvl1pPr>
+              <a:defRPr sz="2000">
+                <a:solidFill>
+                  <a:srgbClr val="FFFFFF"/>
+                </a:solidFill>
+                <a:latin typeface="Calibri"/>
+                <a:ea typeface="Calibri"/>
+                <a:cs typeface="Calibri"/>
+              </a:defRPr>
+            </a:lvl1pPr>
+          </a:lstStyle>
+          <a:p>
+            <a:pPr algn="ctr"/>
+            <a:fld id="{F7021451-1387-4CA6-816F-3879F97B5CBC}" type="slidenum">
+              <a:rPr b="1" lang="en-US"/>
+              <a:t>5</a:t>
+            </a:fld>
+            <a:endParaRPr lang="en-US"/>
+          </a:p>
+        </p:txBody>
+      </p:sp>
+    </p:spTree>
+  </p:cSld>
+  <p:clrMapOvr>
+    <a:masterClrMapping/>
+  </p:clrMapOvr>
+</p:sld>
+</file>
+
+<file path=ppt/slides/slide50.xml><?xml version="1.0" encoding="utf-8"?>
+<p:sld xmlns:a="http://schemas.openxmlformats.org/drawingml/2006/main" xmlns:r="http://schemas.openxmlformats.org/officeDocument/2006/relationships" xmlns:p="http://schemas.openxmlformats.org/presentationml/2006/main">
+  <p:cSld name="Slide 50">
+    <p:spTree>
+      <p:nvGrpSpPr>
+        <p:cNvPr id="1" name=""/>
+        <p:cNvGrpSpPr/>
+        <p:nvPr/>
+      </p:nvGrpSpPr>
+      <p:grpSpPr>
+        <a:xfrm>
+          <a:off x="0" y="0"/>
+          <a:ext cx="0" cy="0"/>
+          <a:chOff x="0" y="0"/>
+          <a:chExt cx="0" cy="0"/>
+        </a:xfrm>
+      </p:grpSpPr>
+      <p:sp>
+        <p:nvSpPr>
+          <p:cNvPr id="2" name="Text 0"/>
+          <p:cNvSpPr/>
+          <p:nvPr/>
+        </p:nvSpPr>
+        <p:spPr>
+          <a:xfrm>
+            <a:off x="457200" y="713232"/>
+            <a:ext cx="11368735" cy="274320"/>
+          </a:xfrm>
+          <a:prstGeom prst="rect">
+            <a:avLst/>
+          </a:prstGeom>
+          <a:noFill/>
+          <a:ln/>
+        </p:spPr>
+        <p:txBody>
+          <a:bodyPr wrap="square" lIns="0" tIns="0" rIns="0" bIns="0" rtlCol="0" anchor="ctr"/>
+          <a:lstStyle/>
+          <a:p>
+            <a:pPr algn="r" indent="0" marL="0">
+              <a:buNone/>
+            </a:pPr>
+            <a:r>
+              <a:rPr lang="en-US" sz="1400" b="1" dirty="0">
+                <a:solidFill>
+                  <a:srgbClr val="1C3F6E"/>
+                </a:solidFill>
+                <a:latin typeface="Calibri" pitchFamily="34" charset="0"/>
+                <a:ea typeface="Calibri" pitchFamily="34" charset="-122"/>
+                <a:cs typeface="Calibri" pitchFamily="34" charset="-120"/>
+              </a:rPr>
+              <a:t>REMEDIATION</a:t>
+            </a:r>
+            <a:endParaRPr lang="en-US" sz="1400" dirty="0"/>
+          </a:p>
+        </p:txBody>
+      </p:sp>
+      <p:pic>
+        <p:nvPicPr>
+          <p:cNvPr id="3" name="Image 0" descr="/home/claude/f4/img/minesec_sheet.png">    </p:cNvPr>
+          <p:cNvPicPr>
+            <a:picLocks noChangeAspect="1"/>
+          </p:cNvPicPr>
+          <p:nvPr/>
+        </p:nvPicPr>
+        <p:blipFill>
+          <a:blip r:embed="rId1"/>
+          <a:stretch>
+            <a:fillRect/>
+          </a:stretch>
+        </p:blipFill>
+        <p:spPr>
+          <a:xfrm>
+            <a:off x="0" y="658368"/>
+            <a:ext cx="3840480" cy="5833872"/>
+          </a:xfrm>
+          <a:prstGeom prst="rect">
+            <a:avLst/>
+          </a:prstGeom>
+        </p:spPr>
+      </p:pic>
+      <p:sp>
+        <p:nvSpPr>
+          <p:cNvPr id="4" name="Text 1"/>
+          <p:cNvSpPr/>
+          <p:nvPr/>
+        </p:nvSpPr>
+        <p:spPr>
+          <a:xfrm>
+            <a:off x="4069080" y="1005840"/>
+            <a:ext cx="7802575" cy="731520"/>
+          </a:xfrm>
+          <a:prstGeom prst="rect">
+            <a:avLst/>
+          </a:prstGeom>
+          <a:noFill/>
+          <a:ln/>
+        </p:spPr>
+        <p:txBody>
+          <a:bodyPr wrap="square" lIns="0" tIns="0" rIns="0" bIns="0" rtlCol="0" anchor="ctr">
+            <a:normAutofit/>
+          </a:bodyPr>
+          <a:lstStyle/>
+          <a:p>
+            <a:pPr algn="ctr" indent="0" marL="0">
+              <a:buNone/>
+            </a:pPr>
+            <a:r>
+              <a:rPr lang="en-US" sz="3600" b="1" dirty="0">
+                <a:solidFill>
+                  <a:srgbClr val="990011"/>
+                </a:solidFill>
+                <a:latin typeface="Times New Roman" pitchFamily="34" charset="0"/>
+                <a:ea typeface="Times New Roman" pitchFamily="34" charset="-122"/>
+                <a:cs typeface="Times New Roman" pitchFamily="34" charset="-120"/>
+              </a:rPr>
+              <a:t>Remediation</a:t>
+            </a:r>
+            <a:endParaRPr lang="en-US" sz="3600" dirty="0"/>
+          </a:p>
+        </p:txBody>
+      </p:sp>
+      <p:sp>
+        <p:nvSpPr>
+          <p:cNvPr id="5" name="Text 2"/>
+          <p:cNvSpPr/>
+          <p:nvPr/>
+        </p:nvSpPr>
+        <p:spPr>
+          <a:xfrm>
+            <a:off x="4069080" y="1783080"/>
+            <a:ext cx="7802575" cy="4663440"/>
+          </a:xfrm>
+          <a:prstGeom prst="rect">
+            <a:avLst/>
+          </a:prstGeom>
+          <a:noFill/>
+          <a:ln/>
+        </p:spPr>
+        <p:txBody>
+          <a:bodyPr wrap="square" lIns="0" tIns="0" rIns="0" bIns="0" rtlCol="0" anchor="t"/>
+          <a:lstStyle/>
+          <a:p>
+            <a:pPr algn="l" indent="0" marL="0">
+              <a:spcAft>
+                <a:spcPts val="800"/>
+              </a:spcAft>
+              <a:buNone/>
+            </a:pPr>
+            <a:r>
+              <a:rPr lang="en-US" sz="4000" b="1" dirty="0">
+                <a:solidFill>
+                  <a:srgbClr val="111111"/>
+                </a:solidFill>
+                <a:latin typeface="Times New Roman" pitchFamily="34" charset="0"/>
+                <a:ea typeface="Times New Roman" pitchFamily="34" charset="-122"/>
+                <a:cs typeface="Times New Roman" pitchFamily="34" charset="-120"/>
+              </a:rPr>
+              <a:t>Fill in the blanks:</a:t>
+            </a:r>
+            <a:endParaRPr lang="en-US" sz="4000" dirty="0"/>
+          </a:p>
+          <a:p>
+            <a:pPr algn="l" marL="342900" indent="-342900">
+              <a:spcAft>
+                <a:spcPts val="800"/>
+              </a:spcAft>
+              <a:buSzPct val="100000"/>
+              <a:buFont typeface="+mj-lt"/>
+              <a:buAutoNum type="arabicPeriod" startAt="1"/>
+            </a:pPr>
+            <a:r>
+              <a:rPr lang="en-US" sz="4000" dirty="0">
+                <a:solidFill>
+                  <a:srgbClr val="111111"/>
+                </a:solidFill>
+                <a:latin typeface="Times New Roman" pitchFamily="34" charset="0"/>
+                <a:ea typeface="Times New Roman" pitchFamily="34" charset="-122"/>
+                <a:cs typeface="Times New Roman" pitchFamily="34" charset="-120"/>
+              </a:rPr>
+              <a:t>"Geo" means the ______.</a:t>
+            </a:r>
+            <a:endParaRPr lang="en-US" sz="4000" dirty="0"/>
+          </a:p>
+          <a:p>
+            <a:pPr algn="l" marL="342900" indent="-342900">
+              <a:spcAft>
+                <a:spcPts val="800"/>
+              </a:spcAft>
+              <a:buSzPct val="100000"/>
+              <a:buFont typeface="+mj-lt"/>
+              <a:buAutoNum type="arabicPeriod" startAt="1"/>
+            </a:pPr>
+            <a:r>
+              <a:rPr lang="en-US" sz="4000" dirty="0">
+                <a:solidFill>
+                  <a:srgbClr val="111111"/>
+                </a:solidFill>
+                <a:latin typeface="Times New Roman" pitchFamily="34" charset="0"/>
+                <a:ea typeface="Times New Roman" pitchFamily="34" charset="-122"/>
+                <a:cs typeface="Times New Roman" pitchFamily="34" charset="-120"/>
+              </a:rPr>
+              <a:t>The study of relief and climate is ______ geography.</a:t>
+            </a:r>
+            <a:endParaRPr lang="en-US" sz="4000" dirty="0"/>
+          </a:p>
+          <a:p>
+            <a:pPr algn="l" marL="342900" indent="-342900">
+              <a:spcAft>
+                <a:spcPts val="800"/>
+              </a:spcAft>
+              <a:buSzPct val="100000"/>
+              <a:buFont typeface="+mj-lt"/>
+              <a:buAutoNum type="arabicPeriod" startAt="1"/>
+            </a:pPr>
+            <a:r>
+              <a:rPr lang="en-US" sz="4000" dirty="0">
+                <a:solidFill>
+                  <a:srgbClr val="111111"/>
+                </a:solidFill>
+                <a:latin typeface="Times New Roman" pitchFamily="34" charset="0"/>
+                <a:ea typeface="Times New Roman" pitchFamily="34" charset="-122"/>
+                <a:cs typeface="Times New Roman" pitchFamily="34" charset="-120"/>
+              </a:rPr>
+              <a:t>The study of population and towns is ______ geography.</a:t>
+            </a:r>
+            <a:endParaRPr lang="en-US" sz="4000" dirty="0"/>
+          </a:p>
+        </p:txBody>
+      </p:sp>
+      <p:sp>
+        <p:nvSpPr>
+          <p:cNvPr id="25" name="Slide Number Placeholder 0"/>
+          <p:cNvSpPr>
+            <a:spLocks noGrp="1"/>
+          </p:cNvSpPr>
+          <p:nvPr>
+            <p:ph type="sldNum" sz="quarter" idx="4294967295"/>
+          </p:nvPr>
+        </p:nvSpPr>
+        <p:spPr>
+          <a:xfrm>
+            <a:off x="27432" y="91440"/>
+            <a:ext cx="585216" cy="475488"/>
+          </a:xfrm>
+          <a:prstGeom prst="rect">
+            <a:avLst/>
+          </a:prstGeom>
+          <a:extLst>
+            <a:ext uri="{C572A759-6A51-4108-AA02-DFA0A04FC94B}">
+              <ma14:wrappingTextBoxFlag xmlns:ma14="http://schemas.microsoft.com/office/mac/drawingml/2011/main" val="0"/>
+            </a:ext>
+          </a:extLst>
+        </p:spPr>
+        <p:txBody>
+          <a:bodyPr/>
+          <a:lstStyle>
+            <a:lvl1pPr>
+              <a:defRPr sz="2000">
+                <a:solidFill>
+                  <a:srgbClr val="FFFFFF"/>
+                </a:solidFill>
+                <a:latin typeface="Calibri"/>
+                <a:ea typeface="Calibri"/>
+                <a:cs typeface="Calibri"/>
+              </a:defRPr>
+            </a:lvl1pPr>
+          </a:lstStyle>
+          <a:p>
+            <a:pPr algn="ctr"/>
+            <a:fld id="{F7021451-1387-4CA6-816F-3879F97B5CBC}" type="slidenum">
+              <a:rPr b="1" lang="en-US"/>
+              <a:t>50</a:t>
+            </a:fld>
+            <a:endParaRPr lang="en-US"/>
+          </a:p>
+        </p:txBody>
+      </p:sp>
+    </p:spTree>
+  </p:cSld>
+  <p:clrMapOvr>
+    <a:masterClrMapping/>
+  </p:clrMapOvr>
+</p:sld>
+</file>
+
+<file path=ppt/slides/slide51.xml><?xml version="1.0" encoding="utf-8"?>
+<p:sld xmlns:a="http://schemas.openxmlformats.org/drawingml/2006/main" xmlns:r="http://schemas.openxmlformats.org/officeDocument/2006/relationships" xmlns:p="http://schemas.openxmlformats.org/presentationml/2006/main">
+  <p:cSld name="Slide 51">
+    <p:spTree>
+      <p:nvGrpSpPr>
+        <p:cNvPr id="1" name=""/>
+        <p:cNvGrpSpPr/>
+        <p:nvPr/>
+      </p:nvGrpSpPr>
+      <p:grpSpPr>
+        <a:xfrm>
+          <a:off x="0" y="0"/>
+          <a:ext cx="0" cy="0"/>
+          <a:chOff x="0" y="0"/>
+          <a:chExt cx="0" cy="0"/>
+        </a:xfrm>
+      </p:grpSpPr>
+      <p:sp>
+        <p:nvSpPr>
+          <p:cNvPr id="2" name="Text 0"/>
+          <p:cNvSpPr/>
+          <p:nvPr/>
+        </p:nvSpPr>
+        <p:spPr>
+          <a:xfrm>
+            <a:off x="457200" y="713232"/>
+            <a:ext cx="11368735" cy="274320"/>
+          </a:xfrm>
+          <a:prstGeom prst="rect">
+            <a:avLst/>
+          </a:prstGeom>
+          <a:noFill/>
+          <a:ln/>
+        </p:spPr>
+        <p:txBody>
+          <a:bodyPr wrap="square" lIns="0" tIns="0" rIns="0" bIns="0" rtlCol="0" anchor="ctr"/>
+          <a:lstStyle/>
+          <a:p>
+            <a:pPr algn="r" indent="0" marL="0">
+              <a:buNone/>
+            </a:pPr>
+            <a:r>
+              <a:rPr lang="en-US" sz="1400" b="1" dirty="0">
+                <a:solidFill>
+                  <a:srgbClr val="1C3F6E"/>
+                </a:solidFill>
+                <a:latin typeface="Calibri" pitchFamily="34" charset="0"/>
+                <a:ea typeface="Calibri" pitchFamily="34" charset="-122"/>
+                <a:cs typeface="Calibri" pitchFamily="34" charset="-120"/>
+              </a:rPr>
+              <a:t>HOMEWORK</a:t>
+            </a:r>
+            <a:endParaRPr lang="en-US" sz="1400" dirty="0"/>
+          </a:p>
+        </p:txBody>
+      </p:sp>
+      <p:pic>
+        <p:nvPicPr>
+          <p:cNvPr id="3" name="Image 0" descr="/home/claude/f4/img/minesec_sheet.png">    </p:cNvPr>
+          <p:cNvPicPr>
+            <a:picLocks noChangeAspect="1"/>
+          </p:cNvPicPr>
+          <p:nvPr/>
+        </p:nvPicPr>
+        <p:blipFill>
+          <a:blip r:embed="rId1"/>
+          <a:stretch>
+            <a:fillRect/>
+          </a:stretch>
+        </p:blipFill>
+        <p:spPr>
+          <a:xfrm>
+            <a:off x="0" y="658368"/>
+            <a:ext cx="5120640" cy="5833872"/>
+          </a:xfrm>
+          <a:prstGeom prst="rect">
+            <a:avLst/>
+          </a:prstGeom>
+        </p:spPr>
+      </p:pic>
+      <p:sp>
+        <p:nvSpPr>
+          <p:cNvPr id="4" name="Text 1"/>
+          <p:cNvSpPr/>
+          <p:nvPr/>
+        </p:nvSpPr>
+        <p:spPr>
+          <a:xfrm>
+            <a:off x="5349240" y="1005840"/>
+            <a:ext cx="6522415" cy="731520"/>
+          </a:xfrm>
+          <a:prstGeom prst="rect">
+            <a:avLst/>
+          </a:prstGeom>
+          <a:noFill/>
+          <a:ln/>
+        </p:spPr>
+        <p:txBody>
+          <a:bodyPr wrap="square" lIns="0" tIns="0" rIns="0" bIns="0" rtlCol="0" anchor="ctr">
+            <a:normAutofit/>
+          </a:bodyPr>
+          <a:lstStyle/>
+          <a:p>
+            <a:pPr algn="ctr" indent="0" marL="0">
+              <a:buNone/>
+            </a:pPr>
+            <a:r>
+              <a:rPr lang="en-US" sz="3600" b="1" dirty="0">
+                <a:solidFill>
+                  <a:srgbClr val="990011"/>
+                </a:solidFill>
+                <a:latin typeface="Times New Roman" pitchFamily="34" charset="0"/>
+                <a:ea typeface="Times New Roman" pitchFamily="34" charset="-122"/>
+                <a:cs typeface="Times New Roman" pitchFamily="34" charset="-120"/>
+              </a:rPr>
+              <a:t>Homework</a:t>
+            </a:r>
+            <a:endParaRPr lang="en-US" sz="3600" dirty="0"/>
+          </a:p>
+        </p:txBody>
+      </p:sp>
+      <p:sp>
+        <p:nvSpPr>
+          <p:cNvPr id="5" name="Text 2"/>
+          <p:cNvSpPr/>
+          <p:nvPr/>
+        </p:nvSpPr>
+        <p:spPr>
+          <a:xfrm>
+            <a:off x="5349240" y="1783080"/>
+            <a:ext cx="6522415" cy="4663440"/>
+          </a:xfrm>
+          <a:prstGeom prst="rect">
+            <a:avLst/>
+          </a:prstGeom>
+          <a:noFill/>
+          <a:ln/>
+        </p:spPr>
+        <p:txBody>
+          <a:bodyPr wrap="square" lIns="0" tIns="0" rIns="0" bIns="0" rtlCol="0" anchor="t"/>
+          <a:lstStyle/>
+          <a:p>
+            <a:pPr algn="l" indent="0" marL="0">
+              <a:spcAft>
+                <a:spcPts val="800"/>
+              </a:spcAft>
+              <a:buNone/>
+            </a:pPr>
+            <a:r>
+              <a:rPr lang="en-US" sz="4000" dirty="0">
+                <a:solidFill>
+                  <a:srgbClr val="111111"/>
+                </a:solidFill>
+                <a:latin typeface="Times New Roman" pitchFamily="34" charset="0"/>
+                <a:ea typeface="Times New Roman" pitchFamily="34" charset="-122"/>
+                <a:cs typeface="Times New Roman" pitchFamily="34" charset="-120"/>
+              </a:rPr>
+              <a:t>Write three physical features and three human activities that you see on your way to school.</a:t>
+            </a:r>
+            <a:endParaRPr lang="en-US" sz="4000" dirty="0"/>
+          </a:p>
+        </p:txBody>
+      </p:sp>
+      <p:sp>
+        <p:nvSpPr>
+          <p:cNvPr id="25" name="Slide Number Placeholder 0"/>
+          <p:cNvSpPr>
+            <a:spLocks noGrp="1"/>
+          </p:cNvSpPr>
+          <p:nvPr>
+            <p:ph type="sldNum" sz="quarter" idx="4294967295"/>
+          </p:nvPr>
+        </p:nvSpPr>
+        <p:spPr>
+          <a:xfrm>
+            <a:off x="27432" y="91440"/>
+            <a:ext cx="585216" cy="475488"/>
+          </a:xfrm>
+          <a:prstGeom prst="rect">
+            <a:avLst/>
+          </a:prstGeom>
+          <a:extLst>
+            <a:ext uri="{C572A759-6A51-4108-AA02-DFA0A04FC94B}">
+              <ma14:wrappingTextBoxFlag xmlns:ma14="http://schemas.microsoft.com/office/mac/drawingml/2011/main" val="0"/>
+            </a:ext>
+          </a:extLst>
+        </p:spPr>
+        <p:txBody>
+          <a:bodyPr/>
+          <a:lstStyle>
+            <a:lvl1pPr>
+              <a:defRPr sz="2000">
+                <a:solidFill>
+                  <a:srgbClr val="FFFFFF"/>
+                </a:solidFill>
+                <a:latin typeface="Calibri"/>
+                <a:ea typeface="Calibri"/>
+                <a:cs typeface="Calibri"/>
+              </a:defRPr>
+            </a:lvl1pPr>
+          </a:lstStyle>
+          <a:p>
+            <a:pPr algn="ctr"/>
+            <a:fld id="{F7021451-1387-4CA6-816F-3879F97B5CBC}" type="slidenum">
+              <a:rPr b="1" lang="en-US"/>
+              <a:t>51</a:t>
+            </a:fld>
+            <a:endParaRPr lang="en-US"/>
+          </a:p>
+        </p:txBody>
+      </p:sp>
+    </p:spTree>
+  </p:cSld>
+  <p:clrMapOvr>
+    <a:masterClrMapping/>
+  </p:clrMapOvr>
+</p:sld>
+</file>
+
+<file path=ppt/slides/slide52.xml><?xml version="1.0" encoding="utf-8"?>
+<p:sld xmlns:a="http://schemas.openxmlformats.org/drawingml/2006/main" xmlns:r="http://schemas.openxmlformats.org/officeDocument/2006/relationships" xmlns:p="http://schemas.openxmlformats.org/presentationml/2006/main">
+  <p:cSld name="Slide 52">
+    <p:spTree>
+      <p:nvGrpSpPr>
+        <p:cNvPr id="1" name=""/>
+        <p:cNvGrpSpPr/>
+        <p:nvPr/>
+      </p:nvGrpSpPr>
+      <p:grpSpPr>
+        <a:xfrm>
+          <a:off x="0" y="0"/>
+          <a:ext cx="0" cy="0"/>
+          <a:chOff x="0" y="0"/>
+          <a:chExt cx="0" cy="0"/>
+        </a:xfrm>
+      </p:grpSpPr>
+      <p:sp>
+        <p:nvSpPr>
+          <p:cNvPr id="2" name="Text 0"/>
+          <p:cNvSpPr/>
+          <p:nvPr/>
+        </p:nvSpPr>
+        <p:spPr>
+          <a:xfrm>
+            <a:off x="457200" y="713232"/>
+            <a:ext cx="11368735" cy="274320"/>
+          </a:xfrm>
+          <a:prstGeom prst="rect">
+            <a:avLst/>
+          </a:prstGeom>
+          <a:noFill/>
+          <a:ln/>
+        </p:spPr>
+        <p:txBody>
+          <a:bodyPr wrap="square" lIns="0" tIns="0" rIns="0" bIns="0" rtlCol="0" anchor="ctr"/>
+          <a:lstStyle/>
+          <a:p>
+            <a:pPr algn="r" indent="0" marL="0">
+              <a:buNone/>
+            </a:pPr>
+            <a:r>
+              <a:rPr lang="en-US" sz="1400" b="1" dirty="0">
+                <a:solidFill>
+                  <a:srgbClr val="1C3F6E"/>
+                </a:solidFill>
+                <a:latin typeface="Calibri" pitchFamily="34" charset="0"/>
+                <a:ea typeface="Calibri" pitchFamily="34" charset="-122"/>
+                <a:cs typeface="Calibri" pitchFamily="34" charset="-120"/>
+              </a:rPr>
+              <a:t>NEXT LESSON</a:t>
+            </a:r>
+            <a:endParaRPr lang="en-US" sz="1400" dirty="0"/>
+          </a:p>
+        </p:txBody>
+      </p:sp>
+      <p:pic>
+        <p:nvPicPr>
+          <p:cNvPr id="3" name="Image 0" descr="/home/claude/f4/img/minesec_sheet.png">    </p:cNvPr>
+          <p:cNvPicPr>
+            <a:picLocks noChangeAspect="1"/>
+          </p:cNvPicPr>
+          <p:nvPr/>
+        </p:nvPicPr>
+        <p:blipFill>
+          <a:blip r:embed="rId1"/>
+          <a:stretch>
+            <a:fillRect/>
+          </a:stretch>
+        </p:blipFill>
+        <p:spPr>
+          <a:xfrm>
+            <a:off x="0" y="658368"/>
+            <a:ext cx="5120640" cy="5833872"/>
+          </a:xfrm>
+          <a:prstGeom prst="rect">
+            <a:avLst/>
+          </a:prstGeom>
+        </p:spPr>
+      </p:pic>
+      <p:sp>
+        <p:nvSpPr>
+          <p:cNvPr id="4" name="Text 1"/>
+          <p:cNvSpPr/>
+          <p:nvPr/>
+        </p:nvSpPr>
+        <p:spPr>
+          <a:xfrm>
+            <a:off x="5349240" y="1005840"/>
+            <a:ext cx="6522415" cy="731520"/>
+          </a:xfrm>
+          <a:prstGeom prst="rect">
+            <a:avLst/>
+          </a:prstGeom>
+          <a:noFill/>
+          <a:ln/>
+        </p:spPr>
+        <p:txBody>
+          <a:bodyPr wrap="square" lIns="0" tIns="0" rIns="0" bIns="0" rtlCol="0" anchor="ctr">
+            <a:normAutofit/>
+          </a:bodyPr>
+          <a:lstStyle/>
+          <a:p>
+            <a:pPr algn="ctr" indent="0" marL="0">
+              <a:buNone/>
+            </a:pPr>
+            <a:r>
+              <a:rPr lang="en-US" sz="3600" b="1" dirty="0">
+                <a:solidFill>
+                  <a:srgbClr val="990011"/>
+                </a:solidFill>
+                <a:latin typeface="Times New Roman" pitchFamily="34" charset="0"/>
+                <a:ea typeface="Times New Roman" pitchFamily="34" charset="-122"/>
+                <a:cs typeface="Times New Roman" pitchFamily="34" charset="-120"/>
+              </a:rPr>
+              <a:t>Next Lesson</a:t>
+            </a:r>
+            <a:endParaRPr lang="en-US" sz="3600" dirty="0"/>
+          </a:p>
+        </p:txBody>
+      </p:sp>
+      <p:sp>
+        <p:nvSpPr>
+          <p:cNvPr id="5" name="Text 2"/>
+          <p:cNvSpPr/>
+          <p:nvPr/>
+        </p:nvSpPr>
+        <p:spPr>
+          <a:xfrm>
+            <a:off x="5349240" y="1783080"/>
+            <a:ext cx="6522415" cy="4663440"/>
+          </a:xfrm>
+          <a:prstGeom prst="rect">
+            <a:avLst/>
+          </a:prstGeom>
+          <a:noFill/>
+          <a:ln/>
+        </p:spPr>
+        <p:txBody>
+          <a:bodyPr wrap="square" lIns="0" tIns="0" rIns="0" bIns="0" rtlCol="0" anchor="ctr"/>
+          <a:lstStyle/>
+          <a:p>
+            <a:pPr algn="ctr" indent="0" marL="0">
+              <a:spcAft>
+                <a:spcPts val="800"/>
+              </a:spcAft>
+              <a:buNone/>
+            </a:pPr>
+            <a:r>
+              <a:rPr lang="en-US" sz="4000" b="1" dirty="0">
+                <a:solidFill>
+                  <a:srgbClr val="111111"/>
+                </a:solidFill>
+                <a:latin typeface="Times New Roman" pitchFamily="34" charset="0"/>
+                <a:ea typeface="Times New Roman" pitchFamily="34" charset="-122"/>
+                <a:cs typeface="Times New Roman" pitchFamily="34" charset="-120"/>
+              </a:rPr>
+              <a:t>Our next lesson will be on:</a:t>
+            </a:r>
+            <a:endParaRPr lang="en-US" sz="4000" dirty="0"/>
+          </a:p>
+          <a:p>
+            <a:pPr algn="ctr" indent="0" marL="0">
+              <a:spcAft>
+                <a:spcPts val="800"/>
+              </a:spcAft>
+              <a:buNone/>
+            </a:pPr>
+            <a:r>
+              <a:rPr lang="en-US" sz="4000" b="1" dirty="0">
+                <a:solidFill>
+                  <a:srgbClr val="990011"/>
+                </a:solidFill>
+                <a:latin typeface="Times New Roman" pitchFamily="34" charset="0"/>
+                <a:ea typeface="Times New Roman" pitchFamily="34" charset="-122"/>
+                <a:cs typeface="Times New Roman" pitchFamily="34" charset="-120"/>
+              </a:rPr>
+              <a:t>Lesson 2: Our Planet, the Earth</a:t>
+            </a:r>
+            <a:endParaRPr lang="en-US" sz="4000" dirty="0"/>
+          </a:p>
+        </p:txBody>
+      </p:sp>
+      <p:sp>
+        <p:nvSpPr>
+          <p:cNvPr id="25" name="Slide Number Placeholder 0"/>
+          <p:cNvSpPr>
+            <a:spLocks noGrp="1"/>
+          </p:cNvSpPr>
+          <p:nvPr>
+            <p:ph type="sldNum" sz="quarter" idx="4294967295"/>
+          </p:nvPr>
+        </p:nvSpPr>
+        <p:spPr>
+          <a:xfrm>
+            <a:off x="27432" y="91440"/>
+            <a:ext cx="585216" cy="475488"/>
+          </a:xfrm>
+          <a:prstGeom prst="rect">
+            <a:avLst/>
+          </a:prstGeom>
+          <a:extLst>
+            <a:ext uri="{C572A759-6A51-4108-AA02-DFA0A04FC94B}">
+              <ma14:wrappingTextBoxFlag xmlns:ma14="http://schemas.microsoft.com/office/mac/drawingml/2011/main" val="0"/>
+            </a:ext>
+          </a:extLst>
+        </p:spPr>
+        <p:txBody>
+          <a:bodyPr/>
+          <a:lstStyle>
+            <a:lvl1pPr>
+              <a:defRPr sz="2000">
+                <a:solidFill>
+                  <a:srgbClr val="FFFFFF"/>
+                </a:solidFill>
+                <a:latin typeface="Calibri"/>
+                <a:ea typeface="Calibri"/>
+                <a:cs typeface="Calibri"/>
+              </a:defRPr>
+            </a:lvl1pPr>
+          </a:lstStyle>
+          <a:p>
+            <a:pPr algn="ctr"/>
+            <a:fld id="{F7021451-1387-4CA6-816F-3879F97B5CBC}" type="slidenum">
+              <a:rPr b="1" lang="en-US"/>
+              <a:t>52</a:t>
+            </a:fld>
+            <a:endParaRPr lang="en-US"/>
+          </a:p>
+        </p:txBody>
+      </p:sp>
+    </p:spTree>
+  </p:cSld>
+  <p:clrMapOvr>
+    <a:masterClrMapping/>
+  </p:clrMapOvr>
+</p:sld>
+</file>
+
+<file path=ppt/slides/slide53.xml><?xml version="1.0" encoding="utf-8"?>
+<p:sld xmlns:a="http://schemas.openxmlformats.org/drawingml/2006/main" xmlns:r="http://schemas.openxmlformats.org/officeDocument/2006/relationships" xmlns:p="http://schemas.openxmlformats.org/presentationml/2006/main">
+  <p:cSld name="Slide 53">
+    <p:spTree>
+      <p:nvGrpSpPr>
+        <p:cNvPr id="1" name=""/>
+        <p:cNvGrpSpPr/>
+        <p:nvPr/>
+      </p:nvGrpSpPr>
+      <p:grpSpPr>
+        <a:xfrm>
+          <a:off x="0" y="0"/>
+          <a:ext cx="0" cy="0"/>
+          <a:chOff x="0" y="0"/>
+          <a:chExt cx="0" cy="0"/>
+        </a:xfrm>
+      </p:grpSpPr>
+      <p:sp>
+        <p:nvSpPr>
+          <p:cNvPr id="2" name="Text 0"/>
+          <p:cNvSpPr/>
+          <p:nvPr/>
+        </p:nvSpPr>
+        <p:spPr>
+          <a:xfrm>
+            <a:off x="457200" y="713232"/>
+            <a:ext cx="11368735" cy="274320"/>
+          </a:xfrm>
+          <a:prstGeom prst="rect">
+            <a:avLst/>
+          </a:prstGeom>
+          <a:noFill/>
+          <a:ln/>
+        </p:spPr>
+        <p:txBody>
+          <a:bodyPr wrap="square" lIns="0" tIns="0" rIns="0" bIns="0" rtlCol="0" anchor="ctr"/>
+          <a:lstStyle/>
+          <a:p>
+            <a:pPr algn="r" indent="0" marL="0">
+              <a:buNone/>
+            </a:pPr>
+            <a:r>
+              <a:rPr lang="en-US" sz="1400" b="1" dirty="0">
+                <a:solidFill>
+                  <a:srgbClr val="1C3F6E"/>
+                </a:solidFill>
+                <a:latin typeface="Calibri" pitchFamily="34" charset="0"/>
+                <a:ea typeface="Calibri" pitchFamily="34" charset="-122"/>
+                <a:cs typeface="Calibri" pitchFamily="34" charset="-120"/>
+              </a:rPr>
               <a:t>BILINGUAL GAME</a:t>
             </a:r>
             <a:endParaRPr lang="en-US" sz="1400" dirty="0"/>
@@ -17086,7 +19198,7 @@
       </p:sp>
       <p:graphicFrame>
         <p:nvGraphicFramePr>
-          <p:cNvPr id="49" name="Table 0"/>
+          <p:cNvPr id="54" name="Table 0"/>
           <p:cNvGraphicFramePr>
             <a:graphicFrameLocks noGrp="1"/>
           </p:cNvGraphicFramePr>
@@ -18122,7 +20234,7 @@
             <a:pPr algn="ctr"/>
             <a:fld id="{F7021451-1387-4CA6-816F-3879F97B5CBC}" type="slidenum">
               <a:rPr b="1" lang="en-US"/>
-              <a:t>48</a:t>
+              <a:t>53</a:t>
             </a:fld>
             <a:endParaRPr lang="en-US"/>
           </a:p>
@@ -18136,9 +20248,9 @@
 </p:sld>
 </file>
 
-<file path=ppt/slides/slide49.xml><?xml version="1.0" encoding="utf-8"?>
+<file path=ppt/slides/slide54.xml><?xml version="1.0" encoding="utf-8"?>
 <p:sld xmlns:a="http://schemas.openxmlformats.org/drawingml/2006/main" xmlns:r="http://schemas.openxmlformats.org/officeDocument/2006/relationships" xmlns:p="http://schemas.openxmlformats.org/presentationml/2006/main">
-  <p:cSld name="Slide 49">
+  <p:cSld name="Slide 54">
     <p:spTree>
       <p:nvGrpSpPr>
         <p:cNvPr id="1" name=""/>
@@ -18233,7 +20345,7 @@
       </p:sp>
       <p:graphicFrame>
         <p:nvGraphicFramePr>
-          <p:cNvPr id="50" name="Table 0"/>
+          <p:cNvPr id="55" name="Table 0"/>
           <p:cNvGraphicFramePr>
             <a:graphicFrameLocks noGrp="1"/>
           </p:cNvGraphicFramePr>
@@ -18855,7 +20967,7 @@
             <a:pPr algn="ctr"/>
             <a:fld id="{F7021451-1387-4CA6-816F-3879F97B5CBC}" type="slidenum">
               <a:rPr b="1" lang="en-US"/>
-              <a:t>49</a:t>
+              <a:t>54</a:t>
             </a:fld>
             <a:endParaRPr lang="en-US"/>
           </a:p>
@@ -18869,9 +20981,9 @@
 </p:sld>
 </file>
 
-<file path=ppt/slides/slide5.xml><?xml version="1.0" encoding="utf-8"?>
+<file path=ppt/slides/slide55.xml><?xml version="1.0" encoding="utf-8"?>
 <p:sld xmlns:a="http://schemas.openxmlformats.org/drawingml/2006/main" xmlns:r="http://schemas.openxmlformats.org/officeDocument/2006/relationships" xmlns:p="http://schemas.openxmlformats.org/presentationml/2006/main">
-  <p:cSld name="Slide 5">
+  <p:cSld name="Slide 55">
     <p:spTree>
       <p:nvGrpSpPr>
         <p:cNvPr id="1" name=""/>
@@ -18919,269 +21031,6 @@
                 <a:ea typeface="Calibri" pitchFamily="34" charset="-122"/>
                 <a:cs typeface="Calibri" pitchFamily="34" charset="-120"/>
               </a:rPr>
-              <a:t>OBJECTIVES</a:t>
-            </a:r>
-            <a:endParaRPr lang="en-US" sz="1400" dirty="0"/>
-          </a:p>
-        </p:txBody>
-      </p:sp>
-      <p:pic>
-        <p:nvPicPr>
-          <p:cNvPr id="3" name="Image 0" descr="/home/claude/f4/img/minesec_sheet.png">    </p:cNvPr>
-          <p:cNvPicPr>
-            <a:picLocks noChangeAspect="1"/>
-          </p:cNvPicPr>
-          <p:nvPr/>
-        </p:nvPicPr>
-        <p:blipFill>
-          <a:blip r:embed="rId1"/>
-          <a:stretch>
-            <a:fillRect/>
-          </a:stretch>
-        </p:blipFill>
-        <p:spPr>
-          <a:xfrm>
-            <a:off x="0" y="658368"/>
-            <a:ext cx="5120640" cy="5833872"/>
-          </a:xfrm>
-          <a:prstGeom prst="rect">
-            <a:avLst/>
-          </a:prstGeom>
-        </p:spPr>
-      </p:pic>
-      <p:sp>
-        <p:nvSpPr>
-          <p:cNvPr id="4" name="Text 1"/>
-          <p:cNvSpPr/>
-          <p:nvPr/>
-        </p:nvSpPr>
-        <p:spPr>
-          <a:xfrm>
-            <a:off x="5349240" y="1005840"/>
-            <a:ext cx="6522415" cy="731520"/>
-          </a:xfrm>
-          <a:prstGeom prst="rect">
-            <a:avLst/>
-          </a:prstGeom>
-          <a:noFill/>
-          <a:ln/>
-        </p:spPr>
-        <p:txBody>
-          <a:bodyPr wrap="square" lIns="0" tIns="0" rIns="0" bIns="0" rtlCol="0" anchor="ctr">
-            <a:normAutofit/>
-          </a:bodyPr>
-          <a:lstStyle/>
-          <a:p>
-            <a:pPr algn="ctr" indent="0" marL="0">
-              <a:buNone/>
-            </a:pPr>
-            <a:r>
-              <a:rPr lang="en-US" sz="3600" b="1" dirty="0">
-                <a:solidFill>
-                  <a:srgbClr val="990011"/>
-                </a:solidFill>
-                <a:latin typeface="Times New Roman" pitchFamily="34" charset="0"/>
-                <a:ea typeface="Times New Roman" pitchFamily="34" charset="-122"/>
-                <a:cs typeface="Times New Roman" pitchFamily="34" charset="-120"/>
-              </a:rPr>
-              <a:t>Objectives</a:t>
-            </a:r>
-            <a:endParaRPr lang="en-US" sz="3600" dirty="0"/>
-          </a:p>
-        </p:txBody>
-      </p:sp>
-      <p:sp>
-        <p:nvSpPr>
-          <p:cNvPr id="5" name="Text 2"/>
-          <p:cNvSpPr/>
-          <p:nvPr/>
-        </p:nvSpPr>
-        <p:spPr>
-          <a:xfrm>
-            <a:off x="5349240" y="1783080"/>
-            <a:ext cx="6522415" cy="4663440"/>
-          </a:xfrm>
-          <a:prstGeom prst="rect">
-            <a:avLst/>
-          </a:prstGeom>
-          <a:noFill/>
-          <a:ln/>
-        </p:spPr>
-        <p:txBody>
-          <a:bodyPr wrap="square" lIns="0" tIns="0" rIns="0" bIns="0" rtlCol="0" anchor="t"/>
-          <a:lstStyle/>
-          <a:p>
-            <a:pPr algn="l" indent="0" marL="0">
-              <a:spcAft>
-                <a:spcPts val="800"/>
-              </a:spcAft>
-              <a:buNone/>
-            </a:pPr>
-            <a:r>
-              <a:rPr lang="en-US" sz="4000" b="1" dirty="0">
-                <a:solidFill>
-                  <a:srgbClr val="111111"/>
-                </a:solidFill>
-                <a:latin typeface="Times New Roman" pitchFamily="34" charset="0"/>
-                <a:ea typeface="Times New Roman" pitchFamily="34" charset="-122"/>
-                <a:cs typeface="Times New Roman" pitchFamily="34" charset="-120"/>
-              </a:rPr>
-              <a:t>By the end of this lesson, you should be able to:</a:t>
-            </a:r>
-            <a:endParaRPr lang="en-US" sz="4000" dirty="0"/>
-          </a:p>
-          <a:p>
-            <a:pPr algn="l" marL="342900" indent="-342900">
-              <a:spcAft>
-                <a:spcPts val="800"/>
-              </a:spcAft>
-              <a:buSzPct val="100000"/>
-              <a:buFont typeface="+mj-lt"/>
-              <a:buAutoNum type="arabicPeriod" startAt="1"/>
-            </a:pPr>
-            <a:r>
-              <a:rPr lang="en-US" sz="4000" dirty="0">
-                <a:solidFill>
-                  <a:srgbClr val="111111"/>
-                </a:solidFill>
-                <a:latin typeface="Times New Roman" pitchFamily="34" charset="0"/>
-                <a:ea typeface="Times New Roman" pitchFamily="34" charset="-122"/>
-                <a:cs typeface="Times New Roman" pitchFamily="34" charset="-120"/>
-              </a:rPr>
-              <a:t>Define geography.</a:t>
-            </a:r>
-            <a:endParaRPr lang="en-US" sz="4000" dirty="0"/>
-          </a:p>
-          <a:p>
-            <a:pPr algn="l" marL="342900" indent="-342900">
-              <a:spcAft>
-                <a:spcPts val="800"/>
-              </a:spcAft>
-              <a:buSzPct val="100000"/>
-              <a:buFont typeface="+mj-lt"/>
-              <a:buAutoNum type="arabicPeriod" startAt="1"/>
-            </a:pPr>
-            <a:r>
-              <a:rPr lang="en-US" sz="4000" dirty="0">
-                <a:solidFill>
-                  <a:srgbClr val="111111"/>
-                </a:solidFill>
-                <a:latin typeface="Times New Roman" pitchFamily="34" charset="0"/>
-                <a:ea typeface="Times New Roman" pitchFamily="34" charset="-122"/>
-                <a:cs typeface="Times New Roman" pitchFamily="34" charset="-120"/>
-              </a:rPr>
-              <a:t>Identify the branches and sub-branches of geography.</a:t>
-            </a:r>
-            <a:endParaRPr lang="en-US" sz="4000" dirty="0"/>
-          </a:p>
-        </p:txBody>
-      </p:sp>
-      <p:sp>
-        <p:nvSpPr>
-          <p:cNvPr id="25" name="Slide Number Placeholder 0"/>
-          <p:cNvSpPr>
-            <a:spLocks noGrp="1"/>
-          </p:cNvSpPr>
-          <p:nvPr>
-            <p:ph type="sldNum" sz="quarter" idx="4294967295"/>
-          </p:nvPr>
-        </p:nvSpPr>
-        <p:spPr>
-          <a:xfrm>
-            <a:off x="27432" y="91440"/>
-            <a:ext cx="585216" cy="475488"/>
-          </a:xfrm>
-          <a:prstGeom prst="rect">
-            <a:avLst/>
-          </a:prstGeom>
-          <a:extLst>
-            <a:ext uri="{C572A759-6A51-4108-AA02-DFA0A04FC94B}">
-              <ma14:wrappingTextBoxFlag xmlns:ma14="http://schemas.microsoft.com/office/mac/drawingml/2011/main" val="0"/>
-            </a:ext>
-          </a:extLst>
-        </p:spPr>
-        <p:txBody>
-          <a:bodyPr/>
-          <a:lstStyle>
-            <a:lvl1pPr>
-              <a:defRPr sz="2000">
-                <a:solidFill>
-                  <a:srgbClr val="FFFFFF"/>
-                </a:solidFill>
-                <a:latin typeface="Calibri"/>
-                <a:ea typeface="Calibri"/>
-                <a:cs typeface="Calibri"/>
-              </a:defRPr>
-            </a:lvl1pPr>
-          </a:lstStyle>
-          <a:p>
-            <a:pPr algn="ctr"/>
-            <a:fld id="{F7021451-1387-4CA6-816F-3879F97B5CBC}" type="slidenum">
-              <a:rPr b="1" lang="en-US"/>
-              <a:t>5</a:t>
-            </a:fld>
-            <a:endParaRPr lang="en-US"/>
-          </a:p>
-        </p:txBody>
-      </p:sp>
-    </p:spTree>
-  </p:cSld>
-  <p:clrMapOvr>
-    <a:masterClrMapping/>
-  </p:clrMapOvr>
-</p:sld>
-</file>
-
-<file path=ppt/slides/slide50.xml><?xml version="1.0" encoding="utf-8"?>
-<p:sld xmlns:a="http://schemas.openxmlformats.org/drawingml/2006/main" xmlns:r="http://schemas.openxmlformats.org/officeDocument/2006/relationships" xmlns:p="http://schemas.openxmlformats.org/presentationml/2006/main">
-  <p:cSld name="Slide 50">
-    <p:spTree>
-      <p:nvGrpSpPr>
-        <p:cNvPr id="1" name=""/>
-        <p:cNvGrpSpPr/>
-        <p:nvPr/>
-      </p:nvGrpSpPr>
-      <p:grpSpPr>
-        <a:xfrm>
-          <a:off x="0" y="0"/>
-          <a:ext cx="0" cy="0"/>
-          <a:chOff x="0" y="0"/>
-          <a:chExt cx="0" cy="0"/>
-        </a:xfrm>
-      </p:grpSpPr>
-      <p:sp>
-        <p:nvSpPr>
-          <p:cNvPr id="2" name="Text 0"/>
-          <p:cNvSpPr/>
-          <p:nvPr/>
-        </p:nvSpPr>
-        <p:spPr>
-          <a:xfrm>
-            <a:off x="457200" y="713232"/>
-            <a:ext cx="11368735" cy="274320"/>
-          </a:xfrm>
-          <a:prstGeom prst="rect">
-            <a:avLst/>
-          </a:prstGeom>
-          <a:noFill/>
-          <a:ln/>
-        </p:spPr>
-        <p:txBody>
-          <a:bodyPr wrap="square" lIns="0" tIns="0" rIns="0" bIns="0" rtlCol="0" anchor="ctr"/>
-          <a:lstStyle/>
-          <a:p>
-            <a:pPr algn="r" indent="0" marL="0">
-              <a:buNone/>
-            </a:pPr>
-            <a:r>
-              <a:rPr lang="en-US" sz="1400" b="1" dirty="0">
-                <a:solidFill>
-                  <a:srgbClr val="1C3F6E"/>
-                </a:solidFill>
-                <a:latin typeface="Calibri" pitchFamily="34" charset="0"/>
-                <a:ea typeface="Calibri" pitchFamily="34" charset="-122"/>
-                <a:cs typeface="Calibri" pitchFamily="34" charset="-120"/>
-              </a:rPr>
               <a:t>LOGBOOK</a:t>
             </a:r>
             <a:endParaRPr lang="en-US" sz="1400" dirty="0"/>
@@ -19229,7 +21078,7 @@
       </p:sp>
       <p:graphicFrame>
         <p:nvGraphicFramePr>
-          <p:cNvPr id="51" name="Table 0"/>
+          <p:cNvPr id="56" name="Table 0"/>
           <p:cNvGraphicFramePr>
             <a:graphicFrameLocks noGrp="1"/>
           </p:cNvGraphicFramePr>
@@ -19339,7 +21188,7 @@
                           <a:ea typeface="Calibri" pitchFamily="34" charset="-122"/>
                           <a:cs typeface="Calibri" pitchFamily="34" charset="-120"/>
                         </a:rPr>
-                        <a:t>Meaning of Geography; Branches of Geography; Methods of Geography; Importance of Geography.</a:t>
+                        <a:t>DEFINITIONS; Branches and Sub-branches of Geography; Methods of Geography; Importance of Geography.</a:t>
                       </a:r>
                       <a:endParaRPr lang="en-US" sz="1600" dirty="0">
                         <a:latin typeface="Calibri" charset="0"/>
@@ -19989,7 +21838,7 @@
             <a:pPr algn="ctr"/>
             <a:fld id="{F7021451-1387-4CA6-816F-3879F97B5CBC}" type="slidenum">
               <a:rPr b="1" lang="en-US"/>
-              <a:t>50</a:t>
+              <a:t>55</a:t>
             </a:fld>
             <a:endParaRPr lang="en-US"/>
           </a:p>
@@ -20003,9 +21852,9 @@
 </p:sld>
 </file>
 
-<file path=ppt/slides/slide51.xml><?xml version="1.0" encoding="utf-8"?>
+<file path=ppt/slides/slide56.xml><?xml version="1.0" encoding="utf-8"?>
 <p:sld xmlns:a="http://schemas.openxmlformats.org/drawingml/2006/main" xmlns:r="http://schemas.openxmlformats.org/officeDocument/2006/relationships" xmlns:p="http://schemas.openxmlformats.org/presentationml/2006/main">
-  <p:cSld name="Slide 51">
+  <p:cSld name="Slide 56">
     <p:spTree>
       <p:nvGrpSpPr>
         <p:cNvPr id="1" name=""/>
@@ -20266,7 +22115,7 @@
                 <a:ea typeface="Calibri" pitchFamily="34" charset="-122"/>
                 <a:cs typeface="Calibri" pitchFamily="34" charset="-120"/>
               </a:rPr>
-              <a:t>Without the projector (Activity 5): draw the three branches on the board.</a:t>
+              <a:t>Without the projector (Activity 5): ask learners how their parents choose when to plant.</a:t>
             </a:r>
             <a:endParaRPr lang="en-US" sz="2000" dirty="0"/>
           </a:p>
@@ -20314,7 +22163,7 @@
             <a:pPr algn="ctr"/>
             <a:fld id="{F7021451-1387-4CA6-816F-3879F97B5CBC}" type="slidenum">
               <a:rPr b="1" lang="en-US"/>
-              <a:t>51</a:t>
+              <a:t>56</a:t>
             </a:fld>
             <a:endParaRPr lang="en-US"/>
           </a:p>
@@ -20328,9 +22177,9 @@
 </p:sld>
 </file>
 
-<file path=ppt/slides/slide52.xml><?xml version="1.0" encoding="utf-8"?>
+<file path=ppt/slides/slide57.xml><?xml version="1.0" encoding="utf-8"?>
 <p:sld xmlns:a="http://schemas.openxmlformats.org/drawingml/2006/main" xmlns:r="http://schemas.openxmlformats.org/officeDocument/2006/relationships" xmlns:p="http://schemas.openxmlformats.org/presentationml/2006/main">
-  <p:cSld name="Slide 52">
+  <p:cSld name="Slide 57">
     <p:spTree>
       <p:nvGrpSpPr>
         <p:cNvPr id="1" name=""/>
@@ -20401,7 +22250,7 @@
         <p:spPr>
           <a:xfrm>
             <a:off x="0" y="658368"/>
-            <a:ext cx="3840480" cy="5833872"/>
+            <a:ext cx="1463040" cy="5833872"/>
           </a:xfrm>
           <a:prstGeom prst="rect">
             <a:avLst/>
@@ -20416,8 +22265,8 @@
         </p:nvSpPr>
         <p:spPr>
           <a:xfrm>
-            <a:off x="4069080" y="1005840"/>
-            <a:ext cx="7802575" cy="731520"/>
+            <a:off x="1691640" y="1005840"/>
+            <a:ext cx="10180015" cy="731520"/>
           </a:xfrm>
           <a:prstGeom prst="rect">
             <a:avLst/>
@@ -20457,8 +22306,8 @@
         </p:nvSpPr>
         <p:spPr>
           <a:xfrm>
-            <a:off x="4069080" y="1783080"/>
-            <a:ext cx="7802575" cy="4663440"/>
+            <a:off x="1691640" y="1783080"/>
+            <a:ext cx="10180015" cy="4663440"/>
           </a:xfrm>
           <a:prstGeom prst="rect">
             <a:avLst/>
@@ -20528,7 +22377,7 @@
                 <a:ea typeface="Calibri" pitchFamily="34" charset="-122"/>
                 <a:cs typeface="Calibri" pitchFamily="34" charset="-120"/>
               </a:rPr>
-              <a:t>Photo, Activity 2: “20131110-DSC_4372” by jbdodane, CC BY-NC 2.0, via Flickr (https://www.flickr.com/photos/27998473@N02/11288779044)</a:t>
+              <a:t>Photo, Activity 2: “Mount Cameroon” by John &amp; Mel Kots, CC BY-NC-ND 2.0, via Flickr (https://www.flickr.com/photos/26745817@N00/2347261849)</a:t>
             </a:r>
             <a:endParaRPr lang="en-US" sz="1800" dirty="0"/>
           </a:p>
@@ -20591,6 +22440,27 @@
                 <a:ea typeface="Calibri" pitchFamily="34" charset="-122"/>
                 <a:cs typeface="Calibri" pitchFamily="34" charset="-120"/>
               </a:rPr>
+              <a:t>Photo, Activity 5: “Cotton Fields, U.S. 65, Tensas Parish, Louisiana (4)” by Ken Lund, CC BY-SA 2.0, via Flickr (https://www.flickr.com/photos/75683070@N00/3934873451)</a:t>
+            </a:r>
+            <a:endParaRPr lang="en-US" sz="1800" dirty="0"/>
+          </a:p>
+          <a:p>
+            <a:pPr algn="l" marL="342900" indent="-342900">
+              <a:spcAft>
+                <a:spcPts val="800"/>
+              </a:spcAft>
+              <a:buSzPct val="100000"/>
+              <a:buChar char="•"/>
+            </a:pPr>
+            <a:r>
+              <a:rPr lang="en-US" sz="1800" dirty="0">
+                <a:solidFill>
+                  <a:srgbClr val="111111"/>
+                </a:solidFill>
+                <a:latin typeface="Calibri" pitchFamily="34" charset="0"/>
+                <a:ea typeface="Calibri" pitchFamily="34" charset="-122"/>
+                <a:cs typeface="Calibri" pitchFamily="34" charset="-120"/>
+              </a:rPr>
               <a:t>Diagrams and animations: drawn for this lesson (Geography Department).</a:t>
             </a:r>
             <a:endParaRPr lang="en-US" sz="1800" dirty="0"/>
@@ -20639,7 +22509,7 @@
             <a:pPr algn="ctr"/>
             <a:fld id="{F7021451-1387-4CA6-816F-3879F97B5CBC}" type="slidenum">
               <a:rPr b="1" lang="en-US"/>
-              <a:t>52</a:t>
+              <a:t>57</a:t>
             </a:fld>
             <a:endParaRPr lang="en-US"/>
           </a:p>
@@ -21293,7 +23163,47 @@
                 <a:ea typeface="Times New Roman" pitchFamily="34" charset="-122"/>
                 <a:cs typeface="Times New Roman" pitchFamily="34" charset="-120"/>
               </a:rPr>
-              <a:t>On his first day in Form 1, Ibrahim sees "Geography" on his timetable. His elder sister says it is only about drawing maps, but his father says it helps farmers, drivers and even the Mayor of Garoua. Ibrahim wants to know who is right.</a:t>
+              <a:t>On his first day in Form 1, Ibrahim sees "Geography" on his timetable.</a:t>
+            </a:r>
+            <a:endParaRPr lang="en-US" sz="4000" dirty="0"/>
+          </a:p>
+          <a:p>
+            <a:pPr algn="l" indent="0" marL="0">
+              <a:spcAft>
+                <a:spcPts val="800"/>
+              </a:spcAft>
+              <a:buNone/>
+            </a:pPr>
+            <a:r>
+              <a:rPr lang="en-US" sz="4000" dirty="0">
+                <a:solidFill>
+                  <a:srgbClr val="111111"/>
+                </a:solidFill>
+                <a:latin typeface="Times New Roman" pitchFamily="34" charset="0"/>
+                <a:ea typeface="Times New Roman" pitchFamily="34" charset="-122"/>
+                <a:cs typeface="Times New Roman" pitchFamily="34" charset="-120"/>
+              </a:rPr>
+              <a:t>His elder sister says that it is only about drawing maps, but his father says that it helps farmers, drivers and even the Mayor of Garoua.</a:t>
+            </a:r>
+            <a:endParaRPr lang="en-US" sz="4000" dirty="0"/>
+          </a:p>
+          <a:p>
+            <a:pPr algn="l" indent="0" marL="0">
+              <a:spcAft>
+                <a:spcPts val="800"/>
+              </a:spcAft>
+              <a:buNone/>
+            </a:pPr>
+            <a:r>
+              <a:rPr lang="en-US" sz="4000" dirty="0">
+                <a:solidFill>
+                  <a:srgbClr val="111111"/>
+                </a:solidFill>
+                <a:latin typeface="Times New Roman" pitchFamily="34" charset="0"/>
+                <a:ea typeface="Times New Roman" pitchFamily="34" charset="-122"/>
+                <a:cs typeface="Times New Roman" pitchFamily="34" charset="-120"/>
+              </a:rPr>
+              <a:t>"</a:t>
             </a:r>
             <a:endParaRPr lang="en-US" sz="4000" dirty="0"/>
           </a:p>

--- a/lecons/F1/01_F1_M1_L01_Geography_Meaning_Branches_Methods_and_Importance.pptx
+++ b/lecons/F1/01_F1_M1_L01_Geography_Meaning_Branches_Methods_and_Importance.pptx
@@ -13777,7 +13777,7 @@
               <a:buNone/>
             </a:pPr>
             <a:r>
-              <a:rPr lang="en-US" sz="4000" b="1" dirty="0">
+              <a:rPr lang="en-US" sz="3200" b="1" dirty="0">
                 <a:solidFill>
                   <a:srgbClr val="111111"/>
                 </a:solidFill>
@@ -13787,7 +13787,7 @@
               </a:rPr>
               <a:t>Topic: The Earth in the Universe</a:t>
             </a:r>
-            <a:endParaRPr lang="en-US" sz="4000" dirty="0"/>
+            <a:endParaRPr lang="en-US" sz="3200" dirty="0"/>
           </a:p>
           <a:p>
             <a:pPr algn="l" indent="0" marL="0">
@@ -13797,7 +13797,7 @@
               <a:buNone/>
             </a:pPr>
             <a:r>
-              <a:rPr lang="en-US" sz="4000" b="1" dirty="0">
+              <a:rPr lang="en-US" sz="3200" b="1" dirty="0">
                 <a:solidFill>
                   <a:srgbClr val="111111"/>
                 </a:solidFill>
@@ -13807,7 +13807,7 @@
               </a:rPr>
               <a:t>Sub-topic: Introduction to Geography</a:t>
             </a:r>
-            <a:endParaRPr lang="en-US" sz="4000" dirty="0"/>
+            <a:endParaRPr lang="en-US" sz="3200" dirty="0"/>
           </a:p>
           <a:p>
             <a:pPr algn="l" indent="0" marL="0">
@@ -13817,7 +13817,7 @@
               <a:buNone/>
             </a:pPr>
             <a:r>
-              <a:rPr lang="en-US" sz="4000" b="1" dirty="0">
+              <a:rPr lang="en-US" sz="3200" b="1" dirty="0">
                 <a:solidFill>
                   <a:srgbClr val="990011"/>
                 </a:solidFill>
@@ -13827,7 +13827,7 @@
               </a:rPr>
               <a:t>Lesson 1: Geography: Meaning, Branches, Methods and Importance</a:t>
             </a:r>
-            <a:endParaRPr lang="en-US" sz="4000" dirty="0"/>
+            <a:endParaRPr lang="en-US" sz="3200" dirty="0"/>
           </a:p>
         </p:txBody>
       </p:sp>

--- a/lecons/F1/01_F1_M1_L01_Geography_Meaning_Branches_Methods_and_Importance.pptx
+++ b/lecons/F1/01_F1_M1_L01_Geography_Meaning_Branches_Methods_and_Importance.pptx
@@ -4606,7 +4606,7 @@
           <a:p>
             <a:r>
               <a:rPr lang="en-US" dirty="0"/>
-              <a:t>For your homework: Write three physical features and three human activities that you see on your way to school. We shall correct it at the beginning of our next lesson.</a:t>
+              <a:t>For your homework: Name the eight planets of the solar system. We shall correct it at the beginning of our next lesson.</a:t>
             </a:r>
             <a:endParaRPr lang="en-US" dirty="0"/>
           </a:p>
@@ -18800,7 +18800,7 @@
                 <a:ea typeface="Times New Roman" pitchFamily="34" charset="-122"/>
                 <a:cs typeface="Times New Roman" pitchFamily="34" charset="-120"/>
               </a:rPr>
-              <a:t>Write three physical features and three human activities that you see on your way to school.</a:t>
+              <a:t>Name the eight planets of the solar system.</a:t>
             </a:r>
             <a:endParaRPr lang="en-US" sz="4000" dirty="0"/>
           </a:p>
@@ -21464,7 +21464,7 @@
                           <a:ea typeface="Calibri" pitchFamily="34" charset="-122"/>
                           <a:cs typeface="Calibri" pitchFamily="34" charset="-120"/>
                         </a:rPr>
-                        <a:t>Write three physical features and three human activities that you see on your way to school.</a:t>
+                        <a:t>Name the eight planets of the solar system.</a:t>
                       </a:r>
                       <a:endParaRPr lang="en-US" sz="1600" dirty="0">
                         <a:latin typeface="Calibri" charset="0"/>

--- a/lecons/F1/01_F1_M1_L01_Geography_Meaning_Branches_Methods_and_Importance.pptx
+++ b/lecons/F1/01_F1_M1_L01_Geography_Meaning_Branches_Methods_and_Importance.pptx
@@ -62,9 +62,10 @@
     <p:sldId id="310" r:id="rId56"/>
     <p:sldId id="311" r:id="rId57"/>
     <p:sldId id="312" r:id="rId58"/>
+    <p:sldId id="313" r:id="rId59"/>
   </p:sldIdLst>
   <p:notesMasterIdLst>
-    <p:notesMasterId r:id="rId59"/>
+    <p:notesMasterId r:id="rId60"/>
   </p:notesMasterIdLst>
   <p:sldSz cx="12192000" cy="6858000"/>
   <p:notesSz cx="6858000" cy="12192000"/>
@@ -646,7 +647,7 @@
           <a:p>
             <a:r>
               <a:rPr lang="en-US" dirty="0"/>
-              <a:t>Good. Ibrahim does not know what geography studies and why it is useful.</a:t>
+              <a:t>Question 1: What is the problem in the situation? Think for a moment, then raise your hand to answer.</a:t>
             </a:r>
             <a:endParaRPr lang="en-US" dirty="0"/>
           </a:p>
@@ -734,7 +735,7 @@
           <a:p>
             <a:r>
               <a:rPr lang="en-US" dirty="0"/>
-              <a:t>Question 2: What does his sister think geography is? Think for a moment, then raise your hand to answer.</a:t>
+              <a:t>Good. Ibrahim does not know what geography studies and why it is useful.</a:t>
             </a:r>
             <a:endParaRPr lang="en-US" dirty="0"/>
           </a:p>
@@ -822,7 +823,7 @@
           <a:p>
             <a:r>
               <a:rPr lang="en-US" dirty="0"/>
-              <a:t>Good. She thinks it is only about drawing maps.</a:t>
+              <a:t>Question 2: What does his sister think geography is? Think for a moment, then raise your hand to answer.</a:t>
             </a:r>
             <a:endParaRPr lang="en-US" dirty="0"/>
           </a:p>
@@ -910,7 +911,7 @@
           <a:p>
             <a:r>
               <a:rPr lang="en-US" dirty="0"/>
-              <a:t>Question 3: Who uses geography, according to his father? Think for a moment, then raise your hand to answer.</a:t>
+              <a:t>Good. She thinks it is only about drawing maps.</a:t>
             </a:r>
             <a:endParaRPr lang="en-US" dirty="0"/>
           </a:p>
@@ -998,7 +999,7 @@
           <a:p>
             <a:r>
               <a:rPr lang="en-US" dirty="0"/>
-              <a:t>Good. Farmers, drivers and the Mayor of Garoua.</a:t>
+              <a:t>Question 3: Who uses geography, according to his father? Think for a moment, then raise your hand to answer.</a:t>
             </a:r>
             <a:endParaRPr lang="en-US" dirty="0"/>
           </a:p>
@@ -1086,7 +1087,7 @@
           <a:p>
             <a:r>
               <a:rPr lang="en-US" dirty="0"/>
-              <a:t>From this situation, the action we are working towards in this lesson is the following: observe the land, the weather and the activities of people around you like a geographer.</a:t>
+              <a:t>Good. Farmers, drivers and the Mayor of Garoua.</a:t>
             </a:r>
             <a:endParaRPr lang="en-US" dirty="0"/>
           </a:p>
@@ -1174,7 +1175,7 @@
           <a:p>
             <a:r>
               <a:rPr lang="en-US" dirty="0"/>
-              <a:t>Why is this lesson important for you? This lesson helps us to know what geography studies and why it is useful for our lives.</a:t>
+              <a:t>From this situation, the action we are working towards in this lesson is the following: observe the land, the weather and the activities of people around you like a geographer.</a:t>
             </a:r>
             <a:endParaRPr lang="en-US" dirty="0"/>
           </a:p>
@@ -1262,7 +1263,7 @@
           <a:p>
             <a:r>
               <a:rPr lang="en-US" dirty="0"/>
-              <a:t>Activity 1. Look carefully at this picture: the Earth seen from space. Observe every detail before I ask the question.</a:t>
+              <a:t>Why is this lesson important for you? This lesson helps us to know what geography studies and why it is useful for our lives.</a:t>
             </a:r>
             <a:endParaRPr lang="en-US" dirty="0"/>
           </a:p>
@@ -1350,7 +1351,7 @@
           <a:p>
             <a:r>
               <a:rPr lang="en-US" dirty="0"/>
-              <a:t>Here is the question for Activity 1: The word geography comes from the Greek words "geo" and "graphein". What do these words mean? Take one minute to think and write your answer in your rough notebook.</a:t>
+              <a:t>Activity 1. Look carefully at this picture: the Earth seen from space. Observe every detail before I ask the question.</a:t>
             </a:r>
             <a:endParaRPr lang="en-US" dirty="0"/>
           </a:p>
@@ -1438,7 +1439,7 @@
           <a:p>
             <a:r>
               <a:rPr lang="en-US" dirty="0"/>
-              <a:t>Let us check the answer together. "Geo" means the Earth, and "graphein" means to describe.</a:t>
+              <a:t>Here is the question for Activity 1: The word geography comes from the Greek words "geo" and "graphein". What do these words mean? Take one minute to think and write your answer in your rough notebook.</a:t>
             </a:r>
             <a:endParaRPr lang="en-US" dirty="0"/>
           </a:p>
@@ -1614,7 +1615,7 @@
           <a:p>
             <a:r>
               <a:rPr lang="en-US" dirty="0"/>
-              <a:t>Here is the next question: So, what is geography? Take one minute to think and write your answer in your rough notebook.</a:t>
+              <a:t>Let us check the answer together. "Geo" means the Earth, and "graphein" means to describe.</a:t>
             </a:r>
             <a:endParaRPr lang="en-US" dirty="0"/>
           </a:p>
@@ -1702,7 +1703,7 @@
           <a:p>
             <a:r>
               <a:rPr lang="en-US" dirty="0"/>
-              <a:t>Let us check the answer together. Geography is the study and description of the Earth and of the people who live on it.</a:t>
+              <a:t>Here is the next question: So, what is geography? Take one minute to think and write your answer in your rough notebook.</a:t>
             </a:r>
             <a:endParaRPr lang="en-US" dirty="0"/>
           </a:p>
@@ -1790,7 +1791,7 @@
           <a:p>
             <a:r>
               <a:rPr lang="en-US" dirty="0"/>
-              <a:t>Activity 2. Look carefully at this picture: mount Cameroon. Observe every detail before I ask the question.</a:t>
+              <a:t>Let us check the answer together. Geography is the study and description of the Earth and of the people who live on it.</a:t>
             </a:r>
             <a:endParaRPr lang="en-US" dirty="0"/>
           </a:p>
@@ -1878,7 +1879,7 @@
           <a:p>
             <a:r>
               <a:rPr lang="en-US" dirty="0"/>
-              <a:t>Here is the question for Activity 2: Which branch of geography studies mountains, rivers, climate and soils? Take one minute to think and write your answer in your rough notebook.</a:t>
+              <a:t>Activity 2. Look carefully at this picture: mount Cameroon. Observe every detail before I ask the question.</a:t>
             </a:r>
             <a:endParaRPr lang="en-US" dirty="0"/>
           </a:p>
@@ -1966,7 +1967,7 @@
           <a:p>
             <a:r>
               <a:rPr lang="en-US" dirty="0"/>
-              <a:t>Let us check the answer together. Physical geography.</a:t>
+              <a:t>Here is the question for Activity 2: Which branch of geography studies mountains, rivers, climate and soils? Take one minute to think and write your answer in your rough notebook.</a:t>
             </a:r>
             <a:endParaRPr lang="en-US" dirty="0"/>
           </a:p>
@@ -2054,7 +2055,7 @@
           <a:p>
             <a:r>
               <a:rPr lang="en-US" dirty="0"/>
-              <a:t>Activity 3. Look carefully at this picture: a busy market in Cameroon. Observe every detail before I ask the question.</a:t>
+              <a:t>Let us check the answer together. Physical geography.</a:t>
             </a:r>
             <a:endParaRPr lang="en-US" dirty="0"/>
           </a:p>
@@ -2142,7 +2143,7 @@
           <a:p>
             <a:r>
               <a:rPr lang="en-US" dirty="0"/>
-              <a:t>Here is the question for Activity 3: Which branch of geography studies people, markets, towns and farming? Take one minute to think and write your answer in your rough notebook.</a:t>
+              <a:t>Activity 3. Look carefully at this picture: a busy market in Cameroon. Observe every detail before I ask the question.</a:t>
             </a:r>
             <a:endParaRPr lang="en-US" dirty="0"/>
           </a:p>
@@ -2230,7 +2231,7 @@
           <a:p>
             <a:r>
               <a:rPr lang="en-US" dirty="0"/>
-              <a:t>Let us check the answer together. Human geography.</a:t>
+              <a:t>Here is the question for Activity 3: Which branch of geography studies people, markets, towns and farming? Take one minute to think and write your answer in your rough notebook.</a:t>
             </a:r>
             <a:endParaRPr lang="en-US" dirty="0"/>
           </a:p>
@@ -2318,7 +2319,7 @@
           <a:p>
             <a:r>
               <a:rPr lang="en-US" dirty="0"/>
-              <a:t>Activity 4. Look carefully at this picture: a geographer using a map in the field. Observe every detail before I ask the question.</a:t>
+              <a:t>Let us check the answer together. Human geography.</a:t>
             </a:r>
             <a:endParaRPr lang="en-US" dirty="0"/>
           </a:p>
@@ -2406,7 +2407,7 @@
           <a:p>
             <a:r>
               <a:rPr lang="en-US" dirty="0"/>
-              <a:t>Here is the question for Activity 4: How does a geographer collect information about a place? Take one minute to think and write your answer in your rough notebook.</a:t>
+              <a:t>Activity 4. Look carefully at this picture: a geographer using a map in the field. Observe every detail before I ask the question.</a:t>
             </a:r>
             <a:endParaRPr lang="en-US" dirty="0"/>
           </a:p>
@@ -2582,7 +2583,7 @@
           <a:p>
             <a:r>
               <a:rPr lang="en-US" dirty="0"/>
-              <a:t>Let us check the answer together. By observing and measuring in the field, and by asking people questions.</a:t>
+              <a:t>Here is the question for Activity 4: How does a geographer collect information about a place? Take one minute to think and write your answer in your rough notebook.</a:t>
             </a:r>
             <a:endParaRPr lang="en-US" dirty="0"/>
           </a:p>
@@ -2670,7 +2671,7 @@
           <a:p>
             <a:r>
               <a:rPr lang="en-US" dirty="0"/>
-              <a:t>Activity 5. Look carefully at this picture: a cotton farm in the North. Observe every detail before I ask the question.</a:t>
+              <a:t>Let us check the answer together. By observing and measuring in the field, and by asking people questions.</a:t>
             </a:r>
             <a:endParaRPr lang="en-US" dirty="0"/>
           </a:p>
@@ -2758,7 +2759,7 @@
           <a:p>
             <a:r>
               <a:rPr lang="en-US" dirty="0"/>
-              <a:t>Here is the question for Activity 5: How can geography help this farmer? Take one minute to think and write your answer in your rough notebook.</a:t>
+              <a:t>Activity 5. Look carefully at this picture: a cotton farm in the North. Observe every detail before I ask the question.</a:t>
             </a:r>
             <a:endParaRPr lang="en-US" dirty="0"/>
           </a:p>
@@ -2846,7 +2847,7 @@
           <a:p>
             <a:r>
               <a:rPr lang="en-US" dirty="0"/>
-              <a:t>Let us check the answer together. It helps him to know the seasons, the rainfall and the soils, so that he chooses the right crops and the right time to plant.</a:t>
+              <a:t>Here is the question for Activity 5: How can geography help this farmer? Take one minute to think and write your answer in your rough notebook.</a:t>
             </a:r>
             <a:endParaRPr lang="en-US" dirty="0"/>
           </a:p>
@@ -2934,7 +2935,7 @@
           <a:p>
             <a:r>
               <a:rPr lang="en-US" dirty="0"/>
-              <a:t>Now we are going to copy the board summary. Write the title and the headings neatly in your notebooks. I will give you enough time for each slide, so do not rush.</a:t>
+              <a:t>Let us check the answer together. It helps him to know the seasons, the rainfall and the soils, so that he chooses the right crops and the right time to plant.</a:t>
             </a:r>
             <a:endParaRPr lang="en-US" dirty="0"/>
           </a:p>
@@ -3022,7 +3023,7 @@
           <a:p>
             <a:r>
               <a:rPr lang="en-US" dirty="0"/>
-              <a:t>Let us copy the definitions. The key terms of this lesson are defined as follows. On this slide we have Geography. Write each point on a new line, with the key term first, and explain it in your own words when we revise. When you finish, we go to the next slide.</a:t>
+              <a:t>Now we are going to copy the board summary. Write the title and the headings neatly in your notebooks. I will give you enough time for each slide, so do not rush.</a:t>
             </a:r>
             <a:endParaRPr lang="en-US" dirty="0"/>
           </a:p>
@@ -3110,7 +3111,7 @@
           <a:p>
             <a:r>
               <a:rPr lang="en-US" dirty="0"/>
-              <a:t>We continue with the definitions. On this slide we have Branch of geography. Write each point on a new line, with the key term first, and explain it in your own words when we revise.</a:t>
+              <a:t>Let us copy the definitions. The key terms of this lesson are defined as follows. On this slide we have Geography. Write each point on a new line, with the key term first, and explain it in your own words when we revise. When you finish, we go to the next slide.</a:t>
             </a:r>
             <a:endParaRPr lang="en-US" dirty="0"/>
           </a:p>
@@ -3198,7 +3199,7 @@
           <a:p>
             <a:r>
               <a:rPr lang="en-US" dirty="0"/>
-              <a:t>Let us copy Branches and Sub-branches of Geography. Geography has three main branches. Copy the point on Physical geography on the left, then draw the diagram on the right: mount Cameroon, a physical feature. Give it a title and label it clearly.</a:t>
+              <a:t>We continue with the definitions. On this slide we have Branch of geography. Write each point on a new line, with the key term first, and explain it in your own words when we revise.</a:t>
             </a:r>
             <a:endParaRPr lang="en-US" dirty="0"/>
           </a:p>
@@ -3286,7 +3287,7 @@
           <a:p>
             <a:r>
               <a:rPr lang="en-US" dirty="0"/>
-              <a:t>Copy the point on Human geography on the left, then draw the diagram on the right: a market, a human activity. Give it a title and label it clearly.</a:t>
+              <a:t>Let us copy Branches and Sub-branches of Geography. Geography has three main branches. Copy the point on Physical geography on the left, then draw the diagram on the right: mount Cameroon, a physical feature. Give it a title and label it clearly.</a:t>
             </a:r>
             <a:endParaRPr lang="en-US" dirty="0"/>
           </a:p>
@@ -3374,7 +3375,7 @@
           <a:p>
             <a:r>
               <a:rPr lang="en-US" dirty="0"/>
-              <a:t>Copy the point on Practical geography on the left, then draw the diagram on the right: map reading in the field. Give it a title and label it clearly.</a:t>
+              <a:t>Copy the point on Human geography on the left, then draw the diagram on the right: a market, a human activity. Give it a title and label it clearly.</a:t>
             </a:r>
             <a:endParaRPr lang="en-US" dirty="0"/>
           </a:p>
@@ -3550,7 +3551,7 @@
           <a:p>
             <a:r>
               <a:rPr lang="en-US" dirty="0"/>
-              <a:t>Let us copy Methods of Geography. Geographers use the following methods. Copy the point on Observation and fieldwork on the left, then draw the diagram on the right: the steps of fieldwork. Give it a title and label it clearly.</a:t>
+              <a:t>Copy the point on Practical geography on the left, then draw the diagram on the right: map reading in the field. Give it a title and label it clearly.</a:t>
             </a:r>
             <a:endParaRPr lang="en-US" dirty="0"/>
           </a:p>
@@ -3638,7 +3639,7 @@
           <a:p>
             <a:r>
               <a:rPr lang="en-US" dirty="0"/>
-              <a:t>Copy the point on Interviews and questionnaires on the left, then draw the diagram on the right: a questionnaire. Give it a title and label it clearly.</a:t>
+              <a:t>Let us copy Methods of Geography. Geographers use the following methods. Copy the point on Observation and fieldwork on the left, then draw the diagram on the right: the steps of fieldwork. Give it a title and label it clearly.</a:t>
             </a:r>
             <a:endParaRPr lang="en-US" dirty="0"/>
           </a:p>
@@ -3726,7 +3727,7 @@
           <a:p>
             <a:r>
               <a:rPr lang="en-US" dirty="0"/>
-              <a:t>Copy the point on Maps and photographs on the left, then draw the diagram on the right: a satellite image is taken from space. Give it a title and label it clearly.</a:t>
+              <a:t>Copy the point on Interviews and questionnaires on the left, then draw the diagram on the right: a questionnaire. Give it a title and label it clearly.</a:t>
             </a:r>
             <a:endParaRPr lang="en-US" dirty="0"/>
           </a:p>
@@ -3814,7 +3815,7 @@
           <a:p>
             <a:r>
               <a:rPr lang="en-US" dirty="0"/>
-              <a:t>Copy the point on Statistics and graphs on the left, then draw the diagram on the right: types of graphs. Give it a title and label it clearly.</a:t>
+              <a:t>Copy the point on Maps and photographs on the left, then draw the diagram on the right: a satellite image is taken from space. Give it a title and label it clearly.</a:t>
             </a:r>
             <a:endParaRPr lang="en-US" dirty="0"/>
           </a:p>
@@ -3902,7 +3903,7 @@
           <a:p>
             <a:r>
               <a:rPr lang="en-US" dirty="0"/>
-              <a:t>Let us copy Importance of Geography. Geography is important for the following reasons. On this slide we have Daily life and Farming. Write each point on a new line, with the key term first, and explain it in your own words when we revise. When you finish, we go to the next slide.</a:t>
+              <a:t>Copy the point on Statistics and graphs on the left, then draw the diagram on the right: types of graphs. Give it a title and label it clearly.</a:t>
             </a:r>
             <a:endParaRPr lang="en-US" dirty="0"/>
           </a:p>
@@ -3990,7 +3991,7 @@
           <a:p>
             <a:r>
               <a:rPr lang="en-US" dirty="0"/>
-              <a:t>We continue with Importance of Geography. On this slide we have Planning and Environment. Write each point on a new line, with the key term first, and explain it in your own words when we revise.</a:t>
+              <a:t>Let us copy Importance of Geography. Geography is important for the following reasons. On this slide we have Daily life and Farming. Write each point on a new line, with the key term first, and explain it in your own words when we revise. When you finish, we go to the next slide.</a:t>
             </a:r>
             <a:endParaRPr lang="en-US" dirty="0"/>
           </a:p>
@@ -4078,7 +4079,7 @@
           <a:p>
             <a:r>
               <a:rPr lang="en-US" dirty="0"/>
-              <a:t>Now let us check what you have understood. Question 1: Define geography. Answer in your exercise book.</a:t>
+              <a:t>We continue with Importance of Geography. On this slide we have Planning and Environment. Write each point on a new line, with the key term first, and explain it in your own words when we revise.</a:t>
             </a:r>
             <a:endParaRPr lang="en-US" dirty="0"/>
           </a:p>
@@ -4166,7 +4167,7 @@
           <a:p>
             <a:r>
               <a:rPr lang="en-US" dirty="0"/>
-              <a:t>The expected answer is: it is the study of the Earth, its physical features and the activities of people on it. If you got it right, well done.</a:t>
+              <a:t>Now let us check what you have understood. Question 1: Define geography. Answer in your exercise book.</a:t>
             </a:r>
             <a:endParaRPr lang="en-US" dirty="0"/>
           </a:p>
@@ -4254,7 +4255,7 @@
           <a:p>
             <a:r>
               <a:rPr lang="en-US" dirty="0"/>
-              <a:t>Now let us check what you have understood. Question 2: Name the three branches of geography. Answer in your exercise book.</a:t>
+              <a:t>The expected answer is: it is the study of the Earth, its physical features and the activities of people on it. If you got it right, well done.</a:t>
             </a:r>
             <a:endParaRPr lang="en-US" dirty="0"/>
           </a:p>
@@ -4342,7 +4343,7 @@
           <a:p>
             <a:r>
               <a:rPr lang="en-US" dirty="0"/>
-              <a:t>The expected answer is: physical, human and practical geography. If you got it right, well done.</a:t>
+              <a:t>Now let us check what you have understood. Question 2: Name the three branches of geography. Answer in your exercise book.</a:t>
             </a:r>
             <a:endParaRPr lang="en-US" dirty="0"/>
           </a:p>
@@ -4518,7 +4519,7 @@
           <a:p>
             <a:r>
               <a:rPr lang="en-US" dirty="0"/>
-              <a:t>For those who need more practice, fill in the blanks in your exercise book. The answers are: number 1, Earth; number 2, physical; number 3, human.</a:t>
+              <a:t>The expected answer is: physical, human and practical geography. If you got it right, well done.</a:t>
             </a:r>
             <a:endParaRPr lang="en-US" dirty="0"/>
           </a:p>
@@ -4606,7 +4607,7 @@
           <a:p>
             <a:r>
               <a:rPr lang="en-US" dirty="0"/>
-              <a:t>For your homework: Name the eight planets of the solar system. We shall correct it at the beginning of our next lesson.</a:t>
+              <a:t>For those who need more practice, fill in the blanks in your exercise book. The answers are: number 1, Earth; number 2, physical; number 3, human.</a:t>
             </a:r>
             <a:endParaRPr lang="en-US" dirty="0"/>
           </a:p>
@@ -4694,7 +4695,7 @@
           <a:p>
             <a:r>
               <a:rPr lang="en-US" dirty="0"/>
-              <a:t>Our next lesson will be on Lesson 2: Our Planet, the Earth. Thank you for your attention, and see you next time.</a:t>
+              <a:t>For your homework: Name the eight planets of the solar system. We shall correct it at the beginning of our next lesson.</a:t>
             </a:r>
             <a:endParaRPr lang="en-US" dirty="0"/>
           </a:p>
@@ -4782,7 +4783,7 @@
           <a:p>
             <a:r>
               <a:rPr lang="en-US" dirty="0"/>
-              <a:t>Let us play the bilingual game. I say a word in English, and you give me the French word. Then we do the reverse.</a:t>
+              <a:t>Our next lesson will be on Lesson 2: Our Planet, the Earth. Thank you for your attention, and see you next time.</a:t>
             </a:r>
             <a:endParaRPr lang="en-US" dirty="0"/>
           </a:p>
@@ -4870,7 +4871,7 @@
           <a:p>
             <a:r>
               <a:rPr lang="en-US" dirty="0"/>
-              <a:t>I record this information in the official logbook of the class after the lesson.</a:t>
+              <a:t>Let us play the bilingual game. I say a word in English, and you give me the French word. Then we do the reverse.</a:t>
             </a:r>
             <a:endParaRPr lang="en-US" dirty="0"/>
           </a:p>
@@ -4958,7 +4959,7 @@
           <a:p>
             <a:r>
               <a:rPr lang="en-US" dirty="0"/>
-              <a:t>I complete the second page of the logbook: the matter taught, the evaluation, the homework and the attendance.</a:t>
+              <a:t>I record this information in the official logbook of the class after the lesson.</a:t>
             </a:r>
             <a:endParaRPr lang="en-US" dirty="0"/>
           </a:p>
@@ -5046,7 +5047,7 @@
           <a:p>
             <a:r>
               <a:rPr lang="en-US" dirty="0"/>
-              <a:t>This slide is for me, the teacher: it gives the timing of the lesson and what to do if the projector is not available.</a:t>
+              <a:t>I complete the second page of the logbook: the matter taught, the evaluation, the homework and the attendance.</a:t>
             </a:r>
             <a:endParaRPr lang="en-US" dirty="0"/>
           </a:p>
@@ -5134,7 +5135,7 @@
           <a:p>
             <a:r>
               <a:rPr lang="en-US" dirty="0"/>
-              <a:t>These are the references and picture credits used to prepare this lesson.</a:t>
+              <a:t>This slide is for me, the teacher: it gives the timing of the lesson and what to do if the projector is not available.</a:t>
             </a:r>
             <a:endParaRPr lang="en-US" dirty="0"/>
           </a:p>
@@ -5158,6 +5159,94 @@
             <a:fld id="{F7021451-1387-4CA6-816F-3879F97B5CBC}" type="slidenum">
               <a:rPr lang="en-US"/>
               <a:t>57</a:t>
+            </a:fld>
+            <a:endParaRPr lang="en-US"/>
+          </a:p>
+        </p:txBody>
+      </p:sp>
+    </p:spTree>
+    <p:extLst>
+      <p:ext uri="{BB962C8B-B14F-4D97-AF65-F5344CB8AC3E}">
+        <p14:creationId xmlns:p14="http://schemas.microsoft.com/office/powerpoint/2010/main" val="1024086991"/>
+      </p:ext>
+    </p:extLst>
+  </p:cSld>
+  <p:clrMapOvr>
+    <a:masterClrMapping/>
+  </p:clrMapOvr>
+</p:notes>
+</file>
+
+<file path=ppt/notesSlides/notesSlide58.xml><?xml version="1.0" encoding="utf-8"?>
+<p:notes xmlns:a="http://schemas.openxmlformats.org/drawingml/2006/main" xmlns:r="http://schemas.openxmlformats.org/officeDocument/2006/relationships" xmlns:p="http://schemas.openxmlformats.org/presentationml/2006/main">
+  <p:cSld>
+    <p:spTree>
+      <p:nvGrpSpPr>
+        <p:cNvPr id="1" name=""/>
+        <p:cNvGrpSpPr/>
+        <p:nvPr/>
+      </p:nvGrpSpPr>
+      <p:grpSpPr>
+        <a:xfrm>
+          <a:off x="0" y="0"/>
+          <a:ext cx="0" cy="0"/>
+          <a:chOff x="0" y="0"/>
+          <a:chExt cx="0" cy="0"/>
+        </a:xfrm>
+      </p:grpSpPr>
+      <p:sp>
+        <p:nvSpPr>
+          <p:cNvPr id="2" name="Slide Image Placeholder 1"/>
+          <p:cNvSpPr>
+            <a:spLocks noGrp="1" noRot="1" noChangeAspect="1"/>
+          </p:cNvSpPr>
+          <p:nvPr>
+            <p:ph type="sldImg"/>
+          </p:nvPr>
+        </p:nvSpPr>
+        <p:spPr/>
+      </p:sp>
+      <p:sp>
+        <p:nvSpPr>
+          <p:cNvPr id="3" name="Notes Placeholder 2"/>
+          <p:cNvSpPr>
+            <a:spLocks noGrp="1"/>
+          </p:cNvSpPr>
+          <p:nvPr>
+            <p:ph type="body" idx="1"/>
+          </p:nvPr>
+        </p:nvSpPr>
+        <p:spPr/>
+        <p:txBody>
+          <a:bodyPr/>
+          <a:lstStyle/>
+          <a:p>
+            <a:r>
+              <a:rPr lang="en-US" dirty="0"/>
+              <a:t>These are the references and picture credits used to prepare this lesson.</a:t>
+            </a:r>
+            <a:endParaRPr lang="en-US" dirty="0"/>
+          </a:p>
+        </p:txBody>
+      </p:sp>
+      <p:sp>
+        <p:nvSpPr>
+          <p:cNvPr id="4" name="Slide Number Placeholder 3"/>
+          <p:cNvSpPr>
+            <a:spLocks noGrp="1"/>
+          </p:cNvSpPr>
+          <p:nvPr>
+            <p:ph type="sldNum" sz="quarter" idx="10"/>
+          </p:nvPr>
+        </p:nvSpPr>
+        <p:spPr/>
+        <p:txBody>
+          <a:bodyPr/>
+          <a:lstStyle/>
+          <a:p>
+            <a:fld id="{F7021451-1387-4CA6-816F-3879F97B5CBC}" type="slidenum">
+              <a:rPr lang="en-US"/>
+              <a:t>58</a:t>
             </a:fld>
             <a:endParaRPr lang="en-US"/>
           </a:p>
@@ -5398,7 +5487,7 @@
           <a:p>
             <a:r>
               <a:rPr lang="en-US" dirty="0"/>
-              <a:t>Listen carefully to this situation from real life. On his first day in Form 1, Ibrahim sees "Geography" on his timetable. His elder sister says that it is only about drawing maps, but his father says that it helps farmers, drivers and even the Mayor of Garoua. Ibrahim is confused and asks his teacher: "What does geography really study, and why is it useful?" Think about it, because I am going to ask you some questions.</a:t>
+              <a:t>Take your time to copy this part; we will continue together.</a:t>
             </a:r>
             <a:endParaRPr lang="en-US" dirty="0"/>
           </a:p>
@@ -5486,7 +5575,7 @@
           <a:p>
             <a:r>
               <a:rPr lang="en-US" dirty="0"/>
-              <a:t>Question 1: What is the problem in the situation? Think for a moment, then raise your hand to answer.</a:t>
+              <a:t>Listen carefully to this situation from real life. On his first day in Form 1, Ibrahim sees "Geography" on his timetable. His elder sister says that it is only about drawing maps, but his father says that it helps farmers, drivers and even the Mayor of Garoua. Ibrahim is confused and asks his teacher: "What does geography really study, and why is it useful?" Think about it, because I am going to ask you some questions.</a:t>
             </a:r>
             <a:endParaRPr lang="en-US" dirty="0"/>
           </a:p>
@@ -6908,7 +6997,7 @@
                 <a:ea typeface="Times New Roman" pitchFamily="34" charset="-122"/>
                 <a:cs typeface="Times New Roman" pitchFamily="34" charset="-120"/>
               </a:rPr>
-              <a:t>Answer</a:t>
+              <a:t>Situation: Question 1</a:t>
             </a:r>
             <a:endParaRPr lang="en-US" sz="3600" dirty="0"/>
           </a:p>
@@ -6950,7 +7039,7 @@
                 <a:ea typeface="Times New Roman" pitchFamily="34" charset="-122"/>
                 <a:cs typeface="Times New Roman" pitchFamily="34" charset="-120"/>
               </a:rPr>
-              <a:t>Ibrahim does not know what geography studies and why it is useful.</a:t>
+              <a:t>What is the problem in the situation?</a:t>
             </a:r>
             <a:endParaRPr lang="en-US" sz="4000" dirty="0"/>
           </a:p>
@@ -7127,7 +7216,7 @@
                 <a:ea typeface="Times New Roman" pitchFamily="34" charset="-122"/>
                 <a:cs typeface="Times New Roman" pitchFamily="34" charset="-120"/>
               </a:rPr>
-              <a:t>Situation: Question 2</a:t>
+              <a:t>Answer</a:t>
             </a:r>
             <a:endParaRPr lang="en-US" sz="3600" dirty="0"/>
           </a:p>
@@ -7169,7 +7258,7 @@
                 <a:ea typeface="Times New Roman" pitchFamily="34" charset="-122"/>
                 <a:cs typeface="Times New Roman" pitchFamily="34" charset="-120"/>
               </a:rPr>
-              <a:t>What does his sister think geography is?</a:t>
+              <a:t>Ibrahim does not know what geography studies and why it is useful.</a:t>
             </a:r>
             <a:endParaRPr lang="en-US" sz="4000" dirty="0"/>
           </a:p>
@@ -7346,7 +7435,7 @@
                 <a:ea typeface="Times New Roman" pitchFamily="34" charset="-122"/>
                 <a:cs typeface="Times New Roman" pitchFamily="34" charset="-120"/>
               </a:rPr>
-              <a:t>Answer</a:t>
+              <a:t>Situation: Question 2</a:t>
             </a:r>
             <a:endParaRPr lang="en-US" sz="3600" dirty="0"/>
           </a:p>
@@ -7388,7 +7477,7 @@
                 <a:ea typeface="Times New Roman" pitchFamily="34" charset="-122"/>
                 <a:cs typeface="Times New Roman" pitchFamily="34" charset="-120"/>
               </a:rPr>
-              <a:t>She thinks it is only about drawing maps.</a:t>
+              <a:t>What does his sister think geography is?</a:t>
             </a:r>
             <a:endParaRPr lang="en-US" sz="4000" dirty="0"/>
           </a:p>
@@ -7565,7 +7654,7 @@
                 <a:ea typeface="Times New Roman" pitchFamily="34" charset="-122"/>
                 <a:cs typeface="Times New Roman" pitchFamily="34" charset="-120"/>
               </a:rPr>
-              <a:t>Situation: Question 3</a:t>
+              <a:t>Answer</a:t>
             </a:r>
             <a:endParaRPr lang="en-US" sz="3600" dirty="0"/>
           </a:p>
@@ -7607,7 +7696,7 @@
                 <a:ea typeface="Times New Roman" pitchFamily="34" charset="-122"/>
                 <a:cs typeface="Times New Roman" pitchFamily="34" charset="-120"/>
               </a:rPr>
-              <a:t>Who uses geography, according to his father?</a:t>
+              <a:t>She thinks it is only about drawing maps.</a:t>
             </a:r>
             <a:endParaRPr lang="en-US" sz="4000" dirty="0"/>
           </a:p>
@@ -7784,7 +7873,7 @@
                 <a:ea typeface="Times New Roman" pitchFamily="34" charset="-122"/>
                 <a:cs typeface="Times New Roman" pitchFamily="34" charset="-120"/>
               </a:rPr>
-              <a:t>Possible Answer</a:t>
+              <a:t>Situation: Question 3</a:t>
             </a:r>
             <a:endParaRPr lang="en-US" sz="3600" dirty="0"/>
           </a:p>
@@ -7826,7 +7915,7 @@
                 <a:ea typeface="Times New Roman" pitchFamily="34" charset="-122"/>
                 <a:cs typeface="Times New Roman" pitchFamily="34" charset="-120"/>
               </a:rPr>
-              <a:t>Farmers, drivers and the Mayor of Garoua.</a:t>
+              <a:t>Who uses geography, according to his father?</a:t>
             </a:r>
             <a:endParaRPr lang="en-US" sz="4000" dirty="0"/>
           </a:p>
@@ -7938,7 +8027,7 @@
                 <a:ea typeface="Calibri" pitchFamily="34" charset="-122"/>
                 <a:cs typeface="Calibri" pitchFamily="34" charset="-120"/>
               </a:rPr>
-              <a:t>ACTION TO TAKE</a:t>
+              <a:t>REAL-LIFE SITUATION</a:t>
             </a:r>
             <a:endParaRPr lang="en-US" sz="1400" dirty="0"/>
           </a:p>
@@ -8003,7 +8092,7 @@
                 <a:ea typeface="Times New Roman" pitchFamily="34" charset="-122"/>
                 <a:cs typeface="Times New Roman" pitchFamily="34" charset="-120"/>
               </a:rPr>
-              <a:t>Action to Take</a:t>
+              <a:t>Possible Answer</a:t>
             </a:r>
             <a:endParaRPr lang="en-US" sz="3600" dirty="0"/>
           </a:p>
@@ -8045,7 +8134,7 @@
                 <a:ea typeface="Times New Roman" pitchFamily="34" charset="-122"/>
                 <a:cs typeface="Times New Roman" pitchFamily="34" charset="-120"/>
               </a:rPr>
-              <a:t>Observe the land, the weather and the activities of people around you like a geographer.</a:t>
+              <a:t>Farmers, drivers and the Mayor of Garoua.</a:t>
             </a:r>
             <a:endParaRPr lang="en-US" sz="4000" dirty="0"/>
           </a:p>
@@ -8157,7 +8246,7 @@
                 <a:ea typeface="Calibri" pitchFamily="34" charset="-122"/>
                 <a:cs typeface="Calibri" pitchFamily="34" charset="-120"/>
               </a:rPr>
-              <a:t>JUSTIFICATION</a:t>
+              <a:t>ACTION TO TAKE</a:t>
             </a:r>
             <a:endParaRPr lang="en-US" sz="1400" dirty="0"/>
           </a:p>
@@ -8222,7 +8311,7 @@
                 <a:ea typeface="Times New Roman" pitchFamily="34" charset="-122"/>
                 <a:cs typeface="Times New Roman" pitchFamily="34" charset="-120"/>
               </a:rPr>
-              <a:t>Justification of the Lesson</a:t>
+              <a:t>Action to Take</a:t>
             </a:r>
             <a:endParaRPr lang="en-US" sz="3600" dirty="0"/>
           </a:p>
@@ -8264,7 +8353,7 @@
                 <a:ea typeface="Times New Roman" pitchFamily="34" charset="-122"/>
                 <a:cs typeface="Times New Roman" pitchFamily="34" charset="-120"/>
               </a:rPr>
-              <a:t>This lesson helps us to know what geography studies and why it is useful for our lives.</a:t>
+              <a:t>Observe the land, the weather and the activities of people around you like a geographer.</a:t>
             </a:r>
             <a:endParaRPr lang="en-US" sz="4000" dirty="0"/>
           </a:p>
@@ -8376,54 +8465,15 @@
                 <a:ea typeface="Calibri" pitchFamily="34" charset="-122"/>
                 <a:cs typeface="Calibri" pitchFamily="34" charset="-120"/>
               </a:rPr>
-              <a:t>1. MEANING OF GEOGRAPHY</a:t>
+              <a:t>JUSTIFICATION</a:t>
             </a:r>
             <a:endParaRPr lang="en-US" sz="1400" dirty="0"/>
-          </a:p>
-        </p:txBody>
-      </p:sp>
-      <p:sp>
-        <p:nvSpPr>
-          <p:cNvPr id="3" name="Text 1"/>
-          <p:cNvSpPr/>
-          <p:nvPr/>
-        </p:nvSpPr>
-        <p:spPr>
-          <a:xfrm>
-            <a:off x="457200" y="1005840"/>
-            <a:ext cx="11277295" cy="731520"/>
-          </a:xfrm>
-          <a:prstGeom prst="rect">
-            <a:avLst/>
-          </a:prstGeom>
-          <a:noFill/>
-          <a:ln/>
-        </p:spPr>
-        <p:txBody>
-          <a:bodyPr wrap="square" lIns="0" tIns="0" rIns="0" bIns="0" rtlCol="0" anchor="ctr"/>
-          <a:lstStyle/>
-          <a:p>
-            <a:pPr algn="ctr" indent="0" marL="0">
-              <a:buNone/>
-            </a:pPr>
-            <a:r>
-              <a:rPr lang="en-US" sz="3600" b="1" dirty="0">
-                <a:solidFill>
-                  <a:srgbClr val="990011"/>
-                </a:solidFill>
-                <a:latin typeface="Times New Roman" pitchFamily="34" charset="0"/>
-                <a:ea typeface="Times New Roman" pitchFamily="34" charset="-122"/>
-                <a:cs typeface="Times New Roman" pitchFamily="34" charset="-120"/>
-              </a:rPr>
-              <a:t>Activity 1</a:t>
-            </a:r>
-            <a:endParaRPr lang="en-US" sz="3600" dirty="0"/>
           </a:p>
         </p:txBody>
       </p:sp>
       <p:pic>
         <p:nvPicPr>
-          <p:cNvPr id="4" name="Image 0" descr="/home/claude/f4/img/v2/f4_earth_space.jpg">    </p:cNvPr>
+          <p:cNvPr id="3" name="Image 0" descr="/home/claude/f4/img/minesec_sheet.png">    </p:cNvPr>
           <p:cNvPicPr>
             <a:picLocks noChangeAspect="1"/>
           </p:cNvPicPr>
@@ -8437,8 +8487,8 @@
         </p:blipFill>
         <p:spPr>
           <a:xfrm>
-            <a:off x="2300072" y="1783080"/>
-            <a:ext cx="7591552" cy="4270248"/>
+            <a:off x="0" y="658368"/>
+            <a:ext cx="5120640" cy="5833872"/>
           </a:xfrm>
           <a:prstGeom prst="rect">
             <a:avLst/>
@@ -8447,14 +8497,14 @@
       </p:pic>
       <p:sp>
         <p:nvSpPr>
-          <p:cNvPr id="5" name="Text 2"/>
+          <p:cNvPr id="4" name="Text 1"/>
           <p:cNvSpPr/>
           <p:nvPr/>
         </p:nvSpPr>
         <p:spPr>
           <a:xfrm>
-            <a:off x="457200" y="6089904"/>
-            <a:ext cx="11277295" cy="347472"/>
+            <a:off x="5349240" y="1005840"/>
+            <a:ext cx="6522415" cy="731520"/>
           </a:xfrm>
           <a:prstGeom prst="rect">
             <a:avLst/>
@@ -8463,24 +8513,68 @@
           <a:ln/>
         </p:spPr>
         <p:txBody>
-          <a:bodyPr wrap="square" lIns="0" tIns="0" rIns="0" bIns="0" rtlCol="0" anchor="ctr"/>
+          <a:bodyPr wrap="square" lIns="0" tIns="0" rIns="0" bIns="0" rtlCol="0" anchor="ctr">
+            <a:normAutofit/>
+          </a:bodyPr>
           <a:lstStyle/>
           <a:p>
             <a:pPr algn="ctr" indent="0" marL="0">
               <a:buNone/>
             </a:pPr>
             <a:r>
-              <a:rPr lang="en-US" sz="1800" i="1" dirty="0">
-                <a:solidFill>
-                  <a:srgbClr val="555555"/>
+              <a:rPr lang="en-US" sz="3600" b="1" dirty="0">
+                <a:solidFill>
+                  <a:srgbClr val="990011"/>
                 </a:solidFill>
                 <a:latin typeface="Times New Roman" pitchFamily="34" charset="0"/>
                 <a:ea typeface="Times New Roman" pitchFamily="34" charset="-122"/>
                 <a:cs typeface="Times New Roman" pitchFamily="34" charset="-120"/>
               </a:rPr>
-              <a:t>The Earth seen from space.</a:t>
-            </a:r>
-            <a:endParaRPr lang="en-US" sz="1800" dirty="0"/>
+              <a:t>Justification of the Lesson</a:t>
+            </a:r>
+            <a:endParaRPr lang="en-US" sz="3600" dirty="0"/>
+          </a:p>
+        </p:txBody>
+      </p:sp>
+      <p:sp>
+        <p:nvSpPr>
+          <p:cNvPr id="5" name="Text 2"/>
+          <p:cNvSpPr/>
+          <p:nvPr/>
+        </p:nvSpPr>
+        <p:spPr>
+          <a:xfrm>
+            <a:off x="5349240" y="1783080"/>
+            <a:ext cx="6522415" cy="4663440"/>
+          </a:xfrm>
+          <a:prstGeom prst="rect">
+            <a:avLst/>
+          </a:prstGeom>
+          <a:noFill/>
+          <a:ln/>
+        </p:spPr>
+        <p:txBody>
+          <a:bodyPr wrap="square" lIns="0" tIns="0" rIns="0" bIns="0" rtlCol="0" anchor="t"/>
+          <a:lstStyle/>
+          <a:p>
+            <a:pPr algn="l" indent="0" marL="0">
+              <a:spcAft>
+                <a:spcPts val="800"/>
+              </a:spcAft>
+              <a:buNone/>
+            </a:pPr>
+            <a:r>
+              <a:rPr lang="en-US" sz="4000" dirty="0">
+                <a:solidFill>
+                  <a:srgbClr val="111111"/>
+                </a:solidFill>
+                <a:latin typeface="Times New Roman" pitchFamily="34" charset="0"/>
+                <a:ea typeface="Times New Roman" pitchFamily="34" charset="-122"/>
+                <a:cs typeface="Times New Roman" pitchFamily="34" charset="-120"/>
+              </a:rPr>
+              <a:t>This lesson helps us to know what geography studies and why it is useful for our lives.</a:t>
+            </a:r>
+            <a:endParaRPr lang="en-US" sz="4000" dirty="0"/>
           </a:p>
         </p:txBody>
       </p:sp>
@@ -8596,9 +8690,48 @@
           </a:p>
         </p:txBody>
       </p:sp>
+      <p:sp>
+        <p:nvSpPr>
+          <p:cNvPr id="3" name="Text 1"/>
+          <p:cNvSpPr/>
+          <p:nvPr/>
+        </p:nvSpPr>
+        <p:spPr>
+          <a:xfrm>
+            <a:off x="457200" y="1005840"/>
+            <a:ext cx="11277295" cy="731520"/>
+          </a:xfrm>
+          <a:prstGeom prst="rect">
+            <a:avLst/>
+          </a:prstGeom>
+          <a:noFill/>
+          <a:ln/>
+        </p:spPr>
+        <p:txBody>
+          <a:bodyPr wrap="square" lIns="0" tIns="0" rIns="0" bIns="0" rtlCol="0" anchor="ctr"/>
+          <a:lstStyle/>
+          <a:p>
+            <a:pPr algn="ctr" indent="0" marL="0">
+              <a:buNone/>
+            </a:pPr>
+            <a:r>
+              <a:rPr lang="en-US" sz="3600" b="1" dirty="0">
+                <a:solidFill>
+                  <a:srgbClr val="990011"/>
+                </a:solidFill>
+                <a:latin typeface="Times New Roman" pitchFamily="34" charset="0"/>
+                <a:ea typeface="Times New Roman" pitchFamily="34" charset="-122"/>
+                <a:cs typeface="Times New Roman" pitchFamily="34" charset="-120"/>
+              </a:rPr>
+              <a:t>Activity 1</a:t>
+            </a:r>
+            <a:endParaRPr lang="en-US" sz="3600" dirty="0"/>
+          </a:p>
+        </p:txBody>
+      </p:sp>
       <p:pic>
         <p:nvPicPr>
-          <p:cNvPr id="3" name="Image 0" descr="/home/claude/f4/img/minesec_sheet.png">    </p:cNvPr>
+          <p:cNvPr id="4" name="Image 0" descr="/home/claude/f4/img/v2/f4_earth_space.jpg">    </p:cNvPr>
           <p:cNvPicPr>
             <a:picLocks noChangeAspect="1"/>
           </p:cNvPicPr>
@@ -8612,8 +8745,8 @@
         </p:blipFill>
         <p:spPr>
           <a:xfrm>
-            <a:off x="0" y="658368"/>
-            <a:ext cx="5120640" cy="5833872"/>
+            <a:off x="2300072" y="1783080"/>
+            <a:ext cx="7591552" cy="4270248"/>
           </a:xfrm>
           <a:prstGeom prst="rect">
             <a:avLst/>
@@ -8622,14 +8755,14 @@
       </p:pic>
       <p:sp>
         <p:nvSpPr>
-          <p:cNvPr id="4" name="Text 1"/>
+          <p:cNvPr id="5" name="Text 2"/>
           <p:cNvSpPr/>
           <p:nvPr/>
         </p:nvSpPr>
         <p:spPr>
           <a:xfrm>
-            <a:off x="5349240" y="1005840"/>
-            <a:ext cx="6522415" cy="731520"/>
+            <a:off x="457200" y="6089904"/>
+            <a:ext cx="11277295" cy="347472"/>
           </a:xfrm>
           <a:prstGeom prst="rect">
             <a:avLst/>
@@ -8638,68 +8771,24 @@
           <a:ln/>
         </p:spPr>
         <p:txBody>
-          <a:bodyPr wrap="square" lIns="0" tIns="0" rIns="0" bIns="0" rtlCol="0" anchor="ctr">
-            <a:normAutofit/>
-          </a:bodyPr>
+          <a:bodyPr wrap="square" lIns="0" tIns="0" rIns="0" bIns="0" rtlCol="0" anchor="ctr"/>
           <a:lstStyle/>
           <a:p>
             <a:pPr algn="ctr" indent="0" marL="0">
               <a:buNone/>
             </a:pPr>
             <a:r>
-              <a:rPr lang="en-US" sz="3600" b="1" dirty="0">
-                <a:solidFill>
-                  <a:srgbClr val="990011"/>
+              <a:rPr lang="en-US" sz="1800" i="1" dirty="0">
+                <a:solidFill>
+                  <a:srgbClr val="555555"/>
                 </a:solidFill>
                 <a:latin typeface="Times New Roman" pitchFamily="34" charset="0"/>
                 <a:ea typeface="Times New Roman" pitchFamily="34" charset="-122"/>
                 <a:cs typeface="Times New Roman" pitchFamily="34" charset="-120"/>
               </a:rPr>
-              <a:t>Activity 1: Question 1</a:t>
-            </a:r>
-            <a:endParaRPr lang="en-US" sz="3600" dirty="0"/>
-          </a:p>
-        </p:txBody>
-      </p:sp>
-      <p:sp>
-        <p:nvSpPr>
-          <p:cNvPr id="5" name="Text 2"/>
-          <p:cNvSpPr/>
-          <p:nvPr/>
-        </p:nvSpPr>
-        <p:spPr>
-          <a:xfrm>
-            <a:off x="5349240" y="1783080"/>
-            <a:ext cx="6522415" cy="4663440"/>
-          </a:xfrm>
-          <a:prstGeom prst="rect">
-            <a:avLst/>
-          </a:prstGeom>
-          <a:noFill/>
-          <a:ln/>
-        </p:spPr>
-        <p:txBody>
-          <a:bodyPr wrap="square" lIns="0" tIns="0" rIns="0" bIns="0" rtlCol="0" anchor="t"/>
-          <a:lstStyle/>
-          <a:p>
-            <a:pPr algn="l" indent="0" marL="0">
-              <a:spcAft>
-                <a:spcPts val="800"/>
-              </a:spcAft>
-              <a:buNone/>
-            </a:pPr>
-            <a:r>
-              <a:rPr lang="en-US" sz="4000" dirty="0">
-                <a:solidFill>
-                  <a:srgbClr val="111111"/>
-                </a:solidFill>
-                <a:latin typeface="Times New Roman" pitchFamily="34" charset="0"/>
-                <a:ea typeface="Times New Roman" pitchFamily="34" charset="-122"/>
-                <a:cs typeface="Times New Roman" pitchFamily="34" charset="-120"/>
-              </a:rPr>
-              <a:t>The word geography comes from the Greek words "geo" and "graphein". What do these words mean?</a:t>
-            </a:r>
-            <a:endParaRPr lang="en-US" sz="4000" dirty="0"/>
+              <a:t>The Earth seen from space.</a:t>
+            </a:r>
+            <a:endParaRPr lang="en-US" sz="1800" dirty="0"/>
           </a:p>
         </p:txBody>
       </p:sp>
@@ -8874,7 +8963,7 @@
                 <a:ea typeface="Times New Roman" pitchFamily="34" charset="-122"/>
                 <a:cs typeface="Times New Roman" pitchFamily="34" charset="-120"/>
               </a:rPr>
-              <a:t>Activity 1: Answer 1</a:t>
+              <a:t>Activity 1: Question 1</a:t>
             </a:r>
             <a:endParaRPr lang="en-US" sz="3600" dirty="0"/>
           </a:p>
@@ -8916,7 +9005,7 @@
                 <a:ea typeface="Times New Roman" pitchFamily="34" charset="-122"/>
                 <a:cs typeface="Times New Roman" pitchFamily="34" charset="-120"/>
               </a:rPr>
-              <a:t>"Geo" means the Earth, and "graphein" means to describe.</a:t>
+              <a:t>The word geography comes from the Greek words "geo" and "graphein". What do these words mean?</a:t>
             </a:r>
             <a:endParaRPr lang="en-US" sz="4000" dirty="0"/>
           </a:p>
@@ -9688,7 +9777,7 @@
                 <a:ea typeface="Times New Roman" pitchFamily="34" charset="-122"/>
                 <a:cs typeface="Times New Roman" pitchFamily="34" charset="-120"/>
               </a:rPr>
-              <a:t>Activity 1: Question 2</a:t>
+              <a:t>Activity 1: Answer 1</a:t>
             </a:r>
             <a:endParaRPr lang="en-US" sz="3600" dirty="0"/>
           </a:p>
@@ -9730,7 +9819,7 @@
                 <a:ea typeface="Times New Roman" pitchFamily="34" charset="-122"/>
                 <a:cs typeface="Times New Roman" pitchFamily="34" charset="-120"/>
               </a:rPr>
-              <a:t>So, what is geography?</a:t>
+              <a:t>"Geo" means the Earth, and "graphein" means to describe.</a:t>
             </a:r>
             <a:endParaRPr lang="en-US" sz="4000" dirty="0"/>
           </a:p>
@@ -9907,7 +9996,7 @@
                 <a:ea typeface="Times New Roman" pitchFamily="34" charset="-122"/>
                 <a:cs typeface="Times New Roman" pitchFamily="34" charset="-120"/>
               </a:rPr>
-              <a:t>Activity 1: Answer 2</a:t>
+              <a:t>Activity 1: Question 2</a:t>
             </a:r>
             <a:endParaRPr lang="en-US" sz="3600" dirty="0"/>
           </a:p>
@@ -9949,7 +10038,7 @@
                 <a:ea typeface="Times New Roman" pitchFamily="34" charset="-122"/>
                 <a:cs typeface="Times New Roman" pitchFamily="34" charset="-120"/>
               </a:rPr>
-              <a:t>Geography is the study and description of the Earth and of the people who live on it.</a:t>
+              <a:t>So, what is geography?</a:t>
             </a:r>
             <a:endParaRPr lang="en-US" sz="4000" dirty="0"/>
           </a:p>
@@ -10061,54 +10150,15 @@
                 <a:ea typeface="Calibri" pitchFamily="34" charset="-122"/>
                 <a:cs typeface="Calibri" pitchFamily="34" charset="-120"/>
               </a:rPr>
-              <a:t>2. BRANCHES OF GEOGRAPHY</a:t>
+              <a:t>1. MEANING OF GEOGRAPHY</a:t>
             </a:r>
             <a:endParaRPr lang="en-US" sz="1400" dirty="0"/>
-          </a:p>
-        </p:txBody>
-      </p:sp>
-      <p:sp>
-        <p:nvSpPr>
-          <p:cNvPr id="3" name="Text 1"/>
-          <p:cNvSpPr/>
-          <p:nvPr/>
-        </p:nvSpPr>
-        <p:spPr>
-          <a:xfrm>
-            <a:off x="457200" y="1005840"/>
-            <a:ext cx="11277295" cy="731520"/>
-          </a:xfrm>
-          <a:prstGeom prst="rect">
-            <a:avLst/>
-          </a:prstGeom>
-          <a:noFill/>
-          <a:ln/>
-        </p:spPr>
-        <p:txBody>
-          <a:bodyPr wrap="square" lIns="0" tIns="0" rIns="0" bIns="0" rtlCol="0" anchor="ctr"/>
-          <a:lstStyle/>
-          <a:p>
-            <a:pPr algn="ctr" indent="0" marL="0">
-              <a:buNone/>
-            </a:pPr>
-            <a:r>
-              <a:rPr lang="en-US" sz="3600" b="1" dirty="0">
-                <a:solidFill>
-                  <a:srgbClr val="990011"/>
-                </a:solidFill>
-                <a:latin typeface="Times New Roman" pitchFamily="34" charset="0"/>
-                <a:ea typeface="Times New Roman" pitchFamily="34" charset="-122"/>
-                <a:cs typeface="Times New Roman" pitchFamily="34" charset="-120"/>
-              </a:rPr>
-              <a:t>Activity 2</a:t>
-            </a:r>
-            <a:endParaRPr lang="en-US" sz="3600" dirty="0"/>
           </a:p>
         </p:txBody>
       </p:sp>
       <p:pic>
         <p:nvPicPr>
-          <p:cNvPr id="4" name="Image 0" descr="/home/claude/f4/img/v2/lsa_mtcameroon.jpg">    </p:cNvPr>
+          <p:cNvPr id="3" name="Image 0" descr="/home/claude/f4/img/minesec_sheet.png">    </p:cNvPr>
           <p:cNvPicPr>
             <a:picLocks noChangeAspect="1"/>
           </p:cNvPicPr>
@@ -10122,8 +10172,8 @@
         </p:blipFill>
         <p:spPr>
           <a:xfrm>
-            <a:off x="2246610" y="1783080"/>
-            <a:ext cx="7698475" cy="4270248"/>
+            <a:off x="0" y="658368"/>
+            <a:ext cx="5120640" cy="5833872"/>
           </a:xfrm>
           <a:prstGeom prst="rect">
             <a:avLst/>
@@ -10132,14 +10182,14 @@
       </p:pic>
       <p:sp>
         <p:nvSpPr>
-          <p:cNvPr id="5" name="Text 2"/>
+          <p:cNvPr id="4" name="Text 1"/>
           <p:cNvSpPr/>
           <p:nvPr/>
         </p:nvSpPr>
         <p:spPr>
           <a:xfrm>
-            <a:off x="457200" y="6089904"/>
-            <a:ext cx="11277295" cy="347472"/>
+            <a:off x="5349240" y="1005840"/>
+            <a:ext cx="6522415" cy="731520"/>
           </a:xfrm>
           <a:prstGeom prst="rect">
             <a:avLst/>
@@ -10148,24 +10198,68 @@
           <a:ln/>
         </p:spPr>
         <p:txBody>
-          <a:bodyPr wrap="square" lIns="0" tIns="0" rIns="0" bIns="0" rtlCol="0" anchor="ctr"/>
+          <a:bodyPr wrap="square" lIns="0" tIns="0" rIns="0" bIns="0" rtlCol="0" anchor="ctr">
+            <a:normAutofit/>
+          </a:bodyPr>
           <a:lstStyle/>
           <a:p>
             <a:pPr algn="ctr" indent="0" marL="0">
               <a:buNone/>
             </a:pPr>
             <a:r>
-              <a:rPr lang="en-US" sz="1800" i="1" dirty="0">
-                <a:solidFill>
-                  <a:srgbClr val="555555"/>
+              <a:rPr lang="en-US" sz="3600" b="1" dirty="0">
+                <a:solidFill>
+                  <a:srgbClr val="990011"/>
                 </a:solidFill>
                 <a:latin typeface="Times New Roman" pitchFamily="34" charset="0"/>
                 <a:ea typeface="Times New Roman" pitchFamily="34" charset="-122"/>
                 <a:cs typeface="Times New Roman" pitchFamily="34" charset="-120"/>
               </a:rPr>
-              <a:t>Mount Cameroon.</a:t>
-            </a:r>
-            <a:endParaRPr lang="en-US" sz="1800" dirty="0"/>
+              <a:t>Activity 1: Answer 2</a:t>
+            </a:r>
+            <a:endParaRPr lang="en-US" sz="3600" dirty="0"/>
+          </a:p>
+        </p:txBody>
+      </p:sp>
+      <p:sp>
+        <p:nvSpPr>
+          <p:cNvPr id="5" name="Text 2"/>
+          <p:cNvSpPr/>
+          <p:nvPr/>
+        </p:nvSpPr>
+        <p:spPr>
+          <a:xfrm>
+            <a:off x="5349240" y="1783080"/>
+            <a:ext cx="6522415" cy="4663440"/>
+          </a:xfrm>
+          <a:prstGeom prst="rect">
+            <a:avLst/>
+          </a:prstGeom>
+          <a:noFill/>
+          <a:ln/>
+        </p:spPr>
+        <p:txBody>
+          <a:bodyPr wrap="square" lIns="0" tIns="0" rIns="0" bIns="0" rtlCol="0" anchor="t"/>
+          <a:lstStyle/>
+          <a:p>
+            <a:pPr algn="l" indent="0" marL="0">
+              <a:spcAft>
+                <a:spcPts val="800"/>
+              </a:spcAft>
+              <a:buNone/>
+            </a:pPr>
+            <a:r>
+              <a:rPr lang="en-US" sz="4000" dirty="0">
+                <a:solidFill>
+                  <a:srgbClr val="111111"/>
+                </a:solidFill>
+                <a:latin typeface="Times New Roman" pitchFamily="34" charset="0"/>
+                <a:ea typeface="Times New Roman" pitchFamily="34" charset="-122"/>
+                <a:cs typeface="Times New Roman" pitchFamily="34" charset="-120"/>
+              </a:rPr>
+              <a:t>Geography is the study and description of the Earth and of the people who live on it.</a:t>
+            </a:r>
+            <a:endParaRPr lang="en-US" sz="4000" dirty="0"/>
           </a:p>
         </p:txBody>
       </p:sp>
@@ -10281,9 +10375,48 @@
           </a:p>
         </p:txBody>
       </p:sp>
+      <p:sp>
+        <p:nvSpPr>
+          <p:cNvPr id="3" name="Text 1"/>
+          <p:cNvSpPr/>
+          <p:nvPr/>
+        </p:nvSpPr>
+        <p:spPr>
+          <a:xfrm>
+            <a:off x="457200" y="1005840"/>
+            <a:ext cx="11277295" cy="731520"/>
+          </a:xfrm>
+          <a:prstGeom prst="rect">
+            <a:avLst/>
+          </a:prstGeom>
+          <a:noFill/>
+          <a:ln/>
+        </p:spPr>
+        <p:txBody>
+          <a:bodyPr wrap="square" lIns="0" tIns="0" rIns="0" bIns="0" rtlCol="0" anchor="ctr"/>
+          <a:lstStyle/>
+          <a:p>
+            <a:pPr algn="ctr" indent="0" marL="0">
+              <a:buNone/>
+            </a:pPr>
+            <a:r>
+              <a:rPr lang="en-US" sz="3600" b="1" dirty="0">
+                <a:solidFill>
+                  <a:srgbClr val="990011"/>
+                </a:solidFill>
+                <a:latin typeface="Times New Roman" pitchFamily="34" charset="0"/>
+                <a:ea typeface="Times New Roman" pitchFamily="34" charset="-122"/>
+                <a:cs typeface="Times New Roman" pitchFamily="34" charset="-120"/>
+              </a:rPr>
+              <a:t>Activity 2</a:t>
+            </a:r>
+            <a:endParaRPr lang="en-US" sz="3600" dirty="0"/>
+          </a:p>
+        </p:txBody>
+      </p:sp>
       <p:pic>
         <p:nvPicPr>
-          <p:cNvPr id="3" name="Image 0" descr="/home/claude/f4/img/minesec_sheet.png">    </p:cNvPr>
+          <p:cNvPr id="4" name="Image 0" descr="/home/claude/f4/img/v2/lsa_mtcameroon.jpg">    </p:cNvPr>
           <p:cNvPicPr>
             <a:picLocks noChangeAspect="1"/>
           </p:cNvPicPr>
@@ -10297,8 +10430,8 @@
         </p:blipFill>
         <p:spPr>
           <a:xfrm>
-            <a:off x="0" y="658368"/>
-            <a:ext cx="5120640" cy="5833872"/>
+            <a:off x="2246610" y="1783080"/>
+            <a:ext cx="7698475" cy="4270248"/>
           </a:xfrm>
           <a:prstGeom prst="rect">
             <a:avLst/>
@@ -10307,14 +10440,14 @@
       </p:pic>
       <p:sp>
         <p:nvSpPr>
-          <p:cNvPr id="4" name="Text 1"/>
+          <p:cNvPr id="5" name="Text 2"/>
           <p:cNvSpPr/>
           <p:nvPr/>
         </p:nvSpPr>
         <p:spPr>
           <a:xfrm>
-            <a:off x="5349240" y="1005840"/>
-            <a:ext cx="6522415" cy="731520"/>
+            <a:off x="457200" y="6089904"/>
+            <a:ext cx="11277295" cy="347472"/>
           </a:xfrm>
           <a:prstGeom prst="rect">
             <a:avLst/>
@@ -10323,68 +10456,24 @@
           <a:ln/>
         </p:spPr>
         <p:txBody>
-          <a:bodyPr wrap="square" lIns="0" tIns="0" rIns="0" bIns="0" rtlCol="0" anchor="ctr">
-            <a:normAutofit/>
-          </a:bodyPr>
+          <a:bodyPr wrap="square" lIns="0" tIns="0" rIns="0" bIns="0" rtlCol="0" anchor="ctr"/>
           <a:lstStyle/>
           <a:p>
             <a:pPr algn="ctr" indent="0" marL="0">
               <a:buNone/>
             </a:pPr>
             <a:r>
-              <a:rPr lang="en-US" sz="3600" b="1" dirty="0">
-                <a:solidFill>
-                  <a:srgbClr val="990011"/>
+              <a:rPr lang="en-US" sz="1800" i="1" dirty="0">
+                <a:solidFill>
+                  <a:srgbClr val="555555"/>
                 </a:solidFill>
                 <a:latin typeface="Times New Roman" pitchFamily="34" charset="0"/>
                 <a:ea typeface="Times New Roman" pitchFamily="34" charset="-122"/>
                 <a:cs typeface="Times New Roman" pitchFamily="34" charset="-120"/>
               </a:rPr>
-              <a:t>Activity 2: Question</a:t>
-            </a:r>
-            <a:endParaRPr lang="en-US" sz="3600" dirty="0"/>
-          </a:p>
-        </p:txBody>
-      </p:sp>
-      <p:sp>
-        <p:nvSpPr>
-          <p:cNvPr id="5" name="Text 2"/>
-          <p:cNvSpPr/>
-          <p:nvPr/>
-        </p:nvSpPr>
-        <p:spPr>
-          <a:xfrm>
-            <a:off x="5349240" y="1783080"/>
-            <a:ext cx="6522415" cy="4663440"/>
-          </a:xfrm>
-          <a:prstGeom prst="rect">
-            <a:avLst/>
-          </a:prstGeom>
-          <a:noFill/>
-          <a:ln/>
-        </p:spPr>
-        <p:txBody>
-          <a:bodyPr wrap="square" lIns="0" tIns="0" rIns="0" bIns="0" rtlCol="0" anchor="t"/>
-          <a:lstStyle/>
-          <a:p>
-            <a:pPr algn="l" indent="0" marL="0">
-              <a:spcAft>
-                <a:spcPts val="800"/>
-              </a:spcAft>
-              <a:buNone/>
-            </a:pPr>
-            <a:r>
-              <a:rPr lang="en-US" sz="4000" dirty="0">
-                <a:solidFill>
-                  <a:srgbClr val="111111"/>
-                </a:solidFill>
-                <a:latin typeface="Times New Roman" pitchFamily="34" charset="0"/>
-                <a:ea typeface="Times New Roman" pitchFamily="34" charset="-122"/>
-                <a:cs typeface="Times New Roman" pitchFamily="34" charset="-120"/>
-              </a:rPr>
-              <a:t>Which branch of geography studies mountains, rivers, climate and soils?</a:t>
-            </a:r>
-            <a:endParaRPr lang="en-US" sz="4000" dirty="0"/>
+              <a:t>Mount Cameroon.</a:t>
+            </a:r>
+            <a:endParaRPr lang="en-US" sz="1800" dirty="0"/>
           </a:p>
         </p:txBody>
       </p:sp>
@@ -10559,7 +10648,7 @@
                 <a:ea typeface="Times New Roman" pitchFamily="34" charset="-122"/>
                 <a:cs typeface="Times New Roman" pitchFamily="34" charset="-120"/>
               </a:rPr>
-              <a:t>Activity 2: Answer</a:t>
+              <a:t>Activity 2: Question</a:t>
             </a:r>
             <a:endParaRPr lang="en-US" sz="3600" dirty="0"/>
           </a:p>
@@ -10601,7 +10690,7 @@
                 <a:ea typeface="Times New Roman" pitchFamily="34" charset="-122"/>
                 <a:cs typeface="Times New Roman" pitchFamily="34" charset="-120"/>
               </a:rPr>
-              <a:t>Physical geography.</a:t>
+              <a:t>Which branch of geography studies mountains, rivers, climate and soils?</a:t>
             </a:r>
             <a:endParaRPr lang="en-US" sz="4000" dirty="0"/>
           </a:p>
@@ -10719,48 +10808,9 @@
           </a:p>
         </p:txBody>
       </p:sp>
-      <p:sp>
-        <p:nvSpPr>
-          <p:cNvPr id="3" name="Text 1"/>
-          <p:cNvSpPr/>
-          <p:nvPr/>
-        </p:nvSpPr>
-        <p:spPr>
-          <a:xfrm>
-            <a:off x="457200" y="1005840"/>
-            <a:ext cx="11277295" cy="731520"/>
-          </a:xfrm>
-          <a:prstGeom prst="rect">
-            <a:avLst/>
-          </a:prstGeom>
-          <a:noFill/>
-          <a:ln/>
-        </p:spPr>
-        <p:txBody>
-          <a:bodyPr wrap="square" lIns="0" tIns="0" rIns="0" bIns="0" rtlCol="0" anchor="ctr"/>
-          <a:lstStyle/>
-          <a:p>
-            <a:pPr algn="ctr" indent="0" marL="0">
-              <a:buNone/>
-            </a:pPr>
-            <a:r>
-              <a:rPr lang="en-US" sz="3600" b="1" dirty="0">
-                <a:solidFill>
-                  <a:srgbClr val="990011"/>
-                </a:solidFill>
-                <a:latin typeface="Times New Roman" pitchFamily="34" charset="0"/>
-                <a:ea typeface="Times New Roman" pitchFamily="34" charset="-122"/>
-                <a:cs typeface="Times New Roman" pitchFamily="34" charset="-120"/>
-              </a:rPr>
-              <a:t>Activity 3</a:t>
-            </a:r>
-            <a:endParaRPr lang="en-US" sz="3600" dirty="0"/>
-          </a:p>
-        </p:txBody>
-      </p:sp>
       <p:pic>
         <p:nvPicPr>
-          <p:cNvPr id="4" name="Image 0" descr="/home/claude/f4/img/v2/f2t_market.jpg">    </p:cNvPr>
+          <p:cNvPr id="3" name="Image 0" descr="/home/claude/f4/img/minesec_sheet.png">    </p:cNvPr>
           <p:cNvPicPr>
             <a:picLocks noChangeAspect="1"/>
           </p:cNvPicPr>
@@ -10774,8 +10824,8 @@
         </p:blipFill>
         <p:spPr>
           <a:xfrm>
-            <a:off x="2246610" y="1783080"/>
-            <a:ext cx="7698475" cy="4270248"/>
+            <a:off x="0" y="658368"/>
+            <a:ext cx="5120640" cy="5833872"/>
           </a:xfrm>
           <a:prstGeom prst="rect">
             <a:avLst/>
@@ -10784,14 +10834,14 @@
       </p:pic>
       <p:sp>
         <p:nvSpPr>
-          <p:cNvPr id="5" name="Text 2"/>
+          <p:cNvPr id="4" name="Text 1"/>
           <p:cNvSpPr/>
           <p:nvPr/>
         </p:nvSpPr>
         <p:spPr>
           <a:xfrm>
-            <a:off x="457200" y="6089904"/>
-            <a:ext cx="11277295" cy="347472"/>
+            <a:off x="5349240" y="1005840"/>
+            <a:ext cx="6522415" cy="731520"/>
           </a:xfrm>
           <a:prstGeom prst="rect">
             <a:avLst/>
@@ -10800,24 +10850,68 @@
           <a:ln/>
         </p:spPr>
         <p:txBody>
-          <a:bodyPr wrap="square" lIns="0" tIns="0" rIns="0" bIns="0" rtlCol="0" anchor="ctr"/>
+          <a:bodyPr wrap="square" lIns="0" tIns="0" rIns="0" bIns="0" rtlCol="0" anchor="ctr">
+            <a:normAutofit/>
+          </a:bodyPr>
           <a:lstStyle/>
           <a:p>
             <a:pPr algn="ctr" indent="0" marL="0">
               <a:buNone/>
             </a:pPr>
             <a:r>
-              <a:rPr lang="en-US" sz="1800" i="1" dirty="0">
-                <a:solidFill>
-                  <a:srgbClr val="555555"/>
+              <a:rPr lang="en-US" sz="3600" b="1" dirty="0">
+                <a:solidFill>
+                  <a:srgbClr val="990011"/>
                 </a:solidFill>
                 <a:latin typeface="Times New Roman" pitchFamily="34" charset="0"/>
                 <a:ea typeface="Times New Roman" pitchFamily="34" charset="-122"/>
                 <a:cs typeface="Times New Roman" pitchFamily="34" charset="-120"/>
               </a:rPr>
-              <a:t>A busy market in Cameroon.</a:t>
-            </a:r>
-            <a:endParaRPr lang="en-US" sz="1800" dirty="0"/>
+              <a:t>Activity 2: Answer</a:t>
+            </a:r>
+            <a:endParaRPr lang="en-US" sz="3600" dirty="0"/>
+          </a:p>
+        </p:txBody>
+      </p:sp>
+      <p:sp>
+        <p:nvSpPr>
+          <p:cNvPr id="5" name="Text 2"/>
+          <p:cNvSpPr/>
+          <p:nvPr/>
+        </p:nvSpPr>
+        <p:spPr>
+          <a:xfrm>
+            <a:off x="5349240" y="1783080"/>
+            <a:ext cx="6522415" cy="4663440"/>
+          </a:xfrm>
+          <a:prstGeom prst="rect">
+            <a:avLst/>
+          </a:prstGeom>
+          <a:noFill/>
+          <a:ln/>
+        </p:spPr>
+        <p:txBody>
+          <a:bodyPr wrap="square" lIns="0" tIns="0" rIns="0" bIns="0" rtlCol="0" anchor="t"/>
+          <a:lstStyle/>
+          <a:p>
+            <a:pPr algn="l" indent="0" marL="0">
+              <a:spcAft>
+                <a:spcPts val="800"/>
+              </a:spcAft>
+              <a:buNone/>
+            </a:pPr>
+            <a:r>
+              <a:rPr lang="en-US" sz="4000" dirty="0">
+                <a:solidFill>
+                  <a:srgbClr val="111111"/>
+                </a:solidFill>
+                <a:latin typeface="Times New Roman" pitchFamily="34" charset="0"/>
+                <a:ea typeface="Times New Roman" pitchFamily="34" charset="-122"/>
+                <a:cs typeface="Times New Roman" pitchFamily="34" charset="-120"/>
+              </a:rPr>
+              <a:t>Physical geography.</a:t>
+            </a:r>
+            <a:endParaRPr lang="en-US" sz="4000" dirty="0"/>
           </a:p>
         </p:txBody>
       </p:sp>
@@ -10933,9 +11027,48 @@
           </a:p>
         </p:txBody>
       </p:sp>
+      <p:sp>
+        <p:nvSpPr>
+          <p:cNvPr id="3" name="Text 1"/>
+          <p:cNvSpPr/>
+          <p:nvPr/>
+        </p:nvSpPr>
+        <p:spPr>
+          <a:xfrm>
+            <a:off x="457200" y="1005840"/>
+            <a:ext cx="11277295" cy="731520"/>
+          </a:xfrm>
+          <a:prstGeom prst="rect">
+            <a:avLst/>
+          </a:prstGeom>
+          <a:noFill/>
+          <a:ln/>
+        </p:spPr>
+        <p:txBody>
+          <a:bodyPr wrap="square" lIns="0" tIns="0" rIns="0" bIns="0" rtlCol="0" anchor="ctr"/>
+          <a:lstStyle/>
+          <a:p>
+            <a:pPr algn="ctr" indent="0" marL="0">
+              <a:buNone/>
+            </a:pPr>
+            <a:r>
+              <a:rPr lang="en-US" sz="3600" b="1" dirty="0">
+                <a:solidFill>
+                  <a:srgbClr val="990011"/>
+                </a:solidFill>
+                <a:latin typeface="Times New Roman" pitchFamily="34" charset="0"/>
+                <a:ea typeface="Times New Roman" pitchFamily="34" charset="-122"/>
+                <a:cs typeface="Times New Roman" pitchFamily="34" charset="-120"/>
+              </a:rPr>
+              <a:t>Activity 3</a:t>
+            </a:r>
+            <a:endParaRPr lang="en-US" sz="3600" dirty="0"/>
+          </a:p>
+        </p:txBody>
+      </p:sp>
       <p:pic>
         <p:nvPicPr>
-          <p:cNvPr id="3" name="Image 0" descr="/home/claude/f4/img/minesec_sheet.png">    </p:cNvPr>
+          <p:cNvPr id="4" name="Image 0" descr="/home/claude/f4/img/v2/f2t_market.jpg">    </p:cNvPr>
           <p:cNvPicPr>
             <a:picLocks noChangeAspect="1"/>
           </p:cNvPicPr>
@@ -10949,8 +11082,8 @@
         </p:blipFill>
         <p:spPr>
           <a:xfrm>
-            <a:off x="0" y="658368"/>
-            <a:ext cx="5120640" cy="5833872"/>
+            <a:off x="2246610" y="1783080"/>
+            <a:ext cx="7698475" cy="4270248"/>
           </a:xfrm>
           <a:prstGeom prst="rect">
             <a:avLst/>
@@ -10959,14 +11092,14 @@
       </p:pic>
       <p:sp>
         <p:nvSpPr>
-          <p:cNvPr id="4" name="Text 1"/>
+          <p:cNvPr id="5" name="Text 2"/>
           <p:cNvSpPr/>
           <p:nvPr/>
         </p:nvSpPr>
         <p:spPr>
           <a:xfrm>
-            <a:off x="5349240" y="1005840"/>
-            <a:ext cx="6522415" cy="731520"/>
+            <a:off x="457200" y="6089904"/>
+            <a:ext cx="11277295" cy="347472"/>
           </a:xfrm>
           <a:prstGeom prst="rect">
             <a:avLst/>
@@ -10975,68 +11108,24 @@
           <a:ln/>
         </p:spPr>
         <p:txBody>
-          <a:bodyPr wrap="square" lIns="0" tIns="0" rIns="0" bIns="0" rtlCol="0" anchor="ctr">
-            <a:normAutofit/>
-          </a:bodyPr>
+          <a:bodyPr wrap="square" lIns="0" tIns="0" rIns="0" bIns="0" rtlCol="0" anchor="ctr"/>
           <a:lstStyle/>
           <a:p>
             <a:pPr algn="ctr" indent="0" marL="0">
               <a:buNone/>
             </a:pPr>
             <a:r>
-              <a:rPr lang="en-US" sz="3600" b="1" dirty="0">
-                <a:solidFill>
-                  <a:srgbClr val="990011"/>
+              <a:rPr lang="en-US" sz="1800" i="1" dirty="0">
+                <a:solidFill>
+                  <a:srgbClr val="555555"/>
                 </a:solidFill>
                 <a:latin typeface="Times New Roman" pitchFamily="34" charset="0"/>
                 <a:ea typeface="Times New Roman" pitchFamily="34" charset="-122"/>
                 <a:cs typeface="Times New Roman" pitchFamily="34" charset="-120"/>
               </a:rPr>
-              <a:t>Activity 3: Question</a:t>
-            </a:r>
-            <a:endParaRPr lang="en-US" sz="3600" dirty="0"/>
-          </a:p>
-        </p:txBody>
-      </p:sp>
-      <p:sp>
-        <p:nvSpPr>
-          <p:cNvPr id="5" name="Text 2"/>
-          <p:cNvSpPr/>
-          <p:nvPr/>
-        </p:nvSpPr>
-        <p:spPr>
-          <a:xfrm>
-            <a:off x="5349240" y="1783080"/>
-            <a:ext cx="6522415" cy="4663440"/>
-          </a:xfrm>
-          <a:prstGeom prst="rect">
-            <a:avLst/>
-          </a:prstGeom>
-          <a:noFill/>
-          <a:ln/>
-        </p:spPr>
-        <p:txBody>
-          <a:bodyPr wrap="square" lIns="0" tIns="0" rIns="0" bIns="0" rtlCol="0" anchor="t"/>
-          <a:lstStyle/>
-          <a:p>
-            <a:pPr algn="l" indent="0" marL="0">
-              <a:spcAft>
-                <a:spcPts val="800"/>
-              </a:spcAft>
-              <a:buNone/>
-            </a:pPr>
-            <a:r>
-              <a:rPr lang="en-US" sz="4000" dirty="0">
-                <a:solidFill>
-                  <a:srgbClr val="111111"/>
-                </a:solidFill>
-                <a:latin typeface="Times New Roman" pitchFamily="34" charset="0"/>
-                <a:ea typeface="Times New Roman" pitchFamily="34" charset="-122"/>
-                <a:cs typeface="Times New Roman" pitchFamily="34" charset="-120"/>
-              </a:rPr>
-              <a:t>Which branch of geography studies people, markets, towns and farming?</a:t>
-            </a:r>
-            <a:endParaRPr lang="en-US" sz="4000" dirty="0"/>
+              <a:t>A busy market in Cameroon.</a:t>
+            </a:r>
+            <a:endParaRPr lang="en-US" sz="1800" dirty="0"/>
           </a:p>
         </p:txBody>
       </p:sp>
@@ -11211,7 +11300,7 @@
                 <a:ea typeface="Times New Roman" pitchFamily="34" charset="-122"/>
                 <a:cs typeface="Times New Roman" pitchFamily="34" charset="-120"/>
               </a:rPr>
-              <a:t>Activity 3: Answer</a:t>
+              <a:t>Activity 3: Question</a:t>
             </a:r>
             <a:endParaRPr lang="en-US" sz="3600" dirty="0"/>
           </a:p>
@@ -11253,7 +11342,7 @@
                 <a:ea typeface="Times New Roman" pitchFamily="34" charset="-122"/>
                 <a:cs typeface="Times New Roman" pitchFamily="34" charset="-120"/>
               </a:rPr>
-              <a:t>Human geography.</a:t>
+              <a:t>Which branch of geography studies people, markets, towns and farming?</a:t>
             </a:r>
             <a:endParaRPr lang="en-US" sz="4000" dirty="0"/>
           </a:p>
@@ -11365,54 +11454,15 @@
                 <a:ea typeface="Calibri" pitchFamily="34" charset="-122"/>
                 <a:cs typeface="Calibri" pitchFamily="34" charset="-120"/>
               </a:rPr>
-              <a:t>3. METHODS OF GEOGRAPHY</a:t>
+              <a:t>2. BRANCHES OF GEOGRAPHY</a:t>
             </a:r>
             <a:endParaRPr lang="en-US" sz="1400" dirty="0"/>
-          </a:p>
-        </p:txBody>
-      </p:sp>
-      <p:sp>
-        <p:nvSpPr>
-          <p:cNvPr id="3" name="Text 1"/>
-          <p:cNvSpPr/>
-          <p:nvPr/>
-        </p:nvSpPr>
-        <p:spPr>
-          <a:xfrm>
-            <a:off x="457200" y="1005840"/>
-            <a:ext cx="11277295" cy="731520"/>
-          </a:xfrm>
-          <a:prstGeom prst="rect">
-            <a:avLst/>
-          </a:prstGeom>
-          <a:noFill/>
-          <a:ln/>
-        </p:spPr>
-        <p:txBody>
-          <a:bodyPr wrap="square" lIns="0" tIns="0" rIns="0" bIns="0" rtlCol="0" anchor="ctr"/>
-          <a:lstStyle/>
-          <a:p>
-            <a:pPr algn="ctr" indent="0" marL="0">
-              <a:buNone/>
-            </a:pPr>
-            <a:r>
-              <a:rPr lang="en-US" sz="3600" b="1" dirty="0">
-                <a:solidFill>
-                  <a:srgbClr val="990011"/>
-                </a:solidFill>
-                <a:latin typeface="Times New Roman" pitchFamily="34" charset="0"/>
-                <a:ea typeface="Times New Roman" pitchFamily="34" charset="-122"/>
-                <a:cs typeface="Times New Roman" pitchFamily="34" charset="-120"/>
-              </a:rPr>
-              <a:t>Activity 4</a:t>
-            </a:r>
-            <a:endParaRPr lang="en-US" sz="3600" dirty="0"/>
           </a:p>
         </p:txBody>
       </p:sp>
       <p:pic>
         <p:nvPicPr>
-          <p:cNvPr id="4" name="Image 0" descr="/home/claude/f4/img/v2/usa_topomap.jpg">    </p:cNvPr>
+          <p:cNvPr id="3" name="Image 0" descr="/home/claude/f4/img/minesec_sheet.png">    </p:cNvPr>
           <p:cNvPicPr>
             <a:picLocks noChangeAspect="1"/>
           </p:cNvPicPr>
@@ -11426,8 +11476,8 @@
         </p:blipFill>
         <p:spPr>
           <a:xfrm>
-            <a:off x="2246610" y="1783080"/>
-            <a:ext cx="7698475" cy="4270248"/>
+            <a:off x="0" y="658368"/>
+            <a:ext cx="5120640" cy="5833872"/>
           </a:xfrm>
           <a:prstGeom prst="rect">
             <a:avLst/>
@@ -11436,14 +11486,14 @@
       </p:pic>
       <p:sp>
         <p:nvSpPr>
-          <p:cNvPr id="5" name="Text 2"/>
+          <p:cNvPr id="4" name="Text 1"/>
           <p:cNvSpPr/>
           <p:nvPr/>
         </p:nvSpPr>
         <p:spPr>
           <a:xfrm>
-            <a:off x="457200" y="6089904"/>
-            <a:ext cx="11277295" cy="347472"/>
+            <a:off x="5349240" y="1005840"/>
+            <a:ext cx="6522415" cy="731520"/>
           </a:xfrm>
           <a:prstGeom prst="rect">
             <a:avLst/>
@@ -11452,24 +11502,68 @@
           <a:ln/>
         </p:spPr>
         <p:txBody>
-          <a:bodyPr wrap="square" lIns="0" tIns="0" rIns="0" bIns="0" rtlCol="0" anchor="ctr"/>
+          <a:bodyPr wrap="square" lIns="0" tIns="0" rIns="0" bIns="0" rtlCol="0" anchor="ctr">
+            <a:normAutofit/>
+          </a:bodyPr>
           <a:lstStyle/>
           <a:p>
             <a:pPr algn="ctr" indent="0" marL="0">
               <a:buNone/>
             </a:pPr>
             <a:r>
-              <a:rPr lang="en-US" sz="1800" i="1" dirty="0">
-                <a:solidFill>
-                  <a:srgbClr val="555555"/>
+              <a:rPr lang="en-US" sz="3600" b="1" dirty="0">
+                <a:solidFill>
+                  <a:srgbClr val="990011"/>
                 </a:solidFill>
                 <a:latin typeface="Times New Roman" pitchFamily="34" charset="0"/>
                 <a:ea typeface="Times New Roman" pitchFamily="34" charset="-122"/>
                 <a:cs typeface="Times New Roman" pitchFamily="34" charset="-120"/>
               </a:rPr>
-              <a:t>A geographer using a map in the field.</a:t>
-            </a:r>
-            <a:endParaRPr lang="en-US" sz="1800" dirty="0"/>
+              <a:t>Activity 3: Answer</a:t>
+            </a:r>
+            <a:endParaRPr lang="en-US" sz="3600" dirty="0"/>
+          </a:p>
+        </p:txBody>
+      </p:sp>
+      <p:sp>
+        <p:nvSpPr>
+          <p:cNvPr id="5" name="Text 2"/>
+          <p:cNvSpPr/>
+          <p:nvPr/>
+        </p:nvSpPr>
+        <p:spPr>
+          <a:xfrm>
+            <a:off x="5349240" y="1783080"/>
+            <a:ext cx="6522415" cy="4663440"/>
+          </a:xfrm>
+          <a:prstGeom prst="rect">
+            <a:avLst/>
+          </a:prstGeom>
+          <a:noFill/>
+          <a:ln/>
+        </p:spPr>
+        <p:txBody>
+          <a:bodyPr wrap="square" lIns="0" tIns="0" rIns="0" bIns="0" rtlCol="0" anchor="t"/>
+          <a:lstStyle/>
+          <a:p>
+            <a:pPr algn="l" indent="0" marL="0">
+              <a:spcAft>
+                <a:spcPts val="800"/>
+              </a:spcAft>
+              <a:buNone/>
+            </a:pPr>
+            <a:r>
+              <a:rPr lang="en-US" sz="4000" dirty="0">
+                <a:solidFill>
+                  <a:srgbClr val="111111"/>
+                </a:solidFill>
+                <a:latin typeface="Times New Roman" pitchFamily="34" charset="0"/>
+                <a:ea typeface="Times New Roman" pitchFamily="34" charset="-122"/>
+                <a:cs typeface="Times New Roman" pitchFamily="34" charset="-120"/>
+              </a:rPr>
+              <a:t>Human geography.</a:t>
+            </a:r>
+            <a:endParaRPr lang="en-US" sz="4000" dirty="0"/>
           </a:p>
         </p:txBody>
       </p:sp>
@@ -11585,9 +11679,48 @@
           </a:p>
         </p:txBody>
       </p:sp>
+      <p:sp>
+        <p:nvSpPr>
+          <p:cNvPr id="3" name="Text 1"/>
+          <p:cNvSpPr/>
+          <p:nvPr/>
+        </p:nvSpPr>
+        <p:spPr>
+          <a:xfrm>
+            <a:off x="457200" y="1005840"/>
+            <a:ext cx="11277295" cy="731520"/>
+          </a:xfrm>
+          <a:prstGeom prst="rect">
+            <a:avLst/>
+          </a:prstGeom>
+          <a:noFill/>
+          <a:ln/>
+        </p:spPr>
+        <p:txBody>
+          <a:bodyPr wrap="square" lIns="0" tIns="0" rIns="0" bIns="0" rtlCol="0" anchor="ctr"/>
+          <a:lstStyle/>
+          <a:p>
+            <a:pPr algn="ctr" indent="0" marL="0">
+              <a:buNone/>
+            </a:pPr>
+            <a:r>
+              <a:rPr lang="en-US" sz="3600" b="1" dirty="0">
+                <a:solidFill>
+                  <a:srgbClr val="990011"/>
+                </a:solidFill>
+                <a:latin typeface="Times New Roman" pitchFamily="34" charset="0"/>
+                <a:ea typeface="Times New Roman" pitchFamily="34" charset="-122"/>
+                <a:cs typeface="Times New Roman" pitchFamily="34" charset="-120"/>
+              </a:rPr>
+              <a:t>Activity 4</a:t>
+            </a:r>
+            <a:endParaRPr lang="en-US" sz="3600" dirty="0"/>
+          </a:p>
+        </p:txBody>
+      </p:sp>
       <p:pic>
         <p:nvPicPr>
-          <p:cNvPr id="3" name="Image 0" descr="/home/claude/f4/img/minesec_sheet.png">    </p:cNvPr>
+          <p:cNvPr id="4" name="Image 0" descr="/home/claude/f4/img/v2/usa_topomap.jpg">    </p:cNvPr>
           <p:cNvPicPr>
             <a:picLocks noChangeAspect="1"/>
           </p:cNvPicPr>
@@ -11601,8 +11734,8 @@
         </p:blipFill>
         <p:spPr>
           <a:xfrm>
-            <a:off x="0" y="658368"/>
-            <a:ext cx="5120640" cy="5833872"/>
+            <a:off x="2246610" y="1783080"/>
+            <a:ext cx="7698475" cy="4270248"/>
           </a:xfrm>
           <a:prstGeom prst="rect">
             <a:avLst/>
@@ -11611,14 +11744,14 @@
       </p:pic>
       <p:sp>
         <p:nvSpPr>
-          <p:cNvPr id="4" name="Text 1"/>
+          <p:cNvPr id="5" name="Text 2"/>
           <p:cNvSpPr/>
           <p:nvPr/>
         </p:nvSpPr>
         <p:spPr>
           <a:xfrm>
-            <a:off x="5349240" y="1005840"/>
-            <a:ext cx="6522415" cy="731520"/>
+            <a:off x="457200" y="6089904"/>
+            <a:ext cx="11277295" cy="347472"/>
           </a:xfrm>
           <a:prstGeom prst="rect">
             <a:avLst/>
@@ -11627,68 +11760,24 @@
           <a:ln/>
         </p:spPr>
         <p:txBody>
-          <a:bodyPr wrap="square" lIns="0" tIns="0" rIns="0" bIns="0" rtlCol="0" anchor="ctr">
-            <a:normAutofit/>
-          </a:bodyPr>
+          <a:bodyPr wrap="square" lIns="0" tIns="0" rIns="0" bIns="0" rtlCol="0" anchor="ctr"/>
           <a:lstStyle/>
           <a:p>
             <a:pPr algn="ctr" indent="0" marL="0">
               <a:buNone/>
             </a:pPr>
             <a:r>
-              <a:rPr lang="en-US" sz="3600" b="1" dirty="0">
-                <a:solidFill>
-                  <a:srgbClr val="990011"/>
+              <a:rPr lang="en-US" sz="1800" i="1" dirty="0">
+                <a:solidFill>
+                  <a:srgbClr val="555555"/>
                 </a:solidFill>
                 <a:latin typeface="Times New Roman" pitchFamily="34" charset="0"/>
                 <a:ea typeface="Times New Roman" pitchFamily="34" charset="-122"/>
                 <a:cs typeface="Times New Roman" pitchFamily="34" charset="-120"/>
               </a:rPr>
-              <a:t>Activity 4: Question</a:t>
-            </a:r>
-            <a:endParaRPr lang="en-US" sz="3600" dirty="0"/>
-          </a:p>
-        </p:txBody>
-      </p:sp>
-      <p:sp>
-        <p:nvSpPr>
-          <p:cNvPr id="5" name="Text 2"/>
-          <p:cNvSpPr/>
-          <p:nvPr/>
-        </p:nvSpPr>
-        <p:spPr>
-          <a:xfrm>
-            <a:off x="5349240" y="1783080"/>
-            <a:ext cx="6522415" cy="4663440"/>
-          </a:xfrm>
-          <a:prstGeom prst="rect">
-            <a:avLst/>
-          </a:prstGeom>
-          <a:noFill/>
-          <a:ln/>
-        </p:spPr>
-        <p:txBody>
-          <a:bodyPr wrap="square" lIns="0" tIns="0" rIns="0" bIns="0" rtlCol="0" anchor="t"/>
-          <a:lstStyle/>
-          <a:p>
-            <a:pPr algn="l" indent="0" marL="0">
-              <a:spcAft>
-                <a:spcPts val="800"/>
-              </a:spcAft>
-              <a:buNone/>
-            </a:pPr>
-            <a:r>
-              <a:rPr lang="en-US" sz="4000" dirty="0">
-                <a:solidFill>
-                  <a:srgbClr val="111111"/>
-                </a:solidFill>
-                <a:latin typeface="Times New Roman" pitchFamily="34" charset="0"/>
-                <a:ea typeface="Times New Roman" pitchFamily="34" charset="-122"/>
-                <a:cs typeface="Times New Roman" pitchFamily="34" charset="-120"/>
-              </a:rPr>
-              <a:t>How does a geographer collect information about a place?</a:t>
-            </a:r>
-            <a:endParaRPr lang="en-US" sz="4000" dirty="0"/>
+              <a:t>A geographer using a map in the field.</a:t>
+            </a:r>
+            <a:endParaRPr lang="en-US" sz="1800" dirty="0"/>
           </a:p>
         </p:txBody>
       </p:sp>
@@ -12872,7 +12961,7 @@
                 <a:ea typeface="Times New Roman" pitchFamily="34" charset="-122"/>
                 <a:cs typeface="Times New Roman" pitchFamily="34" charset="-120"/>
               </a:rPr>
-              <a:t>Activity 4: Answer</a:t>
+              <a:t>Activity 4: Question</a:t>
             </a:r>
             <a:endParaRPr lang="en-US" sz="3600" dirty="0"/>
           </a:p>
@@ -12914,7 +13003,7 @@
                 <a:ea typeface="Times New Roman" pitchFamily="34" charset="-122"/>
                 <a:cs typeface="Times New Roman" pitchFamily="34" charset="-120"/>
               </a:rPr>
-              <a:t>By observing and measuring in the field, and by asking people questions.</a:t>
+              <a:t>How does a geographer collect information about a place?</a:t>
             </a:r>
             <a:endParaRPr lang="en-US" sz="4000" dirty="0"/>
           </a:p>
@@ -13026,54 +13115,15 @@
                 <a:ea typeface="Calibri" pitchFamily="34" charset="-122"/>
                 <a:cs typeface="Calibri" pitchFamily="34" charset="-120"/>
               </a:rPr>
-              <a:t>4. IMPORTANCE OF GEOGRAPHY</a:t>
+              <a:t>3. METHODS OF GEOGRAPHY</a:t>
             </a:r>
             <a:endParaRPr lang="en-US" sz="1400" dirty="0"/>
-          </a:p>
-        </p:txBody>
-      </p:sp>
-      <p:sp>
-        <p:nvSpPr>
-          <p:cNvPr id="3" name="Text 1"/>
-          <p:cNvSpPr/>
-          <p:nvPr/>
-        </p:nvSpPr>
-        <p:spPr>
-          <a:xfrm>
-            <a:off x="457200" y="1005840"/>
-            <a:ext cx="11277295" cy="731520"/>
-          </a:xfrm>
-          <a:prstGeom prst="rect">
-            <a:avLst/>
-          </a:prstGeom>
-          <a:noFill/>
-          <a:ln/>
-        </p:spPr>
-        <p:txBody>
-          <a:bodyPr wrap="square" lIns="0" tIns="0" rIns="0" bIns="0" rtlCol="0" anchor="ctr"/>
-          <a:lstStyle/>
-          <a:p>
-            <a:pPr algn="ctr" indent="0" marL="0">
-              <a:buNone/>
-            </a:pPr>
-            <a:r>
-              <a:rPr lang="en-US" sz="3600" b="1" dirty="0">
-                <a:solidFill>
-                  <a:srgbClr val="990011"/>
-                </a:solidFill>
-                <a:latin typeface="Times New Roman" pitchFamily="34" charset="0"/>
-                <a:ea typeface="Times New Roman" pitchFamily="34" charset="-122"/>
-                <a:cs typeface="Times New Roman" pitchFamily="34" charset="-120"/>
-              </a:rPr>
-              <a:t>Activity 5</a:t>
-            </a:r>
-            <a:endParaRPr lang="en-US" sz="3600" dirty="0"/>
           </a:p>
         </p:txBody>
       </p:sp>
       <p:pic>
         <p:nvPicPr>
-          <p:cNvPr id="4" name="Image 0" descr="/home/claude/f4/img/v2/f2t_cotton_field.jpg">    </p:cNvPr>
+          <p:cNvPr id="3" name="Image 0" descr="/home/claude/f4/img/minesec_sheet.png">    </p:cNvPr>
           <p:cNvPicPr>
             <a:picLocks noChangeAspect="1"/>
           </p:cNvPicPr>
@@ -13087,8 +13137,8 @@
         </p:blipFill>
         <p:spPr>
           <a:xfrm>
-            <a:off x="2246610" y="1783080"/>
-            <a:ext cx="7698475" cy="4270248"/>
+            <a:off x="0" y="658368"/>
+            <a:ext cx="5120640" cy="5833872"/>
           </a:xfrm>
           <a:prstGeom prst="rect">
             <a:avLst/>
@@ -13097,14 +13147,14 @@
       </p:pic>
       <p:sp>
         <p:nvSpPr>
-          <p:cNvPr id="5" name="Text 2"/>
+          <p:cNvPr id="4" name="Text 1"/>
           <p:cNvSpPr/>
           <p:nvPr/>
         </p:nvSpPr>
         <p:spPr>
           <a:xfrm>
-            <a:off x="457200" y="6089904"/>
-            <a:ext cx="11277295" cy="347472"/>
+            <a:off x="5349240" y="1005840"/>
+            <a:ext cx="6522415" cy="731520"/>
           </a:xfrm>
           <a:prstGeom prst="rect">
             <a:avLst/>
@@ -13113,24 +13163,68 @@
           <a:ln/>
         </p:spPr>
         <p:txBody>
-          <a:bodyPr wrap="square" lIns="0" tIns="0" rIns="0" bIns="0" rtlCol="0" anchor="ctr"/>
+          <a:bodyPr wrap="square" lIns="0" tIns="0" rIns="0" bIns="0" rtlCol="0" anchor="ctr">
+            <a:normAutofit/>
+          </a:bodyPr>
           <a:lstStyle/>
           <a:p>
             <a:pPr algn="ctr" indent="0" marL="0">
               <a:buNone/>
             </a:pPr>
             <a:r>
-              <a:rPr lang="en-US" sz="1800" i="1" dirty="0">
-                <a:solidFill>
-                  <a:srgbClr val="555555"/>
+              <a:rPr lang="en-US" sz="3600" b="1" dirty="0">
+                <a:solidFill>
+                  <a:srgbClr val="990011"/>
                 </a:solidFill>
                 <a:latin typeface="Times New Roman" pitchFamily="34" charset="0"/>
                 <a:ea typeface="Times New Roman" pitchFamily="34" charset="-122"/>
                 <a:cs typeface="Times New Roman" pitchFamily="34" charset="-120"/>
               </a:rPr>
-              <a:t>A cotton farm in the North.</a:t>
-            </a:r>
-            <a:endParaRPr lang="en-US" sz="1800" dirty="0"/>
+              <a:t>Activity 4: Answer</a:t>
+            </a:r>
+            <a:endParaRPr lang="en-US" sz="3600" dirty="0"/>
+          </a:p>
+        </p:txBody>
+      </p:sp>
+      <p:sp>
+        <p:nvSpPr>
+          <p:cNvPr id="5" name="Text 2"/>
+          <p:cNvSpPr/>
+          <p:nvPr/>
+        </p:nvSpPr>
+        <p:spPr>
+          <a:xfrm>
+            <a:off x="5349240" y="1783080"/>
+            <a:ext cx="6522415" cy="4663440"/>
+          </a:xfrm>
+          <a:prstGeom prst="rect">
+            <a:avLst/>
+          </a:prstGeom>
+          <a:noFill/>
+          <a:ln/>
+        </p:spPr>
+        <p:txBody>
+          <a:bodyPr wrap="square" lIns="0" tIns="0" rIns="0" bIns="0" rtlCol="0" anchor="t"/>
+          <a:lstStyle/>
+          <a:p>
+            <a:pPr algn="l" indent="0" marL="0">
+              <a:spcAft>
+                <a:spcPts val="800"/>
+              </a:spcAft>
+              <a:buNone/>
+            </a:pPr>
+            <a:r>
+              <a:rPr lang="en-US" sz="4000" dirty="0">
+                <a:solidFill>
+                  <a:srgbClr val="111111"/>
+                </a:solidFill>
+                <a:latin typeface="Times New Roman" pitchFamily="34" charset="0"/>
+                <a:ea typeface="Times New Roman" pitchFamily="34" charset="-122"/>
+                <a:cs typeface="Times New Roman" pitchFamily="34" charset="-120"/>
+              </a:rPr>
+              <a:t>By observing and measuring in the field, and by asking people questions.</a:t>
+            </a:r>
+            <a:endParaRPr lang="en-US" sz="4000" dirty="0"/>
           </a:p>
         </p:txBody>
       </p:sp>
@@ -13246,9 +13340,48 @@
           </a:p>
         </p:txBody>
       </p:sp>
+      <p:sp>
+        <p:nvSpPr>
+          <p:cNvPr id="3" name="Text 1"/>
+          <p:cNvSpPr/>
+          <p:nvPr/>
+        </p:nvSpPr>
+        <p:spPr>
+          <a:xfrm>
+            <a:off x="457200" y="1005840"/>
+            <a:ext cx="11277295" cy="731520"/>
+          </a:xfrm>
+          <a:prstGeom prst="rect">
+            <a:avLst/>
+          </a:prstGeom>
+          <a:noFill/>
+          <a:ln/>
+        </p:spPr>
+        <p:txBody>
+          <a:bodyPr wrap="square" lIns="0" tIns="0" rIns="0" bIns="0" rtlCol="0" anchor="ctr"/>
+          <a:lstStyle/>
+          <a:p>
+            <a:pPr algn="ctr" indent="0" marL="0">
+              <a:buNone/>
+            </a:pPr>
+            <a:r>
+              <a:rPr lang="en-US" sz="3600" b="1" dirty="0">
+                <a:solidFill>
+                  <a:srgbClr val="990011"/>
+                </a:solidFill>
+                <a:latin typeface="Times New Roman" pitchFamily="34" charset="0"/>
+                <a:ea typeface="Times New Roman" pitchFamily="34" charset="-122"/>
+                <a:cs typeface="Times New Roman" pitchFamily="34" charset="-120"/>
+              </a:rPr>
+              <a:t>Activity 5</a:t>
+            </a:r>
+            <a:endParaRPr lang="en-US" sz="3600" dirty="0"/>
+          </a:p>
+        </p:txBody>
+      </p:sp>
       <p:pic>
         <p:nvPicPr>
-          <p:cNvPr id="3" name="Image 0" descr="/home/claude/f4/img/minesec_sheet.png">    </p:cNvPr>
+          <p:cNvPr id="4" name="Image 0" descr="/home/claude/f4/img/v2/f2t_cotton_field.jpg">    </p:cNvPr>
           <p:cNvPicPr>
             <a:picLocks noChangeAspect="1"/>
           </p:cNvPicPr>
@@ -13262,8 +13395,8 @@
         </p:blipFill>
         <p:spPr>
           <a:xfrm>
-            <a:off x="0" y="658368"/>
-            <a:ext cx="5120640" cy="5833872"/>
+            <a:off x="2246610" y="1783080"/>
+            <a:ext cx="7698475" cy="4270248"/>
           </a:xfrm>
           <a:prstGeom prst="rect">
             <a:avLst/>
@@ -13272,14 +13405,14 @@
       </p:pic>
       <p:sp>
         <p:nvSpPr>
-          <p:cNvPr id="4" name="Text 1"/>
+          <p:cNvPr id="5" name="Text 2"/>
           <p:cNvSpPr/>
           <p:nvPr/>
         </p:nvSpPr>
         <p:spPr>
           <a:xfrm>
-            <a:off x="5349240" y="1005840"/>
-            <a:ext cx="6522415" cy="731520"/>
+            <a:off x="457200" y="6089904"/>
+            <a:ext cx="11277295" cy="347472"/>
           </a:xfrm>
           <a:prstGeom prst="rect">
             <a:avLst/>
@@ -13288,68 +13421,24 @@
           <a:ln/>
         </p:spPr>
         <p:txBody>
-          <a:bodyPr wrap="square" lIns="0" tIns="0" rIns="0" bIns="0" rtlCol="0" anchor="ctr">
-            <a:normAutofit/>
-          </a:bodyPr>
+          <a:bodyPr wrap="square" lIns="0" tIns="0" rIns="0" bIns="0" rtlCol="0" anchor="ctr"/>
           <a:lstStyle/>
           <a:p>
             <a:pPr algn="ctr" indent="0" marL="0">
               <a:buNone/>
             </a:pPr>
             <a:r>
-              <a:rPr lang="en-US" sz="3600" b="1" dirty="0">
-                <a:solidFill>
-                  <a:srgbClr val="990011"/>
+              <a:rPr lang="en-US" sz="1800" i="1" dirty="0">
+                <a:solidFill>
+                  <a:srgbClr val="555555"/>
                 </a:solidFill>
                 <a:latin typeface="Times New Roman" pitchFamily="34" charset="0"/>
                 <a:ea typeface="Times New Roman" pitchFamily="34" charset="-122"/>
                 <a:cs typeface="Times New Roman" pitchFamily="34" charset="-120"/>
               </a:rPr>
-              <a:t>Activity 5: Question</a:t>
-            </a:r>
-            <a:endParaRPr lang="en-US" sz="3600" dirty="0"/>
-          </a:p>
-        </p:txBody>
-      </p:sp>
-      <p:sp>
-        <p:nvSpPr>
-          <p:cNvPr id="5" name="Text 2"/>
-          <p:cNvSpPr/>
-          <p:nvPr/>
-        </p:nvSpPr>
-        <p:spPr>
-          <a:xfrm>
-            <a:off x="5349240" y="1783080"/>
-            <a:ext cx="6522415" cy="4663440"/>
-          </a:xfrm>
-          <a:prstGeom prst="rect">
-            <a:avLst/>
-          </a:prstGeom>
-          <a:noFill/>
-          <a:ln/>
-        </p:spPr>
-        <p:txBody>
-          <a:bodyPr wrap="square" lIns="0" tIns="0" rIns="0" bIns="0" rtlCol="0" anchor="t"/>
-          <a:lstStyle/>
-          <a:p>
-            <a:pPr algn="l" indent="0" marL="0">
-              <a:spcAft>
-                <a:spcPts val="800"/>
-              </a:spcAft>
-              <a:buNone/>
-            </a:pPr>
-            <a:r>
-              <a:rPr lang="en-US" sz="4000" dirty="0">
-                <a:solidFill>
-                  <a:srgbClr val="111111"/>
-                </a:solidFill>
-                <a:latin typeface="Times New Roman" pitchFamily="34" charset="0"/>
-                <a:ea typeface="Times New Roman" pitchFamily="34" charset="-122"/>
-                <a:cs typeface="Times New Roman" pitchFamily="34" charset="-120"/>
-              </a:rPr>
-              <a:t>How can geography help this farmer?</a:t>
-            </a:r>
-            <a:endParaRPr lang="en-US" sz="4000" dirty="0"/>
+              <a:t>A cotton farm in the North.</a:t>
+            </a:r>
+            <a:endParaRPr lang="en-US" sz="1800" dirty="0"/>
           </a:p>
         </p:txBody>
       </p:sp>
@@ -13524,7 +13613,7 @@
                 <a:ea typeface="Times New Roman" pitchFamily="34" charset="-122"/>
                 <a:cs typeface="Times New Roman" pitchFamily="34" charset="-120"/>
               </a:rPr>
-              <a:t>Activity 5: Answer</a:t>
+              <a:t>Activity 5: Question</a:t>
             </a:r>
             <a:endParaRPr lang="en-US" sz="3600" dirty="0"/>
           </a:p>
@@ -13566,7 +13655,7 @@
                 <a:ea typeface="Times New Roman" pitchFamily="34" charset="-122"/>
                 <a:cs typeface="Times New Roman" pitchFamily="34" charset="-120"/>
               </a:rPr>
-              <a:t>It helps him to know the seasons, the rainfall and the soils, so that he chooses the right crops and the right time to plant.</a:t>
+              <a:t>How can geography help this farmer?</a:t>
             </a:r>
             <a:endParaRPr lang="en-US" sz="4000" dirty="0"/>
           </a:p>
@@ -13678,7 +13767,7 @@
                 <a:ea typeface="Calibri" pitchFamily="34" charset="-122"/>
                 <a:cs typeface="Calibri" pitchFamily="34" charset="-120"/>
               </a:rPr>
-              <a:t>BOARD SUMMARY</a:t>
+              <a:t>4. IMPORTANCE OF GEOGRAPHY</a:t>
             </a:r>
             <a:endParaRPr lang="en-US" sz="1400" dirty="0"/>
           </a:p>
@@ -13743,7 +13832,7 @@
                 <a:ea typeface="Times New Roman" pitchFamily="34" charset="-122"/>
                 <a:cs typeface="Times New Roman" pitchFamily="34" charset="-120"/>
               </a:rPr>
-              <a:t>Board Summary</a:t>
+              <a:t>Activity 5: Answer</a:t>
             </a:r>
             <a:endParaRPr lang="en-US" sz="3600" dirty="0"/>
           </a:p>
@@ -13777,7 +13866,7 @@
               <a:buNone/>
             </a:pPr>
             <a:r>
-              <a:rPr lang="en-US" sz="3200" b="1" dirty="0">
+              <a:rPr lang="en-US" sz="4000" dirty="0">
                 <a:solidFill>
                   <a:srgbClr val="111111"/>
                 </a:solidFill>
@@ -13785,49 +13874,9 @@
                 <a:ea typeface="Times New Roman" pitchFamily="34" charset="-122"/>
                 <a:cs typeface="Times New Roman" pitchFamily="34" charset="-120"/>
               </a:rPr>
-              <a:t>Topic: The Earth in the Universe</a:t>
-            </a:r>
-            <a:endParaRPr lang="en-US" sz="3200" dirty="0"/>
-          </a:p>
-          <a:p>
-            <a:pPr algn="l" indent="0" marL="0">
-              <a:spcAft>
-                <a:spcPts val="800"/>
-              </a:spcAft>
-              <a:buNone/>
-            </a:pPr>
-            <a:r>
-              <a:rPr lang="en-US" sz="3200" b="1" dirty="0">
-                <a:solidFill>
-                  <a:srgbClr val="111111"/>
-                </a:solidFill>
-                <a:latin typeface="Times New Roman" pitchFamily="34" charset="0"/>
-                <a:ea typeface="Times New Roman" pitchFamily="34" charset="-122"/>
-                <a:cs typeface="Times New Roman" pitchFamily="34" charset="-120"/>
-              </a:rPr>
-              <a:t>Sub-topic: Introduction to Geography</a:t>
-            </a:r>
-            <a:endParaRPr lang="en-US" sz="3200" dirty="0"/>
-          </a:p>
-          <a:p>
-            <a:pPr algn="l" indent="0" marL="0">
-              <a:spcAft>
-                <a:spcPts val="800"/>
-              </a:spcAft>
-              <a:buNone/>
-            </a:pPr>
-            <a:r>
-              <a:rPr lang="en-US" sz="3200" b="1" dirty="0">
-                <a:solidFill>
-                  <a:srgbClr val="990011"/>
-                </a:solidFill>
-                <a:latin typeface="Times New Roman" pitchFamily="34" charset="0"/>
-                <a:ea typeface="Times New Roman" pitchFamily="34" charset="-122"/>
-                <a:cs typeface="Times New Roman" pitchFamily="34" charset="-120"/>
-              </a:rPr>
-              <a:t>Lesson 1: Geography: Meaning, Branches, Methods and Importance</a:t>
-            </a:r>
-            <a:endParaRPr lang="en-US" sz="3200" dirty="0"/>
+              <a:t>It helps him to know the seasons, the rainfall and the soils, so that he chooses the right crops and the right time to plant.</a:t>
+            </a:r>
+            <a:endParaRPr lang="en-US" sz="4000" dirty="0"/>
           </a:p>
         </p:txBody>
       </p:sp>
@@ -14002,7 +14051,7 @@
                 <a:ea typeface="Times New Roman" pitchFamily="34" charset="-122"/>
                 <a:cs typeface="Times New Roman" pitchFamily="34" charset="-120"/>
               </a:rPr>
-              <a:t>DEFINITIONS</a:t>
+              <a:t>Board Summary</a:t>
             </a:r>
             <a:endParaRPr lang="en-US" sz="3600" dirty="0"/>
           </a:p>
@@ -14036,7 +14085,7 @@
               <a:buNone/>
             </a:pPr>
             <a:r>
-              <a:rPr lang="en-US" sz="4000" i="1" dirty="0">
+              <a:rPr lang="en-US" sz="3200" b="1" dirty="0">
                 <a:solidFill>
                   <a:srgbClr val="111111"/>
                 </a:solidFill>
@@ -14044,9 +14093,9 @@
                 <a:ea typeface="Times New Roman" pitchFamily="34" charset="-122"/>
                 <a:cs typeface="Times New Roman" pitchFamily="34" charset="-120"/>
               </a:rPr>
-              <a:t>The key terms of this lesson are defined as follows:</a:t>
-            </a:r>
-            <a:endParaRPr lang="en-US" sz="4000" dirty="0"/>
+              <a:t>Topic: The Earth in the Universe</a:t>
+            </a:r>
+            <a:endParaRPr lang="en-US" sz="3200" dirty="0"/>
           </a:p>
           <a:p>
             <a:pPr algn="l" indent="0" marL="0">
@@ -14056,7 +14105,7 @@
               <a:buNone/>
             </a:pPr>
             <a:r>
-              <a:rPr lang="en-US" sz="4000" b="1" dirty="0">
+              <a:rPr lang="en-US" sz="3200" b="1" dirty="0">
                 <a:solidFill>
                   <a:srgbClr val="111111"/>
                 </a:solidFill>
@@ -14064,8 +14113,11 @@
                 <a:ea typeface="Times New Roman" pitchFamily="34" charset="-122"/>
                 <a:cs typeface="Times New Roman" pitchFamily="34" charset="-120"/>
               </a:rPr>
-              <a:t>Geography: </a:t>
-            </a:r>
+              <a:t>Sub-topic: Introduction to Geography</a:t>
+            </a:r>
+            <a:endParaRPr lang="en-US" sz="3200" dirty="0"/>
+          </a:p>
+          <a:p>
             <a:pPr algn="l" indent="0" marL="0">
               <a:spcAft>
                 <a:spcPts val="800"/>
@@ -14073,17 +14125,17 @@
               <a:buNone/>
             </a:pPr>
             <a:r>
-              <a:rPr lang="en-US" sz="4000" dirty="0">
-                <a:solidFill>
-                  <a:srgbClr val="111111"/>
+              <a:rPr lang="en-US" sz="3200" b="1" dirty="0">
+                <a:solidFill>
+                  <a:srgbClr val="990011"/>
                 </a:solidFill>
                 <a:latin typeface="Times New Roman" pitchFamily="34" charset="0"/>
                 <a:ea typeface="Times New Roman" pitchFamily="34" charset="-122"/>
                 <a:cs typeface="Times New Roman" pitchFamily="34" charset="-120"/>
               </a:rPr>
-              <a:t>It is the study of the Earth, its physical features and the activities of the people who live on it.</a:t>
-            </a:r>
-            <a:endParaRPr lang="en-US" sz="4000" dirty="0"/>
+              <a:t>Lesson 1: Geography: Meaning, Branches, Methods and Importance</a:t>
+            </a:r>
+            <a:endParaRPr lang="en-US" sz="3200" dirty="0"/>
           </a:p>
         </p:txBody>
       </p:sp>
@@ -14258,7 +14310,7 @@
                 <a:ea typeface="Times New Roman" pitchFamily="34" charset="-122"/>
                 <a:cs typeface="Times New Roman" pitchFamily="34" charset="-120"/>
               </a:rPr>
-              <a:t>DEFINITIONS (continued)</a:t>
+              <a:t>DEFINITIONS</a:t>
             </a:r>
             <a:endParaRPr lang="en-US" sz="3600" dirty="0"/>
           </a:p>
@@ -14292,7 +14344,7 @@
               <a:buNone/>
             </a:pPr>
             <a:r>
-              <a:rPr lang="en-US" sz="4000" b="1" dirty="0">
+              <a:rPr lang="en-US" sz="4000" i="1" dirty="0">
                 <a:solidFill>
                   <a:srgbClr val="111111"/>
                 </a:solidFill>
@@ -14300,8 +14352,11 @@
                 <a:ea typeface="Times New Roman" pitchFamily="34" charset="-122"/>
                 <a:cs typeface="Times New Roman" pitchFamily="34" charset="-120"/>
               </a:rPr>
-              <a:t>Branch of geography: </a:t>
-            </a:r>
+              <a:t>The key terms of this lesson are defined as follows:</a:t>
+            </a:r>
+            <a:endParaRPr lang="en-US" sz="4000" dirty="0"/>
+          </a:p>
+          <a:p>
             <a:pPr algn="l" indent="0" marL="0">
               <a:spcAft>
                 <a:spcPts val="800"/>
@@ -14309,7 +14364,7 @@
               <a:buNone/>
             </a:pPr>
             <a:r>
-              <a:rPr lang="en-US" sz="4000" dirty="0">
+              <a:rPr lang="en-US" sz="4000" b="1" dirty="0">
                 <a:solidFill>
                   <a:srgbClr val="111111"/>
                 </a:solidFill>
@@ -14317,7 +14372,24 @@
                 <a:ea typeface="Times New Roman" pitchFamily="34" charset="-122"/>
                 <a:cs typeface="Times New Roman" pitchFamily="34" charset="-120"/>
               </a:rPr>
-              <a:t>It is a main part of geography that studies one group of subjects.</a:t>
+              <a:t>Geography: </a:t>
+            </a:r>
+            <a:pPr algn="l" indent="0" marL="0">
+              <a:spcAft>
+                <a:spcPts val="800"/>
+              </a:spcAft>
+              <a:buNone/>
+            </a:pPr>
+            <a:r>
+              <a:rPr lang="en-US" sz="4000" dirty="0">
+                <a:solidFill>
+                  <a:srgbClr val="111111"/>
+                </a:solidFill>
+                <a:latin typeface="Times New Roman" pitchFamily="34" charset="0"/>
+                <a:ea typeface="Times New Roman" pitchFamily="34" charset="-122"/>
+                <a:cs typeface="Times New Roman" pitchFamily="34" charset="-120"/>
+              </a:rPr>
+              <a:t>It is the study of the Earth, its physical features and the activities of the people who live on it.</a:t>
             </a:r>
             <a:endParaRPr lang="en-US" sz="4000" dirty="0"/>
           </a:p>
@@ -14435,129 +14507,9 @@
           </a:p>
         </p:txBody>
       </p:sp>
-      <p:sp>
-        <p:nvSpPr>
-          <p:cNvPr id="3" name="Text 1"/>
-          <p:cNvSpPr/>
-          <p:nvPr/>
-        </p:nvSpPr>
-        <p:spPr>
-          <a:xfrm>
-            <a:off x="365760" y="1005840"/>
-            <a:ext cx="11460175" cy="731520"/>
-          </a:xfrm>
-          <a:prstGeom prst="rect">
-            <a:avLst/>
-          </a:prstGeom>
-          <a:noFill/>
-          <a:ln/>
-        </p:spPr>
-        <p:txBody>
-          <a:bodyPr wrap="square" lIns="0" tIns="0" rIns="0" bIns="0" rtlCol="0" anchor="ctr">
-            <a:normAutofit/>
-          </a:bodyPr>
-          <a:lstStyle/>
-          <a:p>
-            <a:pPr algn="ctr" indent="0" marL="0">
-              <a:buNone/>
-            </a:pPr>
-            <a:r>
-              <a:rPr lang="en-US" sz="3600" b="1" dirty="0">
-                <a:solidFill>
-                  <a:srgbClr val="990011"/>
-                </a:solidFill>
-                <a:latin typeface="Times New Roman" pitchFamily="34" charset="0"/>
-                <a:ea typeface="Times New Roman" pitchFamily="34" charset="-122"/>
-                <a:cs typeface="Times New Roman" pitchFamily="34" charset="-120"/>
-              </a:rPr>
-              <a:t>1. Branches and Sub-branches of Geography</a:t>
-            </a:r>
-            <a:endParaRPr lang="en-US" sz="3600" dirty="0"/>
-          </a:p>
-        </p:txBody>
-      </p:sp>
-      <p:sp>
-        <p:nvSpPr>
-          <p:cNvPr id="4" name="Text 2"/>
-          <p:cNvSpPr/>
-          <p:nvPr/>
-        </p:nvSpPr>
-        <p:spPr>
-          <a:xfrm>
-            <a:off x="365760" y="1783080"/>
-            <a:ext cx="4846320" cy="4617720"/>
-          </a:xfrm>
-          <a:prstGeom prst="rect">
-            <a:avLst/>
-          </a:prstGeom>
-          <a:noFill/>
-          <a:ln/>
-        </p:spPr>
-        <p:txBody>
-          <a:bodyPr wrap="square" lIns="0" tIns="0" rIns="0" bIns="0" rtlCol="0" anchor="t"/>
-          <a:lstStyle/>
-          <a:p>
-            <a:pPr algn="l" indent="0" marL="0">
-              <a:spcAft>
-                <a:spcPts val="800"/>
-              </a:spcAft>
-              <a:buNone/>
-            </a:pPr>
-            <a:r>
-              <a:rPr lang="en-US" sz="2800" i="1" dirty="0">
-                <a:solidFill>
-                  <a:srgbClr val="111111"/>
-                </a:solidFill>
-                <a:latin typeface="Times New Roman" pitchFamily="34" charset="0"/>
-                <a:ea typeface="Times New Roman" pitchFamily="34" charset="-122"/>
-                <a:cs typeface="Times New Roman" pitchFamily="34" charset="-120"/>
-              </a:rPr>
-              <a:t>Geography has three main branches:</a:t>
-            </a:r>
-            <a:endParaRPr lang="en-US" sz="2800" dirty="0"/>
-          </a:p>
-          <a:p>
-            <a:pPr algn="l" indent="0" marL="0">
-              <a:spcAft>
-                <a:spcPts val="800"/>
-              </a:spcAft>
-              <a:buNone/>
-            </a:pPr>
-            <a:r>
-              <a:rPr lang="en-US" sz="2800" b="1" dirty="0">
-                <a:solidFill>
-                  <a:srgbClr val="111111"/>
-                </a:solidFill>
-                <a:latin typeface="Times New Roman" pitchFamily="34" charset="0"/>
-                <a:ea typeface="Times New Roman" pitchFamily="34" charset="-122"/>
-                <a:cs typeface="Times New Roman" pitchFamily="34" charset="-120"/>
-              </a:rPr>
-              <a:t>Physical geography: </a:t>
-            </a:r>
-            <a:pPr algn="l" indent="0" marL="0">
-              <a:spcAft>
-                <a:spcPts val="800"/>
-              </a:spcAft>
-              <a:buNone/>
-            </a:pPr>
-            <a:r>
-              <a:rPr lang="en-US" sz="2800" dirty="0">
-                <a:solidFill>
-                  <a:srgbClr val="111111"/>
-                </a:solidFill>
-                <a:latin typeface="Times New Roman" pitchFamily="34" charset="0"/>
-                <a:ea typeface="Times New Roman" pitchFamily="34" charset="-122"/>
-                <a:cs typeface="Times New Roman" pitchFamily="34" charset="-120"/>
-              </a:rPr>
-              <a:t>It studies natural features such as relief, climate, rivers, soils and vegetation. Its sub-branches include geomorphology, climatology, hydrology, pedology and biogeography.</a:t>
-            </a:r>
-            <a:endParaRPr lang="en-US" sz="2800" dirty="0"/>
-          </a:p>
-        </p:txBody>
-      </p:sp>
       <p:pic>
         <p:nvPicPr>
-          <p:cNvPr id="5" name="Image 0" descr="/home/claude/f4/img/v2/lsa_mtcameroon.jpg">    </p:cNvPr>
+          <p:cNvPr id="3" name="Image 0" descr="/home/claude/f4/img/minesec_sheet.png">    </p:cNvPr>
           <p:cNvPicPr>
             <a:picLocks noChangeAspect="1"/>
           </p:cNvPicPr>
@@ -14571,8 +14523,8 @@
         </p:blipFill>
         <p:spPr>
           <a:xfrm>
-            <a:off x="5349240" y="2071212"/>
-            <a:ext cx="6659575" cy="3693983"/>
+            <a:off x="0" y="658368"/>
+            <a:ext cx="5120640" cy="5833872"/>
           </a:xfrm>
           <a:prstGeom prst="rect">
             <a:avLst/>
@@ -14581,14 +14533,14 @@
       </p:pic>
       <p:sp>
         <p:nvSpPr>
-          <p:cNvPr id="6" name="Text 3"/>
+          <p:cNvPr id="4" name="Text 1"/>
           <p:cNvSpPr/>
           <p:nvPr/>
         </p:nvSpPr>
         <p:spPr>
           <a:xfrm>
-            <a:off x="5349240" y="6089904"/>
-            <a:ext cx="6659575" cy="347472"/>
+            <a:off x="5349240" y="1005840"/>
+            <a:ext cx="6522415" cy="731520"/>
           </a:xfrm>
           <a:prstGeom prst="rect">
             <a:avLst/>
@@ -14597,24 +14549,85 @@
           <a:ln/>
         </p:spPr>
         <p:txBody>
-          <a:bodyPr wrap="square" lIns="0" tIns="0" rIns="0" bIns="0" rtlCol="0" anchor="ctr"/>
+          <a:bodyPr wrap="square" lIns="0" tIns="0" rIns="0" bIns="0" rtlCol="0" anchor="ctr">
+            <a:normAutofit/>
+          </a:bodyPr>
           <a:lstStyle/>
           <a:p>
             <a:pPr algn="ctr" indent="0" marL="0">
               <a:buNone/>
             </a:pPr>
             <a:r>
-              <a:rPr lang="en-US" sz="1600" i="1" dirty="0">
-                <a:solidFill>
-                  <a:srgbClr val="555555"/>
+              <a:rPr lang="en-US" sz="3600" b="1" dirty="0">
+                <a:solidFill>
+                  <a:srgbClr val="990011"/>
                 </a:solidFill>
                 <a:latin typeface="Times New Roman" pitchFamily="34" charset="0"/>
                 <a:ea typeface="Times New Roman" pitchFamily="34" charset="-122"/>
                 <a:cs typeface="Times New Roman" pitchFamily="34" charset="-120"/>
               </a:rPr>
-              <a:t>Illustration: Mount Cameroon, a physical feature</a:t>
-            </a:r>
-            <a:endParaRPr lang="en-US" sz="1600" dirty="0"/>
+              <a:t>DEFINITIONS (continued)</a:t>
+            </a:r>
+            <a:endParaRPr lang="en-US" sz="3600" dirty="0"/>
+          </a:p>
+        </p:txBody>
+      </p:sp>
+      <p:sp>
+        <p:nvSpPr>
+          <p:cNvPr id="5" name="Text 2"/>
+          <p:cNvSpPr/>
+          <p:nvPr/>
+        </p:nvSpPr>
+        <p:spPr>
+          <a:xfrm>
+            <a:off x="5349240" y="1783080"/>
+            <a:ext cx="6522415" cy="4663440"/>
+          </a:xfrm>
+          <a:prstGeom prst="rect">
+            <a:avLst/>
+          </a:prstGeom>
+          <a:noFill/>
+          <a:ln/>
+        </p:spPr>
+        <p:txBody>
+          <a:bodyPr wrap="square" lIns="0" tIns="0" rIns="0" bIns="0" rtlCol="0" anchor="t"/>
+          <a:lstStyle/>
+          <a:p>
+            <a:pPr algn="l" indent="0" marL="0">
+              <a:spcAft>
+                <a:spcPts val="800"/>
+              </a:spcAft>
+              <a:buNone/>
+            </a:pPr>
+            <a:r>
+              <a:rPr lang="en-US" sz="4000" b="1" dirty="0">
+                <a:solidFill>
+                  <a:srgbClr val="111111"/>
+                </a:solidFill>
+                <a:latin typeface="Times New Roman" pitchFamily="34" charset="0"/>
+                <a:ea typeface="Times New Roman" pitchFamily="34" charset="-122"/>
+                <a:cs typeface="Times New Roman" pitchFamily="34" charset="-120"/>
+              </a:rPr>
+              <a:t>Branch of geography: </a:t>
+            </a:r>
+            <a:pPr algn="l" indent="0" marL="0">
+              <a:spcAft>
+                <a:spcPts val="800"/>
+              </a:spcAft>
+              <a:buNone/>
+            </a:pPr>
+            <a:r>
+              <a:rPr lang="en-US" sz="4000" dirty="0">
+                <a:solidFill>
+                  <a:srgbClr val="111111"/>
+                </a:solidFill>
+                <a:latin typeface="Times New Roman" pitchFamily="34" charset="0"/>
+                <a:ea typeface="Times New Roman" pitchFamily="34" charset="-122"/>
+                <a:cs typeface="Times New Roman" pitchFamily="34" charset="-120"/>
+              </a:rPr>
+              <a:t>It is a main part of geography that studies one group of subjects.</a:t>
+            </a:r>
+            <a:endParaRPr lang="en-US" sz="4000" dirty="0"/>
           </a:p>
         </p:txBody>
       </p:sp>
@@ -14799,7 +14812,7 @@
               <a:buNone/>
             </a:pPr>
             <a:r>
-              <a:rPr lang="en-US" sz="3600" b="1" dirty="0">
+              <a:rPr lang="en-US" sz="2800" i="1" dirty="0">
                 <a:solidFill>
                   <a:srgbClr val="111111"/>
                 </a:solidFill>
@@ -14807,8 +14820,11 @@
                 <a:ea typeface="Times New Roman" pitchFamily="34" charset="-122"/>
                 <a:cs typeface="Times New Roman" pitchFamily="34" charset="-120"/>
               </a:rPr>
-              <a:t>Human geography: </a:t>
-            </a:r>
+              <a:t>Geography has three main branches:</a:t>
+            </a:r>
+            <a:endParaRPr lang="en-US" sz="2800" dirty="0"/>
+          </a:p>
+          <a:p>
             <a:pPr algn="l" indent="0" marL="0">
               <a:spcAft>
                 <a:spcPts val="800"/>
@@ -14816,7 +14832,7 @@
               <a:buNone/>
             </a:pPr>
             <a:r>
-              <a:rPr lang="en-US" sz="3600" dirty="0">
+              <a:rPr lang="en-US" sz="2800" b="1" dirty="0">
                 <a:solidFill>
                   <a:srgbClr val="111111"/>
                 </a:solidFill>
@@ -14824,15 +14840,32 @@
                 <a:ea typeface="Times New Roman" pitchFamily="34" charset="-122"/>
                 <a:cs typeface="Times New Roman" pitchFamily="34" charset="-120"/>
               </a:rPr>
-              <a:t>It studies people and their activities. Its sub-branches include population, settlement, economic and political geography.</a:t>
-            </a:r>
-            <a:endParaRPr lang="en-US" sz="3600" dirty="0"/>
+              <a:t>Physical geography: </a:t>
+            </a:r>
+            <a:pPr algn="l" indent="0" marL="0">
+              <a:spcAft>
+                <a:spcPts val="800"/>
+              </a:spcAft>
+              <a:buNone/>
+            </a:pPr>
+            <a:r>
+              <a:rPr lang="en-US" sz="2800" dirty="0">
+                <a:solidFill>
+                  <a:srgbClr val="111111"/>
+                </a:solidFill>
+                <a:latin typeface="Times New Roman" pitchFamily="34" charset="0"/>
+                <a:ea typeface="Times New Roman" pitchFamily="34" charset="-122"/>
+                <a:cs typeface="Times New Roman" pitchFamily="34" charset="-120"/>
+              </a:rPr>
+              <a:t>It studies natural features such as relief, climate, rivers, soils and vegetation. Its sub-branches include geomorphology, climatology, hydrology, pedology and biogeography.</a:t>
+            </a:r>
+            <a:endParaRPr lang="en-US" sz="2800" dirty="0"/>
           </a:p>
         </p:txBody>
       </p:sp>
       <p:pic>
         <p:nvPicPr>
-          <p:cNvPr id="5" name="Image 0" descr="/home/claude/f4/img/v2/f2t_market.jpg">    </p:cNvPr>
+          <p:cNvPr id="5" name="Image 0" descr="/home/claude/f4/img/v2/lsa_mtcameroon.jpg">    </p:cNvPr>
           <p:cNvPicPr>
             <a:picLocks noChangeAspect="1"/>
           </p:cNvPicPr>
@@ -14887,7 +14920,7 @@
                 <a:ea typeface="Times New Roman" pitchFamily="34" charset="-122"/>
                 <a:cs typeface="Times New Roman" pitchFamily="34" charset="-120"/>
               </a:rPr>
-              <a:t>Illustration: a market, a human activity</a:t>
+              <a:t>Illustration: Mount Cameroon, a physical feature</a:t>
             </a:r>
             <a:endParaRPr lang="en-US" sz="1600" dirty="0"/>
           </a:p>
@@ -15082,7 +15115,7 @@
                 <a:ea typeface="Times New Roman" pitchFamily="34" charset="-122"/>
                 <a:cs typeface="Times New Roman" pitchFamily="34" charset="-120"/>
               </a:rPr>
-              <a:t>Practical geography: </a:t>
+              <a:t>Human geography: </a:t>
             </a:r>
             <a:pPr algn="l" indent="0" marL="0">
               <a:spcAft>
@@ -15099,7 +15132,7 @@
                 <a:ea typeface="Times New Roman" pitchFamily="34" charset="-122"/>
                 <a:cs typeface="Times New Roman" pitchFamily="34" charset="-120"/>
               </a:rPr>
-              <a:t>It studies the tools of the geographer. Its sub-branches include map reading, statistics, fieldwork and remote sensing.</a:t>
+              <a:t>It studies people and their activities. Its sub-branches include population, settlement, economic and political geography.</a:t>
             </a:r>
             <a:endParaRPr lang="en-US" sz="3600" dirty="0"/>
           </a:p>
@@ -15107,7 +15140,7 @@
       </p:sp>
       <p:pic>
         <p:nvPicPr>
-          <p:cNvPr id="5" name="Image 0" descr="/home/claude/f4/img/v2/usa_topomap.jpg">    </p:cNvPr>
+          <p:cNvPr id="5" name="Image 0" descr="/home/claude/f4/img/v2/f2t_market.jpg">    </p:cNvPr>
           <p:cNvPicPr>
             <a:picLocks noChangeAspect="1"/>
           </p:cNvPicPr>
@@ -15162,7 +15195,7 @@
                 <a:ea typeface="Times New Roman" pitchFamily="34" charset="-122"/>
                 <a:cs typeface="Times New Roman" pitchFamily="34" charset="-120"/>
               </a:rPr>
-              <a:t>Illustration: map reading in the field</a:t>
+              <a:t>Illustration: a market, a human activity</a:t>
             </a:r>
             <a:endParaRPr lang="en-US" sz="1600" dirty="0"/>
           </a:p>
@@ -15624,7 +15657,7 @@
                 <a:ea typeface="Times New Roman" pitchFamily="34" charset="-122"/>
                 <a:cs typeface="Times New Roman" pitchFamily="34" charset="-120"/>
               </a:rPr>
-              <a:t>2. Methods of Geography</a:t>
+              <a:t>1. Branches and Sub-branches of Geography</a:t>
             </a:r>
             <a:endParaRPr lang="en-US" sz="3600" dirty="0"/>
           </a:p>
@@ -15658,7 +15691,7 @@
               <a:buNone/>
             </a:pPr>
             <a:r>
-              <a:rPr lang="en-US" sz="3600" i="1" dirty="0">
+              <a:rPr lang="en-US" sz="3600" b="1" dirty="0">
                 <a:solidFill>
                   <a:srgbClr val="111111"/>
                 </a:solidFill>
@@ -15666,11 +15699,8 @@
                 <a:ea typeface="Times New Roman" pitchFamily="34" charset="-122"/>
                 <a:cs typeface="Times New Roman" pitchFamily="34" charset="-120"/>
               </a:rPr>
-              <a:t>Geographers use the following methods:</a:t>
-            </a:r>
-            <a:endParaRPr lang="en-US" sz="3600" dirty="0"/>
-          </a:p>
-          <a:p>
+              <a:t>Practical geography: </a:t>
+            </a:r>
             <a:pPr algn="l" indent="0" marL="0">
               <a:spcAft>
                 <a:spcPts val="800"/>
@@ -15678,7 +15708,7 @@
               <a:buNone/>
             </a:pPr>
             <a:r>
-              <a:rPr lang="en-US" sz="3600" b="1" dirty="0">
+              <a:rPr lang="en-US" sz="3600" dirty="0">
                 <a:solidFill>
                   <a:srgbClr val="111111"/>
                 </a:solidFill>
@@ -15686,24 +15716,7 @@
                 <a:ea typeface="Times New Roman" pitchFamily="34" charset="-122"/>
                 <a:cs typeface="Times New Roman" pitchFamily="34" charset="-120"/>
               </a:rPr>
-              <a:t>Observation and fieldwork: </a:t>
-            </a:r>
-            <a:pPr algn="l" indent="0" marL="0">
-              <a:spcAft>
-                <a:spcPts val="800"/>
-              </a:spcAft>
-              <a:buNone/>
-            </a:pPr>
-            <a:r>
-              <a:rPr lang="en-US" sz="3600" dirty="0">
-                <a:solidFill>
-                  <a:srgbClr val="111111"/>
-                </a:solidFill>
-                <a:latin typeface="Times New Roman" pitchFamily="34" charset="0"/>
-                <a:ea typeface="Times New Roman" pitchFamily="34" charset="-122"/>
-                <a:cs typeface="Times New Roman" pitchFamily="34" charset="-120"/>
-              </a:rPr>
-              <a:t>Geographers go to the field to observe, measure and record what they see.</a:t>
+              <a:t>It studies the tools of the geographer. Its sub-branches include map reading, statistics, fieldwork and remote sensing.</a:t>
             </a:r>
             <a:endParaRPr lang="en-US" sz="3600" dirty="0"/>
           </a:p>
@@ -15711,7 +15724,7 @@
       </p:sp>
       <p:pic>
         <p:nvPicPr>
-          <p:cNvPr id="5" name="Image 0" descr="/home/claude/f4/img/v2/fieldwork_steps_big.png">    </p:cNvPr>
+          <p:cNvPr id="5" name="Image 0" descr="/home/claude/f4/img/v2/usa_topomap.jpg">    </p:cNvPr>
           <p:cNvPicPr>
             <a:picLocks noChangeAspect="1"/>
           </p:cNvPicPr>
@@ -15725,8 +15738,8 @@
         </p:blipFill>
         <p:spPr>
           <a:xfrm>
-            <a:off x="5349240" y="2617506"/>
-            <a:ext cx="6659575" cy="2601397"/>
+            <a:off x="5349240" y="2071212"/>
+            <a:ext cx="6659575" cy="3693983"/>
           </a:xfrm>
           <a:prstGeom prst="rect">
             <a:avLst/>
@@ -15766,7 +15779,7 @@
                 <a:ea typeface="Times New Roman" pitchFamily="34" charset="-122"/>
                 <a:cs typeface="Times New Roman" pitchFamily="34" charset="-120"/>
               </a:rPr>
-              <a:t>Illustration: the steps of fieldwork</a:t>
+              <a:t>Illustration: map reading in the field</a:t>
             </a:r>
             <a:endParaRPr lang="en-US" sz="1600" dirty="0"/>
           </a:p>
@@ -15953,7 +15966,7 @@
               <a:buNone/>
             </a:pPr>
             <a:r>
-              <a:rPr lang="en-US" sz="3600" b="1" dirty="0">
+              <a:rPr lang="en-US" sz="3600" i="1" dirty="0">
                 <a:solidFill>
                   <a:srgbClr val="111111"/>
                 </a:solidFill>
@@ -15961,8 +15974,11 @@
                 <a:ea typeface="Times New Roman" pitchFamily="34" charset="-122"/>
                 <a:cs typeface="Times New Roman" pitchFamily="34" charset="-120"/>
               </a:rPr>
-              <a:t>Interviews and questionnaires: </a:t>
-            </a:r>
+              <a:t>Geographers use the following methods:</a:t>
+            </a:r>
+            <a:endParaRPr lang="en-US" sz="3600" dirty="0"/>
+          </a:p>
+          <a:p>
             <a:pPr algn="l" indent="0" marL="0">
               <a:spcAft>
                 <a:spcPts val="800"/>
@@ -15970,7 +15986,7 @@
               <a:buNone/>
             </a:pPr>
             <a:r>
-              <a:rPr lang="en-US" sz="3600" dirty="0">
+              <a:rPr lang="en-US" sz="3600" b="1" dirty="0">
                 <a:solidFill>
                   <a:srgbClr val="111111"/>
                 </a:solidFill>
@@ -15978,7 +15994,24 @@
                 <a:ea typeface="Times New Roman" pitchFamily="34" charset="-122"/>
                 <a:cs typeface="Times New Roman" pitchFamily="34" charset="-120"/>
               </a:rPr>
-              <a:t>Geographers ask people questions to collect information on their lives and activities.</a:t>
+              <a:t>Observation and fieldwork: </a:t>
+            </a:r>
+            <a:pPr algn="l" indent="0" marL="0">
+              <a:spcAft>
+                <a:spcPts val="800"/>
+              </a:spcAft>
+              <a:buNone/>
+            </a:pPr>
+            <a:r>
+              <a:rPr lang="en-US" sz="3600" dirty="0">
+                <a:solidFill>
+                  <a:srgbClr val="111111"/>
+                </a:solidFill>
+                <a:latin typeface="Times New Roman" pitchFamily="34" charset="0"/>
+                <a:ea typeface="Times New Roman" pitchFamily="34" charset="-122"/>
+                <a:cs typeface="Times New Roman" pitchFamily="34" charset="-120"/>
+              </a:rPr>
+              <a:t>Geographers go to the field to observe, measure and record what they see.</a:t>
             </a:r>
             <a:endParaRPr lang="en-US" sz="3600" dirty="0"/>
           </a:p>
@@ -15986,7 +16019,7 @@
       </p:sp>
       <p:pic>
         <p:nvPicPr>
-          <p:cNvPr id="5" name="Image 0" descr="/home/claude/f4/img/v2/questionnaire_big.png">    </p:cNvPr>
+          <p:cNvPr id="5" name="Image 0" descr="/home/claude/f4/img/v2/fieldwork_steps_big.png">    </p:cNvPr>
           <p:cNvPicPr>
             <a:picLocks noChangeAspect="1"/>
           </p:cNvPicPr>
@@ -16041,7 +16074,7 @@
                 <a:ea typeface="Times New Roman" pitchFamily="34" charset="-122"/>
                 <a:cs typeface="Times New Roman" pitchFamily="34" charset="-120"/>
               </a:rPr>
-              <a:t>Illustration: a questionnaire</a:t>
+              <a:t>Illustration: the steps of fieldwork</a:t>
             </a:r>
             <a:endParaRPr lang="en-US" sz="1600" dirty="0"/>
           </a:p>
@@ -16236,7 +16269,7 @@
                 <a:ea typeface="Times New Roman" pitchFamily="34" charset="-122"/>
                 <a:cs typeface="Times New Roman" pitchFamily="34" charset="-120"/>
               </a:rPr>
-              <a:t>Maps and photographs: </a:t>
+              <a:t>Interviews and questionnaires: </a:t>
             </a:r>
             <a:pPr algn="l" indent="0" marL="0">
               <a:spcAft>
@@ -16253,7 +16286,7 @@
                 <a:ea typeface="Times New Roman" pitchFamily="34" charset="-122"/>
                 <a:cs typeface="Times New Roman" pitchFamily="34" charset="-120"/>
               </a:rPr>
-              <a:t>Geographers use maps, photographs and satellite images to show and study places.</a:t>
+              <a:t>Geographers ask people questions to collect information on their lives and activities.</a:t>
             </a:r>
             <a:endParaRPr lang="en-US" sz="3600" dirty="0"/>
           </a:p>
@@ -16261,7 +16294,7 @@
       </p:sp>
       <p:pic>
         <p:nvPicPr>
-          <p:cNvPr id="5" name="Image 0" descr="/home/claude/f4/img/v2/remote_sensing_big.png">    </p:cNvPr>
+          <p:cNvPr id="5" name="Image 0" descr="/home/claude/f4/img/v2/questionnaire_big.png">    </p:cNvPr>
           <p:cNvPicPr>
             <a:picLocks noChangeAspect="1"/>
           </p:cNvPicPr>
@@ -16316,7 +16349,7 @@
                 <a:ea typeface="Times New Roman" pitchFamily="34" charset="-122"/>
                 <a:cs typeface="Times New Roman" pitchFamily="34" charset="-120"/>
               </a:rPr>
-              <a:t>Illustration: a satellite image is taken from space</a:t>
+              <a:t>Illustration: a questionnaire</a:t>
             </a:r>
             <a:endParaRPr lang="en-US" sz="1600" dirty="0"/>
           </a:p>
@@ -16511,7 +16544,7 @@
                 <a:ea typeface="Times New Roman" pitchFamily="34" charset="-122"/>
                 <a:cs typeface="Times New Roman" pitchFamily="34" charset="-120"/>
               </a:rPr>
-              <a:t>Statistics and graphs: </a:t>
+              <a:t>Maps and photographs: </a:t>
             </a:r>
             <a:pPr algn="l" indent="0" marL="0">
               <a:spcAft>
@@ -16528,7 +16561,7 @@
                 <a:ea typeface="Times New Roman" pitchFamily="34" charset="-122"/>
                 <a:cs typeface="Times New Roman" pitchFamily="34" charset="-120"/>
               </a:rPr>
-              <a:t>Geographers use numbers, tables and graphs to compare places and changes.</a:t>
+              <a:t>Geographers use maps, photographs and satellite images to show and study places.</a:t>
             </a:r>
             <a:endParaRPr lang="en-US" sz="3600" dirty="0"/>
           </a:p>
@@ -16536,7 +16569,7 @@
       </p:sp>
       <p:pic>
         <p:nvPicPr>
-          <p:cNvPr id="5" name="Image 0" descr="/home/claude/f4/img/v2/graph_choice_big.png">    </p:cNvPr>
+          <p:cNvPr id="5" name="Image 0" descr="/home/claude/f4/img/v2/remote_sensing_big.png">    </p:cNvPr>
           <p:cNvPicPr>
             <a:picLocks noChangeAspect="1"/>
           </p:cNvPicPr>
@@ -16591,7 +16624,7 @@
                 <a:ea typeface="Times New Roman" pitchFamily="34" charset="-122"/>
                 <a:cs typeface="Times New Roman" pitchFamily="34" charset="-120"/>
               </a:rPr>
-              <a:t>Illustration: types of graphs</a:t>
+              <a:t>Illustration: a satellite image is taken from space</a:t>
             </a:r>
             <a:endParaRPr lang="en-US" sz="1600" dirty="0"/>
           </a:p>
@@ -16709,9 +16742,109 @@
           </a:p>
         </p:txBody>
       </p:sp>
+      <p:sp>
+        <p:nvSpPr>
+          <p:cNvPr id="3" name="Text 1"/>
+          <p:cNvSpPr/>
+          <p:nvPr/>
+        </p:nvSpPr>
+        <p:spPr>
+          <a:xfrm>
+            <a:off x="365760" y="1005840"/>
+            <a:ext cx="11460175" cy="731520"/>
+          </a:xfrm>
+          <a:prstGeom prst="rect">
+            <a:avLst/>
+          </a:prstGeom>
+          <a:noFill/>
+          <a:ln/>
+        </p:spPr>
+        <p:txBody>
+          <a:bodyPr wrap="square" lIns="0" tIns="0" rIns="0" bIns="0" rtlCol="0" anchor="ctr">
+            <a:normAutofit/>
+          </a:bodyPr>
+          <a:lstStyle/>
+          <a:p>
+            <a:pPr algn="ctr" indent="0" marL="0">
+              <a:buNone/>
+            </a:pPr>
+            <a:r>
+              <a:rPr lang="en-US" sz="3600" b="1" dirty="0">
+                <a:solidFill>
+                  <a:srgbClr val="990011"/>
+                </a:solidFill>
+                <a:latin typeface="Times New Roman" pitchFamily="34" charset="0"/>
+                <a:ea typeface="Times New Roman" pitchFamily="34" charset="-122"/>
+                <a:cs typeface="Times New Roman" pitchFamily="34" charset="-120"/>
+              </a:rPr>
+              <a:t>2. Methods of Geography</a:t>
+            </a:r>
+            <a:endParaRPr lang="en-US" sz="3600" dirty="0"/>
+          </a:p>
+        </p:txBody>
+      </p:sp>
+      <p:sp>
+        <p:nvSpPr>
+          <p:cNvPr id="4" name="Text 2"/>
+          <p:cNvSpPr/>
+          <p:nvPr/>
+        </p:nvSpPr>
+        <p:spPr>
+          <a:xfrm>
+            <a:off x="365760" y="1783080"/>
+            <a:ext cx="4846320" cy="4617720"/>
+          </a:xfrm>
+          <a:prstGeom prst="rect">
+            <a:avLst/>
+          </a:prstGeom>
+          <a:noFill/>
+          <a:ln/>
+        </p:spPr>
+        <p:txBody>
+          <a:bodyPr wrap="square" lIns="0" tIns="0" rIns="0" bIns="0" rtlCol="0" anchor="t"/>
+          <a:lstStyle/>
+          <a:p>
+            <a:pPr algn="l" indent="0" marL="0">
+              <a:spcAft>
+                <a:spcPts val="800"/>
+              </a:spcAft>
+              <a:buNone/>
+            </a:pPr>
+            <a:r>
+              <a:rPr lang="en-US" sz="3600" b="1" dirty="0">
+                <a:solidFill>
+                  <a:srgbClr val="111111"/>
+                </a:solidFill>
+                <a:latin typeface="Times New Roman" pitchFamily="34" charset="0"/>
+                <a:ea typeface="Times New Roman" pitchFamily="34" charset="-122"/>
+                <a:cs typeface="Times New Roman" pitchFamily="34" charset="-120"/>
+              </a:rPr>
+              <a:t>Statistics and graphs: </a:t>
+            </a:r>
+            <a:pPr algn="l" indent="0" marL="0">
+              <a:spcAft>
+                <a:spcPts val="800"/>
+              </a:spcAft>
+              <a:buNone/>
+            </a:pPr>
+            <a:r>
+              <a:rPr lang="en-US" sz="3600" dirty="0">
+                <a:solidFill>
+                  <a:srgbClr val="111111"/>
+                </a:solidFill>
+                <a:latin typeface="Times New Roman" pitchFamily="34" charset="0"/>
+                <a:ea typeface="Times New Roman" pitchFamily="34" charset="-122"/>
+                <a:cs typeface="Times New Roman" pitchFamily="34" charset="-120"/>
+              </a:rPr>
+              <a:t>Geographers use numbers, tables and graphs to compare places and changes.</a:t>
+            </a:r>
+            <a:endParaRPr lang="en-US" sz="3600" dirty="0"/>
+          </a:p>
+        </p:txBody>
+      </p:sp>
       <p:pic>
         <p:nvPicPr>
-          <p:cNvPr id="3" name="Image 0" descr="/home/claude/f4/img/minesec_sheet.png">    </p:cNvPr>
+          <p:cNvPr id="5" name="Image 0" descr="/home/claude/f4/img/v2/graph_choice_big.png">    </p:cNvPr>
           <p:cNvPicPr>
             <a:picLocks noChangeAspect="1"/>
           </p:cNvPicPr>
@@ -16725,8 +16858,8 @@
         </p:blipFill>
         <p:spPr>
           <a:xfrm>
-            <a:off x="0" y="658368"/>
-            <a:ext cx="2468880" cy="5833872"/>
+            <a:off x="5349240" y="2617506"/>
+            <a:ext cx="6659575" cy="2601397"/>
           </a:xfrm>
           <a:prstGeom prst="rect">
             <a:avLst/>
@@ -16735,14 +16868,14 @@
       </p:pic>
       <p:sp>
         <p:nvSpPr>
-          <p:cNvPr id="4" name="Text 1"/>
+          <p:cNvPr id="6" name="Text 3"/>
           <p:cNvSpPr/>
           <p:nvPr/>
         </p:nvSpPr>
         <p:spPr>
           <a:xfrm>
-            <a:off x="2697480" y="1005840"/>
-            <a:ext cx="9174175" cy="731520"/>
+            <a:off x="5349240" y="6089904"/>
+            <a:ext cx="6659575" cy="347472"/>
           </a:xfrm>
           <a:prstGeom prst="rect">
             <a:avLst/>
@@ -16751,142 +16884,24 @@
           <a:ln/>
         </p:spPr>
         <p:txBody>
-          <a:bodyPr wrap="square" lIns="0" tIns="0" rIns="0" bIns="0" rtlCol="0" anchor="ctr">
-            <a:normAutofit/>
-          </a:bodyPr>
+          <a:bodyPr wrap="square" lIns="0" tIns="0" rIns="0" bIns="0" rtlCol="0" anchor="ctr"/>
           <a:lstStyle/>
           <a:p>
             <a:pPr algn="ctr" indent="0" marL="0">
               <a:buNone/>
             </a:pPr>
             <a:r>
-              <a:rPr lang="en-US" sz="3600" b="1" dirty="0">
-                <a:solidFill>
-                  <a:srgbClr val="990011"/>
+              <a:rPr lang="en-US" sz="1600" i="1" dirty="0">
+                <a:solidFill>
+                  <a:srgbClr val="555555"/>
                 </a:solidFill>
                 <a:latin typeface="Times New Roman" pitchFamily="34" charset="0"/>
                 <a:ea typeface="Times New Roman" pitchFamily="34" charset="-122"/>
                 <a:cs typeface="Times New Roman" pitchFamily="34" charset="-120"/>
               </a:rPr>
-              <a:t>3. Importance of Geography</a:t>
-            </a:r>
-            <a:endParaRPr lang="en-US" sz="3600" dirty="0"/>
-          </a:p>
-        </p:txBody>
-      </p:sp>
-      <p:sp>
-        <p:nvSpPr>
-          <p:cNvPr id="5" name="Text 2"/>
-          <p:cNvSpPr/>
-          <p:nvPr/>
-        </p:nvSpPr>
-        <p:spPr>
-          <a:xfrm>
-            <a:off x="2697480" y="1783080"/>
-            <a:ext cx="9174175" cy="4663440"/>
-          </a:xfrm>
-          <a:prstGeom prst="rect">
-            <a:avLst/>
-          </a:prstGeom>
-          <a:noFill/>
-          <a:ln/>
-        </p:spPr>
-        <p:txBody>
-          <a:bodyPr wrap="square" lIns="0" tIns="0" rIns="0" bIns="0" rtlCol="0" anchor="t"/>
-          <a:lstStyle/>
-          <a:p>
-            <a:pPr algn="l" indent="0" marL="0">
-              <a:spcAft>
-                <a:spcPts val="800"/>
-              </a:spcAft>
-              <a:buNone/>
-            </a:pPr>
-            <a:r>
-              <a:rPr lang="en-US" sz="4000" i="1" dirty="0">
-                <a:solidFill>
-                  <a:srgbClr val="111111"/>
-                </a:solidFill>
-                <a:latin typeface="Times New Roman" pitchFamily="34" charset="0"/>
-                <a:ea typeface="Times New Roman" pitchFamily="34" charset="-122"/>
-                <a:cs typeface="Times New Roman" pitchFamily="34" charset="-120"/>
-              </a:rPr>
-              <a:t>Geography is important for the following reasons:</a:t>
-            </a:r>
-            <a:endParaRPr lang="en-US" sz="4000" dirty="0"/>
-          </a:p>
-          <a:p>
-            <a:pPr algn="l" indent="0" marL="0">
-              <a:spcAft>
-                <a:spcPts val="800"/>
-              </a:spcAft>
-              <a:buNone/>
-            </a:pPr>
-            <a:r>
-              <a:rPr lang="en-US" sz="4000" b="1" dirty="0">
-                <a:solidFill>
-                  <a:srgbClr val="111111"/>
-                </a:solidFill>
-                <a:latin typeface="Times New Roman" pitchFamily="34" charset="0"/>
-                <a:ea typeface="Times New Roman" pitchFamily="34" charset="-122"/>
-                <a:cs typeface="Times New Roman" pitchFamily="34" charset="-120"/>
-              </a:rPr>
-              <a:t>Daily life: </a:t>
-            </a:r>
-            <a:pPr algn="l" indent="0" marL="0">
-              <a:spcAft>
-                <a:spcPts val="800"/>
-              </a:spcAft>
-              <a:buNone/>
-            </a:pPr>
-            <a:r>
-              <a:rPr lang="en-US" sz="4000" dirty="0">
-                <a:solidFill>
-                  <a:srgbClr val="111111"/>
-                </a:solidFill>
-                <a:latin typeface="Times New Roman" pitchFamily="34" charset="0"/>
-                <a:ea typeface="Times New Roman" pitchFamily="34" charset="-122"/>
-                <a:cs typeface="Times New Roman" pitchFamily="34" charset="-120"/>
-              </a:rPr>
-              <a:t>It helps us to find places, read maps and understand the weather.</a:t>
-            </a:r>
-            <a:endParaRPr lang="en-US" sz="4000" dirty="0"/>
-          </a:p>
-          <a:p>
-            <a:pPr algn="l" indent="0" marL="0">
-              <a:spcAft>
-                <a:spcPts val="800"/>
-              </a:spcAft>
-              <a:buNone/>
-            </a:pPr>
-            <a:r>
-              <a:rPr lang="en-US" sz="4000" b="1" dirty="0">
-                <a:solidFill>
-                  <a:srgbClr val="111111"/>
-                </a:solidFill>
-                <a:latin typeface="Times New Roman" pitchFamily="34" charset="0"/>
-                <a:ea typeface="Times New Roman" pitchFamily="34" charset="-122"/>
-                <a:cs typeface="Times New Roman" pitchFamily="34" charset="-120"/>
-              </a:rPr>
-              <a:t>Farming: </a:t>
-            </a:r>
-            <a:pPr algn="l" indent="0" marL="0">
-              <a:spcAft>
-                <a:spcPts val="800"/>
-              </a:spcAft>
-              <a:buNone/>
-            </a:pPr>
-            <a:r>
-              <a:rPr lang="en-US" sz="4000" dirty="0">
-                <a:solidFill>
-                  <a:srgbClr val="111111"/>
-                </a:solidFill>
-                <a:latin typeface="Times New Roman" pitchFamily="34" charset="0"/>
-                <a:ea typeface="Times New Roman" pitchFamily="34" charset="-122"/>
-                <a:cs typeface="Times New Roman" pitchFamily="34" charset="-120"/>
-              </a:rPr>
-              <a:t>It helps farmers to know the seasons, the soils and the right crops.</a:t>
-            </a:r>
-            <a:endParaRPr lang="en-US" sz="4000" dirty="0"/>
+              <a:t>Illustration: types of graphs</a:t>
+            </a:r>
+            <a:endParaRPr lang="en-US" sz="1600" dirty="0"/>
           </a:p>
         </p:txBody>
       </p:sp>
@@ -17019,7 +17034,7 @@
         <p:spPr>
           <a:xfrm>
             <a:off x="0" y="658368"/>
-            <a:ext cx="5120640" cy="5833872"/>
+            <a:ext cx="2468880" cy="5833872"/>
           </a:xfrm>
           <a:prstGeom prst="rect">
             <a:avLst/>
@@ -17034,8 +17049,8 @@
         </p:nvSpPr>
         <p:spPr>
           <a:xfrm>
-            <a:off x="5349240" y="1005840"/>
-            <a:ext cx="6522415" cy="731520"/>
+            <a:off x="2697480" y="1005840"/>
+            <a:ext cx="9174175" cy="731520"/>
           </a:xfrm>
           <a:prstGeom prst="rect">
             <a:avLst/>
@@ -17061,7 +17076,7 @@
                 <a:ea typeface="Times New Roman" pitchFamily="34" charset="-122"/>
                 <a:cs typeface="Times New Roman" pitchFamily="34" charset="-120"/>
               </a:rPr>
-              <a:t>3. Importance of Geography (continued)</a:t>
+              <a:t>3. Importance of Geography</a:t>
             </a:r>
             <a:endParaRPr lang="en-US" sz="3600" dirty="0"/>
           </a:p>
@@ -17075,8 +17090,8 @@
         </p:nvSpPr>
         <p:spPr>
           <a:xfrm>
-            <a:off x="5349240" y="1783080"/>
-            <a:ext cx="6522415" cy="4663440"/>
+            <a:off x="2697480" y="1783080"/>
+            <a:ext cx="9174175" cy="4663440"/>
           </a:xfrm>
           <a:prstGeom prst="rect">
             <a:avLst/>
@@ -17095,7 +17110,7 @@
               <a:buNone/>
             </a:pPr>
             <a:r>
-              <a:rPr lang="en-US" sz="4000" b="1" dirty="0">
+              <a:rPr lang="en-US" sz="4000" i="1" dirty="0">
                 <a:solidFill>
                   <a:srgbClr val="111111"/>
                 </a:solidFill>
@@ -17103,8 +17118,11 @@
                 <a:ea typeface="Times New Roman" pitchFamily="34" charset="-122"/>
                 <a:cs typeface="Times New Roman" pitchFamily="34" charset="-120"/>
               </a:rPr>
-              <a:t>Planning: </a:t>
-            </a:r>
+              <a:t>Geography is important for the following reasons:</a:t>
+            </a:r>
+            <a:endParaRPr lang="en-US" sz="4000" dirty="0"/>
+          </a:p>
+          <a:p>
             <a:pPr algn="l" indent="0" marL="0">
               <a:spcAft>
                 <a:spcPts val="800"/>
@@ -17112,7 +17130,7 @@
               <a:buNone/>
             </a:pPr>
             <a:r>
-              <a:rPr lang="en-US" sz="4000" dirty="0">
+              <a:rPr lang="en-US" sz="4000" b="1" dirty="0">
                 <a:solidFill>
                   <a:srgbClr val="111111"/>
                 </a:solidFill>
@@ -17120,11 +17138,8 @@
                 <a:ea typeface="Times New Roman" pitchFamily="34" charset="-122"/>
                 <a:cs typeface="Times New Roman" pitchFamily="34" charset="-120"/>
               </a:rPr>
-              <a:t>It helps the government and councils to plan roads, schools and towns.</a:t>
-            </a:r>
-            <a:endParaRPr lang="en-US" sz="4000" dirty="0"/>
-          </a:p>
-          <a:p>
+              <a:t>Daily life: </a:t>
+            </a:r>
             <a:pPr algn="l" indent="0" marL="0">
               <a:spcAft>
                 <a:spcPts val="800"/>
@@ -17132,7 +17147,7 @@
               <a:buNone/>
             </a:pPr>
             <a:r>
-              <a:rPr lang="en-US" sz="4000" b="1" dirty="0">
+              <a:rPr lang="en-US" sz="4000" dirty="0">
                 <a:solidFill>
                   <a:srgbClr val="111111"/>
                 </a:solidFill>
@@ -17140,8 +17155,11 @@
                 <a:ea typeface="Times New Roman" pitchFamily="34" charset="-122"/>
                 <a:cs typeface="Times New Roman" pitchFamily="34" charset="-120"/>
               </a:rPr>
-              <a:t>Environment: </a:t>
-            </a:r>
+              <a:t>It helps us to find places, read maps and understand the weather.</a:t>
+            </a:r>
+            <a:endParaRPr lang="en-US" sz="4000" dirty="0"/>
+          </a:p>
+          <a:p>
             <a:pPr algn="l" indent="0" marL="0">
               <a:spcAft>
                 <a:spcPts val="800"/>
@@ -17149,7 +17167,7 @@
               <a:buNone/>
             </a:pPr>
             <a:r>
-              <a:rPr lang="en-US" sz="4000" dirty="0">
+              <a:rPr lang="en-US" sz="4000" b="1" dirty="0">
                 <a:solidFill>
                   <a:srgbClr val="111111"/>
                 </a:solidFill>
@@ -17157,7 +17175,24 @@
                 <a:ea typeface="Times New Roman" pitchFamily="34" charset="-122"/>
                 <a:cs typeface="Times New Roman" pitchFamily="34" charset="-120"/>
               </a:rPr>
-              <a:t>It teaches us to protect the land, water and forests.</a:t>
+              <a:t>Farming: </a:t>
+            </a:r>
+            <a:pPr algn="l" indent="0" marL="0">
+              <a:spcAft>
+                <a:spcPts val="800"/>
+              </a:spcAft>
+              <a:buNone/>
+            </a:pPr>
+            <a:r>
+              <a:rPr lang="en-US" sz="4000" dirty="0">
+                <a:solidFill>
+                  <a:srgbClr val="111111"/>
+                </a:solidFill>
+                <a:latin typeface="Times New Roman" pitchFamily="34" charset="0"/>
+                <a:ea typeface="Times New Roman" pitchFamily="34" charset="-122"/>
+                <a:cs typeface="Times New Roman" pitchFamily="34" charset="-120"/>
+              </a:rPr>
+              <a:t>It helps farmers to know the seasons, the soils and the right crops.</a:t>
             </a:r>
             <a:endParaRPr lang="en-US" sz="4000" dirty="0"/>
           </a:p>
@@ -17269,7 +17304,7 @@
                 <a:ea typeface="Calibri" pitchFamily="34" charset="-122"/>
                 <a:cs typeface="Calibri" pitchFamily="34" charset="-120"/>
               </a:rPr>
-              <a:t>FORMATIVE EVALUATION</a:t>
+              <a:t>BOARD SUMMARY</a:t>
             </a:r>
             <a:endParaRPr lang="en-US" sz="1400" dirty="0"/>
           </a:p>
@@ -17334,7 +17369,7 @@
                 <a:ea typeface="Times New Roman" pitchFamily="34" charset="-122"/>
                 <a:cs typeface="Times New Roman" pitchFamily="34" charset="-120"/>
               </a:rPr>
-              <a:t>Evaluation 1</a:t>
+              <a:t>3. Importance of Geography (continued)</a:t>
             </a:r>
             <a:endParaRPr lang="en-US" sz="3600" dirty="0"/>
           </a:p>
@@ -17368,7 +17403,7 @@
               <a:buNone/>
             </a:pPr>
             <a:r>
-              <a:rPr lang="en-US" sz="4000" dirty="0">
+              <a:rPr lang="en-US" sz="4000" b="1" dirty="0">
                 <a:solidFill>
                   <a:srgbClr val="111111"/>
                 </a:solidFill>
@@ -17376,7 +17411,61 @@
                 <a:ea typeface="Times New Roman" pitchFamily="34" charset="-122"/>
                 <a:cs typeface="Times New Roman" pitchFamily="34" charset="-120"/>
               </a:rPr>
-              <a:t>Define geography.</a:t>
+              <a:t>Planning: </a:t>
+            </a:r>
+            <a:pPr algn="l" indent="0" marL="0">
+              <a:spcAft>
+                <a:spcPts val="800"/>
+              </a:spcAft>
+              <a:buNone/>
+            </a:pPr>
+            <a:r>
+              <a:rPr lang="en-US" sz="4000" dirty="0">
+                <a:solidFill>
+                  <a:srgbClr val="111111"/>
+                </a:solidFill>
+                <a:latin typeface="Times New Roman" pitchFamily="34" charset="0"/>
+                <a:ea typeface="Times New Roman" pitchFamily="34" charset="-122"/>
+                <a:cs typeface="Times New Roman" pitchFamily="34" charset="-120"/>
+              </a:rPr>
+              <a:t>It helps the government and councils to plan roads, schools and towns.</a:t>
+            </a:r>
+            <a:endParaRPr lang="en-US" sz="4000" dirty="0"/>
+          </a:p>
+          <a:p>
+            <a:pPr algn="l" indent="0" marL="0">
+              <a:spcAft>
+                <a:spcPts val="800"/>
+              </a:spcAft>
+              <a:buNone/>
+            </a:pPr>
+            <a:r>
+              <a:rPr lang="en-US" sz="4000" b="1" dirty="0">
+                <a:solidFill>
+                  <a:srgbClr val="111111"/>
+                </a:solidFill>
+                <a:latin typeface="Times New Roman" pitchFamily="34" charset="0"/>
+                <a:ea typeface="Times New Roman" pitchFamily="34" charset="-122"/>
+                <a:cs typeface="Times New Roman" pitchFamily="34" charset="-120"/>
+              </a:rPr>
+              <a:t>Environment: </a:t>
+            </a:r>
+            <a:pPr algn="l" indent="0" marL="0">
+              <a:spcAft>
+                <a:spcPts val="800"/>
+              </a:spcAft>
+              <a:buNone/>
+            </a:pPr>
+            <a:r>
+              <a:rPr lang="en-US" sz="4000" dirty="0">
+                <a:solidFill>
+                  <a:srgbClr val="111111"/>
+                </a:solidFill>
+                <a:latin typeface="Times New Roman" pitchFamily="34" charset="0"/>
+                <a:ea typeface="Times New Roman" pitchFamily="34" charset="-122"/>
+                <a:cs typeface="Times New Roman" pitchFamily="34" charset="-120"/>
+              </a:rPr>
+              <a:t>It teaches us to protect the land, water and forests.</a:t>
             </a:r>
             <a:endParaRPr lang="en-US" sz="4000" dirty="0"/>
           </a:p>
@@ -17553,7 +17642,7 @@
                 <a:ea typeface="Times New Roman" pitchFamily="34" charset="-122"/>
                 <a:cs typeface="Times New Roman" pitchFamily="34" charset="-120"/>
               </a:rPr>
-              <a:t>Expected Answer</a:t>
+              <a:t>Evaluation 1</a:t>
             </a:r>
             <a:endParaRPr lang="en-US" sz="3600" dirty="0"/>
           </a:p>
@@ -17595,7 +17684,7 @@
                 <a:ea typeface="Times New Roman" pitchFamily="34" charset="-122"/>
                 <a:cs typeface="Times New Roman" pitchFamily="34" charset="-120"/>
               </a:rPr>
-              <a:t>It is the study of the Earth, its physical features and the activities of people on it.</a:t>
+              <a:t>Define geography.</a:t>
             </a:r>
             <a:endParaRPr lang="en-US" sz="4000" dirty="0"/>
           </a:p>
@@ -17772,7 +17861,7 @@
                 <a:ea typeface="Times New Roman" pitchFamily="34" charset="-122"/>
                 <a:cs typeface="Times New Roman" pitchFamily="34" charset="-120"/>
               </a:rPr>
-              <a:t>Evaluation 2</a:t>
+              <a:t>Expected Answer</a:t>
             </a:r>
             <a:endParaRPr lang="en-US" sz="3600" dirty="0"/>
           </a:p>
@@ -17814,7 +17903,7 @@
                 <a:ea typeface="Times New Roman" pitchFamily="34" charset="-122"/>
                 <a:cs typeface="Times New Roman" pitchFamily="34" charset="-120"/>
               </a:rPr>
-              <a:t>Name the three branches of geography.</a:t>
+              <a:t>It is the study of the Earth, its physical features and the activities of people on it.</a:t>
             </a:r>
             <a:endParaRPr lang="en-US" sz="4000" dirty="0"/>
           </a:p>
@@ -17991,7 +18080,7 @@
                 <a:ea typeface="Times New Roman" pitchFamily="34" charset="-122"/>
                 <a:cs typeface="Times New Roman" pitchFamily="34" charset="-120"/>
               </a:rPr>
-              <a:t>Expected Answer</a:t>
+              <a:t>Evaluation 2</a:t>
             </a:r>
             <a:endParaRPr lang="en-US" sz="3600" dirty="0"/>
           </a:p>
@@ -18033,7 +18122,7 @@
                 <a:ea typeface="Times New Roman" pitchFamily="34" charset="-122"/>
                 <a:cs typeface="Times New Roman" pitchFamily="34" charset="-120"/>
               </a:rPr>
-              <a:t>Physical, human and practical geography.</a:t>
+              <a:t>Name the three branches of geography.</a:t>
             </a:r>
             <a:endParaRPr lang="en-US" sz="4000" dirty="0"/>
           </a:p>
@@ -18408,7 +18497,7 @@
                 <a:ea typeface="Calibri" pitchFamily="34" charset="-122"/>
                 <a:cs typeface="Calibri" pitchFamily="34" charset="-120"/>
               </a:rPr>
-              <a:t>REMEDIATION</a:t>
+              <a:t>FORMATIVE EVALUATION</a:t>
             </a:r>
             <a:endParaRPr lang="en-US" sz="1400" dirty="0"/>
           </a:p>
@@ -18431,7 +18520,7 @@
         <p:spPr>
           <a:xfrm>
             <a:off x="0" y="658368"/>
-            <a:ext cx="3840480" cy="5833872"/>
+            <a:ext cx="5120640" cy="5833872"/>
           </a:xfrm>
           <a:prstGeom prst="rect">
             <a:avLst/>
@@ -18446,8 +18535,8 @@
         </p:nvSpPr>
         <p:spPr>
           <a:xfrm>
-            <a:off x="4069080" y="1005840"/>
-            <a:ext cx="7802575" cy="731520"/>
+            <a:off x="5349240" y="1005840"/>
+            <a:ext cx="6522415" cy="731520"/>
           </a:xfrm>
           <a:prstGeom prst="rect">
             <a:avLst/>
@@ -18473,7 +18562,7 @@
                 <a:ea typeface="Times New Roman" pitchFamily="34" charset="-122"/>
                 <a:cs typeface="Times New Roman" pitchFamily="34" charset="-120"/>
               </a:rPr>
-              <a:t>Remediation</a:t>
+              <a:t>Expected Answer</a:t>
             </a:r>
             <a:endParaRPr lang="en-US" sz="3600" dirty="0"/>
           </a:p>
@@ -18487,8 +18576,8 @@
         </p:nvSpPr>
         <p:spPr>
           <a:xfrm>
-            <a:off x="4069080" y="1783080"/>
-            <a:ext cx="7802575" cy="4663440"/>
+            <a:off x="5349240" y="1783080"/>
+            <a:ext cx="6522415" cy="4663440"/>
           </a:xfrm>
           <a:prstGeom prst="rect">
             <a:avLst/>
@@ -18507,7 +18596,7 @@
               <a:buNone/>
             </a:pPr>
             <a:r>
-              <a:rPr lang="en-US" sz="4000" b="1" dirty="0">
+              <a:rPr lang="en-US" sz="4000" dirty="0">
                 <a:solidFill>
                   <a:srgbClr val="111111"/>
                 </a:solidFill>
@@ -18515,73 +18604,7 @@
                 <a:ea typeface="Times New Roman" pitchFamily="34" charset="-122"/>
                 <a:cs typeface="Times New Roman" pitchFamily="34" charset="-120"/>
               </a:rPr>
-              <a:t>Fill in the blanks:</a:t>
-            </a:r>
-            <a:endParaRPr lang="en-US" sz="4000" dirty="0"/>
-          </a:p>
-          <a:p>
-            <a:pPr algn="l" marL="342900" indent="-342900">
-              <a:spcAft>
-                <a:spcPts val="800"/>
-              </a:spcAft>
-              <a:buSzPct val="100000"/>
-              <a:buFont typeface="+mj-lt"/>
-              <a:buAutoNum type="arabicPeriod" startAt="1"/>
-            </a:pPr>
-            <a:r>
-              <a:rPr lang="en-US" sz="4000" dirty="0">
-                <a:solidFill>
-                  <a:srgbClr val="111111"/>
-                </a:solidFill>
-                <a:latin typeface="Times New Roman" pitchFamily="34" charset="0"/>
-                <a:ea typeface="Times New Roman" pitchFamily="34" charset="-122"/>
-                <a:cs typeface="Times New Roman" pitchFamily="34" charset="-120"/>
-              </a:rPr>
-              <a:t>"Geo" means the ______.</a:t>
-            </a:r>
-            <a:endParaRPr lang="en-US" sz="4000" dirty="0"/>
-          </a:p>
-          <a:p>
-            <a:pPr algn="l" marL="342900" indent="-342900">
-              <a:spcAft>
-                <a:spcPts val="800"/>
-              </a:spcAft>
-              <a:buSzPct val="100000"/>
-              <a:buFont typeface="+mj-lt"/>
-              <a:buAutoNum type="arabicPeriod" startAt="1"/>
-            </a:pPr>
-            <a:r>
-              <a:rPr lang="en-US" sz="4000" dirty="0">
-                <a:solidFill>
-                  <a:srgbClr val="111111"/>
-                </a:solidFill>
-                <a:latin typeface="Times New Roman" pitchFamily="34" charset="0"/>
-                <a:ea typeface="Times New Roman" pitchFamily="34" charset="-122"/>
-                <a:cs typeface="Times New Roman" pitchFamily="34" charset="-120"/>
-              </a:rPr>
-              <a:t>The study of relief and climate is ______ geography.</a:t>
-            </a:r>
-            <a:endParaRPr lang="en-US" sz="4000" dirty="0"/>
-          </a:p>
-          <a:p>
-            <a:pPr algn="l" marL="342900" indent="-342900">
-              <a:spcAft>
-                <a:spcPts val="800"/>
-              </a:spcAft>
-              <a:buSzPct val="100000"/>
-              <a:buFont typeface="+mj-lt"/>
-              <a:buAutoNum type="arabicPeriod" startAt="1"/>
-            </a:pPr>
-            <a:r>
-              <a:rPr lang="en-US" sz="4000" dirty="0">
-                <a:solidFill>
-                  <a:srgbClr val="111111"/>
-                </a:solidFill>
-                <a:latin typeface="Times New Roman" pitchFamily="34" charset="0"/>
-                <a:ea typeface="Times New Roman" pitchFamily="34" charset="-122"/>
-                <a:cs typeface="Times New Roman" pitchFamily="34" charset="-120"/>
-              </a:rPr>
-              <a:t>The study of population and towns is ______ geography.</a:t>
+              <a:t>Physical, human and practical geography.</a:t>
             </a:r>
             <a:endParaRPr lang="en-US" sz="4000" dirty="0"/>
           </a:p>
@@ -18693,7 +18716,7 @@
                 <a:ea typeface="Calibri" pitchFamily="34" charset="-122"/>
                 <a:cs typeface="Calibri" pitchFamily="34" charset="-120"/>
               </a:rPr>
-              <a:t>HOMEWORK</a:t>
+              <a:t>REMEDIATION</a:t>
             </a:r>
             <a:endParaRPr lang="en-US" sz="1400" dirty="0"/>
           </a:p>
@@ -18716,7 +18739,7 @@
         <p:spPr>
           <a:xfrm>
             <a:off x="0" y="658368"/>
-            <a:ext cx="5120640" cy="5833872"/>
+            <a:ext cx="3840480" cy="5833872"/>
           </a:xfrm>
           <a:prstGeom prst="rect">
             <a:avLst/>
@@ -18731,8 +18754,8 @@
         </p:nvSpPr>
         <p:spPr>
           <a:xfrm>
-            <a:off x="5349240" y="1005840"/>
-            <a:ext cx="6522415" cy="731520"/>
+            <a:off x="4069080" y="1005840"/>
+            <a:ext cx="7802575" cy="731520"/>
           </a:xfrm>
           <a:prstGeom prst="rect">
             <a:avLst/>
@@ -18758,7 +18781,7 @@
                 <a:ea typeface="Times New Roman" pitchFamily="34" charset="-122"/>
                 <a:cs typeface="Times New Roman" pitchFamily="34" charset="-120"/>
               </a:rPr>
-              <a:t>Homework</a:t>
+              <a:t>Remediation</a:t>
             </a:r>
             <a:endParaRPr lang="en-US" sz="3600" dirty="0"/>
           </a:p>
@@ -18772,8 +18795,8 @@
         </p:nvSpPr>
         <p:spPr>
           <a:xfrm>
-            <a:off x="5349240" y="1783080"/>
-            <a:ext cx="6522415" cy="4663440"/>
+            <a:off x="4069080" y="1783080"/>
+            <a:ext cx="7802575" cy="4663440"/>
           </a:xfrm>
           <a:prstGeom prst="rect">
             <a:avLst/>
@@ -18792,7 +18815,7 @@
               <a:buNone/>
             </a:pPr>
             <a:r>
-              <a:rPr lang="en-US" sz="4000" dirty="0">
+              <a:rPr lang="en-US" sz="4000" b="1" dirty="0">
                 <a:solidFill>
                   <a:srgbClr val="111111"/>
                 </a:solidFill>
@@ -18800,7 +18823,73 @@
                 <a:ea typeface="Times New Roman" pitchFamily="34" charset="-122"/>
                 <a:cs typeface="Times New Roman" pitchFamily="34" charset="-120"/>
               </a:rPr>
-              <a:t>Name the eight planets of the solar system.</a:t>
+              <a:t>Fill in the blanks:</a:t>
+            </a:r>
+            <a:endParaRPr lang="en-US" sz="4000" dirty="0"/>
+          </a:p>
+          <a:p>
+            <a:pPr algn="l" marL="342900" indent="-342900">
+              <a:spcAft>
+                <a:spcPts val="800"/>
+              </a:spcAft>
+              <a:buSzPct val="100000"/>
+              <a:buFont typeface="+mj-lt"/>
+              <a:buAutoNum type="arabicPeriod" startAt="1"/>
+            </a:pPr>
+            <a:r>
+              <a:rPr lang="en-US" sz="4000" dirty="0">
+                <a:solidFill>
+                  <a:srgbClr val="111111"/>
+                </a:solidFill>
+                <a:latin typeface="Times New Roman" pitchFamily="34" charset="0"/>
+                <a:ea typeface="Times New Roman" pitchFamily="34" charset="-122"/>
+                <a:cs typeface="Times New Roman" pitchFamily="34" charset="-120"/>
+              </a:rPr>
+              <a:t>"Geo" means the ______.</a:t>
+            </a:r>
+            <a:endParaRPr lang="en-US" sz="4000" dirty="0"/>
+          </a:p>
+          <a:p>
+            <a:pPr algn="l" marL="342900" indent="-342900">
+              <a:spcAft>
+                <a:spcPts val="800"/>
+              </a:spcAft>
+              <a:buSzPct val="100000"/>
+              <a:buFont typeface="+mj-lt"/>
+              <a:buAutoNum type="arabicPeriod" startAt="1"/>
+            </a:pPr>
+            <a:r>
+              <a:rPr lang="en-US" sz="4000" dirty="0">
+                <a:solidFill>
+                  <a:srgbClr val="111111"/>
+                </a:solidFill>
+                <a:latin typeface="Times New Roman" pitchFamily="34" charset="0"/>
+                <a:ea typeface="Times New Roman" pitchFamily="34" charset="-122"/>
+                <a:cs typeface="Times New Roman" pitchFamily="34" charset="-120"/>
+              </a:rPr>
+              <a:t>The study of relief and climate is ______ geography.</a:t>
+            </a:r>
+            <a:endParaRPr lang="en-US" sz="4000" dirty="0"/>
+          </a:p>
+          <a:p>
+            <a:pPr algn="l" marL="342900" indent="-342900">
+              <a:spcAft>
+                <a:spcPts val="800"/>
+              </a:spcAft>
+              <a:buSzPct val="100000"/>
+              <a:buFont typeface="+mj-lt"/>
+              <a:buAutoNum type="arabicPeriod" startAt="1"/>
+            </a:pPr>
+            <a:r>
+              <a:rPr lang="en-US" sz="4000" dirty="0">
+                <a:solidFill>
+                  <a:srgbClr val="111111"/>
+                </a:solidFill>
+                <a:latin typeface="Times New Roman" pitchFamily="34" charset="0"/>
+                <a:ea typeface="Times New Roman" pitchFamily="34" charset="-122"/>
+                <a:cs typeface="Times New Roman" pitchFamily="34" charset="-120"/>
+              </a:rPr>
+              <a:t>The study of population and towns is ______ geography.</a:t>
             </a:r>
             <a:endParaRPr lang="en-US" sz="4000" dirty="0"/>
           </a:p>
@@ -18912,7 +19001,7 @@
                 <a:ea typeface="Calibri" pitchFamily="34" charset="-122"/>
                 <a:cs typeface="Calibri" pitchFamily="34" charset="-120"/>
               </a:rPr>
-              <a:t>NEXT LESSON</a:t>
+              <a:t>HOMEWORK</a:t>
             </a:r>
             <a:endParaRPr lang="en-US" sz="1400" dirty="0"/>
           </a:p>
@@ -18977,7 +19066,7 @@
                 <a:ea typeface="Times New Roman" pitchFamily="34" charset="-122"/>
                 <a:cs typeface="Times New Roman" pitchFamily="34" charset="-120"/>
               </a:rPr>
-              <a:t>Next Lesson</a:t>
+              <a:t>Homework</a:t>
             </a:r>
             <a:endParaRPr lang="en-US" sz="3600" dirty="0"/>
           </a:p>
@@ -19001,17 +19090,17 @@
           <a:ln/>
         </p:spPr>
         <p:txBody>
-          <a:bodyPr wrap="square" lIns="0" tIns="0" rIns="0" bIns="0" rtlCol="0" anchor="ctr"/>
-          <a:lstStyle/>
-          <a:p>
-            <a:pPr algn="ctr" indent="0" marL="0">
+          <a:bodyPr wrap="square" lIns="0" tIns="0" rIns="0" bIns="0" rtlCol="0" anchor="t"/>
+          <a:lstStyle/>
+          <a:p>
+            <a:pPr algn="l" indent="0" marL="0">
               <a:spcAft>
                 <a:spcPts val="800"/>
               </a:spcAft>
               <a:buNone/>
             </a:pPr>
             <a:r>
-              <a:rPr lang="en-US" sz="4000" b="1" dirty="0">
+              <a:rPr lang="en-US" sz="4000" dirty="0">
                 <a:solidFill>
                   <a:srgbClr val="111111"/>
                 </a:solidFill>
@@ -19019,27 +19108,7 @@
                 <a:ea typeface="Times New Roman" pitchFamily="34" charset="-122"/>
                 <a:cs typeface="Times New Roman" pitchFamily="34" charset="-120"/>
               </a:rPr>
-              <a:t>Our next lesson will be on:</a:t>
-            </a:r>
-            <a:endParaRPr lang="en-US" sz="4000" dirty="0"/>
-          </a:p>
-          <a:p>
-            <a:pPr algn="ctr" indent="0" marL="0">
-              <a:spcAft>
-                <a:spcPts val="800"/>
-              </a:spcAft>
-              <a:buNone/>
-            </a:pPr>
-            <a:r>
-              <a:rPr lang="en-US" sz="4000" b="1" dirty="0">
-                <a:solidFill>
-                  <a:srgbClr val="990011"/>
-                </a:solidFill>
-                <a:latin typeface="Times New Roman" pitchFamily="34" charset="0"/>
-                <a:ea typeface="Times New Roman" pitchFamily="34" charset="-122"/>
-                <a:cs typeface="Times New Roman" pitchFamily="34" charset="-120"/>
-              </a:rPr>
-              <a:t>Lesson 2: Our Planet, the Earth</a:t>
+              <a:t>Name the eight planets of the solar system.</a:t>
             </a:r>
             <a:endParaRPr lang="en-US" sz="4000" dirty="0"/>
           </a:p>
@@ -19151,6 +19220,245 @@
                 <a:ea typeface="Calibri" pitchFamily="34" charset="-122"/>
                 <a:cs typeface="Calibri" pitchFamily="34" charset="-120"/>
               </a:rPr>
+              <a:t>NEXT LESSON</a:t>
+            </a:r>
+            <a:endParaRPr lang="en-US" sz="1400" dirty="0"/>
+          </a:p>
+        </p:txBody>
+      </p:sp>
+      <p:pic>
+        <p:nvPicPr>
+          <p:cNvPr id="3" name="Image 0" descr="/home/claude/f4/img/minesec_sheet.png">    </p:cNvPr>
+          <p:cNvPicPr>
+            <a:picLocks noChangeAspect="1"/>
+          </p:cNvPicPr>
+          <p:nvPr/>
+        </p:nvPicPr>
+        <p:blipFill>
+          <a:blip r:embed="rId1"/>
+          <a:stretch>
+            <a:fillRect/>
+          </a:stretch>
+        </p:blipFill>
+        <p:spPr>
+          <a:xfrm>
+            <a:off x="0" y="658368"/>
+            <a:ext cx="5120640" cy="5833872"/>
+          </a:xfrm>
+          <a:prstGeom prst="rect">
+            <a:avLst/>
+          </a:prstGeom>
+        </p:spPr>
+      </p:pic>
+      <p:sp>
+        <p:nvSpPr>
+          <p:cNvPr id="4" name="Text 1"/>
+          <p:cNvSpPr/>
+          <p:nvPr/>
+        </p:nvSpPr>
+        <p:spPr>
+          <a:xfrm>
+            <a:off x="5349240" y="1005840"/>
+            <a:ext cx="6522415" cy="731520"/>
+          </a:xfrm>
+          <a:prstGeom prst="rect">
+            <a:avLst/>
+          </a:prstGeom>
+          <a:noFill/>
+          <a:ln/>
+        </p:spPr>
+        <p:txBody>
+          <a:bodyPr wrap="square" lIns="0" tIns="0" rIns="0" bIns="0" rtlCol="0" anchor="ctr">
+            <a:normAutofit/>
+          </a:bodyPr>
+          <a:lstStyle/>
+          <a:p>
+            <a:pPr algn="ctr" indent="0" marL="0">
+              <a:buNone/>
+            </a:pPr>
+            <a:r>
+              <a:rPr lang="en-US" sz="3600" b="1" dirty="0">
+                <a:solidFill>
+                  <a:srgbClr val="990011"/>
+                </a:solidFill>
+                <a:latin typeface="Times New Roman" pitchFamily="34" charset="0"/>
+                <a:ea typeface="Times New Roman" pitchFamily="34" charset="-122"/>
+                <a:cs typeface="Times New Roman" pitchFamily="34" charset="-120"/>
+              </a:rPr>
+              <a:t>Next Lesson</a:t>
+            </a:r>
+            <a:endParaRPr lang="en-US" sz="3600" dirty="0"/>
+          </a:p>
+        </p:txBody>
+      </p:sp>
+      <p:sp>
+        <p:nvSpPr>
+          <p:cNvPr id="5" name="Text 2"/>
+          <p:cNvSpPr/>
+          <p:nvPr/>
+        </p:nvSpPr>
+        <p:spPr>
+          <a:xfrm>
+            <a:off x="5349240" y="1783080"/>
+            <a:ext cx="6522415" cy="4663440"/>
+          </a:xfrm>
+          <a:prstGeom prst="rect">
+            <a:avLst/>
+          </a:prstGeom>
+          <a:noFill/>
+          <a:ln/>
+        </p:spPr>
+        <p:txBody>
+          <a:bodyPr wrap="square" lIns="0" tIns="0" rIns="0" bIns="0" rtlCol="0" anchor="ctr"/>
+          <a:lstStyle/>
+          <a:p>
+            <a:pPr algn="ctr" indent="0" marL="0">
+              <a:spcAft>
+                <a:spcPts val="800"/>
+              </a:spcAft>
+              <a:buNone/>
+            </a:pPr>
+            <a:r>
+              <a:rPr lang="en-US" sz="4000" b="1" dirty="0">
+                <a:solidFill>
+                  <a:srgbClr val="111111"/>
+                </a:solidFill>
+                <a:latin typeface="Times New Roman" pitchFamily="34" charset="0"/>
+                <a:ea typeface="Times New Roman" pitchFamily="34" charset="-122"/>
+                <a:cs typeface="Times New Roman" pitchFamily="34" charset="-120"/>
+              </a:rPr>
+              <a:t>Our next lesson will be on:</a:t>
+            </a:r>
+            <a:endParaRPr lang="en-US" sz="4000" dirty="0"/>
+          </a:p>
+          <a:p>
+            <a:pPr algn="ctr" indent="0" marL="0">
+              <a:spcAft>
+                <a:spcPts val="800"/>
+              </a:spcAft>
+              <a:buNone/>
+            </a:pPr>
+            <a:r>
+              <a:rPr lang="en-US" sz="4000" b="1" dirty="0">
+                <a:solidFill>
+                  <a:srgbClr val="990011"/>
+                </a:solidFill>
+                <a:latin typeface="Times New Roman" pitchFamily="34" charset="0"/>
+                <a:ea typeface="Times New Roman" pitchFamily="34" charset="-122"/>
+                <a:cs typeface="Times New Roman" pitchFamily="34" charset="-120"/>
+              </a:rPr>
+              <a:t>Lesson 2: Our Planet, the Earth</a:t>
+            </a:r>
+            <a:endParaRPr lang="en-US" sz="4000" dirty="0"/>
+          </a:p>
+        </p:txBody>
+      </p:sp>
+      <p:sp>
+        <p:nvSpPr>
+          <p:cNvPr id="25" name="Slide Number Placeholder 0"/>
+          <p:cNvSpPr>
+            <a:spLocks noGrp="1"/>
+          </p:cNvSpPr>
+          <p:nvPr>
+            <p:ph type="sldNum" sz="quarter" idx="4294967295"/>
+          </p:nvPr>
+        </p:nvSpPr>
+        <p:spPr>
+          <a:xfrm>
+            <a:off x="27432" y="91440"/>
+            <a:ext cx="585216" cy="475488"/>
+          </a:xfrm>
+          <a:prstGeom prst="rect">
+            <a:avLst/>
+          </a:prstGeom>
+          <a:extLst>
+            <a:ext uri="{C572A759-6A51-4108-AA02-DFA0A04FC94B}">
+              <ma14:wrappingTextBoxFlag xmlns:ma14="http://schemas.microsoft.com/office/mac/drawingml/2011/main" val="0"/>
+            </a:ext>
+          </a:extLst>
+        </p:spPr>
+        <p:txBody>
+          <a:bodyPr/>
+          <a:lstStyle>
+            <a:lvl1pPr>
+              <a:defRPr sz="2000">
+                <a:solidFill>
+                  <a:srgbClr val="FFFFFF"/>
+                </a:solidFill>
+                <a:latin typeface="Calibri"/>
+                <a:ea typeface="Calibri"/>
+                <a:cs typeface="Calibri"/>
+              </a:defRPr>
+            </a:lvl1pPr>
+          </a:lstStyle>
+          <a:p>
+            <a:pPr algn="ctr"/>
+            <a:fld id="{F7021451-1387-4CA6-816F-3879F97B5CBC}" type="slidenum">
+              <a:rPr b="1" lang="en-US"/>
+              <a:t>53</a:t>
+            </a:fld>
+            <a:endParaRPr lang="en-US"/>
+          </a:p>
+        </p:txBody>
+      </p:sp>
+    </p:spTree>
+  </p:cSld>
+  <p:clrMapOvr>
+    <a:masterClrMapping/>
+  </p:clrMapOvr>
+</p:sld>
+</file>
+
+<file path=ppt/slides/slide54.xml><?xml version="1.0" encoding="utf-8"?>
+<p:sld xmlns:a="http://schemas.openxmlformats.org/drawingml/2006/main" xmlns:r="http://schemas.openxmlformats.org/officeDocument/2006/relationships" xmlns:p="http://schemas.openxmlformats.org/presentationml/2006/main">
+  <p:cSld name="Slide 54">
+    <p:spTree>
+      <p:nvGrpSpPr>
+        <p:cNvPr id="1" name=""/>
+        <p:cNvGrpSpPr/>
+        <p:nvPr/>
+      </p:nvGrpSpPr>
+      <p:grpSpPr>
+        <a:xfrm>
+          <a:off x="0" y="0"/>
+          <a:ext cx="0" cy="0"/>
+          <a:chOff x="0" y="0"/>
+          <a:chExt cx="0" cy="0"/>
+        </a:xfrm>
+      </p:grpSpPr>
+      <p:sp>
+        <p:nvSpPr>
+          <p:cNvPr id="2" name="Text 0"/>
+          <p:cNvSpPr/>
+          <p:nvPr/>
+        </p:nvSpPr>
+        <p:spPr>
+          <a:xfrm>
+            <a:off x="457200" y="713232"/>
+            <a:ext cx="11368735" cy="274320"/>
+          </a:xfrm>
+          <a:prstGeom prst="rect">
+            <a:avLst/>
+          </a:prstGeom>
+          <a:noFill/>
+          <a:ln/>
+        </p:spPr>
+        <p:txBody>
+          <a:bodyPr wrap="square" lIns="0" tIns="0" rIns="0" bIns="0" rtlCol="0" anchor="ctr"/>
+          <a:lstStyle/>
+          <a:p>
+            <a:pPr algn="r" indent="0" marL="0">
+              <a:buNone/>
+            </a:pPr>
+            <a:r>
+              <a:rPr lang="en-US" sz="1400" b="1" dirty="0">
+                <a:solidFill>
+                  <a:srgbClr val="1C3F6E"/>
+                </a:solidFill>
+                <a:latin typeface="Calibri" pitchFamily="34" charset="0"/>
+                <a:ea typeface="Calibri" pitchFamily="34" charset="-122"/>
+                <a:cs typeface="Calibri" pitchFamily="34" charset="-120"/>
+              </a:rPr>
               <a:t>BILINGUAL GAME</a:t>
             </a:r>
             <a:endParaRPr lang="en-US" sz="1400" dirty="0"/>
@@ -19198,7 +19506,7 @@
       </p:sp>
       <p:graphicFrame>
         <p:nvGraphicFramePr>
-          <p:cNvPr id="54" name="Table 0"/>
+          <p:cNvPr id="55" name="Table 0"/>
           <p:cNvGraphicFramePr>
             <a:graphicFrameLocks noGrp="1"/>
           </p:cNvGraphicFramePr>
@@ -20234,7 +20542,7 @@
             <a:pPr algn="ctr"/>
             <a:fld id="{F7021451-1387-4CA6-816F-3879F97B5CBC}" type="slidenum">
               <a:rPr b="1" lang="en-US"/>
-              <a:t>53</a:t>
+              <a:t>54</a:t>
             </a:fld>
             <a:endParaRPr lang="en-US"/>
           </a:p>
@@ -20248,9 +20556,9 @@
 </p:sld>
 </file>
 
-<file path=ppt/slides/slide54.xml><?xml version="1.0" encoding="utf-8"?>
+<file path=ppt/slides/slide55.xml><?xml version="1.0" encoding="utf-8"?>
 <p:sld xmlns:a="http://schemas.openxmlformats.org/drawingml/2006/main" xmlns:r="http://schemas.openxmlformats.org/officeDocument/2006/relationships" xmlns:p="http://schemas.openxmlformats.org/presentationml/2006/main">
-  <p:cSld name="Slide 54">
+  <p:cSld name="Slide 55">
     <p:spTree>
       <p:nvGrpSpPr>
         <p:cNvPr id="1" name=""/>
@@ -20345,7 +20653,7 @@
       </p:sp>
       <p:graphicFrame>
         <p:nvGraphicFramePr>
-          <p:cNvPr id="55" name="Table 0"/>
+          <p:cNvPr id="56" name="Table 0"/>
           <p:cNvGraphicFramePr>
             <a:graphicFrameLocks noGrp="1"/>
           </p:cNvGraphicFramePr>
@@ -20967,7 +21275,7 @@
             <a:pPr algn="ctr"/>
             <a:fld id="{F7021451-1387-4CA6-816F-3879F97B5CBC}" type="slidenum">
               <a:rPr b="1" lang="en-US"/>
-              <a:t>54</a:t>
+              <a:t>55</a:t>
             </a:fld>
             <a:endParaRPr lang="en-US"/>
           </a:p>
@@ -20981,9 +21289,9 @@
 </p:sld>
 </file>
 
-<file path=ppt/slides/slide55.xml><?xml version="1.0" encoding="utf-8"?>
+<file path=ppt/slides/slide56.xml><?xml version="1.0" encoding="utf-8"?>
 <p:sld xmlns:a="http://schemas.openxmlformats.org/drawingml/2006/main" xmlns:r="http://schemas.openxmlformats.org/officeDocument/2006/relationships" xmlns:p="http://schemas.openxmlformats.org/presentationml/2006/main">
-  <p:cSld name="Slide 55">
+  <p:cSld name="Slide 56">
     <p:spTree>
       <p:nvGrpSpPr>
         <p:cNvPr id="1" name=""/>
@@ -21078,7 +21386,7 @@
       </p:sp>
       <p:graphicFrame>
         <p:nvGraphicFramePr>
-          <p:cNvPr id="56" name="Table 0"/>
+          <p:cNvPr id="57" name="Table 0"/>
           <p:cNvGraphicFramePr>
             <a:graphicFrameLocks noGrp="1"/>
           </p:cNvGraphicFramePr>
@@ -21838,331 +22146,6 @@
             <a:pPr algn="ctr"/>
             <a:fld id="{F7021451-1387-4CA6-816F-3879F97B5CBC}" type="slidenum">
               <a:rPr b="1" lang="en-US"/>
-              <a:t>55</a:t>
-            </a:fld>
-            <a:endParaRPr lang="en-US"/>
-          </a:p>
-        </p:txBody>
-      </p:sp>
-    </p:spTree>
-  </p:cSld>
-  <p:clrMapOvr>
-    <a:masterClrMapping/>
-  </p:clrMapOvr>
-</p:sld>
-</file>
-
-<file path=ppt/slides/slide56.xml><?xml version="1.0" encoding="utf-8"?>
-<p:sld xmlns:a="http://schemas.openxmlformats.org/drawingml/2006/main" xmlns:r="http://schemas.openxmlformats.org/officeDocument/2006/relationships" xmlns:p="http://schemas.openxmlformats.org/presentationml/2006/main">
-  <p:cSld name="Slide 56">
-    <p:spTree>
-      <p:nvGrpSpPr>
-        <p:cNvPr id="1" name=""/>
-        <p:cNvGrpSpPr/>
-        <p:nvPr/>
-      </p:nvGrpSpPr>
-      <p:grpSpPr>
-        <a:xfrm>
-          <a:off x="0" y="0"/>
-          <a:ext cx="0" cy="0"/>
-          <a:chOff x="0" y="0"/>
-          <a:chExt cx="0" cy="0"/>
-        </a:xfrm>
-      </p:grpSpPr>
-      <p:sp>
-        <p:nvSpPr>
-          <p:cNvPr id="2" name="Text 0"/>
-          <p:cNvSpPr/>
-          <p:nvPr/>
-        </p:nvSpPr>
-        <p:spPr>
-          <a:xfrm>
-            <a:off x="457200" y="713232"/>
-            <a:ext cx="11368735" cy="274320"/>
-          </a:xfrm>
-          <a:prstGeom prst="rect">
-            <a:avLst/>
-          </a:prstGeom>
-          <a:noFill/>
-          <a:ln/>
-        </p:spPr>
-        <p:txBody>
-          <a:bodyPr wrap="square" lIns="0" tIns="0" rIns="0" bIns="0" rtlCol="0" anchor="ctr"/>
-          <a:lstStyle/>
-          <a:p>
-            <a:pPr algn="r" indent="0" marL="0">
-              <a:buNone/>
-            </a:pPr>
-            <a:r>
-              <a:rPr lang="en-US" sz="1400" b="1" dirty="0">
-                <a:solidFill>
-                  <a:srgbClr val="1C3F6E"/>
-                </a:solidFill>
-                <a:latin typeface="Calibri" pitchFamily="34" charset="0"/>
-                <a:ea typeface="Calibri" pitchFamily="34" charset="-122"/>
-                <a:cs typeface="Calibri" pitchFamily="34" charset="-120"/>
-              </a:rPr>
-              <a:t>TEACHER'S NOTE</a:t>
-            </a:r>
-            <a:endParaRPr lang="en-US" sz="1400" dirty="0"/>
-          </a:p>
-        </p:txBody>
-      </p:sp>
-      <p:pic>
-        <p:nvPicPr>
-          <p:cNvPr id="3" name="Image 0" descr="/home/claude/f4/img/minesec_sheet.png">    </p:cNvPr>
-          <p:cNvPicPr>
-            <a:picLocks noChangeAspect="1"/>
-          </p:cNvPicPr>
-          <p:nvPr/>
-        </p:nvPicPr>
-        <p:blipFill>
-          <a:blip r:embed="rId1"/>
-          <a:stretch>
-            <a:fillRect/>
-          </a:stretch>
-        </p:blipFill>
-        <p:spPr>
-          <a:xfrm>
-            <a:off x="0" y="658368"/>
-            <a:ext cx="3840480" cy="5833872"/>
-          </a:xfrm>
-          <a:prstGeom prst="rect">
-            <a:avLst/>
-          </a:prstGeom>
-        </p:spPr>
-      </p:pic>
-      <p:sp>
-        <p:nvSpPr>
-          <p:cNvPr id="4" name="Text 1"/>
-          <p:cNvSpPr/>
-          <p:nvPr/>
-        </p:nvSpPr>
-        <p:spPr>
-          <a:xfrm>
-            <a:off x="4069080" y="1005840"/>
-            <a:ext cx="7802575" cy="731520"/>
-          </a:xfrm>
-          <a:prstGeom prst="rect">
-            <a:avLst/>
-          </a:prstGeom>
-          <a:noFill/>
-          <a:ln/>
-        </p:spPr>
-        <p:txBody>
-          <a:bodyPr wrap="square" lIns="0" tIns="0" rIns="0" bIns="0" rtlCol="0" anchor="ctr">
-            <a:normAutofit/>
-          </a:bodyPr>
-          <a:lstStyle/>
-          <a:p>
-            <a:pPr algn="ctr" indent="0" marL="0">
-              <a:buNone/>
-            </a:pPr>
-            <a:r>
-              <a:rPr lang="en-US" sz="3600" b="1" dirty="0">
-                <a:solidFill>
-                  <a:srgbClr val="990011"/>
-                </a:solidFill>
-                <a:latin typeface="Times New Roman" pitchFamily="34" charset="0"/>
-                <a:ea typeface="Times New Roman" pitchFamily="34" charset="-122"/>
-                <a:cs typeface="Times New Roman" pitchFamily="34" charset="-120"/>
-              </a:rPr>
-              <a:t>Teacher's Note</a:t>
-            </a:r>
-            <a:endParaRPr lang="en-US" sz="3600" dirty="0"/>
-          </a:p>
-        </p:txBody>
-      </p:sp>
-      <p:sp>
-        <p:nvSpPr>
-          <p:cNvPr id="5" name="Text 2"/>
-          <p:cNvSpPr/>
-          <p:nvPr/>
-        </p:nvSpPr>
-        <p:spPr>
-          <a:xfrm>
-            <a:off x="4069080" y="1783080"/>
-            <a:ext cx="7802575" cy="4663440"/>
-          </a:xfrm>
-          <a:prstGeom prst="rect">
-            <a:avLst/>
-          </a:prstGeom>
-          <a:noFill/>
-          <a:ln/>
-        </p:spPr>
-        <p:txBody>
-          <a:bodyPr wrap="square" lIns="0" tIns="0" rIns="0" bIns="0" rtlCol="0" anchor="t"/>
-          <a:lstStyle/>
-          <a:p>
-            <a:pPr algn="l" marL="342900" indent="-342900">
-              <a:spcAft>
-                <a:spcPts val="800"/>
-              </a:spcAft>
-              <a:buSzPct val="100000"/>
-              <a:buChar char="•"/>
-            </a:pPr>
-            <a:r>
-              <a:rPr lang="en-US" sz="2000" dirty="0">
-                <a:solidFill>
-                  <a:srgbClr val="111111"/>
-                </a:solidFill>
-                <a:latin typeface="Calibri" pitchFamily="34" charset="0"/>
-                <a:ea typeface="Calibri" pitchFamily="34" charset="-122"/>
-                <a:cs typeface="Calibri" pitchFamily="34" charset="-120"/>
-              </a:rPr>
-              <a:t>Timing: Homework correction, plan, objectives 8 min | Recall, situation, action 10 min | 5 activities 30 min | Board summary (copying) 30 min | Evaluation, remediation 10 min | Homework, next lesson 5 min | Logbook 7 min</a:t>
-            </a:r>
-            <a:endParaRPr lang="en-US" sz="2000" dirty="0"/>
-          </a:p>
-          <a:p>
-            <a:pPr algn="l" marL="342900" indent="-342900">
-              <a:spcAft>
-                <a:spcPts val="800"/>
-              </a:spcAft>
-              <a:buSzPct val="100000"/>
-              <a:buChar char="•"/>
-            </a:pPr>
-            <a:r>
-              <a:rPr lang="en-US" sz="2000" dirty="0">
-                <a:solidFill>
-                  <a:srgbClr val="111111"/>
-                </a:solidFill>
-                <a:latin typeface="Calibri" pitchFamily="34" charset="0"/>
-                <a:ea typeface="Calibri" pitchFamily="34" charset="-122"/>
-                <a:cs typeface="Calibri" pitchFamily="34" charset="-120"/>
-              </a:rPr>
-              <a:t>Without the projector (Activity 1): write "geo" + "graphein" on the board.</a:t>
-            </a:r>
-            <a:endParaRPr lang="en-US" sz="2000" dirty="0"/>
-          </a:p>
-          <a:p>
-            <a:pPr algn="l" marL="342900" indent="-342900">
-              <a:spcAft>
-                <a:spcPts val="800"/>
-              </a:spcAft>
-              <a:buSzPct val="100000"/>
-              <a:buChar char="•"/>
-            </a:pPr>
-            <a:r>
-              <a:rPr lang="en-US" sz="2000" dirty="0">
-                <a:solidFill>
-                  <a:srgbClr val="111111"/>
-                </a:solidFill>
-                <a:latin typeface="Calibri" pitchFamily="34" charset="0"/>
-                <a:ea typeface="Calibri" pitchFamily="34" charset="-122"/>
-                <a:cs typeface="Calibri" pitchFamily="34" charset="-120"/>
-              </a:rPr>
-              <a:t>Without the projector (Activity 2): name mountains and rivers of Cameroon.</a:t>
-            </a:r>
-            <a:endParaRPr lang="en-US" sz="2000" dirty="0"/>
-          </a:p>
-          <a:p>
-            <a:pPr algn="l" marL="342900" indent="-342900">
-              <a:spcAft>
-                <a:spcPts val="800"/>
-              </a:spcAft>
-              <a:buSzPct val="100000"/>
-              <a:buChar char="•"/>
-            </a:pPr>
-            <a:r>
-              <a:rPr lang="en-US" sz="2000" dirty="0">
-                <a:solidFill>
-                  <a:srgbClr val="111111"/>
-                </a:solidFill>
-                <a:latin typeface="Calibri" pitchFamily="34" charset="0"/>
-                <a:ea typeface="Calibri" pitchFamily="34" charset="-122"/>
-                <a:cs typeface="Calibri" pitchFamily="34" charset="-120"/>
-              </a:rPr>
-              <a:t>Without the projector (Activity 3): describe the market of Garoua.</a:t>
-            </a:r>
-            <a:endParaRPr lang="en-US" sz="2000" dirty="0"/>
-          </a:p>
-          <a:p>
-            <a:pPr algn="l" marL="342900" indent="-342900">
-              <a:spcAft>
-                <a:spcPts val="800"/>
-              </a:spcAft>
-              <a:buSzPct val="100000"/>
-              <a:buChar char="•"/>
-            </a:pPr>
-            <a:r>
-              <a:rPr lang="en-US" sz="2000" dirty="0">
-                <a:solidFill>
-                  <a:srgbClr val="111111"/>
-                </a:solidFill>
-                <a:latin typeface="Calibri" pitchFamily="34" charset="0"/>
-                <a:ea typeface="Calibri" pitchFamily="34" charset="-122"/>
-                <a:cs typeface="Calibri" pitchFamily="34" charset="-120"/>
-              </a:rPr>
-              <a:t>Without the projector (Activity 4): show a map of Cameroon.</a:t>
-            </a:r>
-            <a:endParaRPr lang="en-US" sz="2000" dirty="0"/>
-          </a:p>
-          <a:p>
-            <a:pPr algn="l" marL="342900" indent="-342900">
-              <a:spcAft>
-                <a:spcPts val="800"/>
-              </a:spcAft>
-              <a:buSzPct val="100000"/>
-              <a:buChar char="•"/>
-            </a:pPr>
-            <a:r>
-              <a:rPr lang="en-US" sz="2000" dirty="0">
-                <a:solidFill>
-                  <a:srgbClr val="111111"/>
-                </a:solidFill>
-                <a:latin typeface="Calibri" pitchFamily="34" charset="0"/>
-                <a:ea typeface="Calibri" pitchFamily="34" charset="-122"/>
-                <a:cs typeface="Calibri" pitchFamily="34" charset="-120"/>
-              </a:rPr>
-              <a:t>Without the projector (Activity 5): ask learners how their parents choose when to plant.</a:t>
-            </a:r>
-            <a:endParaRPr lang="en-US" sz="2000" dirty="0"/>
-          </a:p>
-        </p:txBody>
-      </p:sp>
-      <p:sp>
-        <p:nvSpPr>
-          <p:cNvPr id="25" name="Slide Number Placeholder 0"/>
-          <p:cNvSpPr>
-            <a:spLocks noGrp="1"/>
-          </p:cNvSpPr>
-          <p:nvPr>
-            <p:ph type="sldNum" sz="quarter" idx="4294967295"/>
-          </p:nvPr>
-        </p:nvSpPr>
-        <p:spPr>
-          <a:xfrm>
-            <a:off x="27432" y="91440"/>
-            <a:ext cx="585216" cy="475488"/>
-          </a:xfrm>
-          <a:prstGeom prst="rect">
-            <a:avLst/>
-          </a:prstGeom>
-          <a:extLst>
-            <a:ext uri="{C572A759-6A51-4108-AA02-DFA0A04FC94B}">
-              <ma14:wrappingTextBoxFlag xmlns:ma14="http://schemas.microsoft.com/office/mac/drawingml/2011/main" val="0"/>
-            </a:ext>
-          </a:extLst>
-        </p:spPr>
-        <p:txBody>
-          <a:bodyPr/>
-          <a:lstStyle>
-            <a:lvl1pPr>
-              <a:defRPr sz="2000">
-                <a:solidFill>
-                  <a:srgbClr val="FFFFFF"/>
-                </a:solidFill>
-                <a:latin typeface="Calibri"/>
-                <a:ea typeface="Calibri"/>
-                <a:cs typeface="Calibri"/>
-              </a:defRPr>
-            </a:lvl1pPr>
-          </a:lstStyle>
-          <a:p>
-            <a:pPr algn="ctr"/>
-            <a:fld id="{F7021451-1387-4CA6-816F-3879F97B5CBC}" type="slidenum">
-              <a:rPr b="1" lang="en-US"/>
               <a:t>56</a:t>
             </a:fld>
             <a:endParaRPr lang="en-US"/>
@@ -22227,7 +22210,7 @@
                 <a:ea typeface="Calibri" pitchFamily="34" charset="-122"/>
                 <a:cs typeface="Calibri" pitchFamily="34" charset="-120"/>
               </a:rPr>
-              <a:t>REFERENCES</a:t>
+              <a:t>TEACHER'S NOTE</a:t>
             </a:r>
             <a:endParaRPr lang="en-US" sz="1400" dirty="0"/>
           </a:p>
@@ -22250,7 +22233,7 @@
         <p:spPr>
           <a:xfrm>
             <a:off x="0" y="658368"/>
-            <a:ext cx="1463040" cy="5833872"/>
+            <a:ext cx="3840480" cy="5833872"/>
           </a:xfrm>
           <a:prstGeom prst="rect">
             <a:avLst/>
@@ -22265,8 +22248,8 @@
         </p:nvSpPr>
         <p:spPr>
           <a:xfrm>
-            <a:off x="1691640" y="1005840"/>
-            <a:ext cx="10180015" cy="731520"/>
+            <a:off x="4069080" y="1005840"/>
+            <a:ext cx="7802575" cy="731520"/>
           </a:xfrm>
           <a:prstGeom prst="rect">
             <a:avLst/>
@@ -22292,7 +22275,7 @@
                 <a:ea typeface="Times New Roman" pitchFamily="34" charset="-122"/>
                 <a:cs typeface="Times New Roman" pitchFamily="34" charset="-120"/>
               </a:rPr>
-              <a:t>References</a:t>
+              <a:t>Teacher's Note</a:t>
             </a:r>
             <a:endParaRPr lang="en-US" sz="3600" dirty="0"/>
           </a:p>
@@ -22306,8 +22289,8 @@
         </p:nvSpPr>
         <p:spPr>
           <a:xfrm>
-            <a:off x="1691640" y="1783080"/>
-            <a:ext cx="10180015" cy="4663440"/>
+            <a:off x="4069080" y="1783080"/>
+            <a:ext cx="7802575" cy="4663440"/>
           </a:xfrm>
           <a:prstGeom prst="rect">
             <a:avLst/>
@@ -22327,7 +22310,7 @@
               <a:buChar char="•"/>
             </a:pPr>
             <a:r>
-              <a:rPr lang="en-US" sz="1800" dirty="0">
+              <a:rPr lang="en-US" sz="2000" dirty="0">
                 <a:solidFill>
                   <a:srgbClr val="111111"/>
                 </a:solidFill>
@@ -22335,9 +22318,9 @@
                 <a:ea typeface="Calibri" pitchFamily="34" charset="-122"/>
                 <a:cs typeface="Calibri" pitchFamily="34" charset="-120"/>
               </a:rPr>
-              <a:t>Geography Syllabus, Forms I–V, MINESEC (2023) — Form 1, Module 1: The Earth in the Universe.</a:t>
-            </a:r>
-            <a:endParaRPr lang="en-US" sz="1800" dirty="0"/>
+              <a:t>Timing: Homework correction, plan, objectives 8 min | Recall, situation, action 10 min | 5 activities 30 min | Board summary (copying) 30 min | Evaluation, remediation 10 min | Homework, next lesson 5 min | Logbook 7 min</a:t>
+            </a:r>
+            <a:endParaRPr lang="en-US" sz="2000" dirty="0"/>
           </a:p>
           <a:p>
             <a:pPr algn="l" marL="342900" indent="-342900">
@@ -22348,7 +22331,7 @@
               <a:buChar char="•"/>
             </a:pPr>
             <a:r>
-              <a:rPr lang="en-US" sz="1800" dirty="0">
+              <a:rPr lang="en-US" sz="2000" dirty="0">
                 <a:solidFill>
                   <a:srgbClr val="111111"/>
                 </a:solidFill>
@@ -22356,9 +22339,9 @@
                 <a:ea typeface="Calibri" pitchFamily="34" charset="-122"/>
                 <a:cs typeface="Calibri" pitchFamily="34" charset="-120"/>
               </a:rPr>
-              <a:t>Photo, Activity 1: “Blue Marble, Eastern Hemisphere March 2014” by NASA Goddard Photo and Video, CC BY 2.0, via nasa (https://www.flickr.com/photos/24662369@N07/14990033062)</a:t>
-            </a:r>
-            <a:endParaRPr lang="en-US" sz="1800" dirty="0"/>
+              <a:t>Without the projector (Activity 1): write "geo" + "graphein" on the board.</a:t>
+            </a:r>
+            <a:endParaRPr lang="en-US" sz="2000" dirty="0"/>
           </a:p>
           <a:p>
             <a:pPr algn="l" marL="342900" indent="-342900">
@@ -22369,7 +22352,7 @@
               <a:buChar char="•"/>
             </a:pPr>
             <a:r>
-              <a:rPr lang="en-US" sz="1800" dirty="0">
+              <a:rPr lang="en-US" sz="2000" dirty="0">
                 <a:solidFill>
                   <a:srgbClr val="111111"/>
                 </a:solidFill>
@@ -22377,9 +22360,9 @@
                 <a:ea typeface="Calibri" pitchFamily="34" charset="-122"/>
                 <a:cs typeface="Calibri" pitchFamily="34" charset="-120"/>
               </a:rPr>
-              <a:t>Photo, Activity 2: “Mount Cameroon” by John &amp; Mel Kots, CC BY-NC-ND 2.0, via Flickr (https://www.flickr.com/photos/26745817@N00/2347261849)</a:t>
-            </a:r>
-            <a:endParaRPr lang="en-US" sz="1800" dirty="0"/>
+              <a:t>Without the projector (Activity 2): name mountains and rivers of Cameroon.</a:t>
+            </a:r>
+            <a:endParaRPr lang="en-US" sz="2000" dirty="0"/>
           </a:p>
           <a:p>
             <a:pPr algn="l" marL="342900" indent="-342900">
@@ -22390,7 +22373,7 @@
               <a:buChar char="•"/>
             </a:pPr>
             <a:r>
-              <a:rPr lang="en-US" sz="1800" dirty="0">
+              <a:rPr lang="en-US" sz="2000" dirty="0">
                 <a:solidFill>
                   <a:srgbClr val="111111"/>
                 </a:solidFill>
@@ -22398,9 +22381,9 @@
                 <a:ea typeface="Calibri" pitchFamily="34" charset="-122"/>
                 <a:cs typeface="Calibri" pitchFamily="34" charset="-120"/>
               </a:rPr>
-              <a:t>Photo, Activity 3: “Sandga Market in Douala, Cameroon” by The Advocacy Project, CC BY-NC-SA 2.0, via Flickr (https://www.flickr.com/photos/42487558@N00/3636438732)</a:t>
-            </a:r>
-            <a:endParaRPr lang="en-US" sz="1800" dirty="0"/>
+              <a:t>Without the projector (Activity 3): describe the market of Garoua.</a:t>
+            </a:r>
+            <a:endParaRPr lang="en-US" sz="2000" dirty="0"/>
           </a:p>
           <a:p>
             <a:pPr algn="l" marL="342900" indent="-342900">
@@ -22411,7 +22394,7 @@
               <a:buChar char="•"/>
             </a:pPr>
             <a:r>
-              <a:rPr lang="en-US" sz="1800" dirty="0">
+              <a:rPr lang="en-US" sz="2000" dirty="0">
                 <a:solidFill>
                   <a:srgbClr val="111111"/>
                 </a:solidFill>
@@ -22419,9 +22402,9 @@
                 <a:ea typeface="Calibri" pitchFamily="34" charset="-122"/>
                 <a:cs typeface="Calibri" pitchFamily="34" charset="-120"/>
               </a:rPr>
-              <a:t>Photo, Activity 4: “Harvey Butchart's hiking map” by brewbooks, CC BY-SA 2.0, via Flickr (https://www.flickr.com/photos/93452909@N00/5289678354)</a:t>
-            </a:r>
-            <a:endParaRPr lang="en-US" sz="1800" dirty="0"/>
+              <a:t>Without the projector (Activity 4): show a map of Cameroon.</a:t>
+            </a:r>
+            <a:endParaRPr lang="en-US" sz="2000" dirty="0"/>
           </a:p>
           <a:p>
             <a:pPr algn="l" marL="342900" indent="-342900">
@@ -22432,7 +22415,7 @@
               <a:buChar char="•"/>
             </a:pPr>
             <a:r>
-              <a:rPr lang="en-US" sz="1800" dirty="0">
+              <a:rPr lang="en-US" sz="2000" dirty="0">
                 <a:solidFill>
                   <a:srgbClr val="111111"/>
                 </a:solidFill>
@@ -22440,10 +22423,209 @@
                 <a:ea typeface="Calibri" pitchFamily="34" charset="-122"/>
                 <a:cs typeface="Calibri" pitchFamily="34" charset="-120"/>
               </a:rPr>
-              <a:t>Photo, Activity 5: “Cotton Fields, U.S. 65, Tensas Parish, Louisiana (4)” by Ken Lund, CC BY-SA 2.0, via Flickr (https://www.flickr.com/photos/75683070@N00/3934873451)</a:t>
-            </a:r>
-            <a:endParaRPr lang="en-US" sz="1800" dirty="0"/>
-          </a:p>
+              <a:t>Without the projector (Activity 5): ask learners how their parents choose when to plant.</a:t>
+            </a:r>
+            <a:endParaRPr lang="en-US" sz="2000" dirty="0"/>
+          </a:p>
+        </p:txBody>
+      </p:sp>
+      <p:sp>
+        <p:nvSpPr>
+          <p:cNvPr id="25" name="Slide Number Placeholder 0"/>
+          <p:cNvSpPr>
+            <a:spLocks noGrp="1"/>
+          </p:cNvSpPr>
+          <p:nvPr>
+            <p:ph type="sldNum" sz="quarter" idx="4294967295"/>
+          </p:nvPr>
+        </p:nvSpPr>
+        <p:spPr>
+          <a:xfrm>
+            <a:off x="27432" y="91440"/>
+            <a:ext cx="585216" cy="475488"/>
+          </a:xfrm>
+          <a:prstGeom prst="rect">
+            <a:avLst/>
+          </a:prstGeom>
+          <a:extLst>
+            <a:ext uri="{C572A759-6A51-4108-AA02-DFA0A04FC94B}">
+              <ma14:wrappingTextBoxFlag xmlns:ma14="http://schemas.microsoft.com/office/mac/drawingml/2011/main" val="0"/>
+            </a:ext>
+          </a:extLst>
+        </p:spPr>
+        <p:txBody>
+          <a:bodyPr/>
+          <a:lstStyle>
+            <a:lvl1pPr>
+              <a:defRPr sz="2000">
+                <a:solidFill>
+                  <a:srgbClr val="FFFFFF"/>
+                </a:solidFill>
+                <a:latin typeface="Calibri"/>
+                <a:ea typeface="Calibri"/>
+                <a:cs typeface="Calibri"/>
+              </a:defRPr>
+            </a:lvl1pPr>
+          </a:lstStyle>
+          <a:p>
+            <a:pPr algn="ctr"/>
+            <a:fld id="{F7021451-1387-4CA6-816F-3879F97B5CBC}" type="slidenum">
+              <a:rPr b="1" lang="en-US"/>
+              <a:t>57</a:t>
+            </a:fld>
+            <a:endParaRPr lang="en-US"/>
+          </a:p>
+        </p:txBody>
+      </p:sp>
+    </p:spTree>
+  </p:cSld>
+  <p:clrMapOvr>
+    <a:masterClrMapping/>
+  </p:clrMapOvr>
+</p:sld>
+</file>
+
+<file path=ppt/slides/slide58.xml><?xml version="1.0" encoding="utf-8"?>
+<p:sld xmlns:a="http://schemas.openxmlformats.org/drawingml/2006/main" xmlns:r="http://schemas.openxmlformats.org/officeDocument/2006/relationships" xmlns:p="http://schemas.openxmlformats.org/presentationml/2006/main">
+  <p:cSld name="Slide 58">
+    <p:spTree>
+      <p:nvGrpSpPr>
+        <p:cNvPr id="1" name=""/>
+        <p:cNvGrpSpPr/>
+        <p:nvPr/>
+      </p:nvGrpSpPr>
+      <p:grpSpPr>
+        <a:xfrm>
+          <a:off x="0" y="0"/>
+          <a:ext cx="0" cy="0"/>
+          <a:chOff x="0" y="0"/>
+          <a:chExt cx="0" cy="0"/>
+        </a:xfrm>
+      </p:grpSpPr>
+      <p:sp>
+        <p:nvSpPr>
+          <p:cNvPr id="2" name="Text 0"/>
+          <p:cNvSpPr/>
+          <p:nvPr/>
+        </p:nvSpPr>
+        <p:spPr>
+          <a:xfrm>
+            <a:off x="457200" y="713232"/>
+            <a:ext cx="11368735" cy="274320"/>
+          </a:xfrm>
+          <a:prstGeom prst="rect">
+            <a:avLst/>
+          </a:prstGeom>
+          <a:noFill/>
+          <a:ln/>
+        </p:spPr>
+        <p:txBody>
+          <a:bodyPr wrap="square" lIns="0" tIns="0" rIns="0" bIns="0" rtlCol="0" anchor="ctr"/>
+          <a:lstStyle/>
+          <a:p>
+            <a:pPr algn="r" indent="0" marL="0">
+              <a:buNone/>
+            </a:pPr>
+            <a:r>
+              <a:rPr lang="en-US" sz="1400" b="1" dirty="0">
+                <a:solidFill>
+                  <a:srgbClr val="1C3F6E"/>
+                </a:solidFill>
+                <a:latin typeface="Calibri" pitchFamily="34" charset="0"/>
+                <a:ea typeface="Calibri" pitchFamily="34" charset="-122"/>
+                <a:cs typeface="Calibri" pitchFamily="34" charset="-120"/>
+              </a:rPr>
+              <a:t>REFERENCES</a:t>
+            </a:r>
+            <a:endParaRPr lang="en-US" sz="1400" dirty="0"/>
+          </a:p>
+        </p:txBody>
+      </p:sp>
+      <p:pic>
+        <p:nvPicPr>
+          <p:cNvPr id="3" name="Image 0" descr="/home/claude/f4/img/minesec_sheet.png">    </p:cNvPr>
+          <p:cNvPicPr>
+            <a:picLocks noChangeAspect="1"/>
+          </p:cNvPicPr>
+          <p:nvPr/>
+        </p:nvPicPr>
+        <p:blipFill>
+          <a:blip r:embed="rId1"/>
+          <a:stretch>
+            <a:fillRect/>
+          </a:stretch>
+        </p:blipFill>
+        <p:spPr>
+          <a:xfrm>
+            <a:off x="0" y="658368"/>
+            <a:ext cx="1463040" cy="5833872"/>
+          </a:xfrm>
+          <a:prstGeom prst="rect">
+            <a:avLst/>
+          </a:prstGeom>
+        </p:spPr>
+      </p:pic>
+      <p:sp>
+        <p:nvSpPr>
+          <p:cNvPr id="4" name="Text 1"/>
+          <p:cNvSpPr/>
+          <p:nvPr/>
+        </p:nvSpPr>
+        <p:spPr>
+          <a:xfrm>
+            <a:off x="1691640" y="1005840"/>
+            <a:ext cx="10180015" cy="731520"/>
+          </a:xfrm>
+          <a:prstGeom prst="rect">
+            <a:avLst/>
+          </a:prstGeom>
+          <a:noFill/>
+          <a:ln/>
+        </p:spPr>
+        <p:txBody>
+          <a:bodyPr wrap="square" lIns="0" tIns="0" rIns="0" bIns="0" rtlCol="0" anchor="ctr">
+            <a:normAutofit/>
+          </a:bodyPr>
+          <a:lstStyle/>
+          <a:p>
+            <a:pPr algn="ctr" indent="0" marL="0">
+              <a:buNone/>
+            </a:pPr>
+            <a:r>
+              <a:rPr lang="en-US" sz="3600" b="1" dirty="0">
+                <a:solidFill>
+                  <a:srgbClr val="990011"/>
+                </a:solidFill>
+                <a:latin typeface="Times New Roman" pitchFamily="34" charset="0"/>
+                <a:ea typeface="Times New Roman" pitchFamily="34" charset="-122"/>
+                <a:cs typeface="Times New Roman" pitchFamily="34" charset="-120"/>
+              </a:rPr>
+              <a:t>References</a:t>
+            </a:r>
+            <a:endParaRPr lang="en-US" sz="3600" dirty="0"/>
+          </a:p>
+        </p:txBody>
+      </p:sp>
+      <p:sp>
+        <p:nvSpPr>
+          <p:cNvPr id="5" name="Text 2"/>
+          <p:cNvSpPr/>
+          <p:nvPr/>
+        </p:nvSpPr>
+        <p:spPr>
+          <a:xfrm>
+            <a:off x="1691640" y="1783080"/>
+            <a:ext cx="10180015" cy="4663440"/>
+          </a:xfrm>
+          <a:prstGeom prst="rect">
+            <a:avLst/>
+          </a:prstGeom>
+          <a:noFill/>
+          <a:ln/>
+        </p:spPr>
+        <p:txBody>
+          <a:bodyPr wrap="square" lIns="0" tIns="0" rIns="0" bIns="0" rtlCol="0" anchor="t"/>
+          <a:lstStyle/>
           <a:p>
             <a:pPr algn="l" marL="342900" indent="-342900">
               <a:spcAft>
@@ -22461,6 +22643,132 @@
                 <a:ea typeface="Calibri" pitchFamily="34" charset="-122"/>
                 <a:cs typeface="Calibri" pitchFamily="34" charset="-120"/>
               </a:rPr>
+              <a:t>Geography Syllabus, Forms I–V, MINESEC (2023) — Form 1, Module 1: The Earth in the Universe.</a:t>
+            </a:r>
+            <a:endParaRPr lang="en-US" sz="1800" dirty="0"/>
+          </a:p>
+          <a:p>
+            <a:pPr algn="l" marL="342900" indent="-342900">
+              <a:spcAft>
+                <a:spcPts val="800"/>
+              </a:spcAft>
+              <a:buSzPct val="100000"/>
+              <a:buChar char="•"/>
+            </a:pPr>
+            <a:r>
+              <a:rPr lang="en-US" sz="1800" dirty="0">
+                <a:solidFill>
+                  <a:srgbClr val="111111"/>
+                </a:solidFill>
+                <a:latin typeface="Calibri" pitchFamily="34" charset="0"/>
+                <a:ea typeface="Calibri" pitchFamily="34" charset="-122"/>
+                <a:cs typeface="Calibri" pitchFamily="34" charset="-120"/>
+              </a:rPr>
+              <a:t>Photo, Activity 1: “Blue Marble, Eastern Hemisphere March 2014” by NASA Goddard Photo and Video, CC BY 2.0, via nasa (https://www.flickr.com/photos/24662369@N07/14990033062)</a:t>
+            </a:r>
+            <a:endParaRPr lang="en-US" sz="1800" dirty="0"/>
+          </a:p>
+          <a:p>
+            <a:pPr algn="l" marL="342900" indent="-342900">
+              <a:spcAft>
+                <a:spcPts val="800"/>
+              </a:spcAft>
+              <a:buSzPct val="100000"/>
+              <a:buChar char="•"/>
+            </a:pPr>
+            <a:r>
+              <a:rPr lang="en-US" sz="1800" dirty="0">
+                <a:solidFill>
+                  <a:srgbClr val="111111"/>
+                </a:solidFill>
+                <a:latin typeface="Calibri" pitchFamily="34" charset="0"/>
+                <a:ea typeface="Calibri" pitchFamily="34" charset="-122"/>
+                <a:cs typeface="Calibri" pitchFamily="34" charset="-120"/>
+              </a:rPr>
+              <a:t>Photo, Activity 2: “Mount Cameroon” by John &amp; Mel Kots, CC BY-NC-ND 2.0, via Flickr (https://www.flickr.com/photos/26745817@N00/2347261849)</a:t>
+            </a:r>
+            <a:endParaRPr lang="en-US" sz="1800" dirty="0"/>
+          </a:p>
+          <a:p>
+            <a:pPr algn="l" marL="342900" indent="-342900">
+              <a:spcAft>
+                <a:spcPts val="800"/>
+              </a:spcAft>
+              <a:buSzPct val="100000"/>
+              <a:buChar char="•"/>
+            </a:pPr>
+            <a:r>
+              <a:rPr lang="en-US" sz="1800" dirty="0">
+                <a:solidFill>
+                  <a:srgbClr val="111111"/>
+                </a:solidFill>
+                <a:latin typeface="Calibri" pitchFamily="34" charset="0"/>
+                <a:ea typeface="Calibri" pitchFamily="34" charset="-122"/>
+                <a:cs typeface="Calibri" pitchFamily="34" charset="-120"/>
+              </a:rPr>
+              <a:t>Photo, Activity 3: “Sandga Market in Douala, Cameroon” by The Advocacy Project, CC BY-NC-SA 2.0, via Flickr (https://www.flickr.com/photos/42487558@N00/3636438732)</a:t>
+            </a:r>
+            <a:endParaRPr lang="en-US" sz="1800" dirty="0"/>
+          </a:p>
+          <a:p>
+            <a:pPr algn="l" marL="342900" indent="-342900">
+              <a:spcAft>
+                <a:spcPts val="800"/>
+              </a:spcAft>
+              <a:buSzPct val="100000"/>
+              <a:buChar char="•"/>
+            </a:pPr>
+            <a:r>
+              <a:rPr lang="en-US" sz="1800" dirty="0">
+                <a:solidFill>
+                  <a:srgbClr val="111111"/>
+                </a:solidFill>
+                <a:latin typeface="Calibri" pitchFamily="34" charset="0"/>
+                <a:ea typeface="Calibri" pitchFamily="34" charset="-122"/>
+                <a:cs typeface="Calibri" pitchFamily="34" charset="-120"/>
+              </a:rPr>
+              <a:t>Photo, Activity 4: “Harvey Butchart's hiking map” by brewbooks, CC BY-SA 2.0, via Flickr (https://www.flickr.com/photos/93452909@N00/5289678354)</a:t>
+            </a:r>
+            <a:endParaRPr lang="en-US" sz="1800" dirty="0"/>
+          </a:p>
+          <a:p>
+            <a:pPr algn="l" marL="342900" indent="-342900">
+              <a:spcAft>
+                <a:spcPts val="800"/>
+              </a:spcAft>
+              <a:buSzPct val="100000"/>
+              <a:buChar char="•"/>
+            </a:pPr>
+            <a:r>
+              <a:rPr lang="en-US" sz="1800" dirty="0">
+                <a:solidFill>
+                  <a:srgbClr val="111111"/>
+                </a:solidFill>
+                <a:latin typeface="Calibri" pitchFamily="34" charset="0"/>
+                <a:ea typeface="Calibri" pitchFamily="34" charset="-122"/>
+                <a:cs typeface="Calibri" pitchFamily="34" charset="-120"/>
+              </a:rPr>
+              <a:t>Photo, Activity 5: “Cotton Fields, U.S. 65, Tensas Parish, Louisiana (4)” by Ken Lund, CC BY-SA 2.0, via Flickr (https://www.flickr.com/photos/75683070@N00/3934873451)</a:t>
+            </a:r>
+            <a:endParaRPr lang="en-US" sz="1800" dirty="0"/>
+          </a:p>
+          <a:p>
+            <a:pPr algn="l" marL="342900" indent="-342900">
+              <a:spcAft>
+                <a:spcPts val="800"/>
+              </a:spcAft>
+              <a:buSzPct val="100000"/>
+              <a:buChar char="•"/>
+            </a:pPr>
+            <a:r>
+              <a:rPr lang="en-US" sz="1800" dirty="0">
+                <a:solidFill>
+                  <a:srgbClr val="111111"/>
+                </a:solidFill>
+                <a:latin typeface="Calibri" pitchFamily="34" charset="0"/>
+                <a:ea typeface="Calibri" pitchFamily="34" charset="-122"/>
+                <a:cs typeface="Calibri" pitchFamily="34" charset="-120"/>
+              </a:rPr>
               <a:t>Diagrams and animations: drawn for this lesson (Geography Department).</a:t>
             </a:r>
             <a:endParaRPr lang="en-US" sz="1800" dirty="0"/>
@@ -22509,7 +22817,7 @@
             <a:pPr algn="ctr"/>
             <a:fld id="{F7021451-1387-4CA6-816F-3879F97B5CBC}" type="slidenum">
               <a:rPr b="1" lang="en-US"/>
-              <a:t>57</a:t>
+              <a:t>58</a:t>
             </a:fld>
             <a:endParaRPr lang="en-US"/>
           </a:p>
@@ -23187,26 +23495,6 @@
             </a:r>
             <a:endParaRPr lang="en-US" sz="4000" dirty="0"/>
           </a:p>
-          <a:p>
-            <a:pPr algn="l" indent="0" marL="0">
-              <a:spcAft>
-                <a:spcPts val="800"/>
-              </a:spcAft>
-              <a:buNone/>
-            </a:pPr>
-            <a:r>
-              <a:rPr lang="en-US" sz="4000" dirty="0">
-                <a:solidFill>
-                  <a:srgbClr val="111111"/>
-                </a:solidFill>
-                <a:latin typeface="Times New Roman" pitchFamily="34" charset="0"/>
-                <a:ea typeface="Times New Roman" pitchFamily="34" charset="-122"/>
-                <a:cs typeface="Times New Roman" pitchFamily="34" charset="-120"/>
-              </a:rPr>
-              <a:t>"</a:t>
-            </a:r>
-            <a:endParaRPr lang="en-US" sz="4000" dirty="0"/>
-          </a:p>
         </p:txBody>
       </p:sp>
       <p:sp>
@@ -23380,7 +23668,7 @@
                 <a:ea typeface="Times New Roman" pitchFamily="34" charset="-122"/>
                 <a:cs typeface="Times New Roman" pitchFamily="34" charset="-120"/>
               </a:rPr>
-              <a:t>Situation: Question 1</a:t>
+              <a:t>Situation in Real Life (continued)</a:t>
             </a:r>
             <a:endParaRPr lang="en-US" sz="3600" dirty="0"/>
           </a:p>
@@ -23422,7 +23710,7 @@
                 <a:ea typeface="Times New Roman" pitchFamily="34" charset="-122"/>
                 <a:cs typeface="Times New Roman" pitchFamily="34" charset="-120"/>
               </a:rPr>
-              <a:t>What is the problem in the situation?</a:t>
+              <a:t>Ibrahim is confused and asks his teacher: "What does geography really study, and why is it useful?"</a:t>
             </a:r>
             <a:endParaRPr lang="en-US" sz="4000" dirty="0"/>
           </a:p>
